--- a/test/InkUO-产品介绍.pptx
+++ b/test/InkUO-产品介绍.pptx
@@ -35,28 +35,28 @@
 </p:sldMaster>
 </file>
 
-<file path=ppt/slides/slide1.xml><?xml version="1.0" encoding="UTF-8" standalone="yes"?><p:sld xmlns:a="http://schemas.openxmlformats.org/drawingml/2006/main" xmlns:r="http://schemas.openxmlformats.org/officeDocument/2006/relationships" xmlns:p="http://schemas.openxmlformats.org/presentationml/2006/main"><p:cSld><p:spTree><p:nvGrpSpPr><p:cNvPr id="1" name=""/><p:cNvGrpSpPr/><p:nvPr/></p:nvGrpSpPr><p:grpSpPr><a:xfrm><a:off x="0" y="0"/><a:ext cx="0" cy="0"/><a:chOff x="0" y="0"/><a:chExt cx="0" cy="0"/></a:xfrm></p:grpSpPr><p:sp><p:nvSpPr><p:cNvPr id="100" name="Shape"/><p:cNvSpPr/><p:nvPr/></p:nvSpPr><p:spPr><a:xfrm><a:off x="0" y="0"/><a:ext cx="12192000" cy="6858000"/></a:xfrm><a:prstGeom prst="rect"><a:avLst/></a:prstGeom><a:solidFill><a:srgbClr val="1A1A2E"><a:alpha val="100000"/></a:srgbClr></a:solidFill><a:ln><a:noFill/></a:ln></p:sp><p:sp><p:nvSpPr><p:cNvPr id="100" name="Shape"/><p:cNvSpPr/><p:nvPr/></p:nvSpPr><p:spPr><a:xfrm><a:off x="8763000" y="-762000"/><a:ext cx="3429000" cy="3429000"/></a:xfrm><a:prstGeom prst="ellipse"><a:avLst/></a:prstGeom><a:noFill/><a:ln w="25400"><a:solidFill><a:srgbClr val="FFFFFF"><a:alpha val="100000"/></a:srgbClr></a:solidFill></a:ln></p:sp><p:sp><p:nvSpPr><p:cNvPr id="100" name="Shape"/><p:cNvSpPr/><p:nvPr/></p:nvSpPr><p:spPr><a:xfrm><a:off x="762000" y="4572000"/><a:ext cx="2286000" cy="2286000"/></a:xfrm><a:prstGeom prst="ellipse"><a:avLst/></a:prstGeom><a:noFill/><a:ln w="25400"><a:solidFill><a:srgbClr val="FFFFFF"><a:alpha val="100000"/></a:srgbClr></a:solidFill></a:ln></p:sp><p:sp><p:nvSpPr><p:cNvPr id="100" name="Shape"/><p:cNvSpPr/><p:nvPr/></p:nvSpPr><p:spPr><a:xfrm><a:off x="3238500" y="571500"/><a:ext cx="5715000" cy="5715000"/></a:xfrm><a:prstGeom prst="ellipse"><a:avLst/></a:prstGeom><a:noFill/><a:ln w="12700"><a:solidFill><a:srgbClr val="FFFFFF"><a:alpha val="100000"/></a:srgbClr></a:solidFill></a:ln></p:sp><p:sp><p:nvSpPr><p:cNvPr id="100" name="Shape"/><p:cNvSpPr/><p:nvPr/></p:nvSpPr><p:spPr><a:xfrm><a:off x="5143500" y="2286000"/><a:ext cx="1905000" cy="38100"/></a:xfrm><a:prstGeom prst="roundRect"><a:avLst><a:gd name="adj" fmla="val 1000"/></a:avLst></a:prstGeom><a:solidFill><a:srgbClr val="00D2FF"><a:alpha val="100000"/></a:srgbClr></a:solidFill><a:ln><a:noFill/></a:ln></p:sp><p:sp><p:nvSpPr><p:cNvPr id="100" name="TextBox"/><p:cNvSpPr/><p:nvPr/></p:nvSpPr><p:spPr><a:xfrm><a:off x="0" y="3333750"/><a:ext cx="12192000" cy="1137920"/></a:xfrm><p:txBody><a:bodyPr wrap="square" rtlCol="0" anchor="t"/><a:lstStyle/><a:p><a:pPr algn="ctr"/><a:r><a:rPr lang="en-US" sz="64" b="0" i="0" u="none"><a:solidFill><a:srgbClr val="FFFFFF"/></a:solidFill></a:rPr><a:t>InkUO</a:t></a:r></a:p></p:txBody></p:sp><p:sp><p:nvSpPr><p:cNvPr id="100" name="TextBox"/><p:cNvSpPr/><p:nvPr/></p:nvSpPr><p:spPr><a:xfrm><a:off x="0" y="3905250"/><a:ext cx="12192000" cy="497840"/></a:xfrm><p:txBody><a:bodyPr wrap="square" rtlCol="0" anchor="t"/><a:lstStyle/><a:p><a:pPr algn="ctr"/><a:r><a:rPr lang="en-US" sz="28" b="0" i="0" u="none"><a:solidFill><a:srgbClr val="A0B4D8"/></a:solidFill></a:rPr><a:t>AI 文档编辑器</a:t></a:r></a:p></p:txBody></p:sp><p:sp><p:nvSpPr><p:cNvPr id="100" name="TextBox"/><p:cNvSpPr/><p:nvPr/></p:nvSpPr><p:spPr><a:xfrm><a:off x="0" y="4381500"/><a:ext cx="12192000" cy="320040"/></a:xfrm><p:txBody><a:bodyPr wrap="square" rtlCol="0" anchor="t"/><a:lstStyle/><a:p><a:pPr algn="ctr"/><a:r><a:rPr lang="en-US" sz="18" b="0" i="0" u="none"><a:solidFill><a:srgbClr val="6C8EB0"/></a:solidFill></a:rPr><a:t>重新定义文档编辑方式</a:t></a:r></a:p></p:txBody></p:sp><p:sp><p:nvSpPr><p:cNvPr id="100" name="TextBox"/><p:cNvSpPr/><p:nvPr/></p:nvSpPr><p:spPr><a:xfrm><a:off x="0" y="5715000"/><a:ext cx="12192000" cy="248920"/></a:xfrm><p:txBody><a:bodyPr wrap="square" rtlCol="0" anchor="t"/><a:lstStyle/><a:p><a:pPr algn="ctr"/><a:r><a:rPr lang="en-US" sz="14" b="0" i="0" u="none"><a:solidFill><a:srgbClr val="4A6A8A"/></a:solidFill></a:rPr><a:t>版本 0.1.0 ｜ 基于 Tauri 2 + React 19</a:t></a:r></a:p></p:txBody></p:sp></p:spTree></p:cSld></p:sld>
+<file path=ppt/slides/slide1.xml><?xml version="1.0" encoding="UTF-8" standalone="yes"?><p:sld xmlns:a="http://schemas.openxmlformats.org/drawingml/2006/main" xmlns:r="http://schemas.openxmlformats.org/officeDocument/2006/relationships" xmlns:p="http://schemas.openxmlformats.org/presentationml/2006/main"><p:cSld><p:spTree><p:nvGrpSpPr><p:cNvPr id="1" name=""/><p:cNvGrpSpPr/><p:nvPr/></p:nvGrpSpPr><p:grpSpPr><a:xfrm><a:off x="0" y="0"/><a:ext cx="0" cy="0"/><a:chOff x="0" y="0"/><a:chExt cx="0" cy="0"/></a:xfrm></p:grpSpPr><p:sp><p:nvSpPr><p:cNvPr id="2" name="Shape"/><p:cNvSpPr/><p:nvPr/></p:nvSpPr><p:spPr><a:xfrm><a:off x="0" y="0"/><a:ext cx="12192000" cy="6858000"/></a:xfrm><a:prstGeom prst="rect"><a:avLst/></a:prstGeom><a:solidFill><a:srgbClr val="1A1A2E"><a:alpha val="100000"/></a:srgbClr></a:solidFill><a:ln><a:noFill/></a:ln></p:sp><p:sp><p:nvSpPr><p:cNvPr id="3" name="Shape"/><p:cNvSpPr/><p:nvPr/></p:nvSpPr><p:spPr><a:xfrm><a:off x="8763000" y="-762000"/><a:ext cx="3429000" cy="3429000"/></a:xfrm><a:prstGeom prst="ellipse"><a:avLst/></a:prstGeom><a:noFill/><a:ln w="25400"><a:solidFill><a:srgbClr val="FFFFFF"><a:alpha val="100000"/></a:srgbClr></a:solidFill></a:ln></p:sp><p:sp><p:nvSpPr><p:cNvPr id="4" name="Shape"/><p:cNvSpPr/><p:nvPr/></p:nvSpPr><p:spPr><a:xfrm><a:off x="762000" y="4572000"/><a:ext cx="2286000" cy="2286000"/></a:xfrm><a:prstGeom prst="ellipse"><a:avLst/></a:prstGeom><a:noFill/><a:ln w="25400"><a:solidFill><a:srgbClr val="FFFFFF"><a:alpha val="100000"/></a:srgbClr></a:solidFill></a:ln></p:sp><p:sp><p:nvSpPr><p:cNvPr id="5" name="Shape"/><p:cNvSpPr/><p:nvPr/></p:nvSpPr><p:spPr><a:xfrm><a:off x="3238500" y="571500"/><a:ext cx="5715000" cy="5715000"/></a:xfrm><a:prstGeom prst="ellipse"><a:avLst/></a:prstGeom><a:noFill/><a:ln w="12700"><a:solidFill><a:srgbClr val="FFFFFF"><a:alpha val="100000"/></a:srgbClr></a:solidFill></a:ln></p:sp><p:sp><p:nvSpPr><p:cNvPr id="6" name="Shape"/><p:cNvSpPr/><p:nvPr/></p:nvSpPr><p:spPr><a:xfrm><a:off x="5143500" y="2286000"/><a:ext cx="1905000" cy="38100"/></a:xfrm><a:prstGeom prst="roundRect"><a:avLst><a:gd name="adj" fmla="val 1000"/></a:avLst></a:prstGeom><a:solidFill><a:srgbClr val="00D2FF"><a:alpha val="100000"/></a:srgbClr></a:solidFill><a:ln><a:noFill/></a:ln></p:sp><p:sp><p:nvSpPr><p:cNvPr id="7" name="TextBox"/><p:cNvSpPr/><p:nvPr/></p:nvSpPr><p:spPr><a:xfrm><a:off x="0" y="3333750"/><a:ext cx="12192000" cy="1137920"/></a:xfrm><p:txBody><a:bodyPr wrap="square" rtlCol="0" anchor="t"/><a:lstStyle/><a:p><a:pPr algn="ctr"/><a:r><a:rPr lang="en-US" sz="64" b="0" i="0" u="none"><a:solidFill><a:srgbClr val="FFFFFF"/></a:solidFill></a:rPr><a:t>InkUO</a:t></a:r></a:p></p:txBody></p:sp><p:sp><p:nvSpPr><p:cNvPr id="8" name="TextBox"/><p:cNvSpPr/><p:nvPr/></p:nvSpPr><p:spPr><a:xfrm><a:off x="0" y="3905250"/><a:ext cx="12192000" cy="497840"/></a:xfrm><p:txBody><a:bodyPr wrap="square" rtlCol="0" anchor="t"/><a:lstStyle/><a:p><a:pPr algn="ctr"/><a:r><a:rPr lang="en-US" sz="28" b="0" i="0" u="none"><a:solidFill><a:srgbClr val="A0B4D8"/></a:solidFill></a:rPr><a:t>AI 文档编辑器</a:t></a:r></a:p></p:txBody></p:sp><p:sp><p:nvSpPr><p:cNvPr id="9" name="TextBox"/><p:cNvSpPr/><p:nvPr/></p:nvSpPr><p:spPr><a:xfrm><a:off x="0" y="4381500"/><a:ext cx="12192000" cy="320040"/></a:xfrm><p:txBody><a:bodyPr wrap="square" rtlCol="0" anchor="t"/><a:lstStyle/><a:p><a:pPr algn="ctr"/><a:r><a:rPr lang="en-US" sz="18" b="0" i="0" u="none"><a:solidFill><a:srgbClr val="6C8EB0"/></a:solidFill></a:rPr><a:t>重新定义文档编辑方式</a:t></a:r></a:p></p:txBody></p:sp><p:sp><p:nvSpPr><p:cNvPr id="10" name="TextBox"/><p:cNvSpPr/><p:nvPr/></p:nvSpPr><p:spPr><a:xfrm><a:off x="0" y="5715000"/><a:ext cx="12192000" cy="248920"/></a:xfrm><p:txBody><a:bodyPr wrap="square" rtlCol="0" anchor="t"/><a:lstStyle/><a:p><a:pPr algn="ctr"/><a:r><a:rPr lang="en-US" sz="14" b="0" i="0" u="none"><a:solidFill><a:srgbClr val="4A6A8A"/></a:solidFill></a:rPr><a:t>版本 0.1.0 ｜ 基于 Tauri 2 + React 19</a:t></a:r></a:p></p:txBody></p:sp></p:spTree></p:cSld></p:sld>
 </file>
 
-<file path=ppt/slides/slide2.xml><?xml version="1.0" encoding="UTF-8" standalone="yes"?><p:sld xmlns:a="http://schemas.openxmlformats.org/drawingml/2006/main" xmlns:r="http://schemas.openxmlformats.org/officeDocument/2006/relationships" xmlns:p="http://schemas.openxmlformats.org/presentationml/2006/main"><p:cSld><p:spTree><p:nvGrpSpPr><p:cNvPr id="1" name=""/><p:cNvGrpSpPr/><p:nvPr/></p:nvGrpSpPr><p:grpSpPr><a:xfrm><a:off x="0" y="0"/><a:ext cx="0" cy="0"/><a:chOff x="0" y="0"/><a:chExt cx="0" cy="0"/></a:xfrm></p:grpSpPr><p:sp><p:nvSpPr><p:cNvPr id="100" name="Shape"/><p:cNvSpPr/><p:nvPr/></p:nvSpPr><p:spPr><a:xfrm><a:off x="0" y="0"/><a:ext cx="12192000" cy="6858000"/></a:xfrm><a:prstGeom prst="rect"><a:avLst/></a:prstGeom><a:solidFill><a:srgbClr val="0F0F23"><a:alpha val="100000"/></a:srgbClr></a:solidFill><a:ln><a:noFill/></a:ln></p:sp><p:sp><p:nvSpPr><p:cNvPr id="100" name="Shape"/><p:cNvSpPr/><p:nvPr/></p:nvSpPr><p:spPr><a:xfrm><a:off x="762000" y="571500"/><a:ext cx="571500" cy="38100"/></a:xfrm><a:prstGeom prst="roundRect"><a:avLst><a:gd name="adj" fmla="val 3333"/></a:avLst></a:prstGeom><a:solidFill><a:srgbClr val="00D2FF"><a:alpha val="100000"/></a:srgbClr></a:solidFill><a:ln><a:noFill/></a:ln></p:sp><p:sp><p:nvSpPr><p:cNvPr id="100" name="TextBox"/><p:cNvSpPr/><p:nvPr/></p:nvSpPr><p:spPr><a:xfrm><a:off x="762000" y="1047750"/><a:ext cx="12192000" cy="640080"/></a:xfrm><p:txBody><a:bodyPr wrap="square" rtlCol="0" anchor="t"/><a:lstStyle/><a:p><a:pPr algn="l"/><a:r><a:rPr lang="en-US" sz="36" b="0" i="0" u="none"><a:solidFill><a:srgbClr val="FFFFFF"/></a:solidFill></a:rPr><a:t>产品概述</a:t></a:r></a:p></p:txBody></p:sp><p:cxnSp><p:nvCxnSpPr><p:cNvPr id="100" name="Line"/><p:cNvCxnSpPr/><p:nvPr/></p:nvCxnSpPr><p:spPr><a:xfrm><a:off x="762000" y="1190625"/><a:ext cx="4000500" cy="0"/></a:xfrm><a:prstGeom prst="line"><a:avLst/></a:prstGeom><a:ln w="12700"><a:solidFill><a:srgbClr val="FFFFFF"/></a:solidFill></a:ln></p:spPr></p:cxnSp><p:sp><p:nvSpPr><p:cNvPr id="100" name="TextBox"/><p:cNvSpPr/><p:nvPr/></p:nvSpPr><p:spPr><a:xfrm><a:off x="762000" y="2000250"/><a:ext cx="12192000" cy="320040"/></a:xfrm><p:txBody><a:bodyPr wrap="square" rtlCol="0" anchor="t"/><a:lstStyle/><a:p><a:pPr algn="l"/><a:r><a:rPr lang="en-US" sz="18" b="0" i="0" u="none"><a:solidFill><a:srgbClr val="C0D0E8"/></a:solidFill></a:rPr><a:t>InkUO 是一款面向知识工作者、开发者和创意团队的</a:t></a:r><a:r><a:rPr lang="en-US" sz="18" b="0" i="0" u="none"><a:solidFill><a:srgbClr val="C0D0E8"/></a:solidFill></a:rPr><a:t>AI 驱动文档编辑器桌面端。</a:t></a:r></a:p></p:txBody></p:sp><p:sp><p:nvSpPr><p:cNvPr id="100" name="Shape"/><p:cNvSpPr/><p:nvPr/></p:nvSpPr><p:spPr><a:xfrm><a:off x="762000" y="2857500"/><a:ext cx="3333750" cy="857250"/></a:xfrm><a:prstGeom prst="roundRect"><a:avLst><a:gd name="adj" fmla="val 2286"/></a:avLst></a:prstGeom><a:solidFill><a:srgbClr val="00D2FF"><a:alpha val="100000"/></a:srgbClr></a:solidFill><a:ln w="12700"><a:solidFill><a:srgbClr val="00D2FF"><a:alpha val="100000"/></a:srgbClr></a:solidFill></a:ln></p:sp><p:sp><p:nvSpPr><p:cNvPr id="100" name="TextBox"/><p:cNvSpPr/><p:nvPr/></p:nvSpPr><p:spPr><a:xfrm><a:off x="1047750" y="3238500"/><a:ext cx="12192000" cy="320040"/></a:xfrm><p:txBody><a:bodyPr wrap="square" rtlCol="0" anchor="t"/><a:lstStyle/><a:p><a:pPr algn="l"/><a:r><a:rPr lang="en-US" sz="18" b="0" i="0" u="none"><a:solidFill><a:srgbClr val="00D2FF"/></a:solidFill></a:rPr><a:t>多格式支持</a:t></a:r></a:p></p:txBody></p:sp><p:sp><p:nvSpPr><p:cNvPr id="100" name="TextBox"/><p:cNvSpPr/><p:nvPr/></p:nvSpPr><p:spPr><a:xfrm><a:off x="1047750" y="3476625"/><a:ext cx="12192000" cy="248920"/></a:xfrm><p:txBody><a:bodyPr wrap="square" rtlCol="0" anchor="t"/><a:lstStyle/><a:p><a:pPr algn="l"/><a:r><a:rPr lang="en-US" sz="14" b="0" i="0" u="none"><a:solidFill><a:srgbClr val="8AA8C8"/></a:solidFill></a:rPr><a:t>Markdown · Word · Excel · 代码 · PDF · SVG</a:t></a:r></a:p></p:txBody></p:sp><p:sp><p:nvSpPr><p:cNvPr id="100" name="Shape"/><p:cNvSpPr/><p:nvPr/></p:nvSpPr><p:spPr><a:xfrm><a:off x="4429125" y="2857500"/><a:ext cx="3333750" cy="857250"/></a:xfrm><a:prstGeom prst="roundRect"><a:avLst><a:gd name="adj" fmla="val 2286"/></a:avLst></a:prstGeom><a:solidFill><a:srgbClr val="3A7BD5"><a:alpha val="100000"/></a:srgbClr></a:solidFill><a:ln w="12700"><a:solidFill><a:srgbClr val="3A7BD5"><a:alpha val="100000"/></a:srgbClr></a:solidFill></a:ln></p:sp><p:sp><p:nvSpPr><p:cNvPr id="100" name="TextBox"/><p:cNvSpPr/><p:nvPr/></p:nvSpPr><p:spPr><a:xfrm><a:off x="4714875" y="3238500"/><a:ext cx="12192000" cy="320040"/></a:xfrm><p:txBody><a:bodyPr wrap="square" rtlCol="0" anchor="t"/><a:lstStyle/><a:p><a:pPr algn="l"/><a:r><a:rPr lang="en-US" sz="18" b="0" i="0" u="none"><a:solidFill><a:srgbClr val="5A9BE5"/></a:solidFill></a:rPr><a:t>AI 智能体</a:t></a:r></a:p></p:txBody></p:sp><p:sp><p:nvSpPr><p:cNvPr id="100" name="TextBox"/><p:cNvSpPr/><p:nvPr/></p:nvSpPr><p:spPr><a:xfrm><a:off x="4714875" y="3476625"/><a:ext cx="12192000" cy="248920"/></a:xfrm><p:txBody><a:bodyPr wrap="square" rtlCol="0" anchor="t"/><a:lstStyle/><a:p><a:pPr algn="l"/><a:r><a:rPr lang="en-US" sz="14" b="0" i="0" u="none"><a:solidFill><a:srgbClr val="8AA8C8"/></a:solidFill></a:rPr><a:t>Ask · Plan · Agent 三模式 AI 助手</a:t></a:r></a:p></p:txBody></p:sp><p:sp><p:nvSpPr><p:cNvPr id="100" name="Shape"/><p:cNvSpPr/><p:nvPr/></p:nvSpPr><p:spPr><a:xfrm><a:off x="8096250" y="2857500"/><a:ext cx="3333750" cy="857250"/></a:xfrm><a:prstGeom prst="roundRect"><a:avLst><a:gd name="adj" fmla="val 2286"/></a:avLst></a:prstGeom><a:solidFill><a:srgbClr val="64C896"><a:alpha val="100000"/></a:srgbClr></a:solidFill><a:ln w="12700"><a:solidFill><a:srgbClr val="64C896"><a:alpha val="100000"/></a:srgbClr></a:solidFill></a:ln></p:sp><p:sp><p:nvSpPr><p:cNvPr id="100" name="TextBox"/><p:cNvSpPr/><p:nvPr/></p:nvSpPr><p:spPr><a:xfrm><a:off x="8382000" y="3238500"/><a:ext cx="12192000" cy="320040"/></a:xfrm><p:txBody><a:bodyPr wrap="square" rtlCol="0" anchor="t"/><a:lstStyle/><a:p><a:pPr algn="l"/><a:r><a:rPr lang="en-US" sz="18" b="0" i="0" u="none"><a:solidFill><a:srgbClr val="6CC8A0"/></a:solidFill></a:rPr><a:t>桌面原生体验</a:t></a:r></a:p></p:txBody></p:sp><p:sp><p:nvSpPr><p:cNvPr id="100" name="TextBox"/><p:cNvSpPr/><p:nvPr/></p:nvSpPr><p:spPr><a:xfrm><a:off x="8382000" y="3476625"/><a:ext cx="12192000" cy="248920"/></a:xfrm><p:txBody><a:bodyPr wrap="square" rtlCol="0" anchor="t"/><a:lstStyle/><a:p><a:pPr algn="l"/><a:r><a:rPr lang="en-US" sz="14" b="0" i="0" u="none"><a:solidFill><a:srgbClr val="8AA8C8"/></a:solidFill></a:rPr><a:t>Tauri 2 · 原生性能 · 跨平台</a:t></a:r></a:p></p:txBody></p:sp><p:sp><p:nvSpPr><p:cNvPr id="100" name="TextBox"/><p:cNvSpPr/><p:nvPr/></p:nvSpPr><p:spPr><a:xfrm><a:off x="762000" y="4476750"/><a:ext cx="12192000" cy="284480"/></a:xfrm><p:txBody><a:bodyPr wrap="square" rtlCol="0" anchor="t"/><a:lstStyle/><a:p><a:pPr algn="l"/><a:r><a:rPr lang="en-US" sz="16" b="0" i="0" u="none"><a:solidFill><a:srgbClr val="7090B0"/></a:solidFill></a:rPr><a:t>无论你是撰写技术文档、编辑报告、处理数据表格，</a:t></a:r><a:r><a:rPr lang="en-US" sz="16" b="0" i="0" u="none"><a:solidFill><a:srgbClr val="7090B0"/></a:solidFill></a:rPr><a:t>还是阅读论文，InkUO 都能通过 AI 无缝融入你的工作流。</a:t></a:r></a:p></p:txBody></p:sp></p:spTree></p:cSld></p:sld>
+<file path=ppt/slides/slide2.xml><?xml version="1.0" encoding="UTF-8" standalone="yes"?><p:sld xmlns:a="http://schemas.openxmlformats.org/drawingml/2006/main" xmlns:r="http://schemas.openxmlformats.org/officeDocument/2006/relationships" xmlns:p="http://schemas.openxmlformats.org/presentationml/2006/main"><p:cSld><p:spTree><p:nvGrpSpPr><p:cNvPr id="1" name=""/><p:cNvGrpSpPr/><p:nvPr/></p:nvGrpSpPr><p:grpSpPr><a:xfrm><a:off x="0" y="0"/><a:ext cx="0" cy="0"/><a:chOff x="0" y="0"/><a:chExt cx="0" cy="0"/></a:xfrm></p:grpSpPr><p:sp><p:nvSpPr><p:cNvPr id="2" name="Shape"/><p:cNvSpPr/><p:nvPr/></p:nvSpPr><p:spPr><a:xfrm><a:off x="0" y="0"/><a:ext cx="12192000" cy="6858000"/></a:xfrm><a:prstGeom prst="rect"><a:avLst/></a:prstGeom><a:solidFill><a:srgbClr val="0F0F23"><a:alpha val="100000"/></a:srgbClr></a:solidFill><a:ln><a:noFill/></a:ln></p:sp><p:sp><p:nvSpPr><p:cNvPr id="3" name="Shape"/><p:cNvSpPr/><p:nvPr/></p:nvSpPr><p:spPr><a:xfrm><a:off x="762000" y="571500"/><a:ext cx="571500" cy="38100"/></a:xfrm><a:prstGeom prst="roundRect"><a:avLst><a:gd name="adj" fmla="val 3333"/></a:avLst></a:prstGeom><a:solidFill><a:srgbClr val="00D2FF"><a:alpha val="100000"/></a:srgbClr></a:solidFill><a:ln><a:noFill/></a:ln></p:sp><p:sp><p:nvSpPr><p:cNvPr id="4" name="TextBox"/><p:cNvSpPr/><p:nvPr/></p:nvSpPr><p:spPr><a:xfrm><a:off x="762000" y="1047750"/><a:ext cx="12192000" cy="640080"/></a:xfrm><p:txBody><a:bodyPr wrap="square" rtlCol="0" anchor="t"/><a:lstStyle/><a:p><a:pPr algn="l"/><a:r><a:rPr lang="en-US" sz="36" b="0" i="0" u="none"><a:solidFill><a:srgbClr val="FFFFFF"/></a:solidFill></a:rPr><a:t>产品概述</a:t></a:r></a:p></p:txBody></p:sp><p:cxnSp><p:nvCxnSpPr><p:cNvPr id="5" name="Line"/><p:cNvCxnSpPr/><p:nvPr/></p:nvCxnSpPr><p:spPr><a:xfrm><a:off x="762000" y="1190625"/><a:ext cx="4000500" cy="0"/></a:xfrm><a:prstGeom prst="line"><a:avLst/></a:prstGeom><a:ln w="12700"><a:solidFill><a:srgbClr val="FFFFFF"/></a:solidFill></a:ln></p:spPr></p:cxnSp><p:sp><p:nvSpPr><p:cNvPr id="6" name="TextBox"/><p:cNvSpPr/><p:nvPr/></p:nvSpPr><p:spPr><a:xfrm><a:off x="762000" y="2000250"/><a:ext cx="12192000" cy="320040"/></a:xfrm><p:txBody><a:bodyPr wrap="square" rtlCol="0" anchor="t"/><a:lstStyle/><a:p><a:pPr algn="l"/><a:r><a:rPr lang="en-US" sz="18" b="0" i="0" u="none"><a:solidFill><a:srgbClr val="C0D0E8"/></a:solidFill></a:rPr><a:t>InkUO 是一款面向知识工作者、开发者和创意团队的</a:t></a:r><a:r><a:rPr lang="en-US" sz="18" b="0" i="0" u="none"><a:solidFill><a:srgbClr val="C0D0E8"/></a:solidFill></a:rPr><a:t>AI 驱动文档编辑器桌面端。</a:t></a:r></a:p></p:txBody></p:sp><p:sp><p:nvSpPr><p:cNvPr id="7" name="Shape"/><p:cNvSpPr/><p:nvPr/></p:nvSpPr><p:spPr><a:xfrm><a:off x="762000" y="2857500"/><a:ext cx="3333750" cy="857250"/></a:xfrm><a:prstGeom prst="roundRect"><a:avLst><a:gd name="adj" fmla="val 2286"/></a:avLst></a:prstGeom><a:solidFill><a:srgbClr val="00D2FF"><a:alpha val="100000"/></a:srgbClr></a:solidFill><a:ln w="12700"><a:solidFill><a:srgbClr val="00D2FF"><a:alpha val="100000"/></a:srgbClr></a:solidFill></a:ln></p:sp><p:sp><p:nvSpPr><p:cNvPr id="8" name="TextBox"/><p:cNvSpPr/><p:nvPr/></p:nvSpPr><p:spPr><a:xfrm><a:off x="1047750" y="3238500"/><a:ext cx="12192000" cy="320040"/></a:xfrm><p:txBody><a:bodyPr wrap="square" rtlCol="0" anchor="t"/><a:lstStyle/><a:p><a:pPr algn="l"/><a:r><a:rPr lang="en-US" sz="18" b="0" i="0" u="none"><a:solidFill><a:srgbClr val="00D2FF"/></a:solidFill></a:rPr><a:t>多格式支持</a:t></a:r></a:p></p:txBody></p:sp><p:sp><p:nvSpPr><p:cNvPr id="9" name="TextBox"/><p:cNvSpPr/><p:nvPr/></p:nvSpPr><p:spPr><a:xfrm><a:off x="1047750" y="3476625"/><a:ext cx="12192000" cy="248920"/></a:xfrm><p:txBody><a:bodyPr wrap="square" rtlCol="0" anchor="t"/><a:lstStyle/><a:p><a:pPr algn="l"/><a:r><a:rPr lang="en-US" sz="14" b="0" i="0" u="none"><a:solidFill><a:srgbClr val="8AA8C8"/></a:solidFill></a:rPr><a:t>Markdown · Word · Excel · 代码 · PDF · SVG</a:t></a:r></a:p></p:txBody></p:sp><p:sp><p:nvSpPr><p:cNvPr id="10" name="Shape"/><p:cNvSpPr/><p:nvPr/></p:nvSpPr><p:spPr><a:xfrm><a:off x="4429125" y="2857500"/><a:ext cx="3333750" cy="857250"/></a:xfrm><a:prstGeom prst="roundRect"><a:avLst><a:gd name="adj" fmla="val 2286"/></a:avLst></a:prstGeom><a:solidFill><a:srgbClr val="3A7BD5"><a:alpha val="100000"/></a:srgbClr></a:solidFill><a:ln w="12700"><a:solidFill><a:srgbClr val="3A7BD5"><a:alpha val="100000"/></a:srgbClr></a:solidFill></a:ln></p:sp><p:sp><p:nvSpPr><p:cNvPr id="11" name="TextBox"/><p:cNvSpPr/><p:nvPr/></p:nvSpPr><p:spPr><a:xfrm><a:off x="4714875" y="3238500"/><a:ext cx="12192000" cy="320040"/></a:xfrm><p:txBody><a:bodyPr wrap="square" rtlCol="0" anchor="t"/><a:lstStyle/><a:p><a:pPr algn="l"/><a:r><a:rPr lang="en-US" sz="18" b="0" i="0" u="none"><a:solidFill><a:srgbClr val="5A9BE5"/></a:solidFill></a:rPr><a:t>AI 智能体</a:t></a:r></a:p></p:txBody></p:sp><p:sp><p:nvSpPr><p:cNvPr id="12" name="TextBox"/><p:cNvSpPr/><p:nvPr/></p:nvSpPr><p:spPr><a:xfrm><a:off x="4714875" y="3476625"/><a:ext cx="12192000" cy="248920"/></a:xfrm><p:txBody><a:bodyPr wrap="square" rtlCol="0" anchor="t"/><a:lstStyle/><a:p><a:pPr algn="l"/><a:r><a:rPr lang="en-US" sz="14" b="0" i="0" u="none"><a:solidFill><a:srgbClr val="8AA8C8"/></a:solidFill></a:rPr><a:t>Ask · Plan · Agent 三模式 AI 助手</a:t></a:r></a:p></p:txBody></p:sp><p:sp><p:nvSpPr><p:cNvPr id="13" name="Shape"/><p:cNvSpPr/><p:nvPr/></p:nvSpPr><p:spPr><a:xfrm><a:off x="8096250" y="2857500"/><a:ext cx="3333750" cy="857250"/></a:xfrm><a:prstGeom prst="roundRect"><a:avLst><a:gd name="adj" fmla="val 2286"/></a:avLst></a:prstGeom><a:solidFill><a:srgbClr val="64C896"><a:alpha val="100000"/></a:srgbClr></a:solidFill><a:ln w="12700"><a:solidFill><a:srgbClr val="64C896"><a:alpha val="100000"/></a:srgbClr></a:solidFill></a:ln></p:sp><p:sp><p:nvSpPr><p:cNvPr id="14" name="TextBox"/><p:cNvSpPr/><p:nvPr/></p:nvSpPr><p:spPr><a:xfrm><a:off x="8382000" y="3238500"/><a:ext cx="12192000" cy="320040"/></a:xfrm><p:txBody><a:bodyPr wrap="square" rtlCol="0" anchor="t"/><a:lstStyle/><a:p><a:pPr algn="l"/><a:r><a:rPr lang="en-US" sz="18" b="0" i="0" u="none"><a:solidFill><a:srgbClr val="6CC8A0"/></a:solidFill></a:rPr><a:t>桌面原生体验</a:t></a:r></a:p></p:txBody></p:sp><p:sp><p:nvSpPr><p:cNvPr id="15" name="TextBox"/><p:cNvSpPr/><p:nvPr/></p:nvSpPr><p:spPr><a:xfrm><a:off x="8382000" y="3476625"/><a:ext cx="12192000" cy="248920"/></a:xfrm><p:txBody><a:bodyPr wrap="square" rtlCol="0" anchor="t"/><a:lstStyle/><a:p><a:pPr algn="l"/><a:r><a:rPr lang="en-US" sz="14" b="0" i="0" u="none"><a:solidFill><a:srgbClr val="8AA8C8"/></a:solidFill></a:rPr><a:t>Tauri 2 · 原生性能 · 跨平台</a:t></a:r></a:p></p:txBody></p:sp><p:sp><p:nvSpPr><p:cNvPr id="16" name="TextBox"/><p:cNvSpPr/><p:nvPr/></p:nvSpPr><p:spPr><a:xfrm><a:off x="762000" y="4476750"/><a:ext cx="12192000" cy="284480"/></a:xfrm><p:txBody><a:bodyPr wrap="square" rtlCol="0" anchor="t"/><a:lstStyle/><a:p><a:pPr algn="l"/><a:r><a:rPr lang="en-US" sz="16" b="0" i="0" u="none"><a:solidFill><a:srgbClr val="7090B0"/></a:solidFill></a:rPr><a:t>无论你是撰写技术文档、编辑报告、处理数据表格，</a:t></a:r><a:r><a:rPr lang="en-US" sz="16" b="0" i="0" u="none"><a:solidFill><a:srgbClr val="7090B0"/></a:solidFill></a:rPr><a:t>还是阅读论文，InkUO 都能通过 AI 无缝融入你的工作流。</a:t></a:r></a:p></p:txBody></p:sp></p:spTree></p:cSld></p:sld>
 </file>
 
-<file path=ppt/slides/slide3.xml><?xml version="1.0" encoding="UTF-8" standalone="yes"?><p:sld xmlns:a="http://schemas.openxmlformats.org/drawingml/2006/main" xmlns:r="http://schemas.openxmlformats.org/officeDocument/2006/relationships" xmlns:p="http://schemas.openxmlformats.org/presentationml/2006/main"><p:cSld><p:spTree><p:nvGrpSpPr><p:cNvPr id="1" name=""/><p:cNvGrpSpPr/><p:nvPr/></p:nvGrpSpPr><p:grpSpPr><a:xfrm><a:off x="0" y="0"/><a:ext cx="0" cy="0"/><a:chOff x="0" y="0"/><a:chExt cx="0" cy="0"/></a:xfrm></p:grpSpPr><p:sp><p:nvSpPr><p:cNvPr id="100" name="Shape"/><p:cNvSpPr/><p:nvPr/></p:nvSpPr><p:spPr><a:xfrm><a:off x="0" y="0"/><a:ext cx="12192000" cy="6858000"/></a:xfrm><a:prstGeom prst="rect"><a:avLst/></a:prstGeom><a:solidFill><a:srgbClr val="0F0F23"><a:alpha val="100000"/></a:srgbClr></a:solidFill><a:ln><a:noFill/></a:ln></p:sp><p:sp><p:nvSpPr><p:cNvPr id="100" name="TextBox"/><p:cNvSpPr/><p:nvPr/></p:nvSpPr><p:spPr><a:xfrm><a:off x="762000" y="1047750"/><a:ext cx="12192000" cy="640080"/></a:xfrm><p:txBody><a:bodyPr wrap="square" rtlCol="0" anchor="t"/><a:lstStyle/><a:p><a:pPr algn="l"/><a:r><a:rPr lang="en-US" sz="36" b="0" i="0" u="none"><a:solidFill><a:srgbClr val="FFFFFF"/></a:solidFill></a:rPr><a:t>AI 智能体系统</a:t></a:r></a:p></p:txBody></p:sp><p:cxnSp><p:nvCxnSpPr><p:cNvPr id="100" name="Line"/><p:cNvCxnSpPr/><p:nvPr/></p:nvCxnSpPr><p:spPr><a:xfrm><a:off x="762000" y="1190625"/><a:ext cx="4000500" cy="0"/></a:xfrm><a:prstGeom prst="line"><a:avLst/></a:prstGeom><a:ln w="12700"><a:solidFill><a:srgbClr val="FFFFFF"/></a:solidFill></a:ln></p:spPr></p:cxnSp><p:sp><p:nvSpPr><p:cNvPr id="100" name="Shape"/><p:cNvSpPr/><p:nvPr/></p:nvSpPr><p:spPr><a:xfrm><a:off x="762000" y="1714500"/><a:ext cx="3238500" cy="1905000"/></a:xfrm><a:prstGeom prst="roundRect"><a:avLst><a:gd name="adj" fmla="val 2941"/></a:avLst></a:prstGeom><a:solidFill><a:srgbClr val="00D2FF"><a:alpha val="100000"/></a:srgbClr></a:solidFill><a:ln w="19050"><a:solidFill><a:srgbClr val="00D2FF"><a:alpha val="100000"/></a:srgbClr></a:solidFill></a:ln></p:sp><p:sp><p:nvSpPr><p:cNvPr id="100" name="Shape"/><p:cNvSpPr/><p:nvPr/></p:nvSpPr><p:spPr><a:xfrm><a:off x="762000" y="1714500"/><a:ext cx="3238500" cy="419100"/></a:xfrm><a:prstGeom prst="roundRect"><a:avLst><a:gd name="adj" fmla="val 2941"/></a:avLst></a:prstGeom><a:solidFill><a:srgbClr val="00D2FF"><a:alpha val="100000"/></a:srgbClr></a:solidFill><a:ln><a:noFill/></a:ln></p:sp><p:sp><p:nvSpPr><p:cNvPr id="100" name="TextBox"/><p:cNvSpPr/><p:nvPr/></p:nvSpPr><p:spPr><a:xfrm><a:off x="-3714750" y="1981200"/><a:ext cx="12192000" cy="355600"/></a:xfrm><p:txBody><a:bodyPr wrap="square" rtlCol="0" anchor="t"/><a:lstStyle/><a:p><a:pPr algn="ctr"/><a:r><a:rPr lang="en-US" sz="20" b="0" i="0" u="none"><a:solidFill><a:srgbClr val="00D2FF"/></a:solidFill></a:rPr><a:t>Ask 问答模式</a:t></a:r></a:p></p:txBody></p:sp><p:sp><p:nvSpPr><p:cNvPr id="100" name="TextBox"/><p:cNvSpPr/><p:nvPr/></p:nvSpPr><p:spPr><a:xfrm><a:off x="1047750" y="2476500"/><a:ext cx="12192000" cy="266700"/></a:xfrm><p:txBody><a:bodyPr wrap="square" rtlCol="0" anchor="t"/><a:lstStyle/><a:p><a:pPr algn="l"/><a:r><a:rPr lang="en-US" sz="15" b="0" i="0" u="none"><a:solidFill><a:srgbClr val="B0C4D8"/></a:solidFill></a:rPr><a:t>快速提问，获取即时回答</a:t></a:r></a:p></p:txBody></p:sp><p:sp><p:nvSpPr><p:cNvPr id="100" name="TextBox"/><p:cNvSpPr/><p:nvPr/></p:nvSpPr><p:spPr><a:xfrm><a:off x="1047750" y="2762250"/><a:ext cx="12192000" cy="266700"/></a:xfrm><p:txBody><a:bodyPr wrap="square" rtlCol="0" anchor="t"/><a:lstStyle/><a:p><a:pPr algn="l"/><a:r><a:rPr lang="en-US" sz="15" b="0" i="0" u="none"><a:solidFill><a:srgbClr val="B0C4D8"/></a:solidFill></a:rPr><a:t>基于工作区知识库的语义搜索</a:t></a:r></a:p></p:txBody></p:sp><p:sp><p:nvSpPr><p:cNvPr id="100" name="TextBox"/><p:cNvSpPr/><p:nvPr/></p:nvSpPr><p:spPr><a:xfrm><a:off x="1047750" y="3048000"/><a:ext cx="12192000" cy="266700"/></a:xfrm><p:txBody><a:bodyPr wrap="square" rtlCol="0" anchor="t"/><a:lstStyle/><a:p><a:pPr algn="l"/><a:r><a:rPr lang="en-US" sz="15" b="0" i="0" u="none"><a:solidFill><a:srgbClr val="B0C4D8"/></a:solidFill></a:rPr><a:t>上下文感知的精准回复</a:t></a:r></a:p></p:txBody></p:sp><p:sp><p:nvSpPr><p:cNvPr id="100" name="TextBox"/><p:cNvSpPr/><p:nvPr/></p:nvSpPr><p:spPr><a:xfrm><a:off x="1047750" y="3333750"/><a:ext cx="12192000" cy="266700"/></a:xfrm><p:txBody><a:bodyPr wrap="square" rtlCol="0" anchor="t"/><a:lstStyle/><a:p><a:pPr algn="l"/><a:r><a:rPr lang="en-US" sz="15" b="0" i="0" u="none"><a:solidFill><a:srgbClr val="B0C4D8"/></a:solidFill></a:rPr><a:t>支持流式输出，实时生成</a:t></a:r></a:p></p:txBody></p:sp><p:sp><p:nvSpPr><p:cNvPr id="100" name="Shape"/><p:cNvSpPr/><p:nvPr/></p:nvSpPr><p:spPr><a:xfrm><a:off x="4476750" y="1714500"/><a:ext cx="3238500" cy="1905000"/></a:xfrm><a:prstGeom prst="roundRect"><a:avLst><a:gd name="adj" fmla="val 2941"/></a:avLst></a:prstGeom><a:solidFill><a:srgbClr val="3A7BD5"><a:alpha val="100000"/></a:srgbClr></a:solidFill><a:ln w="19050"><a:solidFill><a:srgbClr val="3A7BD5"><a:alpha val="100000"/></a:srgbClr></a:solidFill></a:ln></p:sp><p:sp><p:nvSpPr><p:cNvPr id="100" name="Shape"/><p:cNvSpPr/><p:nvPr/></p:nvSpPr><p:spPr><a:xfrm><a:off x="4476750" y="1714500"/><a:ext cx="3238500" cy="419100"/></a:xfrm><a:prstGeom prst="roundRect"><a:avLst><a:gd name="adj" fmla="val 2941"/></a:avLst></a:prstGeom><a:solidFill><a:srgbClr val="3A7BD5"><a:alpha val="100000"/></a:srgbClr></a:solidFill><a:ln><a:noFill/></a:ln></p:sp><p:sp><p:nvSpPr><p:cNvPr id="100" name="TextBox"/><p:cNvSpPr/><p:nvPr/></p:nvSpPr><p:spPr><a:xfrm><a:off x="0" y="1981200"/><a:ext cx="12192000" cy="355600"/></a:xfrm><p:txBody><a:bodyPr wrap="square" rtlCol="0" anchor="t"/><a:lstStyle/><a:p><a:pPr algn="ctr"/><a:r><a:rPr lang="en-US" sz="20" b="0" i="0" u="none"><a:solidFill><a:srgbClr val="5A9BE5"/></a:solidFill></a:rPr><a:t>Plan 计划模式</a:t></a:r></a:p></p:txBody></p:sp><p:sp><p:nvSpPr><p:cNvPr id="100" name="TextBox"/><p:cNvSpPr/><p:nvPr/></p:nvSpPr><p:spPr><a:xfrm><a:off x="4762500" y="2476500"/><a:ext cx="12192000" cy="266700"/></a:xfrm><p:txBody><a:bodyPr wrap="square" rtlCol="0" anchor="t"/><a:lstStyle/><a:p><a:pPr algn="l"/><a:r><a:rPr lang="en-US" sz="15" b="0" i="0" u="none"><a:solidFill><a:srgbClr val="B0C4D8"/></a:solidFill></a:rPr><a:t>AI 分析需求，制定执行计划</a:t></a:r></a:p></p:txBody></p:sp><p:sp><p:nvSpPr><p:cNvPr id="100" name="TextBox"/><p:cNvSpPr/><p:nvPr/></p:nvSpPr><p:spPr><a:xfrm><a:off x="4762500" y="2762250"/><a:ext cx="12192000" cy="266700"/></a:xfrm><p:txBody><a:bodyPr wrap="square" rtlCol="0" anchor="t"/><a:lstStyle/><a:p><a:pPr algn="l"/><a:r><a:rPr lang="en-US" sz="15" b="0" i="0" u="none"><a:solidFill><a:srgbClr val="B0C4D8"/></a:solidFill></a:rPr><a:t>展示文件修改清单与风险评估</a:t></a:r></a:p></p:txBody></p:sp><p:sp><p:nvSpPr><p:cNvPr id="100" name="TextBox"/><p:cNvSpPr/><p:nvPr/></p:nvSpPr><p:spPr><a:xfrm><a:off x="4762500" y="3048000"/><a:ext cx="12192000" cy="266700"/></a:xfrm><p:txBody><a:bodyPr wrap="square" rtlCol="0" anchor="t"/><a:lstStyle/><a:p><a:pPr algn="l"/><a:r><a:rPr lang="en-US" sz="15" b="0" i="0" u="none"><a:solidFill><a:srgbClr val="B0C4D8"/></a:solidFill></a:rPr><a:t>用户确认后执行</a:t></a:r></a:p></p:txBody></p:sp><p:sp><p:nvSpPr><p:cNvPr id="100" name="TextBox"/><p:cNvSpPr/><p:nvPr/></p:nvSpPr><p:spPr><a:xfrm><a:off x="4762500" y="3333750"/><a:ext cx="12192000" cy="266700"/></a:xfrm><p:txBody><a:bodyPr wrap="square" rtlCol="0" anchor="t"/><a:lstStyle/><a:p><a:pPr algn="l"/><a:r><a:rPr lang="en-US" sz="15" b="0" i="0" u="none"><a:solidFill><a:srgbClr val="B0C4D8"/></a:solidFill></a:rPr><a:t>安全可控的操作流程</a:t></a:r></a:p></p:txBody></p:sp><p:sp><p:nvSpPr><p:cNvPr id="100" name="Shape"/><p:cNvSpPr/><p:nvPr/></p:nvSpPr><p:spPr><a:xfrm><a:off x="8191500" y="1714500"/><a:ext cx="3238500" cy="1905000"/></a:xfrm><a:prstGeom prst="roundRect"><a:avLst><a:gd name="adj" fmla="val 2941"/></a:avLst></a:prstGeom><a:solidFill><a:srgbClr val="64C896"><a:alpha val="100000"/></a:srgbClr></a:solidFill><a:ln w="19050"><a:solidFill><a:srgbClr val="64C896"><a:alpha val="100000"/></a:srgbClr></a:solidFill></a:ln></p:sp><p:sp><p:nvSpPr><p:cNvPr id="100" name="Shape"/><p:cNvSpPr/><p:nvPr/></p:nvSpPr><p:spPr><a:xfrm><a:off x="8191500" y="1714500"/><a:ext cx="3238500" cy="419100"/></a:xfrm><a:prstGeom prst="roundRect"><a:avLst><a:gd name="adj" fmla="val 2941"/></a:avLst></a:prstGeom><a:solidFill><a:srgbClr val="64C896"><a:alpha val="100000"/></a:srgbClr></a:solidFill><a:ln><a:noFill/></a:ln></p:sp><p:sp><p:nvSpPr><p:cNvPr id="100" name="TextBox"/><p:cNvSpPr/><p:nvPr/></p:nvSpPr><p:spPr><a:xfrm><a:off x="3714750" y="1981200"/><a:ext cx="12192000" cy="355600"/></a:xfrm><p:txBody><a:bodyPr wrap="square" rtlCol="0" anchor="t"/><a:lstStyle/><a:p><a:pPr algn="ctr"/><a:r><a:rPr lang="en-US" sz="20" b="0" i="0" u="none"><a:solidFill><a:srgbClr val="6CC8A0"/></a:solidFill></a:rPr><a:t>Agent 智能体模式</a:t></a:r></a:p></p:txBody></p:sp><p:sp><p:nvSpPr><p:cNvPr id="100" name="TextBox"/><p:cNvSpPr/><p:nvPr/></p:nvSpPr><p:spPr><a:xfrm><a:off x="8477250" y="2476500"/><a:ext cx="12192000" cy="266700"/></a:xfrm><p:txBody><a:bodyPr wrap="square" rtlCol="0" anchor="t"/><a:lstStyle/><a:p><a:pPr algn="l"/><a:r><a:rPr lang="en-US" sz="15" b="0" i="0" u="none"><a:solidFill><a:srgbClr val="B0C4D8"/></a:solidFill></a:rPr><a:t>全自动执行，自主调用工具</a:t></a:r></a:p></p:txBody></p:sp><p:sp><p:nvSpPr><p:cNvPr id="100" name="TextBox"/><p:cNvSpPr/><p:nvPr/></p:nvSpPr><p:spPr><a:xfrm><a:off x="8477250" y="2762250"/><a:ext cx="12192000" cy="266700"/></a:xfrm><p:txBody><a:bodyPr wrap="square" rtlCol="0" anchor="t"/><a:lstStyle/><a:p><a:pPr algn="l"/><a:r><a:rPr lang="en-US" sz="15" b="0" i="0" u="none"><a:solidFill><a:srgbClr val="B0C4D8"/></a:solidFill></a:rPr><a:t>子代理协作系统（多专家协同）</a:t></a:r></a:p></p:txBody></p:sp><p:sp><p:nvSpPr><p:cNvPr id="100" name="TextBox"/><p:cNvSpPr/><p:nvPr/></p:nvSpPr><p:spPr><a:xfrm><a:off x="8477250" y="3048000"/><a:ext cx="12192000" cy="266700"/></a:xfrm><p:txBody><a:bodyPr wrap="square" rtlCol="0" anchor="t"/><a:lstStyle/><a:p><a:pPr algn="l"/><a:r><a:rPr lang="en-US" sz="15" b="0" i="0" u="none"><a:solidFill><a:srgbClr val="B0C4D8"/></a:solidFill></a:rPr><a:t>文件读写、代码编辑、Office 操作</a:t></a:r></a:p></p:txBody></p:sp><p:sp><p:nvSpPr><p:cNvPr id="100" name="TextBox"/><p:cNvSpPr/><p:nvPr/></p:nvSpPr><p:spPr><a:xfrm><a:off x="8477250" y="3333750"/><a:ext cx="12192000" cy="266700"/></a:xfrm><p:txBody><a:bodyPr wrap="square" rtlCol="0" anchor="t"/><a:lstStyle/><a:p><a:pPr algn="l"/><a:r><a:rPr lang="en-US" sz="15" b="0" i="0" u="none"><a:solidFill><a:srgbClr val="B0C4D8"/></a:solidFill></a:rPr><a:t>端到端任务自动化</a:t></a:r></a:p></p:txBody></p:sp><p:sp><p:nvSpPr><p:cNvPr id="100" name="TextBox"/><p:cNvSpPr/><p:nvPr/></p:nvSpPr><p:spPr><a:xfrm><a:off x="762000" y="4286250"/><a:ext cx="12192000" cy="391160"/></a:xfrm><p:txBody><a:bodyPr wrap="square" rtlCol="0" anchor="t"/><a:lstStyle/><a:p><a:pPr algn="l"/><a:r><a:rPr lang="en-US" sz="22" b="0" i="0" u="none"><a:solidFill><a:srgbClr val="FFFFFF"/></a:solidFill></a:rPr><a:t>子代理专家体系</a:t></a:r></a:p></p:txBody></p:sp><p:sp><p:nvSpPr><p:cNvPr id="100" name="Shape"/><p:cNvSpPr/><p:nvPr/></p:nvSpPr><p:spPr><a:xfrm><a:off x="762000" y="4572000"/><a:ext cx="1714500" cy="533400"/></a:xfrm><a:prstGeom prst="roundRect"><a:avLst><a:gd name="adj" fmla="val 3333"/></a:avLst></a:prstGeom><a:solidFill><a:srgbClr val="00D2FF"><a:alpha val="100000"/></a:srgbClr></a:solidFill><a:ln w="12700"><a:solidFill><a:srgbClr val="00D2FF"><a:alpha val="100000"/></a:srgbClr></a:solidFill></a:ln></p:sp><p:sp><p:nvSpPr><p:cNvPr id="100" name="TextBox"/><p:cNvSpPr/><p:nvPr/></p:nvSpPr><p:spPr><a:xfrm><a:off x="-4476750" y="4857750"/><a:ext cx="12192000" cy="248920"/></a:xfrm><p:txBody><a:bodyPr wrap="square" rtlCol="0" anchor="t"/><a:lstStyle/><a:p><a:pPr algn="ctr"/><a:r><a:rPr lang="en-US" sz="14" b="0" i="0" u="none"><a:solidFill><a:srgbClr val="00D2FF"/></a:solidFill></a:rPr><a:t>Word 专家</a:t></a:r></a:p></p:txBody></p:sp><p:sp><p:nvSpPr><p:cNvPr id="100" name="TextBox"/><p:cNvSpPr/><p:nvPr/></p:nvSpPr><p:spPr><a:xfrm><a:off x="-4476750" y="5019675"/><a:ext cx="12192000" cy="195580"/></a:xfrm><p:txBody><a:bodyPr wrap="square" rtlCol="0" anchor="t"/><a:lstStyle/><a:p><a:pPr algn="ctr"/><a:r><a:rPr lang="en-US" sz="11" b="0" i="0" u="none"><a:solidFill><a:srgbClr val="7090B0"/></a:solidFill></a:rPr><a:t>文档创建/编辑</a:t></a:r></a:p></p:txBody></p:sp><p:sp><p:nvSpPr><p:cNvPr id="100" name="Shape"/><p:cNvSpPr/><p:nvPr/></p:nvSpPr><p:spPr><a:xfrm><a:off x="2667000" y="4572000"/><a:ext cx="1714500" cy="533400"/></a:xfrm><a:prstGeom prst="roundRect"><a:avLst><a:gd name="adj" fmla="val 3333"/></a:avLst></a:prstGeom><a:solidFill><a:srgbClr val="3A7BD5"><a:alpha val="100000"/></a:srgbClr></a:solidFill><a:ln w="12700"><a:solidFill><a:srgbClr val="3A7BD5"><a:alpha val="100000"/></a:srgbClr></a:solidFill></a:ln></p:sp><p:sp><p:nvSpPr><p:cNvPr id="100" name="TextBox"/><p:cNvSpPr/><p:nvPr/></p:nvSpPr><p:spPr><a:xfrm><a:off x="-2571750" y="4857750"/><a:ext cx="12192000" cy="248920"/></a:xfrm><p:txBody><a:bodyPr wrap="square" rtlCol="0" anchor="t"/><a:lstStyle/><a:p><a:pPr algn="ctr"/><a:r><a:rPr lang="en-US" sz="14" b="0" i="0" u="none"><a:solidFill><a:srgbClr val="5A9BE5"/></a:solidFill></a:rPr><a:t>Excel 专家</a:t></a:r></a:p></p:txBody></p:sp><p:sp><p:nvSpPr><p:cNvPr id="100" name="TextBox"/><p:cNvSpPr/><p:nvPr/></p:nvSpPr><p:spPr><a:xfrm><a:off x="-2571750" y="5019675"/><a:ext cx="12192000" cy="195580"/></a:xfrm><p:txBody><a:bodyPr wrap="square" rtlCol="0" anchor="t"/><a:lstStyle/><a:p><a:pPr algn="ctr"/><a:r><a:rPr lang="en-US" sz="11" b="0" i="0" u="none"><a:solidFill><a:srgbClr val="7090B0"/></a:solidFill></a:rPr><a:t>表格处理/分析</a:t></a:r></a:p></p:txBody></p:sp><p:sp><p:nvSpPr><p:cNvPr id="100" name="Shape"/><p:cNvSpPr/><p:nvPr/></p:nvSpPr><p:spPr><a:xfrm><a:off x="4572000" y="4572000"/><a:ext cx="1714500" cy="533400"/></a:xfrm><a:prstGeom prst="roundRect"><a:avLst><a:gd name="adj" fmla="val 3333"/></a:avLst></a:prstGeom><a:solidFill><a:srgbClr val="64C896"><a:alpha val="100000"/></a:srgbClr></a:solidFill><a:ln w="12700"><a:solidFill><a:srgbClr val="64C896"><a:alpha val="100000"/></a:srgbClr></a:solidFill></a:ln></p:sp><p:sp><p:nvSpPr><p:cNvPr id="100" name="TextBox"/><p:cNvSpPr/><p:nvPr/></p:nvSpPr><p:spPr><a:xfrm><a:off x="-666750" y="4857750"/><a:ext cx="12192000" cy="248920"/></a:xfrm><p:txBody><a:bodyPr wrap="square" rtlCol="0" anchor="t"/><a:lstStyle/><a:p><a:pPr algn="ctr"/><a:r><a:rPr lang="en-US" sz="14" b="0" i="0" u="none"><a:solidFill><a:srgbClr val="6CC8A0"/></a:solidFill></a:rPr><a:t>代码专家</a:t></a:r></a:p></p:txBody></p:sp><p:sp><p:nvSpPr><p:cNvPr id="100" name="TextBox"/><p:cNvSpPr/><p:nvPr/></p:nvSpPr><p:spPr><a:xfrm><a:off x="-666750" y="5019675"/><a:ext cx="12192000" cy="195580"/></a:xfrm><p:txBody><a:bodyPr wrap="square" rtlCol="0" anchor="t"/><a:lstStyle/><a:p><a:pPr algn="ctr"/><a:r><a:rPr lang="en-US" sz="11" b="0" i="0" u="none"><a:solidFill><a:srgbClr val="7090B0"/></a:solidFill></a:rPr><a:t>代码审查/编写</a:t></a:r></a:p></p:txBody></p:sp><p:sp><p:nvSpPr><p:cNvPr id="100" name="Shape"/><p:cNvSpPr/><p:nvPr/></p:nvSpPr><p:spPr><a:xfrm><a:off x="6477000" y="4572000"/><a:ext cx="1714500" cy="533400"/></a:xfrm><a:prstGeom prst="roundRect"><a:avLst><a:gd name="adj" fmla="val 3333"/></a:avLst></a:prstGeom><a:solidFill><a:srgbClr val="C89650"><a:alpha val="100000"/></a:srgbClr></a:solidFill><a:ln w="12700"><a:solidFill><a:srgbClr val="C89650"><a:alpha val="100000"/></a:srgbClr></a:solidFill></a:ln></p:sp><p:sp><p:nvSpPr><p:cNvPr id="100" name="TextBox"/><p:cNvSpPr/><p:nvPr/></p:nvSpPr><p:spPr><a:xfrm><a:off x="1238250" y="4857750"/><a:ext cx="12192000" cy="248920"/></a:xfrm><p:txBody><a:bodyPr wrap="square" rtlCol="0" anchor="t"/><a:lstStyle/><a:p><a:pPr algn="ctr"/><a:r><a:rPr lang="en-US" sz="14" b="0" i="0" u="none"><a:solidFill><a:srgbClr val="C8A050"/></a:solidFill></a:rPr><a:t>Markdown 专家</a:t></a:r></a:p></p:txBody></p:sp><p:sp><p:nvSpPr><p:cNvPr id="100" name="TextBox"/><p:cNvSpPr/><p:nvPr/></p:nvSpPr><p:spPr><a:xfrm><a:off x="1238250" y="5019675"/><a:ext cx="12192000" cy="195580"/></a:xfrm><p:txBody><a:bodyPr wrap="square" rtlCol="0" anchor="t"/><a:lstStyle/><a:p><a:pPr algn="ctr"/><a:r><a:rPr lang="en-US" sz="11" b="0" i="0" u="none"><a:solidFill><a:srgbClr val="7090B0"/></a:solidFill></a:rPr><a:t>长文撰写/排版</a:t></a:r></a:p></p:txBody></p:sp><p:sp><p:nvSpPr><p:cNvPr id="100" name="Shape"/><p:cNvSpPr/><p:nvPr/></p:nvSpPr><p:spPr><a:xfrm><a:off x="8382000" y="4572000"/><a:ext cx="1714500" cy="533400"/></a:xfrm><a:prstGeom prst="roundRect"><a:avLst><a:gd name="adj" fmla="val 3333"/></a:avLst></a:prstGeom><a:solidFill><a:srgbClr val="C86478"><a:alpha val="100000"/></a:srgbClr></a:solidFill><a:ln w="12700"><a:solidFill><a:srgbClr val="C86478"><a:alpha val="100000"/></a:srgbClr></a:solidFill></a:ln></p:sp><p:sp><p:nvSpPr><p:cNvPr id="100" name="TextBox"/><p:cNvSpPr/><p:nvPr/></p:nvSpPr><p:spPr><a:xfrm><a:off x="3143250" y="4857750"/><a:ext cx="12192000" cy="248920"/></a:xfrm><p:txBody><a:bodyPr wrap="square" rtlCol="0" anchor="t"/><a:lstStyle/><a:p><a:pPr algn="ctr"/><a:r><a:rPr lang="en-US" sz="14" b="0" i="0" u="none"><a:solidFill><a:srgbClr val="C86478"/></a:solidFill></a:rPr><a:t>流程图专家</a:t></a:r></a:p></p:txBody></p:sp><p:sp><p:nvSpPr><p:cNvPr id="100" name="TextBox"/><p:cNvSpPr/><p:nvPr/></p:nvSpPr><p:spPr><a:xfrm><a:off x="3143250" y="5019675"/><a:ext cx="12192000" cy="195580"/></a:xfrm><p:txBody><a:bodyPr wrap="square" rtlCol="0" anchor="t"/><a:lstStyle/><a:p><a:pPr algn="ctr"/><a:r><a:rPr lang="en-US" sz="11" b="0" i="0" u="none"><a:solidFill><a:srgbClr val="7090B0"/></a:solidFill></a:rPr><a:t>图表渲染</a:t></a:r></a:p></p:txBody></p:sp><p:sp><p:nvSpPr><p:cNvPr id="100" name="Shape"/><p:cNvSpPr/><p:nvPr/></p:nvSpPr><p:spPr><a:xfrm><a:off x="762000" y="5334000"/><a:ext cx="1714500" cy="533400"/></a:xfrm><a:prstGeom prst="roundRect"><a:avLst><a:gd name="adj" fmla="val 3333"/></a:avLst></a:prstGeom><a:solidFill><a:srgbClr val="9664C8"><a:alpha val="100000"/></a:srgbClr></a:solidFill><a:ln w="12700"><a:solidFill><a:srgbClr val="9664C8"><a:alpha val="100000"/></a:srgbClr></a:solidFill></a:ln></p:sp><p:sp><p:nvSpPr><p:cNvPr id="100" name="TextBox"/><p:cNvSpPr/><p:nvPr/></p:nvSpPr><p:spPr><a:xfrm><a:off x="-4476750" y="5619750"/><a:ext cx="12192000" cy="248920"/></a:xfrm><p:txBody><a:bodyPr wrap="square" rtlCol="0" anchor="t"/><a:lstStyle/><a:p><a:pPr algn="ctr"/><a:r><a:rPr lang="en-US" sz="14" b="0" i="0" u="none"><a:solidFill><a:srgbClr val="9664C8"/></a:solidFill></a:rPr><a:t>批量编辑专家</a:t></a:r></a:p></p:txBody></p:sp><p:sp><p:nvSpPr><p:cNvPr id="100" name="TextBox"/><p:cNvSpPr/><p:nvPr/></p:nvSpPr><p:spPr><a:xfrm><a:off x="-4476750" y="5781675"/><a:ext cx="12192000" cy="195580"/></a:xfrm><p:txBody><a:bodyPr wrap="square" rtlCol="0" anchor="t"/><a:lstStyle/><a:p><a:pPr algn="ctr"/><a:r><a:rPr lang="en-US" sz="11" b="0" i="0" u="none"><a:solidFill><a:srgbClr val="7090B0"/></a:solidFill></a:rPr><a:t>批量文件操作</a:t></a:r></a:p></p:txBody></p:sp><p:sp><p:nvSpPr><p:cNvPr id="100" name="Shape"/><p:cNvSpPr/><p:nvPr/></p:nvSpPr><p:spPr><a:xfrm><a:off x="2667000" y="5334000"/><a:ext cx="1714500" cy="533400"/></a:xfrm><a:prstGeom prst="roundRect"><a:avLst><a:gd name="adj" fmla="val 3333"/></a:avLst></a:prstGeom><a:solidFill><a:srgbClr val="B48250"><a:alpha val="100000"/></a:srgbClr></a:solidFill><a:ln w="12700"><a:solidFill><a:srgbClr val="B48250"><a:alpha val="100000"/></a:srgbClr></a:solidFill></a:ln></p:sp><p:sp><p:nvSpPr><p:cNvPr id="100" name="TextBox"/><p:cNvSpPr/><p:nvPr/></p:nvSpPr><p:spPr><a:xfrm><a:off x="-2571750" y="5619750"/><a:ext cx="12192000" cy="248920"/></a:xfrm><p:txBody><a:bodyPr wrap="square" rtlCol="0" anchor="t"/><a:lstStyle/><a:p><a:pPr algn="ctr"/><a:r><a:rPr lang="en-US" sz="14" b="0" i="0" u="none"><a:solidFill><a:srgbClr val="B48250"/></a:solidFill></a:rPr><a:t>研究专家</a:t></a:r></a:p></p:txBody></p:sp><p:sp><p:nvSpPr><p:cNvPr id="100" name="TextBox"/><p:cNvSpPr/><p:nvPr/></p:nvSpPr><p:spPr><a:xfrm><a:off x="-2571750" y="5781675"/><a:ext cx="12192000" cy="195580"/></a:xfrm><p:txBody><a:bodyPr wrap="square" rtlCol="0" anchor="t"/><a:lstStyle/><a:p><a:pPr algn="ctr"/><a:r><a:rPr lang="en-US" sz="11" b="0" i="0" u="none"><a:solidFill><a:srgbClr val="7090B0"/></a:solidFill></a:rPr><a:t>搜索与信息整理</a:t></a:r></a:p></p:txBody></p:sp></p:spTree></p:cSld></p:sld>
+<file path=ppt/slides/slide3.xml><?xml version="1.0" encoding="UTF-8" standalone="yes"?><p:sld xmlns:a="http://schemas.openxmlformats.org/drawingml/2006/main" xmlns:r="http://schemas.openxmlformats.org/officeDocument/2006/relationships" xmlns:p="http://schemas.openxmlformats.org/presentationml/2006/main"><p:cSld><p:spTree><p:nvGrpSpPr><p:cNvPr id="1" name=""/><p:cNvGrpSpPr/><p:nvPr/></p:nvGrpSpPr><p:grpSpPr><a:xfrm><a:off x="0" y="0"/><a:ext cx="0" cy="0"/><a:chOff x="0" y="0"/><a:chExt cx="0" cy="0"/></a:xfrm></p:grpSpPr><p:sp><p:nvSpPr><p:cNvPr id="2" name="Shape"/><p:cNvSpPr/><p:nvPr/></p:nvSpPr><p:spPr><a:xfrm><a:off x="0" y="0"/><a:ext cx="12192000" cy="6858000"/></a:xfrm><a:prstGeom prst="rect"><a:avLst/></a:prstGeom><a:solidFill><a:srgbClr val="0F0F23"><a:alpha val="100000"/></a:srgbClr></a:solidFill><a:ln><a:noFill/></a:ln></p:sp><p:sp><p:nvSpPr><p:cNvPr id="3" name="TextBox"/><p:cNvSpPr/><p:nvPr/></p:nvSpPr><p:spPr><a:xfrm><a:off x="762000" y="1047750"/><a:ext cx="12192000" cy="640080"/></a:xfrm><p:txBody><a:bodyPr wrap="square" rtlCol="0" anchor="t"/><a:lstStyle/><a:p><a:pPr algn="l"/><a:r><a:rPr lang="en-US" sz="36" b="0" i="0" u="none"><a:solidFill><a:srgbClr val="FFFFFF"/></a:solidFill></a:rPr><a:t>AI 智能体系统</a:t></a:r></a:p></p:txBody></p:sp><p:cxnSp><p:nvCxnSpPr><p:cNvPr id="4" name="Line"/><p:cNvCxnSpPr/><p:nvPr/></p:nvCxnSpPr><p:spPr><a:xfrm><a:off x="762000" y="1190625"/><a:ext cx="4000500" cy="0"/></a:xfrm><a:prstGeom prst="line"><a:avLst/></a:prstGeom><a:ln w="12700"><a:solidFill><a:srgbClr val="FFFFFF"/></a:solidFill></a:ln></p:spPr></p:cxnSp><p:sp><p:nvSpPr><p:cNvPr id="5" name="Shape"/><p:cNvSpPr/><p:nvPr/></p:nvSpPr><p:spPr><a:xfrm><a:off x="762000" y="1714500"/><a:ext cx="3238500" cy="1905000"/></a:xfrm><a:prstGeom prst="roundRect"><a:avLst><a:gd name="adj" fmla="val 2941"/></a:avLst></a:prstGeom><a:solidFill><a:srgbClr val="00D2FF"><a:alpha val="100000"/></a:srgbClr></a:solidFill><a:ln w="19050"><a:solidFill><a:srgbClr val="00D2FF"><a:alpha val="100000"/></a:srgbClr></a:solidFill></a:ln></p:sp><p:sp><p:nvSpPr><p:cNvPr id="6" name="Shape"/><p:cNvSpPr/><p:nvPr/></p:nvSpPr><p:spPr><a:xfrm><a:off x="762000" y="1714500"/><a:ext cx="3238500" cy="419100"/></a:xfrm><a:prstGeom prst="roundRect"><a:avLst><a:gd name="adj" fmla="val 2941"/></a:avLst></a:prstGeom><a:solidFill><a:srgbClr val="00D2FF"><a:alpha val="100000"/></a:srgbClr></a:solidFill><a:ln><a:noFill/></a:ln></p:sp><p:sp><p:nvSpPr><p:cNvPr id="7" name="TextBox"/><p:cNvSpPr/><p:nvPr/></p:nvSpPr><p:spPr><a:xfrm><a:off x="-3714750" y="1981200"/><a:ext cx="12192000" cy="355600"/></a:xfrm><p:txBody><a:bodyPr wrap="square" rtlCol="0" anchor="t"/><a:lstStyle/><a:p><a:pPr algn="ctr"/><a:r><a:rPr lang="en-US" sz="20" b="0" i="0" u="none"><a:solidFill><a:srgbClr val="00D2FF"/></a:solidFill></a:rPr><a:t>Ask 问答模式</a:t></a:r></a:p></p:txBody></p:sp><p:sp><p:nvSpPr><p:cNvPr id="8" name="TextBox"/><p:cNvSpPr/><p:nvPr/></p:nvSpPr><p:spPr><a:xfrm><a:off x="1047750" y="2476500"/><a:ext cx="12192000" cy="266700"/></a:xfrm><p:txBody><a:bodyPr wrap="square" rtlCol="0" anchor="t"/><a:lstStyle/><a:p><a:pPr algn="l"/><a:r><a:rPr lang="en-US" sz="15" b="0" i="0" u="none"><a:solidFill><a:srgbClr val="B0C4D8"/></a:solidFill></a:rPr><a:t>快速提问，获取即时回答</a:t></a:r></a:p></p:txBody></p:sp><p:sp><p:nvSpPr><p:cNvPr id="9" name="TextBox"/><p:cNvSpPr/><p:nvPr/></p:nvSpPr><p:spPr><a:xfrm><a:off x="1047750" y="2762250"/><a:ext cx="12192000" cy="266700"/></a:xfrm><p:txBody><a:bodyPr wrap="square" rtlCol="0" anchor="t"/><a:lstStyle/><a:p><a:pPr algn="l"/><a:r><a:rPr lang="en-US" sz="15" b="0" i="0" u="none"><a:solidFill><a:srgbClr val="B0C4D8"/></a:solidFill></a:rPr><a:t>基于工作区知识库的语义搜索</a:t></a:r></a:p></p:txBody></p:sp><p:sp><p:nvSpPr><p:cNvPr id="10" name="TextBox"/><p:cNvSpPr/><p:nvPr/></p:nvSpPr><p:spPr><a:xfrm><a:off x="1047750" y="3048000"/><a:ext cx="12192000" cy="266700"/></a:xfrm><p:txBody><a:bodyPr wrap="square" rtlCol="0" anchor="t"/><a:lstStyle/><a:p><a:pPr algn="l"/><a:r><a:rPr lang="en-US" sz="15" b="0" i="0" u="none"><a:solidFill><a:srgbClr val="B0C4D8"/></a:solidFill></a:rPr><a:t>上下文感知的精准回复</a:t></a:r></a:p></p:txBody></p:sp><p:sp><p:nvSpPr><p:cNvPr id="11" name="TextBox"/><p:cNvSpPr/><p:nvPr/></p:nvSpPr><p:spPr><a:xfrm><a:off x="1047750" y="3333750"/><a:ext cx="12192000" cy="266700"/></a:xfrm><p:txBody><a:bodyPr wrap="square" rtlCol="0" anchor="t"/><a:lstStyle/><a:p><a:pPr algn="l"/><a:r><a:rPr lang="en-US" sz="15" b="0" i="0" u="none"><a:solidFill><a:srgbClr val="B0C4D8"/></a:solidFill></a:rPr><a:t>支持流式输出，实时生成</a:t></a:r></a:p></p:txBody></p:sp><p:sp><p:nvSpPr><p:cNvPr id="12" name="Shape"/><p:cNvSpPr/><p:nvPr/></p:nvSpPr><p:spPr><a:xfrm><a:off x="4476750" y="1714500"/><a:ext cx="3238500" cy="1905000"/></a:xfrm><a:prstGeom prst="roundRect"><a:avLst><a:gd name="adj" fmla="val 2941"/></a:avLst></a:prstGeom><a:solidFill><a:srgbClr val="3A7BD5"><a:alpha val="100000"/></a:srgbClr></a:solidFill><a:ln w="19050"><a:solidFill><a:srgbClr val="3A7BD5"><a:alpha val="100000"/></a:srgbClr></a:solidFill></a:ln></p:sp><p:sp><p:nvSpPr><p:cNvPr id="13" name="Shape"/><p:cNvSpPr/><p:nvPr/></p:nvSpPr><p:spPr><a:xfrm><a:off x="4476750" y="1714500"/><a:ext cx="3238500" cy="419100"/></a:xfrm><a:prstGeom prst="roundRect"><a:avLst><a:gd name="adj" fmla="val 2941"/></a:avLst></a:prstGeom><a:solidFill><a:srgbClr val="3A7BD5"><a:alpha val="100000"/></a:srgbClr></a:solidFill><a:ln><a:noFill/></a:ln></p:sp><p:sp><p:nvSpPr><p:cNvPr id="14" name="TextBox"/><p:cNvSpPr/><p:nvPr/></p:nvSpPr><p:spPr><a:xfrm><a:off x="0" y="1981200"/><a:ext cx="12192000" cy="355600"/></a:xfrm><p:txBody><a:bodyPr wrap="square" rtlCol="0" anchor="t"/><a:lstStyle/><a:p><a:pPr algn="ctr"/><a:r><a:rPr lang="en-US" sz="20" b="0" i="0" u="none"><a:solidFill><a:srgbClr val="5A9BE5"/></a:solidFill></a:rPr><a:t>Plan 计划模式</a:t></a:r></a:p></p:txBody></p:sp><p:sp><p:nvSpPr><p:cNvPr id="15" name="TextBox"/><p:cNvSpPr/><p:nvPr/></p:nvSpPr><p:spPr><a:xfrm><a:off x="4762500" y="2476500"/><a:ext cx="12192000" cy="266700"/></a:xfrm><p:txBody><a:bodyPr wrap="square" rtlCol="0" anchor="t"/><a:lstStyle/><a:p><a:pPr algn="l"/><a:r><a:rPr lang="en-US" sz="15" b="0" i="0" u="none"><a:solidFill><a:srgbClr val="B0C4D8"/></a:solidFill></a:rPr><a:t>AI 分析需求，制定执行计划</a:t></a:r></a:p></p:txBody></p:sp><p:sp><p:nvSpPr><p:cNvPr id="16" name="TextBox"/><p:cNvSpPr/><p:nvPr/></p:nvSpPr><p:spPr><a:xfrm><a:off x="4762500" y="2762250"/><a:ext cx="12192000" cy="266700"/></a:xfrm><p:txBody><a:bodyPr wrap="square" rtlCol="0" anchor="t"/><a:lstStyle/><a:p><a:pPr algn="l"/><a:r><a:rPr lang="en-US" sz="15" b="0" i="0" u="none"><a:solidFill><a:srgbClr val="B0C4D8"/></a:solidFill></a:rPr><a:t>展示文件修改清单与风险评估</a:t></a:r></a:p></p:txBody></p:sp><p:sp><p:nvSpPr><p:cNvPr id="17" name="TextBox"/><p:cNvSpPr/><p:nvPr/></p:nvSpPr><p:spPr><a:xfrm><a:off x="4762500" y="3048000"/><a:ext cx="12192000" cy="266700"/></a:xfrm><p:txBody><a:bodyPr wrap="square" rtlCol="0" anchor="t"/><a:lstStyle/><a:p><a:pPr algn="l"/><a:r><a:rPr lang="en-US" sz="15" b="0" i="0" u="none"><a:solidFill><a:srgbClr val="B0C4D8"/></a:solidFill></a:rPr><a:t>用户确认后执行</a:t></a:r></a:p></p:txBody></p:sp><p:sp><p:nvSpPr><p:cNvPr id="18" name="TextBox"/><p:cNvSpPr/><p:nvPr/></p:nvSpPr><p:spPr><a:xfrm><a:off x="4762500" y="3333750"/><a:ext cx="12192000" cy="266700"/></a:xfrm><p:txBody><a:bodyPr wrap="square" rtlCol="0" anchor="t"/><a:lstStyle/><a:p><a:pPr algn="l"/><a:r><a:rPr lang="en-US" sz="15" b="0" i="0" u="none"><a:solidFill><a:srgbClr val="B0C4D8"/></a:solidFill></a:rPr><a:t>安全可控的操作流程</a:t></a:r></a:p></p:txBody></p:sp><p:sp><p:nvSpPr><p:cNvPr id="19" name="Shape"/><p:cNvSpPr/><p:nvPr/></p:nvSpPr><p:spPr><a:xfrm><a:off x="8191500" y="1714500"/><a:ext cx="3238500" cy="1905000"/></a:xfrm><a:prstGeom prst="roundRect"><a:avLst><a:gd name="adj" fmla="val 2941"/></a:avLst></a:prstGeom><a:solidFill><a:srgbClr val="64C896"><a:alpha val="100000"/></a:srgbClr></a:solidFill><a:ln w="19050"><a:solidFill><a:srgbClr val="64C896"><a:alpha val="100000"/></a:srgbClr></a:solidFill></a:ln></p:sp><p:sp><p:nvSpPr><p:cNvPr id="20" name="Shape"/><p:cNvSpPr/><p:nvPr/></p:nvSpPr><p:spPr><a:xfrm><a:off x="8191500" y="1714500"/><a:ext cx="3238500" cy="419100"/></a:xfrm><a:prstGeom prst="roundRect"><a:avLst><a:gd name="adj" fmla="val 2941"/></a:avLst></a:prstGeom><a:solidFill><a:srgbClr val="64C896"><a:alpha val="100000"/></a:srgbClr></a:solidFill><a:ln><a:noFill/></a:ln></p:sp><p:sp><p:nvSpPr><p:cNvPr id="21" name="TextBox"/><p:cNvSpPr/><p:nvPr/></p:nvSpPr><p:spPr><a:xfrm><a:off x="3714750" y="1981200"/><a:ext cx="12192000" cy="355600"/></a:xfrm><p:txBody><a:bodyPr wrap="square" rtlCol="0" anchor="t"/><a:lstStyle/><a:p><a:pPr algn="ctr"/><a:r><a:rPr lang="en-US" sz="20" b="0" i="0" u="none"><a:solidFill><a:srgbClr val="6CC8A0"/></a:solidFill></a:rPr><a:t>Agent 智能体模式</a:t></a:r></a:p></p:txBody></p:sp><p:sp><p:nvSpPr><p:cNvPr id="22" name="TextBox"/><p:cNvSpPr/><p:nvPr/></p:nvSpPr><p:spPr><a:xfrm><a:off x="8477250" y="2476500"/><a:ext cx="12192000" cy="266700"/></a:xfrm><p:txBody><a:bodyPr wrap="square" rtlCol="0" anchor="t"/><a:lstStyle/><a:p><a:pPr algn="l"/><a:r><a:rPr lang="en-US" sz="15" b="0" i="0" u="none"><a:solidFill><a:srgbClr val="B0C4D8"/></a:solidFill></a:rPr><a:t>全自动执行，自主调用工具</a:t></a:r></a:p></p:txBody></p:sp><p:sp><p:nvSpPr><p:cNvPr id="23" name="TextBox"/><p:cNvSpPr/><p:nvPr/></p:nvSpPr><p:spPr><a:xfrm><a:off x="8477250" y="2762250"/><a:ext cx="12192000" cy="266700"/></a:xfrm><p:txBody><a:bodyPr wrap="square" rtlCol="0" anchor="t"/><a:lstStyle/><a:p><a:pPr algn="l"/><a:r><a:rPr lang="en-US" sz="15" b="0" i="0" u="none"><a:solidFill><a:srgbClr val="B0C4D8"/></a:solidFill></a:rPr><a:t>子代理协作系统（多专家协同）</a:t></a:r></a:p></p:txBody></p:sp><p:sp><p:nvSpPr><p:cNvPr id="24" name="TextBox"/><p:cNvSpPr/><p:nvPr/></p:nvSpPr><p:spPr><a:xfrm><a:off x="8477250" y="3048000"/><a:ext cx="12192000" cy="266700"/></a:xfrm><p:txBody><a:bodyPr wrap="square" rtlCol="0" anchor="t"/><a:lstStyle/><a:p><a:pPr algn="l"/><a:r><a:rPr lang="en-US" sz="15" b="0" i="0" u="none"><a:solidFill><a:srgbClr val="B0C4D8"/></a:solidFill></a:rPr><a:t>文件读写、代码编辑、Office 操作</a:t></a:r></a:p></p:txBody></p:sp><p:sp><p:nvSpPr><p:cNvPr id="25" name="TextBox"/><p:cNvSpPr/><p:nvPr/></p:nvSpPr><p:spPr><a:xfrm><a:off x="8477250" y="3333750"/><a:ext cx="12192000" cy="266700"/></a:xfrm><p:txBody><a:bodyPr wrap="square" rtlCol="0" anchor="t"/><a:lstStyle/><a:p><a:pPr algn="l"/><a:r><a:rPr lang="en-US" sz="15" b="0" i="0" u="none"><a:solidFill><a:srgbClr val="B0C4D8"/></a:solidFill></a:rPr><a:t>端到端任务自动化</a:t></a:r></a:p></p:txBody></p:sp><p:sp><p:nvSpPr><p:cNvPr id="26" name="TextBox"/><p:cNvSpPr/><p:nvPr/></p:nvSpPr><p:spPr><a:xfrm><a:off x="762000" y="4286250"/><a:ext cx="12192000" cy="391160"/></a:xfrm><p:txBody><a:bodyPr wrap="square" rtlCol="0" anchor="t"/><a:lstStyle/><a:p><a:pPr algn="l"/><a:r><a:rPr lang="en-US" sz="22" b="0" i="0" u="none"><a:solidFill><a:srgbClr val="FFFFFF"/></a:solidFill></a:rPr><a:t>子代理专家体系</a:t></a:r></a:p></p:txBody></p:sp><p:sp><p:nvSpPr><p:cNvPr id="27" name="Shape"/><p:cNvSpPr/><p:nvPr/></p:nvSpPr><p:spPr><a:xfrm><a:off x="762000" y="4572000"/><a:ext cx="1714500" cy="533400"/></a:xfrm><a:prstGeom prst="roundRect"><a:avLst><a:gd name="adj" fmla="val 3333"/></a:avLst></a:prstGeom><a:solidFill><a:srgbClr val="00D2FF"><a:alpha val="100000"/></a:srgbClr></a:solidFill><a:ln w="12700"><a:solidFill><a:srgbClr val="00D2FF"><a:alpha val="100000"/></a:srgbClr></a:solidFill></a:ln></p:sp><p:sp><p:nvSpPr><p:cNvPr id="28" name="TextBox"/><p:cNvSpPr/><p:nvPr/></p:nvSpPr><p:spPr><a:xfrm><a:off x="-4476750" y="4857750"/><a:ext cx="12192000" cy="248920"/></a:xfrm><p:txBody><a:bodyPr wrap="square" rtlCol="0" anchor="t"/><a:lstStyle/><a:p><a:pPr algn="ctr"/><a:r><a:rPr lang="en-US" sz="14" b="0" i="0" u="none"><a:solidFill><a:srgbClr val="00D2FF"/></a:solidFill></a:rPr><a:t>Word 专家</a:t></a:r></a:p></p:txBody></p:sp><p:sp><p:nvSpPr><p:cNvPr id="29" name="TextBox"/><p:cNvSpPr/><p:nvPr/></p:nvSpPr><p:spPr><a:xfrm><a:off x="-4476750" y="5019675"/><a:ext cx="12192000" cy="195580"/></a:xfrm><p:txBody><a:bodyPr wrap="square" rtlCol="0" anchor="t"/><a:lstStyle/><a:p><a:pPr algn="ctr"/><a:r><a:rPr lang="en-US" sz="11" b="0" i="0" u="none"><a:solidFill><a:srgbClr val="7090B0"/></a:solidFill></a:rPr><a:t>文档创建/编辑</a:t></a:r></a:p></p:txBody></p:sp><p:sp><p:nvSpPr><p:cNvPr id="30" name="Shape"/><p:cNvSpPr/><p:nvPr/></p:nvSpPr><p:spPr><a:xfrm><a:off x="2667000" y="4572000"/><a:ext cx="1714500" cy="533400"/></a:xfrm><a:prstGeom prst="roundRect"><a:avLst><a:gd name="adj" fmla="val 3333"/></a:avLst></a:prstGeom><a:solidFill><a:srgbClr val="3A7BD5"><a:alpha val="100000"/></a:srgbClr></a:solidFill><a:ln w="12700"><a:solidFill><a:srgbClr val="3A7BD5"><a:alpha val="100000"/></a:srgbClr></a:solidFill></a:ln></p:sp><p:sp><p:nvSpPr><p:cNvPr id="31" name="TextBox"/><p:cNvSpPr/><p:nvPr/></p:nvSpPr><p:spPr><a:xfrm><a:off x="-2571750" y="4857750"/><a:ext cx="12192000" cy="248920"/></a:xfrm><p:txBody><a:bodyPr wrap="square" rtlCol="0" anchor="t"/><a:lstStyle/><a:p><a:pPr algn="ctr"/><a:r><a:rPr lang="en-US" sz="14" b="0" i="0" u="none"><a:solidFill><a:srgbClr val="5A9BE5"/></a:solidFill></a:rPr><a:t>Excel 专家</a:t></a:r></a:p></p:txBody></p:sp><p:sp><p:nvSpPr><p:cNvPr id="32" name="TextBox"/><p:cNvSpPr/><p:nvPr/></p:nvSpPr><p:spPr><a:xfrm><a:off x="-2571750" y="5019675"/><a:ext cx="12192000" cy="195580"/></a:xfrm><p:txBody><a:bodyPr wrap="square" rtlCol="0" anchor="t"/><a:lstStyle/><a:p><a:pPr algn="ctr"/><a:r><a:rPr lang="en-US" sz="11" b="0" i="0" u="none"><a:solidFill><a:srgbClr val="7090B0"/></a:solidFill></a:rPr><a:t>表格处理/分析</a:t></a:r></a:p></p:txBody></p:sp><p:sp><p:nvSpPr><p:cNvPr id="33" name="Shape"/><p:cNvSpPr/><p:nvPr/></p:nvSpPr><p:spPr><a:xfrm><a:off x="4572000" y="4572000"/><a:ext cx="1714500" cy="533400"/></a:xfrm><a:prstGeom prst="roundRect"><a:avLst><a:gd name="adj" fmla="val 3333"/></a:avLst></a:prstGeom><a:solidFill><a:srgbClr val="64C896"><a:alpha val="100000"/></a:srgbClr></a:solidFill><a:ln w="12700"><a:solidFill><a:srgbClr val="64C896"><a:alpha val="100000"/></a:srgbClr></a:solidFill></a:ln></p:sp><p:sp><p:nvSpPr><p:cNvPr id="34" name="TextBox"/><p:cNvSpPr/><p:nvPr/></p:nvSpPr><p:spPr><a:xfrm><a:off x="-666750" y="4857750"/><a:ext cx="12192000" cy="248920"/></a:xfrm><p:txBody><a:bodyPr wrap="square" rtlCol="0" anchor="t"/><a:lstStyle/><a:p><a:pPr algn="ctr"/><a:r><a:rPr lang="en-US" sz="14" b="0" i="0" u="none"><a:solidFill><a:srgbClr val="6CC8A0"/></a:solidFill></a:rPr><a:t>代码专家</a:t></a:r></a:p></p:txBody></p:sp><p:sp><p:nvSpPr><p:cNvPr id="35" name="TextBox"/><p:cNvSpPr/><p:nvPr/></p:nvSpPr><p:spPr><a:xfrm><a:off x="-666750" y="5019675"/><a:ext cx="12192000" cy="195580"/></a:xfrm><p:txBody><a:bodyPr wrap="square" rtlCol="0" anchor="t"/><a:lstStyle/><a:p><a:pPr algn="ctr"/><a:r><a:rPr lang="en-US" sz="11" b="0" i="0" u="none"><a:solidFill><a:srgbClr val="7090B0"/></a:solidFill></a:rPr><a:t>代码审查/编写</a:t></a:r></a:p></p:txBody></p:sp><p:sp><p:nvSpPr><p:cNvPr id="36" name="Shape"/><p:cNvSpPr/><p:nvPr/></p:nvSpPr><p:spPr><a:xfrm><a:off x="6477000" y="4572000"/><a:ext cx="1714500" cy="533400"/></a:xfrm><a:prstGeom prst="roundRect"><a:avLst><a:gd name="adj" fmla="val 3333"/></a:avLst></a:prstGeom><a:solidFill><a:srgbClr val="C89650"><a:alpha val="100000"/></a:srgbClr></a:solidFill><a:ln w="12700"><a:solidFill><a:srgbClr val="C89650"><a:alpha val="100000"/></a:srgbClr></a:solidFill></a:ln></p:sp><p:sp><p:nvSpPr><p:cNvPr id="37" name="TextBox"/><p:cNvSpPr/><p:nvPr/></p:nvSpPr><p:spPr><a:xfrm><a:off x="1238250" y="4857750"/><a:ext cx="12192000" cy="248920"/></a:xfrm><p:txBody><a:bodyPr wrap="square" rtlCol="0" anchor="t"/><a:lstStyle/><a:p><a:pPr algn="ctr"/><a:r><a:rPr lang="en-US" sz="14" b="0" i="0" u="none"><a:solidFill><a:srgbClr val="C8A050"/></a:solidFill></a:rPr><a:t>Markdown 专家</a:t></a:r></a:p></p:txBody></p:sp><p:sp><p:nvSpPr><p:cNvPr id="38" name="TextBox"/><p:cNvSpPr/><p:nvPr/></p:nvSpPr><p:spPr><a:xfrm><a:off x="1238250" y="5019675"/><a:ext cx="12192000" cy="195580"/></a:xfrm><p:txBody><a:bodyPr wrap="square" rtlCol="0" anchor="t"/><a:lstStyle/><a:p><a:pPr algn="ctr"/><a:r><a:rPr lang="en-US" sz="11" b="0" i="0" u="none"><a:solidFill><a:srgbClr val="7090B0"/></a:solidFill></a:rPr><a:t>长文撰写/排版</a:t></a:r></a:p></p:txBody></p:sp><p:sp><p:nvSpPr><p:cNvPr id="39" name="Shape"/><p:cNvSpPr/><p:nvPr/></p:nvSpPr><p:spPr><a:xfrm><a:off x="8382000" y="4572000"/><a:ext cx="1714500" cy="533400"/></a:xfrm><a:prstGeom prst="roundRect"><a:avLst><a:gd name="adj" fmla="val 3333"/></a:avLst></a:prstGeom><a:solidFill><a:srgbClr val="C86478"><a:alpha val="100000"/></a:srgbClr></a:solidFill><a:ln w="12700"><a:solidFill><a:srgbClr val="C86478"><a:alpha val="100000"/></a:srgbClr></a:solidFill></a:ln></p:sp><p:sp><p:nvSpPr><p:cNvPr id="40" name="TextBox"/><p:cNvSpPr/><p:nvPr/></p:nvSpPr><p:spPr><a:xfrm><a:off x="3143250" y="4857750"/><a:ext cx="12192000" cy="248920"/></a:xfrm><p:txBody><a:bodyPr wrap="square" rtlCol="0" anchor="t"/><a:lstStyle/><a:p><a:pPr algn="ctr"/><a:r><a:rPr lang="en-US" sz="14" b="0" i="0" u="none"><a:solidFill><a:srgbClr val="C86478"/></a:solidFill></a:rPr><a:t>流程图专家</a:t></a:r></a:p></p:txBody></p:sp><p:sp><p:nvSpPr><p:cNvPr id="41" name="TextBox"/><p:cNvSpPr/><p:nvPr/></p:nvSpPr><p:spPr><a:xfrm><a:off x="3143250" y="5019675"/><a:ext cx="12192000" cy="195580"/></a:xfrm><p:txBody><a:bodyPr wrap="square" rtlCol="0" anchor="t"/><a:lstStyle/><a:p><a:pPr algn="ctr"/><a:r><a:rPr lang="en-US" sz="11" b="0" i="0" u="none"><a:solidFill><a:srgbClr val="7090B0"/></a:solidFill></a:rPr><a:t>图表渲染</a:t></a:r></a:p></p:txBody></p:sp><p:sp><p:nvSpPr><p:cNvPr id="42" name="Shape"/><p:cNvSpPr/><p:nvPr/></p:nvSpPr><p:spPr><a:xfrm><a:off x="762000" y="5334000"/><a:ext cx="1714500" cy="533400"/></a:xfrm><a:prstGeom prst="roundRect"><a:avLst><a:gd name="adj" fmla="val 3333"/></a:avLst></a:prstGeom><a:solidFill><a:srgbClr val="9664C8"><a:alpha val="100000"/></a:srgbClr></a:solidFill><a:ln w="12700"><a:solidFill><a:srgbClr val="9664C8"><a:alpha val="100000"/></a:srgbClr></a:solidFill></a:ln></p:sp><p:sp><p:nvSpPr><p:cNvPr id="43" name="TextBox"/><p:cNvSpPr/><p:nvPr/></p:nvSpPr><p:spPr><a:xfrm><a:off x="-4476750" y="5619750"/><a:ext cx="12192000" cy="248920"/></a:xfrm><p:txBody><a:bodyPr wrap="square" rtlCol="0" anchor="t"/><a:lstStyle/><a:p><a:pPr algn="ctr"/><a:r><a:rPr lang="en-US" sz="14" b="0" i="0" u="none"><a:solidFill><a:srgbClr val="9664C8"/></a:solidFill></a:rPr><a:t>批量编辑专家</a:t></a:r></a:p></p:txBody></p:sp><p:sp><p:nvSpPr><p:cNvPr id="44" name="TextBox"/><p:cNvSpPr/><p:nvPr/></p:nvSpPr><p:spPr><a:xfrm><a:off x="-4476750" y="5781675"/><a:ext cx="12192000" cy="195580"/></a:xfrm><p:txBody><a:bodyPr wrap="square" rtlCol="0" anchor="t"/><a:lstStyle/><a:p><a:pPr algn="ctr"/><a:r><a:rPr lang="en-US" sz="11" b="0" i="0" u="none"><a:solidFill><a:srgbClr val="7090B0"/></a:solidFill></a:rPr><a:t>批量文件操作</a:t></a:r></a:p></p:txBody></p:sp><p:sp><p:nvSpPr><p:cNvPr id="45" name="Shape"/><p:cNvSpPr/><p:nvPr/></p:nvSpPr><p:spPr><a:xfrm><a:off x="2667000" y="5334000"/><a:ext cx="1714500" cy="533400"/></a:xfrm><a:prstGeom prst="roundRect"><a:avLst><a:gd name="adj" fmla="val 3333"/></a:avLst></a:prstGeom><a:solidFill><a:srgbClr val="B48250"><a:alpha val="100000"/></a:srgbClr></a:solidFill><a:ln w="12700"><a:solidFill><a:srgbClr val="B48250"><a:alpha val="100000"/></a:srgbClr></a:solidFill></a:ln></p:sp><p:sp><p:nvSpPr><p:cNvPr id="46" name="TextBox"/><p:cNvSpPr/><p:nvPr/></p:nvSpPr><p:spPr><a:xfrm><a:off x="-2571750" y="5619750"/><a:ext cx="12192000" cy="248920"/></a:xfrm><p:txBody><a:bodyPr wrap="square" rtlCol="0" anchor="t"/><a:lstStyle/><a:p><a:pPr algn="ctr"/><a:r><a:rPr lang="en-US" sz="14" b="0" i="0" u="none"><a:solidFill><a:srgbClr val="B48250"/></a:solidFill></a:rPr><a:t>研究专家</a:t></a:r></a:p></p:txBody></p:sp><p:sp><p:nvSpPr><p:cNvPr id="47" name="TextBox"/><p:cNvSpPr/><p:nvPr/></p:nvSpPr><p:spPr><a:xfrm><a:off x="-2571750" y="5781675"/><a:ext cx="12192000" cy="195580"/></a:xfrm><p:txBody><a:bodyPr wrap="square" rtlCol="0" anchor="t"/><a:lstStyle/><a:p><a:pPr algn="ctr"/><a:r><a:rPr lang="en-US" sz="11" b="0" i="0" u="none"><a:solidFill><a:srgbClr val="7090B0"/></a:solidFill></a:rPr><a:t>搜索与信息整理</a:t></a:r></a:p></p:txBody></p:sp></p:spTree></p:cSld></p:sld>
 </file>
 
-<file path=ppt/slides/slide4.xml><?xml version="1.0" encoding="UTF-8" standalone="yes"?><p:sld xmlns:a="http://schemas.openxmlformats.org/drawingml/2006/main" xmlns:r="http://schemas.openxmlformats.org/officeDocument/2006/relationships" xmlns:p="http://schemas.openxmlformats.org/presentationml/2006/main"><p:cSld><p:spTree><p:nvGrpSpPr><p:cNvPr id="1" name=""/><p:cNvGrpSpPr/><p:nvPr/></p:nvGrpSpPr><p:grpSpPr><a:xfrm><a:off x="0" y="0"/><a:ext cx="0" cy="0"/><a:chOff x="0" y="0"/><a:chExt cx="0" cy="0"/></a:xfrm></p:grpSpPr><p:sp><p:nvSpPr><p:cNvPr id="100" name="Shape"/><p:cNvSpPr/><p:nvPr/></p:nvSpPr><p:spPr><a:xfrm><a:off x="0" y="0"/><a:ext cx="12192000" cy="6858000"/></a:xfrm><a:prstGeom prst="rect"><a:avLst/></a:prstGeom><a:solidFill><a:srgbClr val="0F0F23"><a:alpha val="100000"/></a:srgbClr></a:solidFill><a:ln><a:noFill/></a:ln></p:sp><p:sp><p:nvSpPr><p:cNvPr id="100" name="TextBox"/><p:cNvSpPr/><p:nvPr/></p:nvSpPr><p:spPr><a:xfrm><a:off x="762000" y="1047750"/><a:ext cx="12192000" cy="640080"/></a:xfrm><p:txBody><a:bodyPr wrap="square" rtlCol="0" anchor="t"/><a:lstStyle/><a:p><a:pPr algn="l"/><a:r><a:rPr lang="en-US" sz="36" b="0" i="0" u="none"><a:solidFill><a:srgbClr val="FFFFFF"/></a:solidFill></a:rPr><a:t>多格式编辑器</a:t></a:r></a:p></p:txBody></p:sp><p:cxnSp><p:nvCxnSpPr><p:cNvPr id="100" name="Line"/><p:cNvCxnSpPr/><p:nvPr/></p:nvCxnSpPr><p:spPr><a:xfrm><a:off x="762000" y="1190625"/><a:ext cx="4000500" cy="0"/></a:xfrm><a:prstGeom prst="line"><a:avLst/></a:prstGeom><a:ln w="12700"><a:solidFill><a:srgbClr val="FFFFFF"/></a:solidFill></a:ln></p:spPr></p:cxnSp><p:sp><p:nvSpPr><p:cNvPr id="100" name="Shape"/><p:cNvSpPr/><p:nvPr/></p:nvSpPr><p:spPr><a:xfrm><a:off x="762000" y="1619250"/><a:ext cx="3333750" cy="1333500"/></a:xfrm><a:prstGeom prst="roundRect"><a:avLst><a:gd name="adj" fmla="val 2857"/></a:avLst></a:prstGeom><a:solidFill><a:srgbClr val="00D2FF"><a:alpha val="100000"/></a:srgbClr></a:solidFill><a:ln w="12700"><a:solidFill><a:srgbClr val="00D2FF"><a:alpha val="100000"/></a:srgbClr></a:solidFill></a:ln></p:sp><p:sp><p:nvSpPr><p:cNvPr id="100" name="TextBox"/><p:cNvSpPr/><p:nvPr/></p:nvSpPr><p:spPr><a:xfrm><a:off x="1047750" y="2000250"/><a:ext cx="12192000" cy="320040"/></a:xfrm><p:txBody><a:bodyPr wrap="square" rtlCol="0" anchor="t"/><a:lstStyle/><a:p><a:pPr algn="l"/><a:r><a:rPr lang="en-US" sz="18" b="0" i="0" u="none"><a:solidFill><a:srgbClr val="00D2FF"/></a:solidFill></a:rPr><a:t>Markdown</a:t></a:r></a:p></p:txBody></p:sp><p:sp><p:nvSpPr><p:cNvPr id="100" name="TextBox"/><p:cNvSpPr/><p:nvPr/></p:nvSpPr><p:spPr><a:xfrm><a:off x="1047750" y="2238375"/><a:ext cx="12192000" cy="248920"/></a:xfrm><p:txBody><a:bodyPr wrap="square" rtlCol="0" anchor="t"/><a:lstStyle/><a:p><a:pPr algn="l"/><a:r><a:rPr lang="en-US" sz="14" b="0" i="0" u="none"><a:solidFill><a:srgbClr val="B0C4D8"/></a:solidFill></a:rPr><a:t>所见即所得的 Markdown 编辑</a:t></a:r></a:p></p:txBody></p:sp><p:sp><p:nvSpPr><p:cNvPr id="100" name="TextBox"/><p:cNvSpPr/><p:nvPr/></p:nvSpPr><p:spPr><a:xfrm><a:off x="1047750" y="2457450"/><a:ext cx="12192000" cy="248920"/></a:xfrm><p:txBody><a:bodyPr wrap="square" rtlCol="0" anchor="t"/><a:lstStyle/><a:p><a:pPr algn="l"/><a:r><a:rPr lang="en-US" sz="14" b="0" i="0" u="none"><a:solidFill><a:srgbClr val="B0C4D8"/></a:solidFill></a:rPr><a:t>实时预览 · 扩展语法（GFM）</a:t></a:r></a:p></p:txBody></p:sp><p:sp><p:nvSpPr><p:cNvPr id="100" name="TextBox"/><p:cNvSpPr/><p:nvPr/></p:nvSpPr><p:spPr><a:xfrm><a:off x="1047750" y="2676525"/><a:ext cx="12192000" cy="248920"/></a:xfrm><p:txBody><a:bodyPr wrap="square" rtlCol="0" anchor="t"/><a:lstStyle/><a:p><a:pPr algn="l"/><a:r><a:rPr lang="en-US" sz="14" b="0" i="0" u="none"><a:solidFill><a:srgbClr val="B0C4D8"/></a:solidFill></a:rPr><a:t>代码高亮 · 数学公式</a:t></a:r></a:p></p:txBody></p:sp><p:sp><p:nvSpPr><p:cNvPr id="100" name="Shape"/><p:cNvSpPr/><p:nvPr/></p:nvSpPr><p:spPr><a:xfrm><a:off x="4429125" y="1619250"/><a:ext cx="3333750" cy="1333500"/></a:xfrm><a:prstGeom prst="roundRect"><a:avLst><a:gd name="adj" fmla="val 2857"/></a:avLst></a:prstGeom><a:solidFill><a:srgbClr val="3A7BD5"><a:alpha val="100000"/></a:srgbClr></a:solidFill><a:ln w="12700"><a:solidFill><a:srgbClr val="3A7BD5"><a:alpha val="100000"/></a:srgbClr></a:solidFill></a:ln></p:sp><p:sp><p:nvSpPr><p:cNvPr id="100" name="TextBox"/><p:cNvSpPr/><p:nvPr/></p:nvSpPr><p:spPr><a:xfrm><a:off x="4714875" y="2000250"/><a:ext cx="12192000" cy="320040"/></a:xfrm><p:txBody><a:bodyPr wrap="square" rtlCol="0" anchor="t"/><a:lstStyle/><a:p><a:pPr algn="l"/><a:r><a:rPr lang="en-US" sz="18" b="0" i="0" u="none"><a:solidFill><a:srgbClr val="5A9BE5"/></a:solidFill></a:rPr><a:t>Word 文档</a:t></a:r></a:p></p:txBody></p:sp><p:sp><p:nvSpPr><p:cNvPr id="100" name="TextBox"/><p:cNvSpPr/><p:nvPr/></p:nvSpPr><p:spPr><a:xfrm><a:off x="4714875" y="2238375"/><a:ext cx="12192000" cy="248920"/></a:xfrm><p:txBody><a:bodyPr wrap="square" rtlCol="0" anchor="t"/><a:lstStyle/><a:p><a:pPr algn="l"/><a:r><a:rPr lang="en-US" sz="14" b="0" i="0" u="none"><a:solidFill><a:srgbClr val="B0C4D8"/></a:solidFill></a:rPr><a:t>基于 ProseMirror 的富文本编辑</a:t></a:r></a:p></p:txBody></p:sp><p:sp><p:nvSpPr><p:cNvPr id="100" name="TextBox"/><p:cNvSpPr/><p:nvPr/></p:nvSpPr><p:spPr><a:xfrm><a:off x="4714875" y="2457450"/><a:ext cx="12192000" cy="248920"/></a:xfrm><p:txBody><a:bodyPr wrap="square" rtlCol="0" anchor="t"/><a:lstStyle/><a:p><a:pPr algn="l"/><a:r><a:rPr lang="en-US" sz="14" b="0" i="0" u="none"><a:solidFill><a:srgbClr val="B0C4D8"/></a:solidFill></a:rPr><a:t>完整样式支持 · 段落/表格</a:t></a:r></a:p></p:txBody></p:sp><p:sp><p:nvSpPr><p:cNvPr id="100" name="TextBox"/><p:cNvSpPr/><p:nvPr/></p:nvSpPr><p:spPr><a:xfrm><a:off x="4714875" y="2676525"/><a:ext cx="12192000" cy="248920"/></a:xfrm><p:txBody><a:bodyPr wrap="square" rtlCol="0" anchor="t"/><a:lstStyle/><a:p><a:pPr algn="l"/><a:r><a:rPr lang="en-US" sz="14" b="0" i="0" u="none"><a:solidFill><a:srgbClr val="B0C4D8"/></a:solidFill></a:rPr><a:t>页眉页脚 · 多节布局</a:t></a:r></a:p></p:txBody></p:sp><p:sp><p:nvSpPr><p:cNvPr id="100" name="Shape"/><p:cNvSpPr/><p:nvPr/></p:nvSpPr><p:spPr><a:xfrm><a:off x="8096250" y="1619250"/><a:ext cx="3333750" cy="1333500"/></a:xfrm><a:prstGeom prst="roundRect"><a:avLst><a:gd name="adj" fmla="val 2857"/></a:avLst></a:prstGeom><a:solidFill><a:srgbClr val="64C896"><a:alpha val="100000"/></a:srgbClr></a:solidFill><a:ln w="12700"><a:solidFill><a:srgbClr val="64C896"><a:alpha val="100000"/></a:srgbClr></a:solidFill></a:ln></p:sp><p:sp><p:nvSpPr><p:cNvPr id="100" name="TextBox"/><p:cNvSpPr/><p:nvPr/></p:nvSpPr><p:spPr><a:xfrm><a:off x="8382000" y="2000250"/><a:ext cx="12192000" cy="320040"/></a:xfrm><p:txBody><a:bodyPr wrap="square" rtlCol="0" anchor="t"/><a:lstStyle/><a:p><a:pPr algn="l"/><a:r><a:rPr lang="en-US" sz="18" b="0" i="0" u="none"><a:solidFill><a:srgbClr val="6CC8A0"/></a:solidFill></a:rPr><a:t>Excel 电子表格</a:t></a:r></a:p></p:txBody></p:sp><p:sp><p:nvSpPr><p:cNvPr id="100" name="TextBox"/><p:cNvSpPr/><p:nvPr/></p:nvSpPr><p:spPr><a:xfrm><a:off x="8382000" y="2238375"/><a:ext cx="12192000" cy="248920"/></a:xfrm><p:txBody><a:bodyPr wrap="square" rtlCol="0" anchor="t"/><a:lstStyle/><a:p><a:pPr algn="l"/><a:r><a:rPr lang="en-US" sz="14" b="0" i="0" u="none"><a:solidFill><a:srgbClr val="B0C4D8"/></a:solidFill></a:rPr><a:t>基于 FortuneSheet 的表格引擎</a:t></a:r></a:p></p:txBody></p:sp><p:sp><p:nvSpPr><p:cNvPr id="100" name="TextBox"/><p:cNvSpPr/><p:nvPr/></p:nvSpPr><p:spPr><a:xfrm><a:off x="8382000" y="2457450"/><a:ext cx="12192000" cy="248920"/></a:xfrm><p:txBody><a:bodyPr wrap="square" rtlCol="0" anchor="t"/><a:lstStyle/><a:p><a:pPr algn="l"/><a:r><a:rPr lang="en-US" sz="14" b="0" i="0" u="none"><a:solidFill><a:srgbClr val="B0C4D8"/></a:solidFill></a:rPr><a:t>公式支持 · 数据操作</a:t></a:r></a:p></p:txBody></p:sp><p:sp><p:nvSpPr><p:cNvPr id="100" name="TextBox"/><p:cNvSpPr/><p:nvPr/></p:nvSpPr><p:spPr><a:xfrm><a:off x="8382000" y="2676525"/><a:ext cx="12192000" cy="248920"/></a:xfrm><p:txBody><a:bodyPr wrap="square" rtlCol="0" anchor="t"/><a:lstStyle/><a:p><a:pPr algn="l"/><a:r><a:rPr lang="en-US" sz="14" b="0" i="0" u="none"><a:solidFill><a:srgbClr val="B0C4D8"/></a:solidFill></a:rPr><a:t>合并单元格 · 样式设置</a:t></a:r></a:p></p:txBody></p:sp><p:sp><p:nvSpPr><p:cNvPr id="100" name="Shape"/><p:cNvSpPr/><p:nvPr/></p:nvSpPr><p:spPr><a:xfrm><a:off x="762000" y="3238500"/><a:ext cx="3333750" cy="1333500"/></a:xfrm><a:prstGeom prst="roundRect"><a:avLst><a:gd name="adj" fmla="val 2857"/></a:avLst></a:prstGeom><a:solidFill><a:srgbClr val="C89650"><a:alpha val="100000"/></a:srgbClr></a:solidFill><a:ln w="12700"><a:solidFill><a:srgbClr val="C89650"><a:alpha val="100000"/></a:srgbClr></a:solidFill></a:ln></p:sp><p:sp><p:nvSpPr><p:cNvPr id="100" name="TextBox"/><p:cNvSpPr/><p:nvPr/></p:nvSpPr><p:spPr><a:xfrm><a:off x="1047750" y="3619500"/><a:ext cx="12192000" cy="320040"/></a:xfrm><p:txBody><a:bodyPr wrap="square" rtlCol="0" anchor="t"/><a:lstStyle/><a:p><a:pPr algn="l"/><a:r><a:rPr lang="en-US" sz="18" b="0" i="0" u="none"><a:solidFill><a:srgbClr val="C8A050"/></a:solidFill></a:rPr><a:t>代码编辑器</a:t></a:r></a:p></p:txBody></p:sp><p:sp><p:nvSpPr><p:cNvPr id="100" name="TextBox"/><p:cNvSpPr/><p:nvPr/></p:nvSpPr><p:spPr><a:xfrm><a:off x="1047750" y="3857625"/><a:ext cx="12192000" cy="248920"/></a:xfrm><p:txBody><a:bodyPr wrap="square" rtlCol="0" anchor="t"/><a:lstStyle/><a:p><a:pPr algn="l"/><a:r><a:rPr lang="en-US" sz="14" b="0" i="0" u="none"><a:solidFill><a:srgbClr val="B0C4D8"/></a:solidFill></a:rPr><a:t>基于 CodeMirror</a:t></a:r></a:p></p:txBody></p:sp><p:sp><p:nvSpPr><p:cNvPr id="100" name="TextBox"/><p:cNvSpPr/><p:nvPr/></p:nvSpPr><p:spPr><a:xfrm><a:off x="1047750" y="4076700"/><a:ext cx="12192000" cy="248920"/></a:xfrm><p:txBody><a:bodyPr wrap="square" rtlCol="0" anchor="t"/><a:lstStyle/><a:p><a:pPr algn="l"/><a:r><a:rPr lang="en-US" sz="14" b="0" i="0" u="none"><a:solidFill><a:srgbClr val="B0C4D8"/></a:solidFill></a:rPr><a:t>20+ 编程语言语法高亮</a:t></a:r></a:p></p:txBody></p:sp><p:sp><p:nvSpPr><p:cNvPr id="100" name="TextBox"/><p:cNvSpPr/><p:nvPr/></p:nvSpPr><p:spPr><a:xfrm><a:off x="1047750" y="4295775"/><a:ext cx="12192000" cy="248920"/></a:xfrm><p:txBody><a:bodyPr wrap="square" rtlCol="0" anchor="t"/><a:lstStyle/><a:p><a:pPr algn="l"/><a:r><a:rPr lang="en-US" sz="14" b="0" i="0" u="none"><a:solidFill><a:srgbClr val="B0C4D8"/></a:solidFill></a:rPr><a:t>代码补全 · 搜索替换</a:t></a:r></a:p></p:txBody></p:sp><p:sp><p:nvSpPr><p:cNvPr id="100" name="Shape"/><p:cNvSpPr/><p:nvPr/></p:nvSpPr><p:spPr><a:xfrm><a:off x="4429125" y="3238500"/><a:ext cx="3333750" cy="1333500"/></a:xfrm><a:prstGeom prst="roundRect"><a:avLst><a:gd name="adj" fmla="val 2857"/></a:avLst></a:prstGeom><a:solidFill><a:srgbClr val="9664C8"><a:alpha val="100000"/></a:srgbClr></a:solidFill><a:ln w="12700"><a:solidFill><a:srgbClr val="9664C8"><a:alpha val="100000"/></a:srgbClr></a:solidFill></a:ln></p:sp><p:sp><p:nvSpPr><p:cNvPr id="100" name="TextBox"/><p:cNvSpPr/><p:nvPr/></p:nvSpPr><p:spPr><a:xfrm><a:off x="4714875" y="3619500"/><a:ext cx="12192000" cy="320040"/></a:xfrm><p:txBody><a:bodyPr wrap="square" rtlCol="0" anchor="t"/><a:lstStyle/><a:p><a:pPr algn="l"/><a:r><a:rPr lang="en-US" sz="18" b="0" i="0" u="none"><a:solidFill><a:srgbClr val="9664C8"/></a:solidFill></a:rPr><a:t>PDF 阅读器</a:t></a:r></a:p></p:txBody></p:sp><p:sp><p:nvSpPr><p:cNvPr id="100" name="TextBox"/><p:cNvSpPr/><p:nvPr/></p:nvSpPr><p:spPr><a:xfrm><a:off x="4714875" y="3857625"/><a:ext cx="12192000" cy="248920"/></a:xfrm><p:txBody><a:bodyPr wrap="square" rtlCol="0" anchor="t"/><a:lstStyle/><a:p><a:pPr algn="l"/><a:r><a:rPr lang="en-US" sz="14" b="0" i="0" u="none"><a:solidFill><a:srgbClr val="B0C4D8"/></a:solidFill></a:rPr><a:t>内嵌 pdf.js 引擎</a:t></a:r></a:p></p:txBody></p:sp><p:sp><p:nvSpPr><p:cNvPr id="100" name="TextBox"/><p:cNvSpPr/><p:nvPr/></p:nvSpPr><p:spPr><a:xfrm><a:off x="4714875" y="4076700"/><a:ext cx="12192000" cy="248920"/></a:xfrm><p:txBody><a:bodyPr wrap="square" rtlCol="0" anchor="t"/><a:lstStyle/><a:p><a:pPr algn="l"/><a:r><a:rPr lang="en-US" sz="14" b="0" i="0" u="none"><a:solidFill><a:srgbClr val="B0C4D8"/></a:solidFill></a:rPr><a:t>流畅翻页 · 文本选择</a:t></a:r></a:p></p:txBody></p:sp><p:sp><p:nvSpPr><p:cNvPr id="100" name="TextBox"/><p:cNvSpPr/><p:nvPr/></p:nvSpPr><p:spPr><a:xfrm><a:off x="4714875" y="4295775"/><a:ext cx="12192000" cy="248920"/></a:xfrm><p:txBody><a:bodyPr wrap="square" rtlCol="0" anchor="t"/><a:lstStyle/><a:p><a:pPr algn="l"/><a:r><a:rPr lang="en-US" sz="14" b="0" i="0" u="none"><a:solidFill><a:srgbClr val="B0C4D8"/></a:solidFill></a:rPr><a:t>支持大文件分页加载</a:t></a:r></a:p></p:txBody></p:sp><p:sp><p:nvSpPr><p:cNvPr id="100" name="Shape"/><p:cNvSpPr/><p:nvPr/></p:nvSpPr><p:spPr><a:xfrm><a:off x="8096250" y="3238500"/><a:ext cx="3333750" cy="1333500"/></a:xfrm><a:prstGeom prst="roundRect"><a:avLst><a:gd name="adj" fmla="val 2857"/></a:avLst></a:prstGeom><a:solidFill><a:srgbClr val="C85078"><a:alpha val="100000"/></a:srgbClr></a:solidFill><a:ln w="12700"><a:solidFill><a:srgbClr val="C85078"><a:alpha val="100000"/></a:srgbClr></a:solidFill></a:ln></p:sp><p:sp><p:nvSpPr><p:cNvPr id="100" name="TextBox"/><p:cNvSpPr/><p:nvPr/></p:nvSpPr><p:spPr><a:xfrm><a:off x="8382000" y="3619500"/><a:ext cx="12192000" cy="320040"/></a:xfrm><p:txBody><a:bodyPr wrap="square" rtlCol="0" anchor="t"/><a:lstStyle/><a:p><a:pPr algn="l"/><a:r><a:rPr lang="en-US" sz="18" b="0" i="0" u="none"><a:solidFill><a:srgbClr val="C85078"/></a:solidFill></a:rPr><a:t>SVG 图形编辑器</a:t></a:r></a:p></p:txBody></p:sp><p:sp><p:nvSpPr><p:cNvPr id="100" name="TextBox"/><p:cNvSpPr/><p:nvPr/></p:nvSpPr><p:spPr><a:xfrm><a:off x="8382000" y="3857625"/><a:ext cx="12192000" cy="248920"/></a:xfrm><p:txBody><a:bodyPr wrap="square" rtlCol="0" anchor="t"/><a:lstStyle/><a:p><a:pPr algn="l"/><a:r><a:rPr lang="en-US" sz="14" b="0" i="0" u="none"><a:solidFill><a:srgbClr val="B0C4D8"/></a:solidFill></a:rPr><a:t>原生 SVG 编辑能力</a:t></a:r></a:p></p:txBody></p:sp><p:sp><p:nvSpPr><p:cNvPr id="100" name="TextBox"/><p:cNvSpPr/><p:nvPr/></p:nvSpPr><p:spPr><a:xfrm><a:off x="8382000" y="4076700"/><a:ext cx="12192000" cy="248920"/></a:xfrm><p:txBody><a:bodyPr wrap="square" rtlCol="0" anchor="t"/><a:lstStyle/><a:p><a:pPr algn="l"/><a:r><a:rPr lang="en-US" sz="14" b="0" i="0" u="none"><a:solidFill><a:srgbClr val="B0C4D8"/></a:solidFill></a:rPr><a:t>矢量图形 · 缩放不失真</a:t></a:r></a:p></p:txBody></p:sp><p:sp><p:nvSpPr><p:cNvPr id="100" name="TextBox"/><p:cNvSpPr/><p:nvPr/></p:nvSpPr><p:spPr><a:xfrm><a:off x="8382000" y="4295775"/><a:ext cx="12192000" cy="248920"/></a:xfrm><p:txBody><a:bodyPr wrap="square" rtlCol="0" anchor="t"/><a:lstStyle/><a:p><a:pPr algn="l"/><a:r><a:rPr lang="en-US" sz="14" b="0" i="0" u="none"><a:solidFill><a:srgbClr val="B0C4D8"/></a:solidFill></a:rPr><a:t>可导出为标准 SVG</a:t></a:r></a:p></p:txBody></p:sp><p:sp><p:nvSpPr><p:cNvPr id="100" name="Shape"/><p:cNvSpPr/><p:nvPr/></p:nvSpPr><p:spPr><a:xfrm><a:off x="762000" y="5048250"/><a:ext cx="10668000" cy="476250"/></a:xfrm><a:prstGeom prst="roundRect"><a:avLst><a:gd name="adj" fmla="val 714"/></a:avLst></a:prstGeom><a:solidFill><a:srgbClr val="FFFFFF"><a:alpha val="100000"/></a:srgbClr></a:solidFill><a:ln w="12700"><a:solidFill><a:srgbClr val="FFFFFF"><a:alpha val="100000"/></a:srgbClr></a:solidFill></a:ln></p:sp><p:sp><p:nvSpPr><p:cNvPr id="100" name="TextBox"/><p:cNvSpPr/><p:nvPr/></p:nvSpPr><p:spPr><a:xfrm><a:off x="0" y="5334000"/><a:ext cx="12192000" cy="266700"/></a:xfrm><p:txBody><a:bodyPr wrap="square" rtlCol="0" anchor="t"/><a:lstStyle/><a:p><a:pPr algn="ctr"/><a:r><a:rPr lang="en-US" sz="15" b="0" i="0" u="none"><a:solidFill><a:srgbClr val="7090B0"/></a:solidFill></a:rPr><a:t>统一的标签页管理 · 拖拽排序 · 智能文件类型识别 · 自动保存</a:t></a:r></a:p></p:txBody></p:sp></p:spTree></p:cSld></p:sld>
+<file path=ppt/slides/slide4.xml><?xml version="1.0" encoding="UTF-8" standalone="yes"?><p:sld xmlns:a="http://schemas.openxmlformats.org/drawingml/2006/main" xmlns:r="http://schemas.openxmlformats.org/officeDocument/2006/relationships" xmlns:p="http://schemas.openxmlformats.org/presentationml/2006/main"><p:cSld><p:spTree><p:nvGrpSpPr><p:cNvPr id="1" name=""/><p:cNvGrpSpPr/><p:nvPr/></p:nvGrpSpPr><p:grpSpPr><a:xfrm><a:off x="0" y="0"/><a:ext cx="0" cy="0"/><a:chOff x="0" y="0"/><a:chExt cx="0" cy="0"/></a:xfrm></p:grpSpPr><p:sp><p:nvSpPr><p:cNvPr id="2" name="Shape"/><p:cNvSpPr/><p:nvPr/></p:nvSpPr><p:spPr><a:xfrm><a:off x="0" y="0"/><a:ext cx="12192000" cy="6858000"/></a:xfrm><a:prstGeom prst="rect"><a:avLst/></a:prstGeom><a:solidFill><a:srgbClr val="0F0F23"><a:alpha val="100000"/></a:srgbClr></a:solidFill><a:ln><a:noFill/></a:ln></p:sp><p:sp><p:nvSpPr><p:cNvPr id="3" name="TextBox"/><p:cNvSpPr/><p:nvPr/></p:nvSpPr><p:spPr><a:xfrm><a:off x="762000" y="1047750"/><a:ext cx="12192000" cy="640080"/></a:xfrm><p:txBody><a:bodyPr wrap="square" rtlCol="0" anchor="t"/><a:lstStyle/><a:p><a:pPr algn="l"/><a:r><a:rPr lang="en-US" sz="36" b="0" i="0" u="none"><a:solidFill><a:srgbClr val="FFFFFF"/></a:solidFill></a:rPr><a:t>多格式编辑器</a:t></a:r></a:p></p:txBody></p:sp><p:cxnSp><p:nvCxnSpPr><p:cNvPr id="4" name="Line"/><p:cNvCxnSpPr/><p:nvPr/></p:nvCxnSpPr><p:spPr><a:xfrm><a:off x="762000" y="1190625"/><a:ext cx="4000500" cy="0"/></a:xfrm><a:prstGeom prst="line"><a:avLst/></a:prstGeom><a:ln w="12700"><a:solidFill><a:srgbClr val="FFFFFF"/></a:solidFill></a:ln></p:spPr></p:cxnSp><p:sp><p:nvSpPr><p:cNvPr id="5" name="Shape"/><p:cNvSpPr/><p:nvPr/></p:nvSpPr><p:spPr><a:xfrm><a:off x="762000" y="1619250"/><a:ext cx="3333750" cy="1333500"/></a:xfrm><a:prstGeom prst="roundRect"><a:avLst><a:gd name="adj" fmla="val 2857"/></a:avLst></a:prstGeom><a:solidFill><a:srgbClr val="00D2FF"><a:alpha val="100000"/></a:srgbClr></a:solidFill><a:ln w="12700"><a:solidFill><a:srgbClr val="00D2FF"><a:alpha val="100000"/></a:srgbClr></a:solidFill></a:ln></p:sp><p:sp><p:nvSpPr><p:cNvPr id="6" name="TextBox"/><p:cNvSpPr/><p:nvPr/></p:nvSpPr><p:spPr><a:xfrm><a:off x="1047750" y="2000250"/><a:ext cx="12192000" cy="320040"/></a:xfrm><p:txBody><a:bodyPr wrap="square" rtlCol="0" anchor="t"/><a:lstStyle/><a:p><a:pPr algn="l"/><a:r><a:rPr lang="en-US" sz="18" b="0" i="0" u="none"><a:solidFill><a:srgbClr val="00D2FF"/></a:solidFill></a:rPr><a:t>Markdown</a:t></a:r></a:p></p:txBody></p:sp><p:sp><p:nvSpPr><p:cNvPr id="7" name="TextBox"/><p:cNvSpPr/><p:nvPr/></p:nvSpPr><p:spPr><a:xfrm><a:off x="1047750" y="2238375"/><a:ext cx="12192000" cy="248920"/></a:xfrm><p:txBody><a:bodyPr wrap="square" rtlCol="0" anchor="t"/><a:lstStyle/><a:p><a:pPr algn="l"/><a:r><a:rPr lang="en-US" sz="14" b="0" i="0" u="none"><a:solidFill><a:srgbClr val="B0C4D8"/></a:solidFill></a:rPr><a:t>所见即所得的 Markdown 编辑</a:t></a:r></a:p></p:txBody></p:sp><p:sp><p:nvSpPr><p:cNvPr id="8" name="TextBox"/><p:cNvSpPr/><p:nvPr/></p:nvSpPr><p:spPr><a:xfrm><a:off x="1047750" y="2457450"/><a:ext cx="12192000" cy="248920"/></a:xfrm><p:txBody><a:bodyPr wrap="square" rtlCol="0" anchor="t"/><a:lstStyle/><a:p><a:pPr algn="l"/><a:r><a:rPr lang="en-US" sz="14" b="0" i="0" u="none"><a:solidFill><a:srgbClr val="B0C4D8"/></a:solidFill></a:rPr><a:t>实时预览 · 扩展语法（GFM）</a:t></a:r></a:p></p:txBody></p:sp><p:sp><p:nvSpPr><p:cNvPr id="9" name="TextBox"/><p:cNvSpPr/><p:nvPr/></p:nvSpPr><p:spPr><a:xfrm><a:off x="1047750" y="2676525"/><a:ext cx="12192000" cy="248920"/></a:xfrm><p:txBody><a:bodyPr wrap="square" rtlCol="0" anchor="t"/><a:lstStyle/><a:p><a:pPr algn="l"/><a:r><a:rPr lang="en-US" sz="14" b="0" i="0" u="none"><a:solidFill><a:srgbClr val="B0C4D8"/></a:solidFill></a:rPr><a:t>代码高亮 · 数学公式</a:t></a:r></a:p></p:txBody></p:sp><p:sp><p:nvSpPr><p:cNvPr id="10" name="Shape"/><p:cNvSpPr/><p:nvPr/></p:nvSpPr><p:spPr><a:xfrm><a:off x="4429125" y="1619250"/><a:ext cx="3333750" cy="1333500"/></a:xfrm><a:prstGeom prst="roundRect"><a:avLst><a:gd name="adj" fmla="val 2857"/></a:avLst></a:prstGeom><a:solidFill><a:srgbClr val="3A7BD5"><a:alpha val="100000"/></a:srgbClr></a:solidFill><a:ln w="12700"><a:solidFill><a:srgbClr val="3A7BD5"><a:alpha val="100000"/></a:srgbClr></a:solidFill></a:ln></p:sp><p:sp><p:nvSpPr><p:cNvPr id="11" name="TextBox"/><p:cNvSpPr/><p:nvPr/></p:nvSpPr><p:spPr><a:xfrm><a:off x="4714875" y="2000250"/><a:ext cx="12192000" cy="320040"/></a:xfrm><p:txBody><a:bodyPr wrap="square" rtlCol="0" anchor="t"/><a:lstStyle/><a:p><a:pPr algn="l"/><a:r><a:rPr lang="en-US" sz="18" b="0" i="0" u="none"><a:solidFill><a:srgbClr val="5A9BE5"/></a:solidFill></a:rPr><a:t>Word 文档</a:t></a:r></a:p></p:txBody></p:sp><p:sp><p:nvSpPr><p:cNvPr id="12" name="TextBox"/><p:cNvSpPr/><p:nvPr/></p:nvSpPr><p:spPr><a:xfrm><a:off x="4714875" y="2238375"/><a:ext cx="12192000" cy="248920"/></a:xfrm><p:txBody><a:bodyPr wrap="square" rtlCol="0" anchor="t"/><a:lstStyle/><a:p><a:pPr algn="l"/><a:r><a:rPr lang="en-US" sz="14" b="0" i="0" u="none"><a:solidFill><a:srgbClr val="B0C4D8"/></a:solidFill></a:rPr><a:t>基于 ProseMirror 的富文本编辑</a:t></a:r></a:p></p:txBody></p:sp><p:sp><p:nvSpPr><p:cNvPr id="13" name="TextBox"/><p:cNvSpPr/><p:nvPr/></p:nvSpPr><p:spPr><a:xfrm><a:off x="4714875" y="2457450"/><a:ext cx="12192000" cy="248920"/></a:xfrm><p:txBody><a:bodyPr wrap="square" rtlCol="0" anchor="t"/><a:lstStyle/><a:p><a:pPr algn="l"/><a:r><a:rPr lang="en-US" sz="14" b="0" i="0" u="none"><a:solidFill><a:srgbClr val="B0C4D8"/></a:solidFill></a:rPr><a:t>完整样式支持 · 段落/表格</a:t></a:r></a:p></p:txBody></p:sp><p:sp><p:nvSpPr><p:cNvPr id="14" name="TextBox"/><p:cNvSpPr/><p:nvPr/></p:nvSpPr><p:spPr><a:xfrm><a:off x="4714875" y="2676525"/><a:ext cx="12192000" cy="248920"/></a:xfrm><p:txBody><a:bodyPr wrap="square" rtlCol="0" anchor="t"/><a:lstStyle/><a:p><a:pPr algn="l"/><a:r><a:rPr lang="en-US" sz="14" b="0" i="0" u="none"><a:solidFill><a:srgbClr val="B0C4D8"/></a:solidFill></a:rPr><a:t>页眉页脚 · 多节布局</a:t></a:r></a:p></p:txBody></p:sp><p:sp><p:nvSpPr><p:cNvPr id="15" name="Shape"/><p:cNvSpPr/><p:nvPr/></p:nvSpPr><p:spPr><a:xfrm><a:off x="8096250" y="1619250"/><a:ext cx="3333750" cy="1333500"/></a:xfrm><a:prstGeom prst="roundRect"><a:avLst><a:gd name="adj" fmla="val 2857"/></a:avLst></a:prstGeom><a:solidFill><a:srgbClr val="64C896"><a:alpha val="100000"/></a:srgbClr></a:solidFill><a:ln w="12700"><a:solidFill><a:srgbClr val="64C896"><a:alpha val="100000"/></a:srgbClr></a:solidFill></a:ln></p:sp><p:sp><p:nvSpPr><p:cNvPr id="16" name="TextBox"/><p:cNvSpPr/><p:nvPr/></p:nvSpPr><p:spPr><a:xfrm><a:off x="8382000" y="2000250"/><a:ext cx="12192000" cy="320040"/></a:xfrm><p:txBody><a:bodyPr wrap="square" rtlCol="0" anchor="t"/><a:lstStyle/><a:p><a:pPr algn="l"/><a:r><a:rPr lang="en-US" sz="18" b="0" i="0" u="none"><a:solidFill><a:srgbClr val="6CC8A0"/></a:solidFill></a:rPr><a:t>Excel 电子表格</a:t></a:r></a:p></p:txBody></p:sp><p:sp><p:nvSpPr><p:cNvPr id="17" name="TextBox"/><p:cNvSpPr/><p:nvPr/></p:nvSpPr><p:spPr><a:xfrm><a:off x="8382000" y="2238375"/><a:ext cx="12192000" cy="248920"/></a:xfrm><p:txBody><a:bodyPr wrap="square" rtlCol="0" anchor="t"/><a:lstStyle/><a:p><a:pPr algn="l"/><a:r><a:rPr lang="en-US" sz="14" b="0" i="0" u="none"><a:solidFill><a:srgbClr val="B0C4D8"/></a:solidFill></a:rPr><a:t>基于 FortuneSheet 的表格引擎</a:t></a:r></a:p></p:txBody></p:sp><p:sp><p:nvSpPr><p:cNvPr id="18" name="TextBox"/><p:cNvSpPr/><p:nvPr/></p:nvSpPr><p:spPr><a:xfrm><a:off x="8382000" y="2457450"/><a:ext cx="12192000" cy="248920"/></a:xfrm><p:txBody><a:bodyPr wrap="square" rtlCol="0" anchor="t"/><a:lstStyle/><a:p><a:pPr algn="l"/><a:r><a:rPr lang="en-US" sz="14" b="0" i="0" u="none"><a:solidFill><a:srgbClr val="B0C4D8"/></a:solidFill></a:rPr><a:t>公式支持 · 数据操作</a:t></a:r></a:p></p:txBody></p:sp><p:sp><p:nvSpPr><p:cNvPr id="19" name="TextBox"/><p:cNvSpPr/><p:nvPr/></p:nvSpPr><p:spPr><a:xfrm><a:off x="8382000" y="2676525"/><a:ext cx="12192000" cy="248920"/></a:xfrm><p:txBody><a:bodyPr wrap="square" rtlCol="0" anchor="t"/><a:lstStyle/><a:p><a:pPr algn="l"/><a:r><a:rPr lang="en-US" sz="14" b="0" i="0" u="none"><a:solidFill><a:srgbClr val="B0C4D8"/></a:solidFill></a:rPr><a:t>合并单元格 · 样式设置</a:t></a:r></a:p></p:txBody></p:sp><p:sp><p:nvSpPr><p:cNvPr id="20" name="Shape"/><p:cNvSpPr/><p:nvPr/></p:nvSpPr><p:spPr><a:xfrm><a:off x="762000" y="3238500"/><a:ext cx="3333750" cy="1333500"/></a:xfrm><a:prstGeom prst="roundRect"><a:avLst><a:gd name="adj" fmla="val 2857"/></a:avLst></a:prstGeom><a:solidFill><a:srgbClr val="C89650"><a:alpha val="100000"/></a:srgbClr></a:solidFill><a:ln w="12700"><a:solidFill><a:srgbClr val="C89650"><a:alpha val="100000"/></a:srgbClr></a:solidFill></a:ln></p:sp><p:sp><p:nvSpPr><p:cNvPr id="21" name="TextBox"/><p:cNvSpPr/><p:nvPr/></p:nvSpPr><p:spPr><a:xfrm><a:off x="1047750" y="3619500"/><a:ext cx="12192000" cy="320040"/></a:xfrm><p:txBody><a:bodyPr wrap="square" rtlCol="0" anchor="t"/><a:lstStyle/><a:p><a:pPr algn="l"/><a:r><a:rPr lang="en-US" sz="18" b="0" i="0" u="none"><a:solidFill><a:srgbClr val="C8A050"/></a:solidFill></a:rPr><a:t>代码编辑器</a:t></a:r></a:p></p:txBody></p:sp><p:sp><p:nvSpPr><p:cNvPr id="22" name="TextBox"/><p:cNvSpPr/><p:nvPr/></p:nvSpPr><p:spPr><a:xfrm><a:off x="1047750" y="3857625"/><a:ext cx="12192000" cy="248920"/></a:xfrm><p:txBody><a:bodyPr wrap="square" rtlCol="0" anchor="t"/><a:lstStyle/><a:p><a:pPr algn="l"/><a:r><a:rPr lang="en-US" sz="14" b="0" i="0" u="none"><a:solidFill><a:srgbClr val="B0C4D8"/></a:solidFill></a:rPr><a:t>基于 CodeMirror</a:t></a:r></a:p></p:txBody></p:sp><p:sp><p:nvSpPr><p:cNvPr id="23" name="TextBox"/><p:cNvSpPr/><p:nvPr/></p:nvSpPr><p:spPr><a:xfrm><a:off x="1047750" y="4076700"/><a:ext cx="12192000" cy="248920"/></a:xfrm><p:txBody><a:bodyPr wrap="square" rtlCol="0" anchor="t"/><a:lstStyle/><a:p><a:pPr algn="l"/><a:r><a:rPr lang="en-US" sz="14" b="0" i="0" u="none"><a:solidFill><a:srgbClr val="B0C4D8"/></a:solidFill></a:rPr><a:t>20+ 编程语言语法高亮</a:t></a:r></a:p></p:txBody></p:sp><p:sp><p:nvSpPr><p:cNvPr id="24" name="TextBox"/><p:cNvSpPr/><p:nvPr/></p:nvSpPr><p:spPr><a:xfrm><a:off x="1047750" y="4295775"/><a:ext cx="12192000" cy="248920"/></a:xfrm><p:txBody><a:bodyPr wrap="square" rtlCol="0" anchor="t"/><a:lstStyle/><a:p><a:pPr algn="l"/><a:r><a:rPr lang="en-US" sz="14" b="0" i="0" u="none"><a:solidFill><a:srgbClr val="B0C4D8"/></a:solidFill></a:rPr><a:t>代码补全 · 搜索替换</a:t></a:r></a:p></p:txBody></p:sp><p:sp><p:nvSpPr><p:cNvPr id="25" name="Shape"/><p:cNvSpPr/><p:nvPr/></p:nvSpPr><p:spPr><a:xfrm><a:off x="4429125" y="3238500"/><a:ext cx="3333750" cy="1333500"/></a:xfrm><a:prstGeom prst="roundRect"><a:avLst><a:gd name="adj" fmla="val 2857"/></a:avLst></a:prstGeom><a:solidFill><a:srgbClr val="9664C8"><a:alpha val="100000"/></a:srgbClr></a:solidFill><a:ln w="12700"><a:solidFill><a:srgbClr val="9664C8"><a:alpha val="100000"/></a:srgbClr></a:solidFill></a:ln></p:sp><p:sp><p:nvSpPr><p:cNvPr id="26" name="TextBox"/><p:cNvSpPr/><p:nvPr/></p:nvSpPr><p:spPr><a:xfrm><a:off x="4714875" y="3619500"/><a:ext cx="12192000" cy="320040"/></a:xfrm><p:txBody><a:bodyPr wrap="square" rtlCol="0" anchor="t"/><a:lstStyle/><a:p><a:pPr algn="l"/><a:r><a:rPr lang="en-US" sz="18" b="0" i="0" u="none"><a:solidFill><a:srgbClr val="9664C8"/></a:solidFill></a:rPr><a:t>PDF 阅读器</a:t></a:r></a:p></p:txBody></p:sp><p:sp><p:nvSpPr><p:cNvPr id="27" name="TextBox"/><p:cNvSpPr/><p:nvPr/></p:nvSpPr><p:spPr><a:xfrm><a:off x="4714875" y="3857625"/><a:ext cx="12192000" cy="248920"/></a:xfrm><p:txBody><a:bodyPr wrap="square" rtlCol="0" anchor="t"/><a:lstStyle/><a:p><a:pPr algn="l"/><a:r><a:rPr lang="en-US" sz="14" b="0" i="0" u="none"><a:solidFill><a:srgbClr val="B0C4D8"/></a:solidFill></a:rPr><a:t>内嵌 pdf.js 引擎</a:t></a:r></a:p></p:txBody></p:sp><p:sp><p:nvSpPr><p:cNvPr id="28" name="TextBox"/><p:cNvSpPr/><p:nvPr/></p:nvSpPr><p:spPr><a:xfrm><a:off x="4714875" y="4076700"/><a:ext cx="12192000" cy="248920"/></a:xfrm><p:txBody><a:bodyPr wrap="square" rtlCol="0" anchor="t"/><a:lstStyle/><a:p><a:pPr algn="l"/><a:r><a:rPr lang="en-US" sz="14" b="0" i="0" u="none"><a:solidFill><a:srgbClr val="B0C4D8"/></a:solidFill></a:rPr><a:t>流畅翻页 · 文本选择</a:t></a:r></a:p></p:txBody></p:sp><p:sp><p:nvSpPr><p:cNvPr id="29" name="TextBox"/><p:cNvSpPr/><p:nvPr/></p:nvSpPr><p:spPr><a:xfrm><a:off x="4714875" y="4295775"/><a:ext cx="12192000" cy="248920"/></a:xfrm><p:txBody><a:bodyPr wrap="square" rtlCol="0" anchor="t"/><a:lstStyle/><a:p><a:pPr algn="l"/><a:r><a:rPr lang="en-US" sz="14" b="0" i="0" u="none"><a:solidFill><a:srgbClr val="B0C4D8"/></a:solidFill></a:rPr><a:t>支持大文件分页加载</a:t></a:r></a:p></p:txBody></p:sp><p:sp><p:nvSpPr><p:cNvPr id="30" name="Shape"/><p:cNvSpPr/><p:nvPr/></p:nvSpPr><p:spPr><a:xfrm><a:off x="8096250" y="3238500"/><a:ext cx="3333750" cy="1333500"/></a:xfrm><a:prstGeom prst="roundRect"><a:avLst><a:gd name="adj" fmla="val 2857"/></a:avLst></a:prstGeom><a:solidFill><a:srgbClr val="C85078"><a:alpha val="100000"/></a:srgbClr></a:solidFill><a:ln w="12700"><a:solidFill><a:srgbClr val="C85078"><a:alpha val="100000"/></a:srgbClr></a:solidFill></a:ln></p:sp><p:sp><p:nvSpPr><p:cNvPr id="31" name="TextBox"/><p:cNvSpPr/><p:nvPr/></p:nvSpPr><p:spPr><a:xfrm><a:off x="8382000" y="3619500"/><a:ext cx="12192000" cy="320040"/></a:xfrm><p:txBody><a:bodyPr wrap="square" rtlCol="0" anchor="t"/><a:lstStyle/><a:p><a:pPr algn="l"/><a:r><a:rPr lang="en-US" sz="18" b="0" i="0" u="none"><a:solidFill><a:srgbClr val="C85078"/></a:solidFill></a:rPr><a:t>SVG 图形编辑器</a:t></a:r></a:p></p:txBody></p:sp><p:sp><p:nvSpPr><p:cNvPr id="32" name="TextBox"/><p:cNvSpPr/><p:nvPr/></p:nvSpPr><p:spPr><a:xfrm><a:off x="8382000" y="3857625"/><a:ext cx="12192000" cy="248920"/></a:xfrm><p:txBody><a:bodyPr wrap="square" rtlCol="0" anchor="t"/><a:lstStyle/><a:p><a:pPr algn="l"/><a:r><a:rPr lang="en-US" sz="14" b="0" i="0" u="none"><a:solidFill><a:srgbClr val="B0C4D8"/></a:solidFill></a:rPr><a:t>原生 SVG 编辑能力</a:t></a:r></a:p></p:txBody></p:sp><p:sp><p:nvSpPr><p:cNvPr id="33" name="TextBox"/><p:cNvSpPr/><p:nvPr/></p:nvSpPr><p:spPr><a:xfrm><a:off x="8382000" y="4076700"/><a:ext cx="12192000" cy="248920"/></a:xfrm><p:txBody><a:bodyPr wrap="square" rtlCol="0" anchor="t"/><a:lstStyle/><a:p><a:pPr algn="l"/><a:r><a:rPr lang="en-US" sz="14" b="0" i="0" u="none"><a:solidFill><a:srgbClr val="B0C4D8"/></a:solidFill></a:rPr><a:t>矢量图形 · 缩放不失真</a:t></a:r></a:p></p:txBody></p:sp><p:sp><p:nvSpPr><p:cNvPr id="34" name="TextBox"/><p:cNvSpPr/><p:nvPr/></p:nvSpPr><p:spPr><a:xfrm><a:off x="8382000" y="4295775"/><a:ext cx="12192000" cy="248920"/></a:xfrm><p:txBody><a:bodyPr wrap="square" rtlCol="0" anchor="t"/><a:lstStyle/><a:p><a:pPr algn="l"/><a:r><a:rPr lang="en-US" sz="14" b="0" i="0" u="none"><a:solidFill><a:srgbClr val="B0C4D8"/></a:solidFill></a:rPr><a:t>可导出为标准 SVG</a:t></a:r></a:p></p:txBody></p:sp><p:sp><p:nvSpPr><p:cNvPr id="35" name="Shape"/><p:cNvSpPr/><p:nvPr/></p:nvSpPr><p:spPr><a:xfrm><a:off x="762000" y="5048250"/><a:ext cx="10668000" cy="476250"/></a:xfrm><a:prstGeom prst="roundRect"><a:avLst><a:gd name="adj" fmla="val 714"/></a:avLst></a:prstGeom><a:solidFill><a:srgbClr val="FFFFFF"><a:alpha val="100000"/></a:srgbClr></a:solidFill><a:ln w="12700"><a:solidFill><a:srgbClr val="FFFFFF"><a:alpha val="100000"/></a:srgbClr></a:solidFill></a:ln></p:sp><p:sp><p:nvSpPr><p:cNvPr id="36" name="TextBox"/><p:cNvSpPr/><p:nvPr/></p:nvSpPr><p:spPr><a:xfrm><a:off x="0" y="5334000"/><a:ext cx="12192000" cy="266700"/></a:xfrm><p:txBody><a:bodyPr wrap="square" rtlCol="0" anchor="t"/><a:lstStyle/><a:p><a:pPr algn="ctr"/><a:r><a:rPr lang="en-US" sz="15" b="0" i="0" u="none"><a:solidFill><a:srgbClr val="7090B0"/></a:solidFill></a:rPr><a:t>统一的标签页管理 · 拖拽排序 · 智能文件类型识别 · 自动保存</a:t></a:r></a:p></p:txBody></p:sp></p:spTree></p:cSld></p:sld>
 </file>
 
-<file path=ppt/slides/slide5.xml><?xml version="1.0" encoding="UTF-8" standalone="yes"?><p:sld xmlns:a="http://schemas.openxmlformats.org/drawingml/2006/main" xmlns:r="http://schemas.openxmlformats.org/officeDocument/2006/relationships" xmlns:p="http://schemas.openxmlformats.org/presentationml/2006/main"><p:cSld><p:spTree><p:nvGrpSpPr><p:cNvPr id="1" name=""/><p:cNvGrpSpPr/><p:nvPr/></p:nvGrpSpPr><p:grpSpPr><a:xfrm><a:off x="0" y="0"/><a:ext cx="0" cy="0"/><a:chOff x="0" y="0"/><a:chExt cx="0" cy="0"/></a:xfrm></p:grpSpPr><p:sp><p:nvSpPr><p:cNvPr id="100" name="Shape"/><p:cNvSpPr/><p:nvPr/></p:nvSpPr><p:spPr><a:xfrm><a:off x="0" y="0"/><a:ext cx="12192000" cy="6858000"/></a:xfrm><a:prstGeom prst="rect"><a:avLst/></a:prstGeom><a:solidFill><a:srgbClr val="0F0F23"><a:alpha val="100000"/></a:srgbClr></a:solidFill><a:ln><a:noFill/></a:ln></p:sp><p:sp><p:nvSpPr><p:cNvPr id="100" name="TextBox"/><p:cNvSpPr/><p:nvPr/></p:nvSpPr><p:spPr><a:xfrm><a:off x="762000" y="1047750"/><a:ext cx="12192000" cy="640080"/></a:xfrm><p:txBody><a:bodyPr wrap="square" rtlCol="0" anchor="t"/><a:lstStyle/><a:p><a:pPr algn="l"/><a:r><a:rPr lang="en-US" sz="36" b="0" i="0" u="none"><a:solidFill><a:srgbClr val="FFFFFF"/></a:solidFill></a:rPr><a:t>智能特性</a:t></a:r></a:p></p:txBody></p:sp><p:cxnSp><p:nvCxnSpPr><p:cNvPr id="100" name="Line"/><p:cNvCxnSpPr/><p:nvPr/></p:nvCxnSpPr><p:spPr><a:xfrm><a:off x="762000" y="1190625"/><a:ext cx="3048000" cy="0"/></a:xfrm><a:prstGeom prst="line"><a:avLst/></a:prstGeom><a:ln w="12700"><a:solidFill><a:srgbClr val="FFFFFF"/></a:solidFill></a:ln></p:spPr></p:cxnSp><p:sp><p:nvSpPr><p:cNvPr id="100" name="Shape"/><p:cNvSpPr/><p:nvPr/></p:nvSpPr><p:spPr><a:xfrm><a:off x="762000" y="1619250"/><a:ext cx="5143500" cy="2286000"/></a:xfrm><a:prstGeom prst="roundRect"><a:avLst><a:gd name="adj" fmla="val 2222"/></a:avLst></a:prstGeom><a:solidFill><a:srgbClr val="00D2FF"><a:alpha val="100000"/></a:srgbClr></a:solidFill><a:ln w="19050"><a:solidFill><a:srgbClr val="00D2FF"><a:alpha val="100000"/></a:srgbClr></a:solidFill></a:ln></p:sp><p:sp><p:nvSpPr><p:cNvPr id="100" name="Shape"/><p:cNvSpPr/><p:nvPr/></p:nvSpPr><p:spPr><a:xfrm><a:off x="762000" y="1619250"/><a:ext cx="5143500" cy="419100"/></a:xfrm><a:prstGeom prst="roundRect"><a:avLst><a:gd name="adj" fmla="val 2222"/></a:avLst></a:prstGeom><a:solidFill><a:srgbClr val="00D2FF"><a:alpha val="100000"/></a:srgbClr></a:solidFill><a:ln><a:noFill/></a:ln></p:sp><p:sp><p:nvSpPr><p:cNvPr id="100" name="TextBox"/><p:cNvSpPr/><p:nvPr/></p:nvSpPr><p:spPr><a:xfrm><a:off x="1047750" y="1885950"/><a:ext cx="12192000" cy="355600"/></a:xfrm><p:txBody><a:bodyPr wrap="square" rtlCol="0" anchor="t"/><a:lstStyle/><a:p><a:pPr algn="l"/><a:r><a:rPr lang="en-US" sz="20" b="0" i="0" u="none"><a:solidFill><a:srgbClr val="00D2FF"/></a:solidFill></a:rPr><a:t>智能差异对比</a:t></a:r></a:p></p:txBody></p:sp><p:sp><p:nvSpPr><p:cNvPr id="100" name="TextBox"/><p:cNvSpPr/><p:nvPr/></p:nvSpPr><p:spPr><a:xfrm><a:off x="1047750" y="2381250"/><a:ext cx="12192000" cy="266700"/></a:xfrm><p:txBody><a:bodyPr wrap="square" rtlCol="0" anchor="t"/><a:lstStyle/><a:p><a:pPr algn="l"/><a:r><a:rPr lang="en-US" sz="15" b="0" i="0" u="none"><a:solidFill><a:srgbClr val="C0D0E8"/></a:solidFill></a:rPr><a:t>AI 修改建议以行级差异对比呈现</a:t></a:r></a:p></p:txBody></p:sp><p:sp><p:nvSpPr><p:cNvPr id="100" name="TextBox"/><p:cNvSpPr/><p:nvPr/></p:nvSpPr><p:spPr><a:xfrm><a:off x="1047750" y="2667000"/><a:ext cx="12192000" cy="266700"/></a:xfrm><p:txBody><a:bodyPr wrap="square" rtlCol="0" anchor="t"/><a:lstStyle/><a:p><a:pPr algn="l"/><a:r><a:rPr lang="en-US" sz="15" b="0" i="0" u="none"><a:solidFill><a:srgbClr val="C0D0E8"/></a:solidFill></a:rPr><a:t>逐行高亮显示增加/删除/修改</a:t></a:r></a:p></p:txBody></p:sp><p:sp><p:nvSpPr><p:cNvPr id="100" name="TextBox"/><p:cNvSpPr/><p:nvPr/></p:nvSpPr><p:spPr><a:xfrm><a:off x="1047750" y="2952750"/><a:ext cx="12192000" cy="266700"/></a:xfrm><p:txBody><a:bodyPr wrap="square" rtlCol="0" anchor="t"/><a:lstStyle/><a:p><a:pPr algn="l"/><a:r><a:rPr lang="en-US" sz="15" b="0" i="0" u="none"><a:solidFill><a:srgbClr val="C0D0E8"/></a:solidFill></a:rPr><a:t>用户可逐条审阅、接受或拒绝</a:t></a:r></a:p></p:txBody></p:sp><p:sp><p:nvSpPr><p:cNvPr id="100" name="TextBox"/><p:cNvSpPr/><p:nvPr/></p:nvSpPr><p:spPr><a:xfrm><a:off x="1047750" y="3238500"/><a:ext cx="12192000" cy="266700"/></a:xfrm><p:txBody><a:bodyPr wrap="square" rtlCol="0" anchor="t"/><a:lstStyle/><a:p><a:pPr algn="l"/><a:r><a:rPr lang="en-US" sz="15" b="0" i="0" u="none"><a:solidFill><a:srgbClr val="C0D0E8"/></a:solidFill></a:rPr><a:t>完全掌控编辑过程，安全透明</a:t></a:r></a:p></p:txBody></p:sp><p:sp><p:nvSpPr><p:cNvPr id="100" name="TextBox"/><p:cNvSpPr/><p:nvPr/></p:nvSpPr><p:spPr><a:xfrm><a:off x="1047750" y="3571875"/><a:ext cx="12192000" cy="231140"/></a:xfrm><p:txBody><a:bodyPr wrap="square" rtlCol="0" anchor="t"/><a:lstStyle/><a:p><a:pPr algn="l"/><a:r><a:rPr lang="en-US" sz="13" b="0" i="0" u="none"><a:solidFill><a:srgbClr val="6090B0"/></a:solidFill></a:rPr><a:t>支持 Markdown、Word、代码等多种格式的差异对比</a:t></a:r></a:p></p:txBody></p:sp><p:sp><p:nvSpPr><p:cNvPr id="100" name="Shape"/><p:cNvSpPr/><p:nvPr/></p:nvSpPr><p:spPr><a:xfrm><a:off x="6286500" y="1619250"/><a:ext cx="5143500" cy="2286000"/></a:xfrm><a:prstGeom prst="roundRect"><a:avLst><a:gd name="adj" fmla="val 2222"/></a:avLst></a:prstGeom><a:solidFill><a:srgbClr val="64C896"><a:alpha val="100000"/></a:srgbClr></a:solidFill><a:ln w="19050"><a:solidFill><a:srgbClr val="64C896"><a:alpha val="100000"/></a:srgbClr></a:solidFill></a:ln></p:sp><p:sp><p:nvSpPr><p:cNvPr id="100" name="Shape"/><p:cNvSpPr/><p:nvPr/></p:nvSpPr><p:spPr><a:xfrm><a:off x="6286500" y="1619250"/><a:ext cx="5143500" cy="419100"/></a:xfrm><a:prstGeom prst="roundRect"><a:avLst><a:gd name="adj" fmla="val 2222"/></a:avLst></a:prstGeom><a:solidFill><a:srgbClr val="64C896"><a:alpha val="100000"/></a:srgbClr></a:solidFill><a:ln><a:noFill/></a:ln></p:sp><p:sp><p:nvSpPr><p:cNvPr id="100" name="TextBox"/><p:cNvSpPr/><p:nvPr/></p:nvSpPr><p:spPr><a:xfrm><a:off x="6572250" y="1885950"/><a:ext cx="12192000" cy="355600"/></a:xfrm><p:txBody><a:bodyPr wrap="square" rtlCol="0" anchor="t"/><a:lstStyle/><a:p><a:pPr algn="l"/><a:r><a:rPr lang="en-US" sz="20" b="0" i="0" u="none"><a:solidFill><a:srgbClr val="6CC8A0"/></a:solidFill></a:rPr><a:t>知识库系统</a:t></a:r></a:p></p:txBody></p:sp><p:sp><p:nvSpPr><p:cNvPr id="100" name="TextBox"/><p:cNvSpPr/><p:nvPr/></p:nvSpPr><p:spPr><a:xfrm><a:off x="6572250" y="2381250"/><a:ext cx="12192000" cy="266700"/></a:xfrm><p:txBody><a:bodyPr wrap="square" rtlCol="0" anchor="t"/><a:lstStyle/><a:p><a:pPr algn="l"/><a:r><a:rPr lang="en-US" sz="15" b="0" i="0" u="none"><a:solidFill><a:srgbClr val="C0D0E8"/></a:solidFill></a:rPr><a:t>工作区语义知识库构建</a:t></a:r></a:p></p:txBody></p:sp><p:sp><p:nvSpPr><p:cNvPr id="100" name="TextBox"/><p:cNvSpPr/><p:nvPr/></p:nvSpPr><p:spPr><a:xfrm><a:off x="6572250" y="2667000"/><a:ext cx="12192000" cy="266700"/></a:xfrm><p:txBody><a:bodyPr wrap="square" rtlCol="0" anchor="t"/><a:lstStyle/><a:p><a:pPr algn="l"/><a:r><a:rPr lang="en-US" sz="15" b="0" i="0" u="none"><a:solidFill><a:srgbClr val="C0D0E8"/></a:solidFill></a:rPr><a:t>自动文档索引与向量化</a:t></a:r></a:p></p:txBody></p:sp><p:sp><p:nvSpPr><p:cNvPr id="100" name="TextBox"/><p:cNvSpPr/><p:nvPr/></p:nvSpPr><p:spPr><a:xfrm><a:off x="6572250" y="2952750"/><a:ext cx="12192000" cy="266700"/></a:xfrm><p:txBody><a:bodyPr wrap="square" rtlCol="0" anchor="t"/><a:lstStyle/><a:p><a:pPr algn="l"/><a:r><a:rPr lang="en-US" sz="15" b="0" i="0" u="none"><a:solidFill><a:srgbClr val="C0D0E8"/></a:solidFill></a:rPr><a:t>智能语义检索（相似度搜索）</a:t></a:r></a:p></p:txBody></p:sp><p:sp><p:nvSpPr><p:cNvPr id="100" name="TextBox"/><p:cNvSpPr/><p:nvPr/></p:nvSpPr><p:spPr><a:xfrm><a:off x="6572250" y="3238500"/><a:ext cx="12192000" cy="266700"/></a:xfrm><p:txBody><a:bodyPr wrap="square" rtlCol="0" anchor="t"/><a:lstStyle/><a:p><a:pPr algn="l"/><a:r><a:rPr lang="en-US" sz="15" b="0" i="0" u="none"><a:solidFill><a:srgbClr val="C0D0E8"/></a:solidFill></a:rPr><a:t>上下文感知的 AI 问答</a:t></a:r></a:p></p:txBody></p:sp><p:sp><p:nvSpPr><p:cNvPr id="100" name="TextBox"/><p:cNvSpPr/><p:nvPr/></p:nvSpPr><p:spPr><a:xfrm><a:off x="6572250" y="3571875"/><a:ext cx="12192000" cy="231140"/></a:xfrm><p:txBody><a:bodyPr wrap="square" rtlCol="0" anchor="t"/><a:lstStyle/><a:p><a:pPr algn="l"/><a:r><a:rPr lang="en-US" sz="13" b="0" i="0" u="none"><a:solidFill><a:srgbClr val="6090B0"/></a:solidFill></a:rPr><a:t>支持多种嵌入模型：bge-small/large-zh</a:t></a:r></a:p></p:txBody></p:sp><p:sp><p:nvSpPr><p:cNvPr id="100" name="Shape"/><p:cNvSpPr/><p:nvPr/></p:nvSpPr><p:spPr><a:xfrm><a:off x="762000" y="4286250"/><a:ext cx="10668000" cy="1428750"/></a:xfrm><a:prstGeom prst="roundRect"><a:avLst><a:gd name="adj" fmla="val 1071"/></a:avLst></a:prstGeom><a:solidFill><a:srgbClr val="3A7BD5"><a:alpha val="100000"/></a:srgbClr></a:solidFill><a:ln w="19050"><a:solidFill><a:srgbClr val="3A7BD5"><a:alpha val="100000"/></a:srgbClr></a:solidFill></a:ln></p:sp><p:sp><p:nvSpPr><p:cNvPr id="100" name="Shape"/><p:cNvSpPr/><p:nvPr/></p:nvSpPr><p:spPr><a:xfrm><a:off x="762000" y="4286250"/><a:ext cx="10668000" cy="419100"/></a:xfrm><a:prstGeom prst="roundRect"><a:avLst><a:gd name="adj" fmla="val 1071"/></a:avLst></a:prstGeom><a:solidFill><a:srgbClr val="3A7BD5"><a:alpha val="100000"/></a:srgbClr></a:solidFill><a:ln><a:noFill/></a:ln></p:sp><p:sp><p:nvSpPr><p:cNvPr id="100" name="TextBox"/><p:cNvSpPr/><p:nvPr/></p:nvSpPr><p:spPr><a:xfrm><a:off x="1047750" y="4552950"/><a:ext cx="12192000" cy="355600"/></a:xfrm><p:txBody><a:bodyPr wrap="square" rtlCol="0" anchor="t"/><a:lstStyle/><a:p><a:pPr algn="l"/><a:r><a:rPr lang="en-US" sz="20" b="0" i="0" u="none"><a:solidFill><a:srgbClr val="5A9BE5"/></a:solidFill></a:rPr><a:t>云服务与模型支持</a:t></a:r></a:p></p:txBody></p:sp><p:sp><p:nvSpPr><p:cNvPr id="100" name="TextBox"/><p:cNvSpPr/><p:nvPr/></p:nvSpPr><p:spPr><a:xfrm><a:off x="1047750" y="4953000"/><a:ext cx="12192000" cy="266700"/></a:xfrm><p:txBody><a:bodyPr wrap="square" rtlCol="0" anchor="t"/><a:lstStyle/><a:p><a:pPr algn="l"/><a:r><a:rPr lang="en-US" sz="15" b="0" i="0" u="none"><a:solidFill><a:srgbClr val="C0D0E8"/></a:solidFill></a:rPr><a:t>inkuo Cloud 集成 · 多模型提供商切换（OpenAI / DeepSeek / Ollama 等）</a:t></a:r></a:p></p:txBody></p:sp><p:sp><p:nvSpPr><p:cNvPr id="100" name="TextBox"/><p:cNvSpPr/><p:nvPr/></p:nvSpPr><p:spPr><a:xfrm><a:off x="1047750" y="5238750"/><a:ext cx="12192000" cy="266700"/></a:xfrm><p:txBody><a:bodyPr wrap="square" rtlCol="0" anchor="t"/><a:lstStyle/><a:p><a:pPr algn="l"/><a:r><a:rPr lang="en-US" sz="15" b="0" i="0" u="none"><a:solidFill><a:srgbClr val="C0D0E8"/></a:solidFill></a:rPr><a:t>可配置的 API 设置 · 温度/最大 Token 参数 · 灵活的模型路由</a:t></a:r></a:p></p:txBody></p:sp></p:spTree></p:cSld></p:sld>
+<file path=ppt/slides/slide5.xml><?xml version="1.0" encoding="UTF-8" standalone="yes"?><p:sld xmlns:a="http://schemas.openxmlformats.org/drawingml/2006/main" xmlns:r="http://schemas.openxmlformats.org/officeDocument/2006/relationships" xmlns:p="http://schemas.openxmlformats.org/presentationml/2006/main"><p:cSld><p:spTree><p:nvGrpSpPr><p:cNvPr id="1" name=""/><p:cNvGrpSpPr/><p:nvPr/></p:nvGrpSpPr><p:grpSpPr><a:xfrm><a:off x="0" y="0"/><a:ext cx="0" cy="0"/><a:chOff x="0" y="0"/><a:chExt cx="0" cy="0"/></a:xfrm></p:grpSpPr><p:sp><p:nvSpPr><p:cNvPr id="2" name="Shape"/><p:cNvSpPr/><p:nvPr/></p:nvSpPr><p:spPr><a:xfrm><a:off x="0" y="0"/><a:ext cx="12192000" cy="6858000"/></a:xfrm><a:prstGeom prst="rect"><a:avLst/></a:prstGeom><a:solidFill><a:srgbClr val="0F0F23"><a:alpha val="100000"/></a:srgbClr></a:solidFill><a:ln><a:noFill/></a:ln></p:sp><p:sp><p:nvSpPr><p:cNvPr id="3" name="TextBox"/><p:cNvSpPr/><p:nvPr/></p:nvSpPr><p:spPr><a:xfrm><a:off x="762000" y="1047750"/><a:ext cx="12192000" cy="640080"/></a:xfrm><p:txBody><a:bodyPr wrap="square" rtlCol="0" anchor="t"/><a:lstStyle/><a:p><a:pPr algn="l"/><a:r><a:rPr lang="en-US" sz="36" b="0" i="0" u="none"><a:solidFill><a:srgbClr val="FFFFFF"/></a:solidFill></a:rPr><a:t>智能特性</a:t></a:r></a:p></p:txBody></p:sp><p:cxnSp><p:nvCxnSpPr><p:cNvPr id="4" name="Line"/><p:cNvCxnSpPr/><p:nvPr/></p:nvCxnSpPr><p:spPr><a:xfrm><a:off x="762000" y="1190625"/><a:ext cx="3048000" cy="0"/></a:xfrm><a:prstGeom prst="line"><a:avLst/></a:prstGeom><a:ln w="12700"><a:solidFill><a:srgbClr val="FFFFFF"/></a:solidFill></a:ln></p:spPr></p:cxnSp><p:sp><p:nvSpPr><p:cNvPr id="5" name="Shape"/><p:cNvSpPr/><p:nvPr/></p:nvSpPr><p:spPr><a:xfrm><a:off x="762000" y="1619250"/><a:ext cx="5143500" cy="2286000"/></a:xfrm><a:prstGeom prst="roundRect"><a:avLst><a:gd name="adj" fmla="val 2222"/></a:avLst></a:prstGeom><a:solidFill><a:srgbClr val="00D2FF"><a:alpha val="100000"/></a:srgbClr></a:solidFill><a:ln w="19050"><a:solidFill><a:srgbClr val="00D2FF"><a:alpha val="100000"/></a:srgbClr></a:solidFill></a:ln></p:sp><p:sp><p:nvSpPr><p:cNvPr id="6" name="Shape"/><p:cNvSpPr/><p:nvPr/></p:nvSpPr><p:spPr><a:xfrm><a:off x="762000" y="1619250"/><a:ext cx="5143500" cy="419100"/></a:xfrm><a:prstGeom prst="roundRect"><a:avLst><a:gd name="adj" fmla="val 2222"/></a:avLst></a:prstGeom><a:solidFill><a:srgbClr val="00D2FF"><a:alpha val="100000"/></a:srgbClr></a:solidFill><a:ln><a:noFill/></a:ln></p:sp><p:sp><p:nvSpPr><p:cNvPr id="7" name="TextBox"/><p:cNvSpPr/><p:nvPr/></p:nvSpPr><p:spPr><a:xfrm><a:off x="1047750" y="1885950"/><a:ext cx="12192000" cy="355600"/></a:xfrm><p:txBody><a:bodyPr wrap="square" rtlCol="0" anchor="t"/><a:lstStyle/><a:p><a:pPr algn="l"/><a:r><a:rPr lang="en-US" sz="20" b="0" i="0" u="none"><a:solidFill><a:srgbClr val="00D2FF"/></a:solidFill></a:rPr><a:t>智能差异对比</a:t></a:r></a:p></p:txBody></p:sp><p:sp><p:nvSpPr><p:cNvPr id="8" name="TextBox"/><p:cNvSpPr/><p:nvPr/></p:nvSpPr><p:spPr><a:xfrm><a:off x="1047750" y="2381250"/><a:ext cx="12192000" cy="266700"/></a:xfrm><p:txBody><a:bodyPr wrap="square" rtlCol="0" anchor="t"/><a:lstStyle/><a:p><a:pPr algn="l"/><a:r><a:rPr lang="en-US" sz="15" b="0" i="0" u="none"><a:solidFill><a:srgbClr val="C0D0E8"/></a:solidFill></a:rPr><a:t>AI 修改建议以行级差异对比呈现</a:t></a:r></a:p></p:txBody></p:sp><p:sp><p:nvSpPr><p:cNvPr id="9" name="TextBox"/><p:cNvSpPr/><p:nvPr/></p:nvSpPr><p:spPr><a:xfrm><a:off x="1047750" y="2667000"/><a:ext cx="12192000" cy="266700"/></a:xfrm><p:txBody><a:bodyPr wrap="square" rtlCol="0" anchor="t"/><a:lstStyle/><a:p><a:pPr algn="l"/><a:r><a:rPr lang="en-US" sz="15" b="0" i="0" u="none"><a:solidFill><a:srgbClr val="C0D0E8"/></a:solidFill></a:rPr><a:t>逐行高亮显示增加/删除/修改</a:t></a:r></a:p></p:txBody></p:sp><p:sp><p:nvSpPr><p:cNvPr id="10" name="TextBox"/><p:cNvSpPr/><p:nvPr/></p:nvSpPr><p:spPr><a:xfrm><a:off x="1047750" y="2952750"/><a:ext cx="12192000" cy="266700"/></a:xfrm><p:txBody><a:bodyPr wrap="square" rtlCol="0" anchor="t"/><a:lstStyle/><a:p><a:pPr algn="l"/><a:r><a:rPr lang="en-US" sz="15" b="0" i="0" u="none"><a:solidFill><a:srgbClr val="C0D0E8"/></a:solidFill></a:rPr><a:t>用户可逐条审阅、接受或拒绝</a:t></a:r></a:p></p:txBody></p:sp><p:sp><p:nvSpPr><p:cNvPr id="11" name="TextBox"/><p:cNvSpPr/><p:nvPr/></p:nvSpPr><p:spPr><a:xfrm><a:off x="1047750" y="3238500"/><a:ext cx="12192000" cy="266700"/></a:xfrm><p:txBody><a:bodyPr wrap="square" rtlCol="0" anchor="t"/><a:lstStyle/><a:p><a:pPr algn="l"/><a:r><a:rPr lang="en-US" sz="15" b="0" i="0" u="none"><a:solidFill><a:srgbClr val="C0D0E8"/></a:solidFill></a:rPr><a:t>完全掌控编辑过程，安全透明</a:t></a:r></a:p></p:txBody></p:sp><p:sp><p:nvSpPr><p:cNvPr id="12" name="TextBox"/><p:cNvSpPr/><p:nvPr/></p:nvSpPr><p:spPr><a:xfrm><a:off x="1047750" y="3571875"/><a:ext cx="12192000" cy="231140"/></a:xfrm><p:txBody><a:bodyPr wrap="square" rtlCol="0" anchor="t"/><a:lstStyle/><a:p><a:pPr algn="l"/><a:r><a:rPr lang="en-US" sz="13" b="0" i="0" u="none"><a:solidFill><a:srgbClr val="6090B0"/></a:solidFill></a:rPr><a:t>支持 Markdown、Word、代码等多种格式的差异对比</a:t></a:r></a:p></p:txBody></p:sp><p:sp><p:nvSpPr><p:cNvPr id="13" name="Shape"/><p:cNvSpPr/><p:nvPr/></p:nvSpPr><p:spPr><a:xfrm><a:off x="6286500" y="1619250"/><a:ext cx="5143500" cy="2286000"/></a:xfrm><a:prstGeom prst="roundRect"><a:avLst><a:gd name="adj" fmla="val 2222"/></a:avLst></a:prstGeom><a:solidFill><a:srgbClr val="64C896"><a:alpha val="100000"/></a:srgbClr></a:solidFill><a:ln w="19050"><a:solidFill><a:srgbClr val="64C896"><a:alpha val="100000"/></a:srgbClr></a:solidFill></a:ln></p:sp><p:sp><p:nvSpPr><p:cNvPr id="14" name="Shape"/><p:cNvSpPr/><p:nvPr/></p:nvSpPr><p:spPr><a:xfrm><a:off x="6286500" y="1619250"/><a:ext cx="5143500" cy="419100"/></a:xfrm><a:prstGeom prst="roundRect"><a:avLst><a:gd name="adj" fmla="val 2222"/></a:avLst></a:prstGeom><a:solidFill><a:srgbClr val="64C896"><a:alpha val="100000"/></a:srgbClr></a:solidFill><a:ln><a:noFill/></a:ln></p:sp><p:sp><p:nvSpPr><p:cNvPr id="15" name="TextBox"/><p:cNvSpPr/><p:nvPr/></p:nvSpPr><p:spPr><a:xfrm><a:off x="6572250" y="1885950"/><a:ext cx="12192000" cy="355600"/></a:xfrm><p:txBody><a:bodyPr wrap="square" rtlCol="0" anchor="t"/><a:lstStyle/><a:p><a:pPr algn="l"/><a:r><a:rPr lang="en-US" sz="20" b="0" i="0" u="none"><a:solidFill><a:srgbClr val="6CC8A0"/></a:solidFill></a:rPr><a:t>知识库系统</a:t></a:r></a:p></p:txBody></p:sp><p:sp><p:nvSpPr><p:cNvPr id="16" name="TextBox"/><p:cNvSpPr/><p:nvPr/></p:nvSpPr><p:spPr><a:xfrm><a:off x="6572250" y="2381250"/><a:ext cx="12192000" cy="266700"/></a:xfrm><p:txBody><a:bodyPr wrap="square" rtlCol="0" anchor="t"/><a:lstStyle/><a:p><a:pPr algn="l"/><a:r><a:rPr lang="en-US" sz="15" b="0" i="0" u="none"><a:solidFill><a:srgbClr val="C0D0E8"/></a:solidFill></a:rPr><a:t>工作区语义知识库构建</a:t></a:r></a:p></p:txBody></p:sp><p:sp><p:nvSpPr><p:cNvPr id="17" name="TextBox"/><p:cNvSpPr/><p:nvPr/></p:nvSpPr><p:spPr><a:xfrm><a:off x="6572250" y="2667000"/><a:ext cx="12192000" cy="266700"/></a:xfrm><p:txBody><a:bodyPr wrap="square" rtlCol="0" anchor="t"/><a:lstStyle/><a:p><a:pPr algn="l"/><a:r><a:rPr lang="en-US" sz="15" b="0" i="0" u="none"><a:solidFill><a:srgbClr val="C0D0E8"/></a:solidFill></a:rPr><a:t>自动文档索引与向量化</a:t></a:r></a:p></p:txBody></p:sp><p:sp><p:nvSpPr><p:cNvPr id="18" name="TextBox"/><p:cNvSpPr/><p:nvPr/></p:nvSpPr><p:spPr><a:xfrm><a:off x="6572250" y="2952750"/><a:ext cx="12192000" cy="266700"/></a:xfrm><p:txBody><a:bodyPr wrap="square" rtlCol="0" anchor="t"/><a:lstStyle/><a:p><a:pPr algn="l"/><a:r><a:rPr lang="en-US" sz="15" b="0" i="0" u="none"><a:solidFill><a:srgbClr val="C0D0E8"/></a:solidFill></a:rPr><a:t>智能语义检索（相似度搜索）</a:t></a:r></a:p></p:txBody></p:sp><p:sp><p:nvSpPr><p:cNvPr id="19" name="TextBox"/><p:cNvSpPr/><p:nvPr/></p:nvSpPr><p:spPr><a:xfrm><a:off x="6572250" y="3238500"/><a:ext cx="12192000" cy="266700"/></a:xfrm><p:txBody><a:bodyPr wrap="square" rtlCol="0" anchor="t"/><a:lstStyle/><a:p><a:pPr algn="l"/><a:r><a:rPr lang="en-US" sz="15" b="0" i="0" u="none"><a:solidFill><a:srgbClr val="C0D0E8"/></a:solidFill></a:rPr><a:t>上下文感知的 AI 问答</a:t></a:r></a:p></p:txBody></p:sp><p:sp><p:nvSpPr><p:cNvPr id="20" name="TextBox"/><p:cNvSpPr/><p:nvPr/></p:nvSpPr><p:spPr><a:xfrm><a:off x="6572250" y="3571875"/><a:ext cx="12192000" cy="231140"/></a:xfrm><p:txBody><a:bodyPr wrap="square" rtlCol="0" anchor="t"/><a:lstStyle/><a:p><a:pPr algn="l"/><a:r><a:rPr lang="en-US" sz="13" b="0" i="0" u="none"><a:solidFill><a:srgbClr val="6090B0"/></a:solidFill></a:rPr><a:t>支持多种嵌入模型：bge-small/large-zh</a:t></a:r></a:p></p:txBody></p:sp><p:sp><p:nvSpPr><p:cNvPr id="21" name="Shape"/><p:cNvSpPr/><p:nvPr/></p:nvSpPr><p:spPr><a:xfrm><a:off x="762000" y="4286250"/><a:ext cx="10668000" cy="1428750"/></a:xfrm><a:prstGeom prst="roundRect"><a:avLst><a:gd name="adj" fmla="val 1071"/></a:avLst></a:prstGeom><a:solidFill><a:srgbClr val="3A7BD5"><a:alpha val="100000"/></a:srgbClr></a:solidFill><a:ln w="19050"><a:solidFill><a:srgbClr val="3A7BD5"><a:alpha val="100000"/></a:srgbClr></a:solidFill></a:ln></p:sp><p:sp><p:nvSpPr><p:cNvPr id="22" name="Shape"/><p:cNvSpPr/><p:nvPr/></p:nvSpPr><p:spPr><a:xfrm><a:off x="762000" y="4286250"/><a:ext cx="10668000" cy="419100"/></a:xfrm><a:prstGeom prst="roundRect"><a:avLst><a:gd name="adj" fmla="val 1071"/></a:avLst></a:prstGeom><a:solidFill><a:srgbClr val="3A7BD5"><a:alpha val="100000"/></a:srgbClr></a:solidFill><a:ln><a:noFill/></a:ln></p:sp><p:sp><p:nvSpPr><p:cNvPr id="23" name="TextBox"/><p:cNvSpPr/><p:nvPr/></p:nvSpPr><p:spPr><a:xfrm><a:off x="1047750" y="4552950"/><a:ext cx="12192000" cy="355600"/></a:xfrm><p:txBody><a:bodyPr wrap="square" rtlCol="0" anchor="t"/><a:lstStyle/><a:p><a:pPr algn="l"/><a:r><a:rPr lang="en-US" sz="20" b="0" i="0" u="none"><a:solidFill><a:srgbClr val="5A9BE5"/></a:solidFill></a:rPr><a:t>云服务与模型支持</a:t></a:r></a:p></p:txBody></p:sp><p:sp><p:nvSpPr><p:cNvPr id="24" name="TextBox"/><p:cNvSpPr/><p:nvPr/></p:nvSpPr><p:spPr><a:xfrm><a:off x="1047750" y="4953000"/><a:ext cx="12192000" cy="266700"/></a:xfrm><p:txBody><a:bodyPr wrap="square" rtlCol="0" anchor="t"/><a:lstStyle/><a:p><a:pPr algn="l"/><a:r><a:rPr lang="en-US" sz="15" b="0" i="0" u="none"><a:solidFill><a:srgbClr val="C0D0E8"/></a:solidFill></a:rPr><a:t>inkuo Cloud 集成 · 多模型提供商切换（OpenAI / DeepSeek / Ollama 等）</a:t></a:r></a:p></p:txBody></p:sp><p:sp><p:nvSpPr><p:cNvPr id="25" name="TextBox"/><p:cNvSpPr/><p:nvPr/></p:nvSpPr><p:spPr><a:xfrm><a:off x="1047750" y="5238750"/><a:ext cx="12192000" cy="266700"/></a:xfrm><p:txBody><a:bodyPr wrap="square" rtlCol="0" anchor="t"/><a:lstStyle/><a:p><a:pPr algn="l"/><a:r><a:rPr lang="en-US" sz="15" b="0" i="0" u="none"><a:solidFill><a:srgbClr val="C0D0E8"/></a:solidFill></a:rPr><a:t>可配置的 API 设置 · 温度/最大 Token 参数 · 灵活的模型路由</a:t></a:r></a:p></p:txBody></p:sp></p:spTree></p:cSld></p:sld>
 </file>
 
-<file path=ppt/slides/slide6.xml><?xml version="1.0" encoding="UTF-8" standalone="yes"?><p:sld xmlns:a="http://schemas.openxmlformats.org/drawingml/2006/main" xmlns:r="http://schemas.openxmlformats.org/officeDocument/2006/relationships" xmlns:p="http://schemas.openxmlformats.org/presentationml/2006/main"><p:cSld><p:spTree><p:nvGrpSpPr><p:cNvPr id="1" name=""/><p:cNvGrpSpPr/><p:nvPr/></p:nvGrpSpPr><p:grpSpPr><a:xfrm><a:off x="0" y="0"/><a:ext cx="0" cy="0"/><a:chOff x="0" y="0"/><a:chExt cx="0" cy="0"/></a:xfrm></p:grpSpPr><p:sp><p:nvSpPr><p:cNvPr id="100" name="Shape"/><p:cNvSpPr/><p:nvPr/></p:nvSpPr><p:spPr><a:xfrm><a:off x="0" y="0"/><a:ext cx="12192000" cy="6858000"/></a:xfrm><a:prstGeom prst="rect"><a:avLst/></a:prstGeom><a:solidFill><a:srgbClr val="0F0F23"><a:alpha val="100000"/></a:srgbClr></a:solidFill><a:ln><a:noFill/></a:ln></p:sp><p:sp><p:nvSpPr><p:cNvPr id="100" name="TextBox"/><p:cNvSpPr/><p:nvPr/></p:nvSpPr><p:spPr><a:xfrm><a:off x="762000" y="1047750"/><a:ext cx="12192000" cy="640080"/></a:xfrm><p:txBody><a:bodyPr wrap="square" rtlCol="0" anchor="t"/><a:lstStyle/><a:p><a:pPr algn="l"/><a:r><a:rPr lang="en-US" sz="36" b="0" i="0" u="none"><a:solidFill><a:srgbClr val="FFFFFF"/></a:solidFill></a:rPr><a:t>技术架构</a:t></a:r></a:p></p:txBody></p:sp><p:cxnSp><p:nvCxnSpPr><p:cNvPr id="100" name="Line"/><p:cNvCxnSpPr/><p:nvPr/></p:nvCxnSpPr><p:spPr><a:xfrm><a:off x="762000" y="1190625"/><a:ext cx="3048000" cy="0"/></a:xfrm><a:prstGeom prst="line"><a:avLst/></a:prstGeom><a:ln w="12700"><a:solidFill><a:srgbClr val="FFFFFF"/></a:solidFill></a:ln></p:spPr></p:cxnSp><p:sp><p:nvSpPr><p:cNvPr id="100" name="Shape"/><p:cNvSpPr/><p:nvPr/></p:nvSpPr><p:spPr><a:xfrm><a:off x="762000" y="1619250"/><a:ext cx="10668000" cy="666750"/></a:xfrm><a:prstGeom prst="roundRect"><a:avLst><a:gd name="adj" fmla="val 714"/></a:avLst></a:prstGeom><a:solidFill><a:srgbClr val="00D2FF"><a:alpha val="100000"/></a:srgbClr></a:solidFill><a:ln w="19050"><a:solidFill><a:srgbClr val="00D2FF"><a:alpha val="100000"/></a:srgbClr></a:solidFill></a:ln></p:sp><p:sp><p:nvSpPr><p:cNvPr id="100" name="TextBox"/><p:cNvSpPr/><p:nvPr/></p:nvSpPr><p:spPr><a:xfrm><a:off x="1047750" y="2000250"/><a:ext cx="12192000" cy="284480"/></a:xfrm><p:txBody><a:bodyPr wrap="square" rtlCol="0" anchor="t"/><a:lstStyle/><a:p><a:pPr algn="l"/><a:r><a:rPr lang="en-US" sz="16" b="0" i="0" u="none"><a:solidFill><a:srgbClr val="00D2FF"/></a:solidFill></a:rPr><a:t>桌面外壳</a:t></a:r></a:p></p:txBody></p:sp><p:sp><p:nvSpPr><p:cNvPr id="100" name="TextBox"/><p:cNvSpPr/><p:nvPr/></p:nvSpPr><p:spPr><a:xfrm><a:off x="3048000" y="2000250"/><a:ext cx="12192000" cy="248920"/></a:xfrm><p:txBody><a:bodyPr wrap="square" rtlCol="0" anchor="t"/><a:lstStyle/><a:p><a:pPr algn="l"/><a:r><a:rPr lang="en-US" sz="14" b="0" i="0" u="none"><a:solidFill><a:srgbClr val="B0C4D8"/></a:solidFill></a:rPr><a:t>Tauri 2（Rust 后端）</a:t></a:r></a:p></p:txBody></p:sp><p:sp><p:nvSpPr><p:cNvPr id="100" name="TextBox"/><p:cNvSpPr/><p:nvPr/></p:nvSpPr><p:spPr><a:xfrm><a:off x="5524500" y="2000250"/><a:ext cx="12192000" cy="248920"/></a:xfrm><p:txBody><a:bodyPr wrap="square" rtlCol="0" anchor="t"/><a:lstStyle/><a:p><a:pPr algn="l"/><a:r><a:rPr lang="en-US" sz="14" b="0" i="0" u="none"><a:solidFill><a:srgbClr val="B0C4D8"/></a:solidFill></a:rPr><a:t>WebView2 渲染引擎</a:t></a:r></a:p></p:txBody></p:sp><p:sp><p:nvSpPr><p:cNvPr id="100" name="TextBox"/><p:cNvSpPr/><p:nvPr/></p:nvSpPr><p:spPr><a:xfrm><a:off x="8001000" y="2000250"/><a:ext cx="12192000" cy="248920"/></a:xfrm><p:txBody><a:bodyPr wrap="square" rtlCol="0" anchor="t"/><a:lstStyle/><a:p><a:pPr algn="l"/><a:r><a:rPr lang="en-US" sz="14" b="0" i="0" u="none"><a:solidFill><a:srgbClr val="B0C4D8"/></a:solidFill></a:rPr><a:t>原生文件系统 · 系统对话框 · 多窗口</a:t></a:r></a:p></p:txBody></p:sp><p:sp><p:nvSpPr><p:cNvPr id="100" name="TextBox"/><p:cNvSpPr/><p:nvPr/></p:nvSpPr><p:spPr><a:xfrm><a:off x="0" y="2495550"/><a:ext cx="12192000" cy="355600"/></a:xfrm><p:txBody><a:bodyPr wrap="square" rtlCol="0" anchor="t"/><a:lstStyle/><a:p><a:pPr algn="ctr"/><a:r><a:rPr lang="en-US" sz="20" b="0" i="0" u="none"><a:solidFill><a:srgbClr val="404060"/></a:solidFill></a:rPr><a:t>▼</a:t></a:r></a:p></p:txBody></p:sp><p:sp><p:nvSpPr><p:cNvPr id="100" name="Shape"/><p:cNvSpPr/><p:nvPr/></p:nvSpPr><p:spPr><a:xfrm><a:off x="762000" y="2619375"/><a:ext cx="10668000" cy="666750"/></a:xfrm><a:prstGeom prst="roundRect"><a:avLst><a:gd name="adj" fmla="val 714"/></a:avLst></a:prstGeom><a:solidFill><a:srgbClr val="3A7BD5"><a:alpha val="100000"/></a:srgbClr></a:solidFill><a:ln w="19050"><a:solidFill><a:srgbClr val="3A7BD5"><a:alpha val="100000"/></a:srgbClr></a:solidFill></a:ln></p:sp><p:sp><p:nvSpPr><p:cNvPr id="100" name="TextBox"/><p:cNvSpPr/><p:nvPr/></p:nvSpPr><p:spPr><a:xfrm><a:off x="1047750" y="3000375"/><a:ext cx="12192000" cy="284480"/></a:xfrm><p:txBody><a:bodyPr wrap="square" rtlCol="0" anchor="t"/><a:lstStyle/><a:p><a:pPr algn="l"/><a:r><a:rPr lang="en-US" sz="16" b="0" i="0" u="none"><a:solidFill><a:srgbClr val="5A9BE5"/></a:solidFill></a:rPr><a:t>前端框架</a:t></a:r></a:p></p:txBody></p:sp><p:sp><p:nvSpPr><p:cNvPr id="100" name="TextBox"/><p:cNvSpPr/><p:nvPr/></p:nvSpPr><p:spPr><a:xfrm><a:off x="3048000" y="3000375"/><a:ext cx="12192000" cy="248920"/></a:xfrm><p:txBody><a:bodyPr wrap="square" rtlCol="0" anchor="t"/><a:lstStyle/><a:p><a:pPr algn="l"/><a:r><a:rPr lang="en-US" sz="14" b="0" i="0" u="none"><a:solidFill><a:srgbClr val="B0C4D8"/></a:solidFill></a:rPr><a:t>React 19 + TypeScript</a:t></a:r></a:p></p:txBody></p:sp><p:sp><p:nvSpPr><p:cNvPr id="100" name="TextBox"/><p:cNvSpPr/><p:nvPr/></p:nvSpPr><p:spPr><a:xfrm><a:off x="5524500" y="3000375"/><a:ext cx="12192000" cy="248920"/></a:xfrm><p:txBody><a:bodyPr wrap="square" rtlCol="0" anchor="t"/><a:lstStyle/><a:p><a:pPr algn="l"/><a:r><a:rPr lang="en-US" sz="14" b="0" i="0" u="none"><a:solidFill><a:srgbClr val="B0C4D8"/></a:solidFill></a:rPr><a:t>Vite 7 构建</a:t></a:r></a:p></p:txBody></p:sp><p:sp><p:nvSpPr><p:cNvPr id="100" name="TextBox"/><p:cNvSpPr/><p:nvPr/></p:nvSpPr><p:spPr><a:xfrm><a:off x="8001000" y="3000375"/><a:ext cx="12192000" cy="248920"/></a:xfrm><p:txBody><a:bodyPr wrap="square" rtlCol="0" anchor="t"/><a:lstStyle/><a:p><a:pPr algn="l"/><a:r><a:rPr lang="en-US" sz="14" b="0" i="0" u="none"><a:solidFill><a:srgbClr val="B0C4D8"/></a:solidFill></a:rPr><a:t>Zustand 5 状态管理</a:t></a:r></a:p></p:txBody></p:sp><p:sp><p:nvSpPr><p:cNvPr id="100" name="TextBox"/><p:cNvSpPr/><p:nvPr/></p:nvSpPr><p:spPr><a:xfrm><a:off x="0" y="3495675"/><a:ext cx="12192000" cy="355600"/></a:xfrm><p:txBody><a:bodyPr wrap="square" rtlCol="0" anchor="t"/><a:lstStyle/><a:p><a:pPr algn="ctr"/><a:r><a:rPr lang="en-US" sz="20" b="0" i="0" u="none"><a:solidFill><a:srgbClr val="404060"/></a:solidFill></a:rPr><a:t>▼</a:t></a:r></a:p></p:txBody></p:sp><p:sp><p:nvSpPr><p:cNvPr id="100" name="Shape"/><p:cNvSpPr/><p:nvPr/></p:nvSpPr><p:spPr><a:xfrm><a:off x="762000" y="3619500"/><a:ext cx="10668000" cy="666750"/></a:xfrm><a:prstGeom prst="roundRect"><a:avLst><a:gd name="adj" fmla="val 714"/></a:avLst></a:prstGeom><a:solidFill><a:srgbClr val="64C896"><a:alpha val="100000"/></a:srgbClr></a:solidFill><a:ln w="19050"><a:solidFill><a:srgbClr val="64C896"><a:alpha val="100000"/></a:srgbClr></a:solidFill></a:ln></p:sp><p:sp><p:nvSpPr><p:cNvPr id="100" name="TextBox"/><p:cNvSpPr/><p:nvPr/></p:nvSpPr><p:spPr><a:xfrm><a:off x="1047750" y="4000500"/><a:ext cx="12192000" cy="284480"/></a:xfrm><p:txBody><a:bodyPr wrap="square" rtlCol="0" anchor="t"/><a:lstStyle/><a:p><a:pPr algn="l"/><a:r><a:rPr lang="en-US" sz="16" b="0" i="0" u="none"><a:solidFill><a:srgbClr val="6CC8A0"/></a:solidFill></a:rPr><a:t>编辑器核心</a:t></a:r></a:p></p:txBody></p:sp><p:sp><p:nvSpPr><p:cNvPr id="100" name="TextBox"/><p:cNvSpPr/><p:nvPr/></p:nvSpPr><p:spPr><a:xfrm><a:off x="3048000" y="4000500"/><a:ext cx="12192000" cy="248920"/></a:xfrm><p:txBody><a:bodyPr wrap="square" rtlCol="0" anchor="t"/><a:lstStyle/><a:p><a:pPr algn="l"/><a:r><a:rPr lang="en-US" sz="14" b="0" i="0" u="none"><a:solidFill><a:srgbClr val="B0C4D8"/></a:solidFill></a:rPr><a:t>ProseMirror（富文本）</a:t></a:r></a:p></p:txBody></p:sp><p:sp><p:nvSpPr><p:cNvPr id="100" name="TextBox"/><p:cNvSpPr/><p:nvPr/></p:nvSpPr><p:spPr><a:xfrm><a:off x="5524500" y="4000500"/><a:ext cx="12192000" cy="248920"/></a:xfrm><p:txBody><a:bodyPr wrap="square" rtlCol="0" anchor="t"/><a:lstStyle/><a:p><a:pPr algn="l"/><a:r><a:rPr lang="en-US" sz="14" b="0" i="0" u="none"><a:solidFill><a:srgbClr val="B0C4D8"/></a:solidFill></a:rPr><a:t>CodeMirror（代码）</a:t></a:r></a:p></p:txBody></p:sp><p:sp><p:nvSpPr><p:cNvPr id="100" name="TextBox"/><p:cNvSpPr/><p:nvPr/></p:nvSpPr><p:spPr><a:xfrm><a:off x="8001000" y="4000500"/><a:ext cx="12192000" cy="248920"/></a:xfrm><p:txBody><a:bodyPr wrap="square" rtlCol="0" anchor="t"/><a:lstStyle/><a:p><a:pPr algn="l"/><a:r><a:rPr lang="en-US" sz="14" b="0" i="0" u="none"><a:solidFill><a:srgbClr val="B0C4D8"/></a:solidFill></a:rPr><a:t>FortuneSheet（表格）</a:t></a:r></a:p></p:txBody></p:sp><p:sp><p:nvSpPr><p:cNvPr id="100" name="TextBox"/><p:cNvSpPr/><p:nvPr/></p:nvSpPr><p:spPr><a:xfrm><a:off x="0" y="4495800"/><a:ext cx="12192000" cy="355600"/></a:xfrm><p:txBody><a:bodyPr wrap="square" rtlCol="0" anchor="t"/><a:lstStyle/><a:p><a:pPr algn="ctr"/><a:r><a:rPr lang="en-US" sz="20" b="0" i="0" u="none"><a:solidFill><a:srgbClr val="404060"/></a:solidFill></a:rPr><a:t>▼</a:t></a:r></a:p></p:txBody></p:sp><p:sp><p:nvSpPr><p:cNvPr id="100" name="Shape"/><p:cNvSpPr/><p:nvPr/></p:nvSpPr><p:spPr><a:xfrm><a:off x="762000" y="4619625"/><a:ext cx="10668000" cy="666750"/></a:xfrm><a:prstGeom prst="roundRect"><a:avLst><a:gd name="adj" fmla="val 714"/></a:avLst></a:prstGeom><a:solidFill><a:srgbClr val="C89650"><a:alpha val="100000"/></a:srgbClr></a:solidFill><a:ln w="19050"><a:solidFill><a:srgbClr val="C89650"><a:alpha val="100000"/></a:srgbClr></a:solidFill></a:ln></p:sp><p:sp><p:nvSpPr><p:cNvPr id="100" name="TextBox"/><p:cNvSpPr/><p:nvPr/></p:nvSpPr><p:spPr><a:xfrm><a:off x="1047750" y="5000625"/><a:ext cx="12192000" cy="284480"/></a:xfrm><p:txBody><a:bodyPr wrap="square" rtlCol="0" anchor="t"/><a:lstStyle/><a:p><a:pPr algn="l"/><a:r><a:rPr lang="en-US" sz="16" b="0" i="0" u="none"><a:solidFill><a:srgbClr val="C8A050"/></a:solidFill></a:rPr><a:t>AI 引擎与服务</a:t></a:r></a:p></p:txBody></p:sp><p:sp><p:nvSpPr><p:cNvPr id="100" name="TextBox"/><p:cNvSpPr/><p:nvPr/></p:nvSpPr><p:spPr><a:xfrm><a:off x="3048000" y="5000625"/><a:ext cx="12192000" cy="248920"/></a:xfrm><p:txBody><a:bodyPr wrap="square" rtlCol="0" anchor="t"/><a:lstStyle/><a:p><a:pPr algn="l"/><a:r><a:rPr lang="en-US" sz="14" b="0" i="0" u="none"><a:solidFill><a:srgbClr val="B0C4D8"/></a:solidFill></a:rPr><a:t>AI Agent 智能体系统</a:t></a:r></a:p></p:txBody></p:sp><p:sp><p:nvSpPr><p:cNvPr id="100" name="TextBox"/><p:cNvSpPr/><p:nvPr/></p:nvSpPr><p:spPr><a:xfrm><a:off x="5524500" y="5000625"/><a:ext cx="12192000" cy="248920"/></a:xfrm><p:txBody><a:bodyPr wrap="square" rtlCol="0" anchor="t"/><a:lstStyle/><a:p><a:pPr algn="l"/><a:r><a:rPr lang="en-US" sz="14" b="0" i="0" u="none"><a:solidFill><a:srgbClr val="B0C4D8"/></a:solidFill></a:rPr><a:t>知识库（向量搜索）</a:t></a:r></a:p></p:txBody></p:sp><p:sp><p:nvSpPr><p:cNvPr id="100" name="TextBox"/><p:cNvSpPr/><p:nvPr/></p:nvSpPr><p:spPr><a:xfrm><a:off x="8001000" y="5000625"/><a:ext cx="12192000" cy="248920"/></a:xfrm><p:txBody><a:bodyPr wrap="square" rtlCol="0" anchor="t"/><a:lstStyle/><a:p><a:pPr algn="l"/><a:r><a:rPr lang="en-US" sz="14" b="0" i="0" u="none"><a:solidFill><a:srgbClr val="B0C4D8"/></a:solidFill></a:rPr><a:t>inkuo Cloud 云服务</a:t></a:r></a:p></p:txBody></p:sp><p:sp><p:nvSpPr><p:cNvPr id="100" name="TextBox"/><p:cNvSpPr/><p:nvPr/></p:nvSpPr><p:spPr><a:xfrm><a:off x="0" y="5495925"/><a:ext cx="12192000" cy="355600"/></a:xfrm><p:txBody><a:bodyPr wrap="square" rtlCol="0" anchor="t"/><a:lstStyle/><a:p><a:pPr algn="ctr"/><a:r><a:rPr lang="en-US" sz="20" b="0" i="0" u="none"><a:solidFill><a:srgbClr val="404060"/></a:solidFill></a:rPr><a:t>▼</a:t></a:r></a:p></p:txBody></p:sp><p:sp><p:nvSpPr><p:cNvPr id="100" name="Shape"/><p:cNvSpPr/><p:nvPr/></p:nvSpPr><p:spPr><a:xfrm><a:off x="762000" y="5619750"/><a:ext cx="10668000" cy="666750"/></a:xfrm><a:prstGeom prst="roundRect"><a:avLst><a:gd name="adj" fmla="val 714"/></a:avLst></a:prstGeom><a:solidFill><a:srgbClr val="C85078"><a:alpha val="100000"/></a:srgbClr></a:solidFill><a:ln w="19050"><a:solidFill><a:srgbClr val="C85078"><a:alpha val="100000"/></a:srgbClr></a:solidFill></a:ln></p:sp><p:sp><p:nvSpPr><p:cNvPr id="100" name="TextBox"/><p:cNvSpPr/><p:nvPr/></p:nvSpPr><p:spPr><a:xfrm><a:off x="1047750" y="6000750"/><a:ext cx="12192000" cy="284480"/></a:xfrm><p:txBody><a:bodyPr wrap="square" rtlCol="0" anchor="t"/><a:lstStyle/><a:p><a:pPr algn="l"/><a:r><a:rPr lang="en-US" sz="16" b="0" i="0" u="none"><a:solidFill><a:srgbClr val="C85078"/></a:solidFill></a:rPr><a:t>文档解析引擎</a:t></a:r></a:p></p:txBody></p:sp><p:sp><p:nvSpPr><p:cNvPr id="100" name="TextBox"/><p:cNvSpPr/><p:nvPr/></p:nvSpPr><p:spPr><a:xfrm><a:off x="3048000" y="6000750"/><a:ext cx="12192000" cy="248920"/></a:xfrm><p:txBody><a:bodyPr wrap="square" rtlCol="0" anchor="t"/><a:lstStyle/><a:p><a:pPr algn="l"/><a:r><a:rPr lang="en-US" sz="14" b="0" i="0" u="none"><a:solidFill><a:srgbClr val="B0C4D8"/></a:solidFill></a:rPr><a:t>docx-editor-core（Word）</a:t></a:r></a:p></p:txBody></p:sp><p:sp><p:nvSpPr><p:cNvPr id="100" name="TextBox"/><p:cNvSpPr/><p:nvPr/></p:nvSpPr><p:spPr><a:xfrm><a:off x="5524500" y="6000750"/><a:ext cx="12192000" cy="248920"/></a:xfrm><p:txBody><a:bodyPr wrap="square" rtlCol="0" anchor="t"/><a:lstStyle/><a:p><a:pPr algn="l"/><a:r><a:rPr lang="en-US" sz="14" b="0" i="0" u="none"><a:solidFill><a:srgbClr val="B0C4D8"/></a:solidFill></a:rPr><a:t>xlsx（Excel）</a:t></a:r></a:p></p:txBody></p:sp><p:sp><p:nvSpPr><p:cNvPr id="100" name="TextBox"/><p:cNvSpPr/><p:nvPr/></p:nvSpPr><p:spPr><a:xfrm><a:off x="8001000" y="6000750"/><a:ext cx="12192000" cy="248920"/></a:xfrm><p:txBody><a:bodyPr wrap="square" rtlCol="0" anchor="t"/><a:lstStyle/><a:p><a:pPr algn="l"/><a:r><a:rPr lang="en-US" sz="14" b="0" i="0" u="none"><a:solidFill><a:srgbClr val="B0C4D8"/></a:solidFill></a:rPr><a:t>pdfjs-dist（PDF）</a:t></a:r></a:p></p:txBody></p:sp></p:spTree></p:cSld></p:sld>
+<file path=ppt/slides/slide6.xml><?xml version="1.0" encoding="UTF-8" standalone="yes"?><p:sld xmlns:a="http://schemas.openxmlformats.org/drawingml/2006/main" xmlns:r="http://schemas.openxmlformats.org/officeDocument/2006/relationships" xmlns:p="http://schemas.openxmlformats.org/presentationml/2006/main"><p:cSld><p:spTree><p:nvGrpSpPr><p:cNvPr id="1" name=""/><p:cNvGrpSpPr/><p:nvPr/></p:nvGrpSpPr><p:grpSpPr><a:xfrm><a:off x="0" y="0"/><a:ext cx="0" cy="0"/><a:chOff x="0" y="0"/><a:chExt cx="0" cy="0"/></a:xfrm></p:grpSpPr><p:sp><p:nvSpPr><p:cNvPr id="2" name="Shape"/><p:cNvSpPr/><p:nvPr/></p:nvSpPr><p:spPr><a:xfrm><a:off x="0" y="0"/><a:ext cx="12192000" cy="6858000"/></a:xfrm><a:prstGeom prst="rect"><a:avLst/></a:prstGeom><a:solidFill><a:srgbClr val="0F0F23"><a:alpha val="100000"/></a:srgbClr></a:solidFill><a:ln><a:noFill/></a:ln></p:sp><p:sp><p:nvSpPr><p:cNvPr id="3" name="TextBox"/><p:cNvSpPr/><p:nvPr/></p:nvSpPr><p:spPr><a:xfrm><a:off x="762000" y="1047750"/><a:ext cx="12192000" cy="640080"/></a:xfrm><p:txBody><a:bodyPr wrap="square" rtlCol="0" anchor="t"/><a:lstStyle/><a:p><a:pPr algn="l"/><a:r><a:rPr lang="en-US" sz="36" b="0" i="0" u="none"><a:solidFill><a:srgbClr val="FFFFFF"/></a:solidFill></a:rPr><a:t>技术架构</a:t></a:r></a:p></p:txBody></p:sp><p:cxnSp><p:nvCxnSpPr><p:cNvPr id="4" name="Line"/><p:cNvCxnSpPr/><p:nvPr/></p:nvCxnSpPr><p:spPr><a:xfrm><a:off x="762000" y="1190625"/><a:ext cx="3048000" cy="0"/></a:xfrm><a:prstGeom prst="line"><a:avLst/></a:prstGeom><a:ln w="12700"><a:solidFill><a:srgbClr val="FFFFFF"/></a:solidFill></a:ln></p:spPr></p:cxnSp><p:sp><p:nvSpPr><p:cNvPr id="5" name="Shape"/><p:cNvSpPr/><p:nvPr/></p:nvSpPr><p:spPr><a:xfrm><a:off x="762000" y="1619250"/><a:ext cx="10668000" cy="666750"/></a:xfrm><a:prstGeom prst="roundRect"><a:avLst><a:gd name="adj" fmla="val 714"/></a:avLst></a:prstGeom><a:solidFill><a:srgbClr val="00D2FF"><a:alpha val="100000"/></a:srgbClr></a:solidFill><a:ln w="19050"><a:solidFill><a:srgbClr val="00D2FF"><a:alpha val="100000"/></a:srgbClr></a:solidFill></a:ln></p:sp><p:sp><p:nvSpPr><p:cNvPr id="6" name="TextBox"/><p:cNvSpPr/><p:nvPr/></p:nvSpPr><p:spPr><a:xfrm><a:off x="1047750" y="2000250"/><a:ext cx="12192000" cy="284480"/></a:xfrm><p:txBody><a:bodyPr wrap="square" rtlCol="0" anchor="t"/><a:lstStyle/><a:p><a:pPr algn="l"/><a:r><a:rPr lang="en-US" sz="16" b="0" i="0" u="none"><a:solidFill><a:srgbClr val="00D2FF"/></a:solidFill></a:rPr><a:t>桌面外壳</a:t></a:r></a:p></p:txBody></p:sp><p:sp><p:nvSpPr><p:cNvPr id="7" name="TextBox"/><p:cNvSpPr/><p:nvPr/></p:nvSpPr><p:spPr><a:xfrm><a:off x="3048000" y="2000250"/><a:ext cx="12192000" cy="248920"/></a:xfrm><p:txBody><a:bodyPr wrap="square" rtlCol="0" anchor="t"/><a:lstStyle/><a:p><a:pPr algn="l"/><a:r><a:rPr lang="en-US" sz="14" b="0" i="0" u="none"><a:solidFill><a:srgbClr val="B0C4D8"/></a:solidFill></a:rPr><a:t>Tauri 2（Rust 后端）</a:t></a:r></a:p></p:txBody></p:sp><p:sp><p:nvSpPr><p:cNvPr id="8" name="TextBox"/><p:cNvSpPr/><p:nvPr/></p:nvSpPr><p:spPr><a:xfrm><a:off x="5524500" y="2000250"/><a:ext cx="12192000" cy="248920"/></a:xfrm><p:txBody><a:bodyPr wrap="square" rtlCol="0" anchor="t"/><a:lstStyle/><a:p><a:pPr algn="l"/><a:r><a:rPr lang="en-US" sz="14" b="0" i="0" u="none"><a:solidFill><a:srgbClr val="B0C4D8"/></a:solidFill></a:rPr><a:t>WebView2 渲染引擎</a:t></a:r></a:p></p:txBody></p:sp><p:sp><p:nvSpPr><p:cNvPr id="9" name="TextBox"/><p:cNvSpPr/><p:nvPr/></p:nvSpPr><p:spPr><a:xfrm><a:off x="8001000" y="2000250"/><a:ext cx="12192000" cy="248920"/></a:xfrm><p:txBody><a:bodyPr wrap="square" rtlCol="0" anchor="t"/><a:lstStyle/><a:p><a:pPr algn="l"/><a:r><a:rPr lang="en-US" sz="14" b="0" i="0" u="none"><a:solidFill><a:srgbClr val="B0C4D8"/></a:solidFill></a:rPr><a:t>原生文件系统 · 系统对话框 · 多窗口</a:t></a:r></a:p></p:txBody></p:sp><p:sp><p:nvSpPr><p:cNvPr id="10" name="TextBox"/><p:cNvSpPr/><p:nvPr/></p:nvSpPr><p:spPr><a:xfrm><a:off x="0" y="2495550"/><a:ext cx="12192000" cy="355600"/></a:xfrm><p:txBody><a:bodyPr wrap="square" rtlCol="0" anchor="t"/><a:lstStyle/><a:p><a:pPr algn="ctr"/><a:r><a:rPr lang="en-US" sz="20" b="0" i="0" u="none"><a:solidFill><a:srgbClr val="404060"/></a:solidFill></a:rPr><a:t>▼</a:t></a:r></a:p></p:txBody></p:sp><p:sp><p:nvSpPr><p:cNvPr id="11" name="Shape"/><p:cNvSpPr/><p:nvPr/></p:nvSpPr><p:spPr><a:xfrm><a:off x="762000" y="2619375"/><a:ext cx="10668000" cy="666750"/></a:xfrm><a:prstGeom prst="roundRect"><a:avLst><a:gd name="adj" fmla="val 714"/></a:avLst></a:prstGeom><a:solidFill><a:srgbClr val="3A7BD5"><a:alpha val="100000"/></a:srgbClr></a:solidFill><a:ln w="19050"><a:solidFill><a:srgbClr val="3A7BD5"><a:alpha val="100000"/></a:srgbClr></a:solidFill></a:ln></p:sp><p:sp><p:nvSpPr><p:cNvPr id="12" name="TextBox"/><p:cNvSpPr/><p:nvPr/></p:nvSpPr><p:spPr><a:xfrm><a:off x="1047750" y="3000375"/><a:ext cx="12192000" cy="284480"/></a:xfrm><p:txBody><a:bodyPr wrap="square" rtlCol="0" anchor="t"/><a:lstStyle/><a:p><a:pPr algn="l"/><a:r><a:rPr lang="en-US" sz="16" b="0" i="0" u="none"><a:solidFill><a:srgbClr val="5A9BE5"/></a:solidFill></a:rPr><a:t>前端框架</a:t></a:r></a:p></p:txBody></p:sp><p:sp><p:nvSpPr><p:cNvPr id="13" name="TextBox"/><p:cNvSpPr/><p:nvPr/></p:nvSpPr><p:spPr><a:xfrm><a:off x="3048000" y="3000375"/><a:ext cx="12192000" cy="248920"/></a:xfrm><p:txBody><a:bodyPr wrap="square" rtlCol="0" anchor="t"/><a:lstStyle/><a:p><a:pPr algn="l"/><a:r><a:rPr lang="en-US" sz="14" b="0" i="0" u="none"><a:solidFill><a:srgbClr val="B0C4D8"/></a:solidFill></a:rPr><a:t>React 19 + TypeScript</a:t></a:r></a:p></p:txBody></p:sp><p:sp><p:nvSpPr><p:cNvPr id="14" name="TextBox"/><p:cNvSpPr/><p:nvPr/></p:nvSpPr><p:spPr><a:xfrm><a:off x="5524500" y="3000375"/><a:ext cx="12192000" cy="248920"/></a:xfrm><p:txBody><a:bodyPr wrap="square" rtlCol="0" anchor="t"/><a:lstStyle/><a:p><a:pPr algn="l"/><a:r><a:rPr lang="en-US" sz="14" b="0" i="0" u="none"><a:solidFill><a:srgbClr val="B0C4D8"/></a:solidFill></a:rPr><a:t>Vite 7 构建</a:t></a:r></a:p></p:txBody></p:sp><p:sp><p:nvSpPr><p:cNvPr id="15" name="TextBox"/><p:cNvSpPr/><p:nvPr/></p:nvSpPr><p:spPr><a:xfrm><a:off x="8001000" y="3000375"/><a:ext cx="12192000" cy="248920"/></a:xfrm><p:txBody><a:bodyPr wrap="square" rtlCol="0" anchor="t"/><a:lstStyle/><a:p><a:pPr algn="l"/><a:r><a:rPr lang="en-US" sz="14" b="0" i="0" u="none"><a:solidFill><a:srgbClr val="B0C4D8"/></a:solidFill></a:rPr><a:t>Zustand 5 状态管理</a:t></a:r></a:p></p:txBody></p:sp><p:sp><p:nvSpPr><p:cNvPr id="16" name="TextBox"/><p:cNvSpPr/><p:nvPr/></p:nvSpPr><p:spPr><a:xfrm><a:off x="0" y="3495675"/><a:ext cx="12192000" cy="355600"/></a:xfrm><p:txBody><a:bodyPr wrap="square" rtlCol="0" anchor="t"/><a:lstStyle/><a:p><a:pPr algn="ctr"/><a:r><a:rPr lang="en-US" sz="20" b="0" i="0" u="none"><a:solidFill><a:srgbClr val="404060"/></a:solidFill></a:rPr><a:t>▼</a:t></a:r></a:p></p:txBody></p:sp><p:sp><p:nvSpPr><p:cNvPr id="17" name="Shape"/><p:cNvSpPr/><p:nvPr/></p:nvSpPr><p:spPr><a:xfrm><a:off x="762000" y="3619500"/><a:ext cx="10668000" cy="666750"/></a:xfrm><a:prstGeom prst="roundRect"><a:avLst><a:gd name="adj" fmla="val 714"/></a:avLst></a:prstGeom><a:solidFill><a:srgbClr val="64C896"><a:alpha val="100000"/></a:srgbClr></a:solidFill><a:ln w="19050"><a:solidFill><a:srgbClr val="64C896"><a:alpha val="100000"/></a:srgbClr></a:solidFill></a:ln></p:sp><p:sp><p:nvSpPr><p:cNvPr id="18" name="TextBox"/><p:cNvSpPr/><p:nvPr/></p:nvSpPr><p:spPr><a:xfrm><a:off x="1047750" y="4000500"/><a:ext cx="12192000" cy="284480"/></a:xfrm><p:txBody><a:bodyPr wrap="square" rtlCol="0" anchor="t"/><a:lstStyle/><a:p><a:pPr algn="l"/><a:r><a:rPr lang="en-US" sz="16" b="0" i="0" u="none"><a:solidFill><a:srgbClr val="6CC8A0"/></a:solidFill></a:rPr><a:t>编辑器核心</a:t></a:r></a:p></p:txBody></p:sp><p:sp><p:nvSpPr><p:cNvPr id="19" name="TextBox"/><p:cNvSpPr/><p:nvPr/></p:nvSpPr><p:spPr><a:xfrm><a:off x="3048000" y="4000500"/><a:ext cx="12192000" cy="248920"/></a:xfrm><p:txBody><a:bodyPr wrap="square" rtlCol="0" anchor="t"/><a:lstStyle/><a:p><a:pPr algn="l"/><a:r><a:rPr lang="en-US" sz="14" b="0" i="0" u="none"><a:solidFill><a:srgbClr val="B0C4D8"/></a:solidFill></a:rPr><a:t>ProseMirror（富文本）</a:t></a:r></a:p></p:txBody></p:sp><p:sp><p:nvSpPr><p:cNvPr id="20" name="TextBox"/><p:cNvSpPr/><p:nvPr/></p:nvSpPr><p:spPr><a:xfrm><a:off x="5524500" y="4000500"/><a:ext cx="12192000" cy="248920"/></a:xfrm><p:txBody><a:bodyPr wrap="square" rtlCol="0" anchor="t"/><a:lstStyle/><a:p><a:pPr algn="l"/><a:r><a:rPr lang="en-US" sz="14" b="0" i="0" u="none"><a:solidFill><a:srgbClr val="B0C4D8"/></a:solidFill></a:rPr><a:t>CodeMirror（代码）</a:t></a:r></a:p></p:txBody></p:sp><p:sp><p:nvSpPr><p:cNvPr id="21" name="TextBox"/><p:cNvSpPr/><p:nvPr/></p:nvSpPr><p:spPr><a:xfrm><a:off x="8001000" y="4000500"/><a:ext cx="12192000" cy="248920"/></a:xfrm><p:txBody><a:bodyPr wrap="square" rtlCol="0" anchor="t"/><a:lstStyle/><a:p><a:pPr algn="l"/><a:r><a:rPr lang="en-US" sz="14" b="0" i="0" u="none"><a:solidFill><a:srgbClr val="B0C4D8"/></a:solidFill></a:rPr><a:t>FortuneSheet（表格）</a:t></a:r></a:p></p:txBody></p:sp><p:sp><p:nvSpPr><p:cNvPr id="22" name="TextBox"/><p:cNvSpPr/><p:nvPr/></p:nvSpPr><p:spPr><a:xfrm><a:off x="0" y="4495800"/><a:ext cx="12192000" cy="355600"/></a:xfrm><p:txBody><a:bodyPr wrap="square" rtlCol="0" anchor="t"/><a:lstStyle/><a:p><a:pPr algn="ctr"/><a:r><a:rPr lang="en-US" sz="20" b="0" i="0" u="none"><a:solidFill><a:srgbClr val="404060"/></a:solidFill></a:rPr><a:t>▼</a:t></a:r></a:p></p:txBody></p:sp><p:sp><p:nvSpPr><p:cNvPr id="23" name="Shape"/><p:cNvSpPr/><p:nvPr/></p:nvSpPr><p:spPr><a:xfrm><a:off x="762000" y="4619625"/><a:ext cx="10668000" cy="666750"/></a:xfrm><a:prstGeom prst="roundRect"><a:avLst><a:gd name="adj" fmla="val 714"/></a:avLst></a:prstGeom><a:solidFill><a:srgbClr val="C89650"><a:alpha val="100000"/></a:srgbClr></a:solidFill><a:ln w="19050"><a:solidFill><a:srgbClr val="C89650"><a:alpha val="100000"/></a:srgbClr></a:solidFill></a:ln></p:sp><p:sp><p:nvSpPr><p:cNvPr id="24" name="TextBox"/><p:cNvSpPr/><p:nvPr/></p:nvSpPr><p:spPr><a:xfrm><a:off x="1047750" y="5000625"/><a:ext cx="12192000" cy="284480"/></a:xfrm><p:txBody><a:bodyPr wrap="square" rtlCol="0" anchor="t"/><a:lstStyle/><a:p><a:pPr algn="l"/><a:r><a:rPr lang="en-US" sz="16" b="0" i="0" u="none"><a:solidFill><a:srgbClr val="C8A050"/></a:solidFill></a:rPr><a:t>AI 引擎与服务</a:t></a:r></a:p></p:txBody></p:sp><p:sp><p:nvSpPr><p:cNvPr id="25" name="TextBox"/><p:cNvSpPr/><p:nvPr/></p:nvSpPr><p:spPr><a:xfrm><a:off x="3048000" y="5000625"/><a:ext cx="12192000" cy="248920"/></a:xfrm><p:txBody><a:bodyPr wrap="square" rtlCol="0" anchor="t"/><a:lstStyle/><a:p><a:pPr algn="l"/><a:r><a:rPr lang="en-US" sz="14" b="0" i="0" u="none"><a:solidFill><a:srgbClr val="B0C4D8"/></a:solidFill></a:rPr><a:t>AI Agent 智能体系统</a:t></a:r></a:p></p:txBody></p:sp><p:sp><p:nvSpPr><p:cNvPr id="26" name="TextBox"/><p:cNvSpPr/><p:nvPr/></p:nvSpPr><p:spPr><a:xfrm><a:off x="5524500" y="5000625"/><a:ext cx="12192000" cy="248920"/></a:xfrm><p:txBody><a:bodyPr wrap="square" rtlCol="0" anchor="t"/><a:lstStyle/><a:p><a:pPr algn="l"/><a:r><a:rPr lang="en-US" sz="14" b="0" i="0" u="none"><a:solidFill><a:srgbClr val="B0C4D8"/></a:solidFill></a:rPr><a:t>知识库（向量搜索）</a:t></a:r></a:p></p:txBody></p:sp><p:sp><p:nvSpPr><p:cNvPr id="27" name="TextBox"/><p:cNvSpPr/><p:nvPr/></p:nvSpPr><p:spPr><a:xfrm><a:off x="8001000" y="5000625"/><a:ext cx="12192000" cy="248920"/></a:xfrm><p:txBody><a:bodyPr wrap="square" rtlCol="0" anchor="t"/><a:lstStyle/><a:p><a:pPr algn="l"/><a:r><a:rPr lang="en-US" sz="14" b="0" i="0" u="none"><a:solidFill><a:srgbClr val="B0C4D8"/></a:solidFill></a:rPr><a:t>inkuo Cloud 云服务</a:t></a:r></a:p></p:txBody></p:sp><p:sp><p:nvSpPr><p:cNvPr id="28" name="TextBox"/><p:cNvSpPr/><p:nvPr/></p:nvSpPr><p:spPr><a:xfrm><a:off x="0" y="5495925"/><a:ext cx="12192000" cy="355600"/></a:xfrm><p:txBody><a:bodyPr wrap="square" rtlCol="0" anchor="t"/><a:lstStyle/><a:p><a:pPr algn="ctr"/><a:r><a:rPr lang="en-US" sz="20" b="0" i="0" u="none"><a:solidFill><a:srgbClr val="404060"/></a:solidFill></a:rPr><a:t>▼</a:t></a:r></a:p></p:txBody></p:sp><p:sp><p:nvSpPr><p:cNvPr id="29" name="Shape"/><p:cNvSpPr/><p:nvPr/></p:nvSpPr><p:spPr><a:xfrm><a:off x="762000" y="5619750"/><a:ext cx="10668000" cy="666750"/></a:xfrm><a:prstGeom prst="roundRect"><a:avLst><a:gd name="adj" fmla="val 714"/></a:avLst></a:prstGeom><a:solidFill><a:srgbClr val="C85078"><a:alpha val="100000"/></a:srgbClr></a:solidFill><a:ln w="19050"><a:solidFill><a:srgbClr val="C85078"><a:alpha val="100000"/></a:srgbClr></a:solidFill></a:ln></p:sp><p:sp><p:nvSpPr><p:cNvPr id="30" name="TextBox"/><p:cNvSpPr/><p:nvPr/></p:nvSpPr><p:spPr><a:xfrm><a:off x="1047750" y="6000750"/><a:ext cx="12192000" cy="284480"/></a:xfrm><p:txBody><a:bodyPr wrap="square" rtlCol="0" anchor="t"/><a:lstStyle/><a:p><a:pPr algn="l"/><a:r><a:rPr lang="en-US" sz="16" b="0" i="0" u="none"><a:solidFill><a:srgbClr val="C85078"/></a:solidFill></a:rPr><a:t>文档解析引擎</a:t></a:r></a:p></p:txBody></p:sp><p:sp><p:nvSpPr><p:cNvPr id="31" name="TextBox"/><p:cNvSpPr/><p:nvPr/></p:nvSpPr><p:spPr><a:xfrm><a:off x="3048000" y="6000750"/><a:ext cx="12192000" cy="248920"/></a:xfrm><p:txBody><a:bodyPr wrap="square" rtlCol="0" anchor="t"/><a:lstStyle/><a:p><a:pPr algn="l"/><a:r><a:rPr lang="en-US" sz="14" b="0" i="0" u="none"><a:solidFill><a:srgbClr val="B0C4D8"/></a:solidFill></a:rPr><a:t>docx-editor-core（Word）</a:t></a:r></a:p></p:txBody></p:sp><p:sp><p:nvSpPr><p:cNvPr id="32" name="TextBox"/><p:cNvSpPr/><p:nvPr/></p:nvSpPr><p:spPr><a:xfrm><a:off x="5524500" y="6000750"/><a:ext cx="12192000" cy="248920"/></a:xfrm><p:txBody><a:bodyPr wrap="square" rtlCol="0" anchor="t"/><a:lstStyle/><a:p><a:pPr algn="l"/><a:r><a:rPr lang="en-US" sz="14" b="0" i="0" u="none"><a:solidFill><a:srgbClr val="B0C4D8"/></a:solidFill></a:rPr><a:t>xlsx（Excel）</a:t></a:r></a:p></p:txBody></p:sp><p:sp><p:nvSpPr><p:cNvPr id="33" name="TextBox"/><p:cNvSpPr/><p:nvPr/></p:nvSpPr><p:spPr><a:xfrm><a:off x="8001000" y="6000750"/><a:ext cx="12192000" cy="248920"/></a:xfrm><p:txBody><a:bodyPr wrap="square" rtlCol="0" anchor="t"/><a:lstStyle/><a:p><a:pPr algn="l"/><a:r><a:rPr lang="en-US" sz="14" b="0" i="0" u="none"><a:solidFill><a:srgbClr val="B0C4D8"/></a:solidFill></a:rPr><a:t>pdfjs-dist（PDF）</a:t></a:r></a:p></p:txBody></p:sp></p:spTree></p:cSld></p:sld>
 </file>
 
-<file path=ppt/slides/slide7.xml><?xml version="1.0" encoding="UTF-8" standalone="yes"?><p:sld xmlns:a="http://schemas.openxmlformats.org/drawingml/2006/main" xmlns:r="http://schemas.openxmlformats.org/officeDocument/2006/relationships" xmlns:p="http://schemas.openxmlformats.org/presentationml/2006/main"><p:cSld><p:spTree><p:nvGrpSpPr><p:cNvPr id="1" name=""/><p:cNvGrpSpPr/><p:nvPr/></p:nvGrpSpPr><p:grpSpPr><a:xfrm><a:off x="0" y="0"/><a:ext cx="0" cy="0"/><a:chOff x="0" y="0"/><a:chExt cx="0" cy="0"/></a:xfrm></p:grpSpPr><p:sp><p:nvSpPr><p:cNvPr id="100" name="Shape"/><p:cNvSpPr/><p:nvPr/></p:nvSpPr><p:spPr><a:xfrm><a:off x="0" y="0"/><a:ext cx="12192000" cy="6858000"/></a:xfrm><a:prstGeom prst="rect"><a:avLst/></a:prstGeom><a:solidFill><a:srgbClr val="0F0F23"><a:alpha val="100000"/></a:srgbClr></a:solidFill><a:ln><a:noFill/></a:ln></p:sp><p:sp><p:nvSpPr><p:cNvPr id="100" name="TextBox"/><p:cNvSpPr/><p:nvPr/></p:nvSpPr><p:spPr><a:xfrm><a:off x="762000" y="1047750"/><a:ext cx="12192000" cy="640080"/></a:xfrm><p:txBody><a:bodyPr wrap="square" rtlCol="0" anchor="t"/><a:lstStyle/><a:p><a:pPr algn="l"/><a:r><a:rPr lang="en-US" sz="36" b="0" i="0" u="none"><a:solidFill><a:srgbClr val="FFFFFF"/></a:solidFill></a:rPr><a:t>跨平台支持与适用场景</a:t></a:r></a:p></p:txBody></p:sp><p:cxnSp><p:nvCxnSpPr><p:cNvPr id="100" name="Line"/><p:cNvCxnSpPr/><p:nvPr/></p:nvCxnSpPr><p:spPr><a:xfrm><a:off x="762000" y="1190625"/><a:ext cx="4476750" cy="0"/></a:xfrm><a:prstGeom prst="line"><a:avLst/></a:prstGeom><a:ln w="12700"><a:solidFill><a:srgbClr val="FFFFFF"/></a:solidFill></a:ln></p:spPr></p:cxnSp><p:sp><p:nvSpPr><p:cNvPr id="100" name="TextBox"/><p:cNvSpPr/><p:nvPr/></p:nvSpPr><p:spPr><a:xfrm><a:off x="762000" y="1714500"/><a:ext cx="12192000" cy="391160"/></a:xfrm><p:txBody><a:bodyPr wrap="square" rtlCol="0" anchor="t"/><a:lstStyle/><a:p><a:pPr algn="l"/><a:r><a:rPr lang="en-US" sz="22" b="0" i="0" u="none"><a:solidFill><a:srgbClr val="00D2FF"/></a:solidFill></a:rPr><a:t>跨平台支持</a:t></a:r></a:p></p:txBody></p:sp><p:sp><p:nvSpPr><p:cNvPr id="100" name="Shape"/><p:cNvSpPr/><p:nvPr/></p:nvSpPr><p:spPr><a:xfrm><a:off x="762000" y="1905000"/><a:ext cx="3238500" cy="762000"/></a:xfrm><a:prstGeom prst="roundRect"><a:avLst><a:gd name="adj" fmla="val 2353"/></a:avLst></a:prstGeom><a:solidFill><a:srgbClr val="00D2FF"><a:alpha val="100000"/></a:srgbClr></a:solidFill><a:ln w="12700"><a:solidFill><a:srgbClr val="00D2FF"><a:alpha val="100000"/></a:srgbClr></a:solidFill></a:ln></p:sp><p:sp><p:nvSpPr><p:cNvPr id="100" name="TextBox"/><p:cNvSpPr/><p:nvPr/></p:nvSpPr><p:spPr><a:xfrm><a:off x="-3714750" y="2238375"/><a:ext cx="12192000" cy="320040"/></a:xfrm><p:txBody><a:bodyPr wrap="square" rtlCol="0" anchor="t"/><a:lstStyle/><a:p><a:pPr algn="ctr"/><a:r><a:rPr lang="en-US" sz="18" b="0" i="0" u="none"><a:solidFill><a:srgbClr val="FFFFFF"/></a:solidFill></a:rPr><a:t>Windows</a:t></a:r></a:p></p:txBody></p:sp><p:sp><p:nvSpPr><p:cNvPr id="100" name="TextBox"/><p:cNvSpPr/><p:nvPr/></p:nvSpPr><p:spPr><a:xfrm><a:off x="-3714750" y="2457450"/><a:ext cx="12192000" cy="231140"/></a:xfrm><p:txBody><a:bodyPr wrap="square" rtlCol="0" anchor="t"/><a:lstStyle/><a:p><a:pPr algn="ctr"/><a:r><a:rPr lang="en-US" sz="13" b="0" i="0" u="none"><a:solidFill><a:srgbClr val="7090B0"/></a:solidFill></a:rPr><a:t>Windows 10/11 · NSIS/MSI 安装</a:t></a:r></a:p></p:txBody></p:sp><p:sp><p:nvSpPr><p:cNvPr id="100" name="Shape"/><p:cNvSpPr/><p:nvPr/></p:nvSpPr><p:spPr><a:xfrm><a:off x="4476750" y="1905000"/><a:ext cx="3238500" cy="762000"/></a:xfrm><a:prstGeom prst="roundRect"><a:avLst><a:gd name="adj" fmla="val 2353"/></a:avLst></a:prstGeom><a:solidFill><a:srgbClr val="3A7BD5"><a:alpha val="100000"/></a:srgbClr></a:solidFill><a:ln w="12700"><a:solidFill><a:srgbClr val="3A7BD5"><a:alpha val="100000"/></a:srgbClr></a:solidFill></a:ln></p:sp><p:sp><p:nvSpPr><p:cNvPr id="100" name="TextBox"/><p:cNvSpPr/><p:nvPr/></p:nvSpPr><p:spPr><a:xfrm><a:off x="0" y="2238375"/><a:ext cx="12192000" cy="320040"/></a:xfrm><p:txBody><a:bodyPr wrap="square" rtlCol="0" anchor="t"/><a:lstStyle/><a:p><a:pPr algn="ctr"/><a:r><a:rPr lang="en-US" sz="18" b="0" i="0" u="none"><a:solidFill><a:srgbClr val="FFFFFF"/></a:solidFill></a:rPr><a:t>macOS</a:t></a:r></a:p></p:txBody></p:sp><p:sp><p:nvSpPr><p:cNvPr id="100" name="TextBox"/><p:cNvSpPr/><p:nvPr/></p:nvSpPr><p:spPr><a:xfrm><a:off x="0" y="2457450"/><a:ext cx="12192000" cy="231140"/></a:xfrm><p:txBody><a:bodyPr wrap="square" rtlCol="0" anchor="t"/><a:lstStyle/><a:p><a:pPr algn="ctr"/><a:r><a:rPr lang="en-US" sz="13" b="0" i="0" u="none"><a:solidFill><a:srgbClr val="7090B0"/></a:solidFill></a:rPr><a:t>.dmg 构建</a:t></a:r></a:p></p:txBody></p:sp><p:sp><p:nvSpPr><p:cNvPr id="100" name="Shape"/><p:cNvSpPr/><p:nvPr/></p:nvSpPr><p:spPr><a:xfrm><a:off x="8191500" y="1905000"/><a:ext cx="3238500" cy="762000"/></a:xfrm><a:prstGeom prst="roundRect"><a:avLst><a:gd name="adj" fmla="val 2353"/></a:avLst></a:prstGeom><a:solidFill><a:srgbClr val="64C896"><a:alpha val="100000"/></a:srgbClr></a:solidFill><a:ln w="12700"><a:solidFill><a:srgbClr val="64C896"><a:alpha val="100000"/></a:srgbClr></a:solidFill></a:ln></p:sp><p:sp><p:nvSpPr><p:cNvPr id="100" name="TextBox"/><p:cNvSpPr/><p:nvPr/></p:nvSpPr><p:spPr><a:xfrm><a:off x="3714750" y="2238375"/><a:ext cx="12192000" cy="320040"/></a:xfrm><p:txBody><a:bodyPr wrap="square" rtlCol="0" anchor="t"/><a:lstStyle/><a:p><a:pPr algn="ctr"/><a:r><a:rPr lang="en-US" sz="18" b="0" i="0" u="none"><a:solidFill><a:srgbClr val="FFFFFF"/></a:solidFill></a:rPr><a:t>Linux</a:t></a:r></a:p></p:txBody></p:sp><p:sp><p:nvSpPr><p:cNvPr id="100" name="TextBox"/><p:cNvSpPr/><p:nvPr/></p:nvSpPr><p:spPr><a:xfrm><a:off x="3714750" y="2457450"/><a:ext cx="12192000" cy="231140"/></a:xfrm><p:txBody><a:bodyPr wrap="square" rtlCol="0" anchor="t"/><a:lstStyle/><a:p><a:pPr algn="ctr"/><a:r><a:rPr lang="en-US" sz="13" b="0" i="0" u="none"><a:solidFill><a:srgbClr val="7090B0"/></a:solidFill></a:rPr><a:t>.deb / AppImage 构建</a:t></a:r></a:p></p:txBody></p:sp><p:sp><p:nvSpPr><p:cNvPr id="100" name="TextBox"/><p:cNvSpPr/><p:nvPr/></p:nvSpPr><p:spPr><a:xfrm><a:off x="762000" y="3333750"/><a:ext cx="12192000" cy="391160"/></a:xfrm><p:txBody><a:bodyPr wrap="square" rtlCol="0" anchor="t"/><a:lstStyle/><a:p><a:pPr algn="l"/><a:r><a:rPr lang="en-US" sz="22" b="0" i="0" u="none"><a:solidFill><a:srgbClr val="5A9BE5"/></a:solidFill></a:rPr><a:t>适用场景</a:t></a:r></a:p></p:txBody></p:sp><p:sp><p:nvSpPr><p:cNvPr id="100" name="Shape"/><p:cNvSpPr/><p:nvPr/></p:nvSpPr><p:spPr><a:xfrm><a:off x="762000" y="3524250"/><a:ext cx="2428875" cy="1143000"/></a:xfrm><a:prstGeom prst="roundRect"><a:avLst><a:gd name="adj" fmla="val 3922"/></a:avLst></a:prstGeom><a:solidFill><a:srgbClr val="00D2FF"><a:alpha val="100000"/></a:srgbClr></a:solidFill><a:ln w="12700"><a:solidFill><a:srgbClr val="00D2FF"><a:alpha val="100000"/></a:srgbClr></a:solidFill></a:ln></p:sp><p:sp><p:nvSpPr><p:cNvPr id="100" name="TextBox"/><p:cNvSpPr/><p:nvPr/></p:nvSpPr><p:spPr><a:xfrm><a:off x="-4124325" y="3810000"/><a:ext cx="12192000" cy="284480"/></a:xfrm><p:txBody><a:bodyPr wrap="square" rtlCol="0" anchor="t"/><a:lstStyle/><a:p><a:pPr algn="ctr"/><a:r><a:rPr lang="en-US" sz="16" b="0" i="0" u="none"><a:solidFill><a:srgbClr val="00D2FF"/></a:solidFill></a:rPr><a:t>开发者</a:t></a:r></a:p></p:txBody></p:sp><p:sp><p:nvSpPr><p:cNvPr id="100" name="TextBox"/><p:cNvSpPr/><p:nvPr/></p:nvSpPr><p:spPr><a:xfrm><a:off x="952500" y="4076700"/><a:ext cx="12192000" cy="231140"/></a:xfrm><p:txBody><a:bodyPr wrap="square" rtlCol="0" anchor="t"/><a:lstStyle/><a:p><a:pPr algn="l"/><a:r><a:rPr lang="en-US" sz="13" b="0" i="0" u="none"><a:solidFill><a:srgbClr val="A0B4C8"/></a:solidFill></a:rPr><a:t>技术文档编写</a:t></a:r></a:p></p:txBody></p:sp><p:sp><p:nvSpPr><p:cNvPr id="100" name="TextBox"/><p:cNvSpPr/><p:nvPr/></p:nvSpPr><p:spPr><a:xfrm><a:off x="952500" y="4286250"/><a:ext cx="12192000" cy="231140"/></a:xfrm><p:txBody><a:bodyPr wrap="square" rtlCol="0" anchor="t"/><a:lstStyle/><a:p><a:pPr algn="l"/><a:r><a:rPr lang="en-US" sz="13" b="0" i="0" u="none"><a:solidFill><a:srgbClr val="A0B4C8"/></a:solidFill></a:rPr><a:t>代码阅读与编辑</a:t></a:r></a:p></p:txBody></p:sp><p:sp><p:nvSpPr><p:cNvPr id="100" name="TextBox"/><p:cNvSpPr/><p:nvPr/></p:nvSpPr><p:spPr><a:xfrm><a:off x="952500" y="4495800"/><a:ext cx="12192000" cy="231140"/></a:xfrm><p:txBody><a:bodyPr wrap="square" rtlCol="0" anchor="t"/><a:lstStyle/><a:p><a:pPr algn="l"/><a:r><a:rPr lang="en-US" sz="13" b="0" i="0" u="none"><a:solidFill><a:srgbClr val="A0B4C8"/></a:solidFill></a:rPr><a:t>AI 辅助编程</a:t></a:r></a:p></p:txBody></p:sp><p:sp><p:nvSpPr><p:cNvPr id="100" name="Shape"/><p:cNvSpPr/><p:nvPr/></p:nvSpPr><p:spPr><a:xfrm><a:off x="3381375" y="3524250"/><a:ext cx="2428875" cy="1143000"/></a:xfrm><a:prstGeom prst="roundRect"><a:avLst><a:gd name="adj" fmla="val 3922"/></a:avLst></a:prstGeom><a:solidFill><a:srgbClr val="3A7BD5"><a:alpha val="100000"/></a:srgbClr></a:solidFill><a:ln w="12700"><a:solidFill><a:srgbClr val="3A7BD5"><a:alpha val="100000"/></a:srgbClr></a:solidFill></a:ln></p:sp><p:sp><p:nvSpPr><p:cNvPr id="100" name="TextBox"/><p:cNvSpPr/><p:nvPr/></p:nvSpPr><p:spPr><a:xfrm><a:off x="-1504950" y="3810000"/><a:ext cx="12192000" cy="284480"/></a:xfrm><p:txBody><a:bodyPr wrap="square" rtlCol="0" anchor="t"/><a:lstStyle/><a:p><a:pPr algn="ctr"/><a:r><a:rPr lang="en-US" sz="16" b="0" i="0" u="none"><a:solidFill><a:srgbClr val="5A9BE5"/></a:solidFill></a:rPr><a:t>写作者</a:t></a:r></a:p></p:txBody></p:sp><p:sp><p:nvSpPr><p:cNvPr id="100" name="TextBox"/><p:cNvSpPr/><p:nvPr/></p:nvSpPr><p:spPr><a:xfrm><a:off x="3571875" y="4076700"/><a:ext cx="12192000" cy="231140"/></a:xfrm><p:txBody><a:bodyPr wrap="square" rtlCol="0" anchor="t"/><a:lstStyle/><a:p><a:pPr algn="l"/><a:r><a:rPr lang="en-US" sz="13" b="0" i="0" u="none"><a:solidFill><a:srgbClr val="A0B4C8"/></a:solidFill></a:rPr><a:t>Markdown/Word 创作</a:t></a:r></a:p></p:txBody></p:sp><p:sp><p:nvSpPr><p:cNvPr id="100" name="TextBox"/><p:cNvSpPr/><p:nvPr/></p:nvSpPr><p:spPr><a:xfrm><a:off x="3571875" y="4286250"/><a:ext cx="12192000" cy="231140"/></a:xfrm><p:txBody><a:bodyPr wrap="square" rtlCol="0" anchor="t"/><a:lstStyle/><a:p><a:pPr algn="l"/><a:r><a:rPr lang="en-US" sz="13" b="0" i="0" u="none"><a:solidFill><a:srgbClr val="A0B4C8"/></a:solidFill></a:rPr><a:t>AI 辅助润色</a:t></a:r></a:p></p:txBody></p:sp><p:sp><p:nvSpPr><p:cNvPr id="100" name="TextBox"/><p:cNvSpPr/><p:nvPr/></p:nvSpPr><p:spPr><a:xfrm><a:off x="3571875" y="4495800"/><a:ext cx="12192000" cy="231140"/></a:xfrm><p:txBody><a:bodyPr wrap="square" rtlCol="0" anchor="t"/><a:lstStyle/><a:p><a:pPr algn="l"/><a:r><a:rPr lang="en-US" sz="13" b="0" i="0" u="none"><a:solidFill><a:srgbClr val="A0B4C8"/></a:solidFill></a:rPr><a:t>多格式输出</a:t></a:r></a:p></p:txBody></p:sp><p:sp><p:nvSpPr><p:cNvPr id="100" name="Shape"/><p:cNvSpPr/><p:nvPr/></p:nvSpPr><p:spPr><a:xfrm><a:off x="6000750" y="3524250"/><a:ext cx="2428875" cy="1143000"/></a:xfrm><a:prstGeom prst="roundRect"><a:avLst><a:gd name="adj" fmla="val 3922"/></a:avLst></a:prstGeom><a:solidFill><a:srgbClr val="64C896"><a:alpha val="100000"/></a:srgbClr></a:solidFill><a:ln w="12700"><a:solidFill><a:srgbClr val="64C896"><a:alpha val="100000"/></a:srgbClr></a:solidFill></a:ln></p:sp><p:sp><p:nvSpPr><p:cNvPr id="100" name="TextBox"/><p:cNvSpPr/><p:nvPr/></p:nvSpPr><p:spPr><a:xfrm><a:off x="1114425" y="3810000"/><a:ext cx="12192000" cy="284480"/></a:xfrm><p:txBody><a:bodyPr wrap="square" rtlCol="0" anchor="t"/><a:lstStyle/><a:p><a:pPr algn="ctr"/><a:r><a:rPr lang="en-US" sz="16" b="0" i="0" u="none"><a:solidFill><a:srgbClr val="6CC8A0"/></a:solidFill></a:rPr><a:t>数据分析师</a:t></a:r></a:p></p:txBody></p:sp><p:sp><p:nvSpPr><p:cNvPr id="100" name="TextBox"/><p:cNvSpPr/><p:nvPr/></p:nvSpPr><p:spPr><a:xfrm><a:off x="6191250" y="4076700"/><a:ext cx="12192000" cy="231140"/></a:xfrm><p:txBody><a:bodyPr wrap="square" rtlCol="0" anchor="t"/><a:lstStyle/><a:p><a:pPr algn="l"/><a:r><a:rPr lang="en-US" sz="13" b="0" i="0" u="none"><a:solidFill><a:srgbClr val="A0B4C8"/></a:solidFill></a:rPr><a:t>表格数据处理</a:t></a:r></a:p></p:txBody></p:sp><p:sp><p:nvSpPr><p:cNvPr id="100" name="TextBox"/><p:cNvSpPr/><p:nvPr/></p:nvSpPr><p:spPr><a:xfrm><a:off x="6191250" y="4286250"/><a:ext cx="12192000" cy="231140"/></a:xfrm><p:txBody><a:bodyPr wrap="square" rtlCol="0" anchor="t"/><a:lstStyle/><a:p><a:pPr algn="l"/><a:r><a:rPr lang="en-US" sz="13" b="0" i="0" u="none"><a:solidFill><a:srgbClr val="A0B4C8"/></a:solidFill></a:rPr><a:t>公式运算</a:t></a:r></a:p></p:txBody></p:sp><p:sp><p:nvSpPr><p:cNvPr id="100" name="TextBox"/><p:cNvSpPr/><p:nvPr/></p:nvSpPr><p:spPr><a:xfrm><a:off x="6191250" y="4495800"/><a:ext cx="12192000" cy="231140"/></a:xfrm><p:txBody><a:bodyPr wrap="square" rtlCol="0" anchor="t"/><a:lstStyle/><a:p><a:pPr algn="l"/><a:r><a:rPr lang="en-US" sz="13" b="0" i="0" u="none"><a:solidFill><a:srgbClr val="A0B4C8"/></a:solidFill></a:rPr><a:t>报告生成</a:t></a:r></a:p></p:txBody></p:sp><p:sp><p:nvSpPr><p:cNvPr id="100" name="Shape"/><p:cNvSpPr/><p:nvPr/></p:nvSpPr><p:spPr><a:xfrm><a:off x="8620125" y="3524250"/><a:ext cx="2428875" cy="1143000"/></a:xfrm><a:prstGeom prst="roundRect"><a:avLst><a:gd name="adj" fmla="val 3922"/></a:avLst></a:prstGeom><a:solidFill><a:srgbClr val="C89650"><a:alpha val="100000"/></a:srgbClr></a:solidFill><a:ln w="12700"><a:solidFill><a:srgbClr val="C89650"><a:alpha val="100000"/></a:srgbClr></a:solidFill></a:ln></p:sp><p:sp><p:nvSpPr><p:cNvPr id="100" name="TextBox"/><p:cNvSpPr/><p:nvPr/></p:nvSpPr><p:spPr><a:xfrm><a:off x="3733800" y="3810000"/><a:ext cx="12192000" cy="284480"/></a:xfrm><p:txBody><a:bodyPr wrap="square" rtlCol="0" anchor="t"/><a:lstStyle/><a:p><a:pPr algn="ctr"/><a:r><a:rPr lang="en-US" sz="16" b="0" i="0" u="none"><a:solidFill><a:srgbClr val="C8A050"/></a:solidFill></a:rPr><a:t>项目经理</a:t></a:r></a:p></p:txBody></p:sp><p:sp><p:nvSpPr><p:cNvPr id="100" name="TextBox"/><p:cNvSpPr/><p:nvPr/></p:nvSpPr><p:spPr><a:xfrm><a:off x="8810625" y="4076700"/><a:ext cx="12192000" cy="231140"/></a:xfrm><p:txBody><a:bodyPr wrap="square" rtlCol="0" anchor="t"/><a:lstStyle/><a:p><a:pPr algn="l"/><a:r><a:rPr lang="en-US" sz="13" b="0" i="0" u="none"><a:solidFill><a:srgbClr val="A0B4C8"/></a:solidFill></a:rPr><a:t>项目文档审阅</a:t></a:r></a:p></p:txBody></p:sp><p:sp><p:nvSpPr><p:cNvPr id="100" name="TextBox"/><p:cNvSpPr/><p:nvPr/></p:nvSpPr><p:spPr><a:xfrm><a:off x="8810625" y="4286250"/><a:ext cx="12192000" cy="231140"/></a:xfrm><p:txBody><a:bodyPr wrap="square" rtlCol="0" anchor="t"/><a:lstStyle/><a:p><a:pPr algn="l"/><a:r><a:rPr lang="en-US" sz="13" b="0" i="0" u="none"><a:solidFill><a:srgbClr val="A0B4C8"/></a:solidFill></a:rPr><a:t>协作流程管理</a:t></a:r></a:p></p:txBody></p:sp><p:sp><p:nvSpPr><p:cNvPr id="100" name="TextBox"/><p:cNvSpPr/><p:nvPr/></p:nvSpPr><p:spPr><a:xfrm><a:off x="8810625" y="4495800"/><a:ext cx="12192000" cy="231140"/></a:xfrm><p:txBody><a:bodyPr wrap="square" rtlCol="0" anchor="t"/><a:lstStyle/><a:p><a:pPr algn="l"/><a:r><a:rPr lang="en-US" sz="13" b="0" i="0" u="none"><a:solidFill><a:srgbClr val="A0B4C8"/></a:solidFill></a:rPr><a:t>知识库维护</a:t></a:r></a:p></p:txBody></p:sp><p:sp><p:nvSpPr><p:cNvPr id="100" name="TextBox"/><p:cNvSpPr/><p:nvPr/></p:nvSpPr><p:spPr><a:xfrm><a:off x="762000" y="5143500"/><a:ext cx="12192000" cy="248920"/></a:xfrm><p:txBody><a:bodyPr wrap="square" rtlCol="0" anchor="t"/><a:lstStyle/><a:p><a:pPr algn="l"/><a:r><a:rPr lang="en-US" sz="14" b="0" i="0" u="none"><a:solidFill><a:srgbClr val="6080A0"/></a:solidFill></a:rPr><a:t>更多场景：研究人员（PDF 阅读与知识整理）· 学生（笔记与作业）· 团队协作（云端同步）</a:t></a:r></a:p></p:txBody></p:sp></p:spTree></p:cSld></p:sld>
+<file path=ppt/slides/slide7.xml><?xml version="1.0" encoding="UTF-8" standalone="yes"?><p:sld xmlns:a="http://schemas.openxmlformats.org/drawingml/2006/main" xmlns:r="http://schemas.openxmlformats.org/officeDocument/2006/relationships" xmlns:p="http://schemas.openxmlformats.org/presentationml/2006/main"><p:cSld><p:spTree><p:nvGrpSpPr><p:cNvPr id="1" name=""/><p:cNvGrpSpPr/><p:nvPr/></p:nvGrpSpPr><p:grpSpPr><a:xfrm><a:off x="0" y="0"/><a:ext cx="0" cy="0"/><a:chOff x="0" y="0"/><a:chExt cx="0" cy="0"/></a:xfrm></p:grpSpPr><p:sp><p:nvSpPr><p:cNvPr id="2" name="Shape"/><p:cNvSpPr/><p:nvPr/></p:nvSpPr><p:spPr><a:xfrm><a:off x="0" y="0"/><a:ext cx="12192000" cy="6858000"/></a:xfrm><a:prstGeom prst="rect"><a:avLst/></a:prstGeom><a:solidFill><a:srgbClr val="0F0F23"><a:alpha val="100000"/></a:srgbClr></a:solidFill><a:ln><a:noFill/></a:ln></p:sp><p:sp><p:nvSpPr><p:cNvPr id="3" name="TextBox"/><p:cNvSpPr/><p:nvPr/></p:nvSpPr><p:spPr><a:xfrm><a:off x="762000" y="1047750"/><a:ext cx="12192000" cy="640080"/></a:xfrm><p:txBody><a:bodyPr wrap="square" rtlCol="0" anchor="t"/><a:lstStyle/><a:p><a:pPr algn="l"/><a:r><a:rPr lang="en-US" sz="36" b="0" i="0" u="none"><a:solidFill><a:srgbClr val="FFFFFF"/></a:solidFill></a:rPr><a:t>跨平台支持与适用场景</a:t></a:r></a:p></p:txBody></p:sp><p:cxnSp><p:nvCxnSpPr><p:cNvPr id="4" name="Line"/><p:cNvCxnSpPr/><p:nvPr/></p:nvCxnSpPr><p:spPr><a:xfrm><a:off x="762000" y="1190625"/><a:ext cx="4476750" cy="0"/></a:xfrm><a:prstGeom prst="line"><a:avLst/></a:prstGeom><a:ln w="12700"><a:solidFill><a:srgbClr val="FFFFFF"/></a:solidFill></a:ln></p:spPr></p:cxnSp><p:sp><p:nvSpPr><p:cNvPr id="5" name="TextBox"/><p:cNvSpPr/><p:nvPr/></p:nvSpPr><p:spPr><a:xfrm><a:off x="762000" y="1714500"/><a:ext cx="12192000" cy="391160"/></a:xfrm><p:txBody><a:bodyPr wrap="square" rtlCol="0" anchor="t"/><a:lstStyle/><a:p><a:pPr algn="l"/><a:r><a:rPr lang="en-US" sz="22" b="0" i="0" u="none"><a:solidFill><a:srgbClr val="00D2FF"/></a:solidFill></a:rPr><a:t>跨平台支持</a:t></a:r></a:p></p:txBody></p:sp><p:sp><p:nvSpPr><p:cNvPr id="6" name="Shape"/><p:cNvSpPr/><p:nvPr/></p:nvSpPr><p:spPr><a:xfrm><a:off x="762000" y="1905000"/><a:ext cx="3238500" cy="762000"/></a:xfrm><a:prstGeom prst="roundRect"><a:avLst><a:gd name="adj" fmla="val 2353"/></a:avLst></a:prstGeom><a:solidFill><a:srgbClr val="00D2FF"><a:alpha val="100000"/></a:srgbClr></a:solidFill><a:ln w="12700"><a:solidFill><a:srgbClr val="00D2FF"><a:alpha val="100000"/></a:srgbClr></a:solidFill></a:ln></p:sp><p:sp><p:nvSpPr><p:cNvPr id="7" name="TextBox"/><p:cNvSpPr/><p:nvPr/></p:nvSpPr><p:spPr><a:xfrm><a:off x="-3714750" y="2238375"/><a:ext cx="12192000" cy="320040"/></a:xfrm><p:txBody><a:bodyPr wrap="square" rtlCol="0" anchor="t"/><a:lstStyle/><a:p><a:pPr algn="ctr"/><a:r><a:rPr lang="en-US" sz="18" b="0" i="0" u="none"><a:solidFill><a:srgbClr val="FFFFFF"/></a:solidFill></a:rPr><a:t>Windows</a:t></a:r></a:p></p:txBody></p:sp><p:sp><p:nvSpPr><p:cNvPr id="8" name="TextBox"/><p:cNvSpPr/><p:nvPr/></p:nvSpPr><p:spPr><a:xfrm><a:off x="-3714750" y="2457450"/><a:ext cx="12192000" cy="231140"/></a:xfrm><p:txBody><a:bodyPr wrap="square" rtlCol="0" anchor="t"/><a:lstStyle/><a:p><a:pPr algn="ctr"/><a:r><a:rPr lang="en-US" sz="13" b="0" i="0" u="none"><a:solidFill><a:srgbClr val="7090B0"/></a:solidFill></a:rPr><a:t>Windows 10/11 · NSIS/MSI 安装</a:t></a:r></a:p></p:txBody></p:sp><p:sp><p:nvSpPr><p:cNvPr id="9" name="Shape"/><p:cNvSpPr/><p:nvPr/></p:nvSpPr><p:spPr><a:xfrm><a:off x="4476750" y="1905000"/><a:ext cx="3238500" cy="762000"/></a:xfrm><a:prstGeom prst="roundRect"><a:avLst><a:gd name="adj" fmla="val 2353"/></a:avLst></a:prstGeom><a:solidFill><a:srgbClr val="3A7BD5"><a:alpha val="100000"/></a:srgbClr></a:solidFill><a:ln w="12700"><a:solidFill><a:srgbClr val="3A7BD5"><a:alpha val="100000"/></a:srgbClr></a:solidFill></a:ln></p:sp><p:sp><p:nvSpPr><p:cNvPr id="10" name="TextBox"/><p:cNvSpPr/><p:nvPr/></p:nvSpPr><p:spPr><a:xfrm><a:off x="0" y="2238375"/><a:ext cx="12192000" cy="320040"/></a:xfrm><p:txBody><a:bodyPr wrap="square" rtlCol="0" anchor="t"/><a:lstStyle/><a:p><a:pPr algn="ctr"/><a:r><a:rPr lang="en-US" sz="18" b="0" i="0" u="none"><a:solidFill><a:srgbClr val="FFFFFF"/></a:solidFill></a:rPr><a:t>macOS</a:t></a:r></a:p></p:txBody></p:sp><p:sp><p:nvSpPr><p:cNvPr id="11" name="TextBox"/><p:cNvSpPr/><p:nvPr/></p:nvSpPr><p:spPr><a:xfrm><a:off x="0" y="2457450"/><a:ext cx="12192000" cy="231140"/></a:xfrm><p:txBody><a:bodyPr wrap="square" rtlCol="0" anchor="t"/><a:lstStyle/><a:p><a:pPr algn="ctr"/><a:r><a:rPr lang="en-US" sz="13" b="0" i="0" u="none"><a:solidFill><a:srgbClr val="7090B0"/></a:solidFill></a:rPr><a:t>.dmg 构建</a:t></a:r></a:p></p:txBody></p:sp><p:sp><p:nvSpPr><p:cNvPr id="12" name="Shape"/><p:cNvSpPr/><p:nvPr/></p:nvSpPr><p:spPr><a:xfrm><a:off x="8191500" y="1905000"/><a:ext cx="3238500" cy="762000"/></a:xfrm><a:prstGeom prst="roundRect"><a:avLst><a:gd name="adj" fmla="val 2353"/></a:avLst></a:prstGeom><a:solidFill><a:srgbClr val="64C896"><a:alpha val="100000"/></a:srgbClr></a:solidFill><a:ln w="12700"><a:solidFill><a:srgbClr val="64C896"><a:alpha val="100000"/></a:srgbClr></a:solidFill></a:ln></p:sp><p:sp><p:nvSpPr><p:cNvPr id="13" name="TextBox"/><p:cNvSpPr/><p:nvPr/></p:nvSpPr><p:spPr><a:xfrm><a:off x="3714750" y="2238375"/><a:ext cx="12192000" cy="320040"/></a:xfrm><p:txBody><a:bodyPr wrap="square" rtlCol="0" anchor="t"/><a:lstStyle/><a:p><a:pPr algn="ctr"/><a:r><a:rPr lang="en-US" sz="18" b="0" i="0" u="none"><a:solidFill><a:srgbClr val="FFFFFF"/></a:solidFill></a:rPr><a:t>Linux</a:t></a:r></a:p></p:txBody></p:sp><p:sp><p:nvSpPr><p:cNvPr id="14" name="TextBox"/><p:cNvSpPr/><p:nvPr/></p:nvSpPr><p:spPr><a:xfrm><a:off x="3714750" y="2457450"/><a:ext cx="12192000" cy="231140"/></a:xfrm><p:txBody><a:bodyPr wrap="square" rtlCol="0" anchor="t"/><a:lstStyle/><a:p><a:pPr algn="ctr"/><a:r><a:rPr lang="en-US" sz="13" b="0" i="0" u="none"><a:solidFill><a:srgbClr val="7090B0"/></a:solidFill></a:rPr><a:t>.deb / AppImage 构建</a:t></a:r></a:p></p:txBody></p:sp><p:sp><p:nvSpPr><p:cNvPr id="15" name="TextBox"/><p:cNvSpPr/><p:nvPr/></p:nvSpPr><p:spPr><a:xfrm><a:off x="762000" y="3333750"/><a:ext cx="12192000" cy="391160"/></a:xfrm><p:txBody><a:bodyPr wrap="square" rtlCol="0" anchor="t"/><a:lstStyle/><a:p><a:pPr algn="l"/><a:r><a:rPr lang="en-US" sz="22" b="0" i="0" u="none"><a:solidFill><a:srgbClr val="5A9BE5"/></a:solidFill></a:rPr><a:t>适用场景</a:t></a:r></a:p></p:txBody></p:sp><p:sp><p:nvSpPr><p:cNvPr id="16" name="Shape"/><p:cNvSpPr/><p:nvPr/></p:nvSpPr><p:spPr><a:xfrm><a:off x="762000" y="3524250"/><a:ext cx="2428875" cy="1143000"/></a:xfrm><a:prstGeom prst="roundRect"><a:avLst><a:gd name="adj" fmla="val 3922"/></a:avLst></a:prstGeom><a:solidFill><a:srgbClr val="00D2FF"><a:alpha val="100000"/></a:srgbClr></a:solidFill><a:ln w="12700"><a:solidFill><a:srgbClr val="00D2FF"><a:alpha val="100000"/></a:srgbClr></a:solidFill></a:ln></p:sp><p:sp><p:nvSpPr><p:cNvPr id="17" name="TextBox"/><p:cNvSpPr/><p:nvPr/></p:nvSpPr><p:spPr><a:xfrm><a:off x="-4124325" y="3810000"/><a:ext cx="12192000" cy="284480"/></a:xfrm><p:txBody><a:bodyPr wrap="square" rtlCol="0" anchor="t"/><a:lstStyle/><a:p><a:pPr algn="ctr"/><a:r><a:rPr lang="en-US" sz="16" b="0" i="0" u="none"><a:solidFill><a:srgbClr val="00D2FF"/></a:solidFill></a:rPr><a:t>开发者</a:t></a:r></a:p></p:txBody></p:sp><p:sp><p:nvSpPr><p:cNvPr id="18" name="TextBox"/><p:cNvSpPr/><p:nvPr/></p:nvSpPr><p:spPr><a:xfrm><a:off x="952500" y="4076700"/><a:ext cx="12192000" cy="231140"/></a:xfrm><p:txBody><a:bodyPr wrap="square" rtlCol="0" anchor="t"/><a:lstStyle/><a:p><a:pPr algn="l"/><a:r><a:rPr lang="en-US" sz="13" b="0" i="0" u="none"><a:solidFill><a:srgbClr val="A0B4C8"/></a:solidFill></a:rPr><a:t>技术文档编写</a:t></a:r></a:p></p:txBody></p:sp><p:sp><p:nvSpPr><p:cNvPr id="19" name="TextBox"/><p:cNvSpPr/><p:nvPr/></p:nvSpPr><p:spPr><a:xfrm><a:off x="952500" y="4286250"/><a:ext cx="12192000" cy="231140"/></a:xfrm><p:txBody><a:bodyPr wrap="square" rtlCol="0" anchor="t"/><a:lstStyle/><a:p><a:pPr algn="l"/><a:r><a:rPr lang="en-US" sz="13" b="0" i="0" u="none"><a:solidFill><a:srgbClr val="A0B4C8"/></a:solidFill></a:rPr><a:t>代码阅读与编辑</a:t></a:r></a:p></p:txBody></p:sp><p:sp><p:nvSpPr><p:cNvPr id="20" name="TextBox"/><p:cNvSpPr/><p:nvPr/></p:nvSpPr><p:spPr><a:xfrm><a:off x="952500" y="4495800"/><a:ext cx="12192000" cy="231140"/></a:xfrm><p:txBody><a:bodyPr wrap="square" rtlCol="0" anchor="t"/><a:lstStyle/><a:p><a:pPr algn="l"/><a:r><a:rPr lang="en-US" sz="13" b="0" i="0" u="none"><a:solidFill><a:srgbClr val="A0B4C8"/></a:solidFill></a:rPr><a:t>AI 辅助编程</a:t></a:r></a:p></p:txBody></p:sp><p:sp><p:nvSpPr><p:cNvPr id="21" name="Shape"/><p:cNvSpPr/><p:nvPr/></p:nvSpPr><p:spPr><a:xfrm><a:off x="3381375" y="3524250"/><a:ext cx="2428875" cy="1143000"/></a:xfrm><a:prstGeom prst="roundRect"><a:avLst><a:gd name="adj" fmla="val 3922"/></a:avLst></a:prstGeom><a:solidFill><a:srgbClr val="3A7BD5"><a:alpha val="100000"/></a:srgbClr></a:solidFill><a:ln w="12700"><a:solidFill><a:srgbClr val="3A7BD5"><a:alpha val="100000"/></a:srgbClr></a:solidFill></a:ln></p:sp><p:sp><p:nvSpPr><p:cNvPr id="22" name="TextBox"/><p:cNvSpPr/><p:nvPr/></p:nvSpPr><p:spPr><a:xfrm><a:off x="-1504950" y="3810000"/><a:ext cx="12192000" cy="284480"/></a:xfrm><p:txBody><a:bodyPr wrap="square" rtlCol="0" anchor="t"/><a:lstStyle/><a:p><a:pPr algn="ctr"/><a:r><a:rPr lang="en-US" sz="16" b="0" i="0" u="none"><a:solidFill><a:srgbClr val="5A9BE5"/></a:solidFill></a:rPr><a:t>写作者</a:t></a:r></a:p></p:txBody></p:sp><p:sp><p:nvSpPr><p:cNvPr id="23" name="TextBox"/><p:cNvSpPr/><p:nvPr/></p:nvSpPr><p:spPr><a:xfrm><a:off x="3571875" y="4076700"/><a:ext cx="12192000" cy="231140"/></a:xfrm><p:txBody><a:bodyPr wrap="square" rtlCol="0" anchor="t"/><a:lstStyle/><a:p><a:pPr algn="l"/><a:r><a:rPr lang="en-US" sz="13" b="0" i="0" u="none"><a:solidFill><a:srgbClr val="A0B4C8"/></a:solidFill></a:rPr><a:t>Markdown/Word 创作</a:t></a:r></a:p></p:txBody></p:sp><p:sp><p:nvSpPr><p:cNvPr id="24" name="TextBox"/><p:cNvSpPr/><p:nvPr/></p:nvSpPr><p:spPr><a:xfrm><a:off x="3571875" y="4286250"/><a:ext cx="12192000" cy="231140"/></a:xfrm><p:txBody><a:bodyPr wrap="square" rtlCol="0" anchor="t"/><a:lstStyle/><a:p><a:pPr algn="l"/><a:r><a:rPr lang="en-US" sz="13" b="0" i="0" u="none"><a:solidFill><a:srgbClr val="A0B4C8"/></a:solidFill></a:rPr><a:t>AI 辅助润色</a:t></a:r></a:p></p:txBody></p:sp><p:sp><p:nvSpPr><p:cNvPr id="25" name="TextBox"/><p:cNvSpPr/><p:nvPr/></p:nvSpPr><p:spPr><a:xfrm><a:off x="3571875" y="4495800"/><a:ext cx="12192000" cy="231140"/></a:xfrm><p:txBody><a:bodyPr wrap="square" rtlCol="0" anchor="t"/><a:lstStyle/><a:p><a:pPr algn="l"/><a:r><a:rPr lang="en-US" sz="13" b="0" i="0" u="none"><a:solidFill><a:srgbClr val="A0B4C8"/></a:solidFill></a:rPr><a:t>多格式输出</a:t></a:r></a:p></p:txBody></p:sp><p:sp><p:nvSpPr><p:cNvPr id="26" name="Shape"/><p:cNvSpPr/><p:nvPr/></p:nvSpPr><p:spPr><a:xfrm><a:off x="6000750" y="3524250"/><a:ext cx="2428875" cy="1143000"/></a:xfrm><a:prstGeom prst="roundRect"><a:avLst><a:gd name="adj" fmla="val 3922"/></a:avLst></a:prstGeom><a:solidFill><a:srgbClr val="64C896"><a:alpha val="100000"/></a:srgbClr></a:solidFill><a:ln w="12700"><a:solidFill><a:srgbClr val="64C896"><a:alpha val="100000"/></a:srgbClr></a:solidFill></a:ln></p:sp><p:sp><p:nvSpPr><p:cNvPr id="27" name="TextBox"/><p:cNvSpPr/><p:nvPr/></p:nvSpPr><p:spPr><a:xfrm><a:off x="1114425" y="3810000"/><a:ext cx="12192000" cy="284480"/></a:xfrm><p:txBody><a:bodyPr wrap="square" rtlCol="0" anchor="t"/><a:lstStyle/><a:p><a:pPr algn="ctr"/><a:r><a:rPr lang="en-US" sz="16" b="0" i="0" u="none"><a:solidFill><a:srgbClr val="6CC8A0"/></a:solidFill></a:rPr><a:t>数据分析师</a:t></a:r></a:p></p:txBody></p:sp><p:sp><p:nvSpPr><p:cNvPr id="28" name="TextBox"/><p:cNvSpPr/><p:nvPr/></p:nvSpPr><p:spPr><a:xfrm><a:off x="6191250" y="4076700"/><a:ext cx="12192000" cy="231140"/></a:xfrm><p:txBody><a:bodyPr wrap="square" rtlCol="0" anchor="t"/><a:lstStyle/><a:p><a:pPr algn="l"/><a:r><a:rPr lang="en-US" sz="13" b="0" i="0" u="none"><a:solidFill><a:srgbClr val="A0B4C8"/></a:solidFill></a:rPr><a:t>表格数据处理</a:t></a:r></a:p></p:txBody></p:sp><p:sp><p:nvSpPr><p:cNvPr id="29" name="TextBox"/><p:cNvSpPr/><p:nvPr/></p:nvSpPr><p:spPr><a:xfrm><a:off x="6191250" y="4286250"/><a:ext cx="12192000" cy="231140"/></a:xfrm><p:txBody><a:bodyPr wrap="square" rtlCol="0" anchor="t"/><a:lstStyle/><a:p><a:pPr algn="l"/><a:r><a:rPr lang="en-US" sz="13" b="0" i="0" u="none"><a:solidFill><a:srgbClr val="A0B4C8"/></a:solidFill></a:rPr><a:t>公式运算</a:t></a:r></a:p></p:txBody></p:sp><p:sp><p:nvSpPr><p:cNvPr id="30" name="TextBox"/><p:cNvSpPr/><p:nvPr/></p:nvSpPr><p:spPr><a:xfrm><a:off x="6191250" y="4495800"/><a:ext cx="12192000" cy="231140"/></a:xfrm><p:txBody><a:bodyPr wrap="square" rtlCol="0" anchor="t"/><a:lstStyle/><a:p><a:pPr algn="l"/><a:r><a:rPr lang="en-US" sz="13" b="0" i="0" u="none"><a:solidFill><a:srgbClr val="A0B4C8"/></a:solidFill></a:rPr><a:t>报告生成</a:t></a:r></a:p></p:txBody></p:sp><p:sp><p:nvSpPr><p:cNvPr id="31" name="Shape"/><p:cNvSpPr/><p:nvPr/></p:nvSpPr><p:spPr><a:xfrm><a:off x="8620125" y="3524250"/><a:ext cx="2428875" cy="1143000"/></a:xfrm><a:prstGeom prst="roundRect"><a:avLst><a:gd name="adj" fmla="val 3922"/></a:avLst></a:prstGeom><a:solidFill><a:srgbClr val="C89650"><a:alpha val="100000"/></a:srgbClr></a:solidFill><a:ln w="12700"><a:solidFill><a:srgbClr val="C89650"><a:alpha val="100000"/></a:srgbClr></a:solidFill></a:ln></p:sp><p:sp><p:nvSpPr><p:cNvPr id="32" name="TextBox"/><p:cNvSpPr/><p:nvPr/></p:nvSpPr><p:spPr><a:xfrm><a:off x="3733800" y="3810000"/><a:ext cx="12192000" cy="284480"/></a:xfrm><p:txBody><a:bodyPr wrap="square" rtlCol="0" anchor="t"/><a:lstStyle/><a:p><a:pPr algn="ctr"/><a:r><a:rPr lang="en-US" sz="16" b="0" i="0" u="none"><a:solidFill><a:srgbClr val="C8A050"/></a:solidFill></a:rPr><a:t>项目经理</a:t></a:r></a:p></p:txBody></p:sp><p:sp><p:nvSpPr><p:cNvPr id="33" name="TextBox"/><p:cNvSpPr/><p:nvPr/></p:nvSpPr><p:spPr><a:xfrm><a:off x="8810625" y="4076700"/><a:ext cx="12192000" cy="231140"/></a:xfrm><p:txBody><a:bodyPr wrap="square" rtlCol="0" anchor="t"/><a:lstStyle/><a:p><a:pPr algn="l"/><a:r><a:rPr lang="en-US" sz="13" b="0" i="0" u="none"><a:solidFill><a:srgbClr val="A0B4C8"/></a:solidFill></a:rPr><a:t>项目文档审阅</a:t></a:r></a:p></p:txBody></p:sp><p:sp><p:nvSpPr><p:cNvPr id="34" name="TextBox"/><p:cNvSpPr/><p:nvPr/></p:nvSpPr><p:spPr><a:xfrm><a:off x="8810625" y="4286250"/><a:ext cx="12192000" cy="231140"/></a:xfrm><p:txBody><a:bodyPr wrap="square" rtlCol="0" anchor="t"/><a:lstStyle/><a:p><a:pPr algn="l"/><a:r><a:rPr lang="en-US" sz="13" b="0" i="0" u="none"><a:solidFill><a:srgbClr val="A0B4C8"/></a:solidFill></a:rPr><a:t>协作流程管理</a:t></a:r></a:p></p:txBody></p:sp><p:sp><p:nvSpPr><p:cNvPr id="35" name="TextBox"/><p:cNvSpPr/><p:nvPr/></p:nvSpPr><p:spPr><a:xfrm><a:off x="8810625" y="4495800"/><a:ext cx="12192000" cy="231140"/></a:xfrm><p:txBody><a:bodyPr wrap="square" rtlCol="0" anchor="t"/><a:lstStyle/><a:p><a:pPr algn="l"/><a:r><a:rPr lang="en-US" sz="13" b="0" i="0" u="none"><a:solidFill><a:srgbClr val="A0B4C8"/></a:solidFill></a:rPr><a:t>知识库维护</a:t></a:r></a:p></p:txBody></p:sp><p:sp><p:nvSpPr><p:cNvPr id="36" name="TextBox"/><p:cNvSpPr/><p:nvPr/></p:nvSpPr><p:spPr><a:xfrm><a:off x="762000" y="5143500"/><a:ext cx="12192000" cy="248920"/></a:xfrm><p:txBody><a:bodyPr wrap="square" rtlCol="0" anchor="t"/><a:lstStyle/><a:p><a:pPr algn="l"/><a:r><a:rPr lang="en-US" sz="14" b="0" i="0" u="none"><a:solidFill><a:srgbClr val="6080A0"/></a:solidFill></a:rPr><a:t>更多场景：研究人员（PDF 阅读与知识整理）· 学生（笔记与作业）· 团队协作（云端同步）</a:t></a:r></a:p></p:txBody></p:sp></p:spTree></p:cSld></p:sld>
 </file>
 
-<file path=ppt/slides/slide8.xml><?xml version="1.0" encoding="UTF-8" standalone="yes"?><p:sld xmlns:a="http://schemas.openxmlformats.org/drawingml/2006/main" xmlns:r="http://schemas.openxmlformats.org/officeDocument/2006/relationships" xmlns:p="http://schemas.openxmlformats.org/presentationml/2006/main"><p:cSld><p:spTree><p:nvGrpSpPr><p:cNvPr id="1" name=""/><p:cNvGrpSpPr/><p:nvPr/></p:nvGrpSpPr><p:grpSpPr><a:xfrm><a:off x="0" y="0"/><a:ext cx="0" cy="0"/><a:chOff x="0" y="0"/><a:chExt cx="0" cy="0"/></a:xfrm></p:grpSpPr><p:sp><p:nvSpPr><p:cNvPr id="100" name="Shape"/><p:cNvSpPr/><p:nvPr/></p:nvSpPr><p:spPr><a:xfrm><a:off x="0" y="0"/><a:ext cx="12192000" cy="6858000"/></a:xfrm><a:prstGeom prst="rect"><a:avLst/></a:prstGeom><a:solidFill><a:srgbClr val="1A1A2E"><a:alpha val="100000"/></a:srgbClr></a:solidFill><a:ln><a:noFill/></a:ln></p:sp><p:sp><p:nvSpPr><p:cNvPr id="100" name="Shape"/><p:cNvSpPr/><p:nvPr/></p:nvSpPr><p:spPr><a:xfrm><a:off x="3429000" y="762000"/><a:ext cx="5334000" cy="5334000"/></a:xfrm><a:prstGeom prst="ellipse"><a:avLst/></a:prstGeom><a:noFill/><a:ln w="12700"><a:solidFill><a:srgbClr val="FFFFFF"><a:alpha val="100000"/></a:srgbClr></a:solidFill></a:ln></p:sp><p:sp><p:nvSpPr><p:cNvPr id="100" name="Shape"/><p:cNvSpPr/><p:nvPr/></p:nvSpPr><p:spPr><a:xfrm><a:off x="4191000" y="1524000"/><a:ext cx="3810000" cy="3810000"/></a:xfrm><a:prstGeom prst="ellipse"><a:avLst/></a:prstGeom><a:noFill/><a:ln w="6350"><a:solidFill><a:srgbClr val="FFFFFF"><a:alpha val="100000"/></a:srgbClr></a:solidFill></a:ln></p:sp><p:sp><p:nvSpPr><p:cNvPr id="100" name="Shape"/><p:cNvSpPr/><p:nvPr/></p:nvSpPr><p:spPr><a:xfrm><a:off x="5143500" y="1905000"/><a:ext cx="1905000" cy="38100"/></a:xfrm><a:prstGeom prst="roundRect"><a:avLst><a:gd name="adj" fmla="val 1000"/></a:avLst></a:prstGeom><a:solidFill><a:srgbClr val="00D2FF"><a:alpha val="100000"/></a:srgbClr></a:solidFill><a:ln><a:noFill/></a:ln></p:sp><p:sp><p:nvSpPr><p:cNvPr id="100" name="TextBox"/><p:cNvSpPr/><p:nvPr/></p:nvSpPr><p:spPr><a:xfrm><a:off x="0" y="2857500"/><a:ext cx="12192000" cy="853440"/></a:xfrm><p:txBody><a:bodyPr wrap="square" rtlCol="0" anchor="t"/><a:lstStyle/><a:p><a:pPr algn="ctr"/><a:r><a:rPr lang="en-US" sz="48" b="0" i="0" u="none"><a:solidFill><a:srgbClr val="FFFFFF"/></a:solidFill></a:rPr><a:t>InkUO</a:t></a:r></a:p></p:txBody></p:sp><p:sp><p:nvSpPr><p:cNvPr id="100" name="TextBox"/><p:cNvSpPr/><p:nvPr/></p:nvSpPr><p:spPr><a:xfrm><a:off x="0" y="3429000"/><a:ext cx="12192000" cy="391160"/></a:xfrm><p:txBody><a:bodyPr wrap="square" rtlCol="0" anchor="t"/><a:lstStyle/><a:p><a:pPr algn="ctr"/><a:r><a:rPr lang="en-US" sz="22" b="0" i="0" u="none"><a:solidFill><a:srgbClr val="A0B4D8"/></a:solidFill></a:rPr><a:t>AI 文档编辑中枢</a:t></a:r></a:p></p:txBody></p:sp><p:sp><p:nvSpPr><p:cNvPr id="100" name="TextBox"/><p:cNvSpPr/><p:nvPr/></p:nvSpPr><p:spPr><a:xfrm><a:off x="0" y="4000500"/><a:ext cx="12192000" cy="284480"/></a:xfrm><p:txBody><a:bodyPr wrap="square" rtlCol="0" anchor="t"/><a:lstStyle/><a:p><a:pPr algn="ctr"/><a:r><a:rPr lang="en-US" sz="16" b="0" i="0" u="none"><a:solidFill><a:srgbClr val="6C8EB0"/></a:solidFill></a:rPr><a:t>融合 AI 智能与多格式编辑能力 · 让文档创作更高效、更智能</a:t></a:r></a:p></p:txBody></p:sp><p:sp><p:nvSpPr><p:cNvPr id="100" name="TextBox"/><p:cNvSpPr/><p:nvPr/></p:nvSpPr><p:spPr><a:xfrm><a:off x="0" y="4476750"/><a:ext cx="12192000" cy="248920"/></a:xfrm><p:txBody><a:bodyPr wrap="square" rtlCol="0" anchor="t"/><a:lstStyle/><a:p><a:pPr algn="ctr"/><a:r><a:rPr lang="en-US" sz="14" b="0" i="0" u="none"><a:solidFill><a:srgbClr val="4A6A8A"/></a:solidFill></a:rPr><a:t>开源 · 跨平台 · 可扩展</a:t></a:r></a:p></p:txBody></p:sp><p:sp><p:nvSpPr><p:cNvPr id="100" name="Shape"/><p:cNvSpPr/><p:nvPr/></p:nvSpPr><p:spPr><a:xfrm><a:off x="4667250" y="4953000"/><a:ext cx="2857500" cy="419100"/></a:xfrm><a:prstGeom prst="roundRect"><a:avLst><a:gd name="adj" fmla="val 7333"/></a:avLst></a:prstGeom><a:solidFill><a:srgbClr val="00D2FF"><a:alpha val="100000"/></a:srgbClr></a:solidFill><a:ln w="12700"><a:solidFill><a:srgbClr val="00D2FF"><a:alpha val="100000"/></a:srgbClr></a:solidFill></a:ln></p:sp><p:sp><p:nvSpPr><p:cNvPr id="100" name="TextBox"/><p:cNvSpPr/><p:nvPr/></p:nvSpPr><p:spPr><a:xfrm><a:off x="0" y="5219700"/><a:ext cx="12192000" cy="266700"/></a:xfrm><p:txBody><a:bodyPr wrap="square" rtlCol="0" anchor="t"/><a:lstStyle/><a:p><a:pPr algn="ctr"/><a:r><a:rPr lang="en-US" sz="15" b="0" i="0" u="none"><a:solidFill><a:srgbClr val="00D2FF"/></a:solidFill></a:rPr><a:t>github.com/inkuo/inkuo</a:t></a:r></a:p></p:txBody></p:sp></p:spTree></p:cSld></p:sld>
+<file path=ppt/slides/slide8.xml><?xml version="1.0" encoding="UTF-8" standalone="yes"?><p:sld xmlns:a="http://schemas.openxmlformats.org/drawingml/2006/main" xmlns:r="http://schemas.openxmlformats.org/officeDocument/2006/relationships" xmlns:p="http://schemas.openxmlformats.org/presentationml/2006/main"><p:cSld><p:spTree><p:nvGrpSpPr><p:cNvPr id="1" name=""/><p:cNvGrpSpPr/><p:nvPr/></p:nvGrpSpPr><p:grpSpPr><a:xfrm><a:off x="0" y="0"/><a:ext cx="0" cy="0"/><a:chOff x="0" y="0"/><a:chExt cx="0" cy="0"/></a:xfrm></p:grpSpPr><p:sp><p:nvSpPr><p:cNvPr id="2" name="Shape"/><p:cNvSpPr/><p:nvPr/></p:nvSpPr><p:spPr><a:xfrm><a:off x="0" y="0"/><a:ext cx="12192000" cy="6858000"/></a:xfrm><a:prstGeom prst="rect"><a:avLst/></a:prstGeom><a:solidFill><a:srgbClr val="1A1A2E"><a:alpha val="100000"/></a:srgbClr></a:solidFill><a:ln><a:noFill/></a:ln></p:sp><p:sp><p:nvSpPr><p:cNvPr id="3" name="Shape"/><p:cNvSpPr/><p:nvPr/></p:nvSpPr><p:spPr><a:xfrm><a:off x="3429000" y="762000"/><a:ext cx="5334000" cy="5334000"/></a:xfrm><a:prstGeom prst="ellipse"><a:avLst/></a:prstGeom><a:noFill/><a:ln w="12700"><a:solidFill><a:srgbClr val="FFFFFF"><a:alpha val="100000"/></a:srgbClr></a:solidFill></a:ln></p:sp><p:sp><p:nvSpPr><p:cNvPr id="4" name="Shape"/><p:cNvSpPr/><p:nvPr/></p:nvSpPr><p:spPr><a:xfrm><a:off x="4191000" y="1524000"/><a:ext cx="3810000" cy="3810000"/></a:xfrm><a:prstGeom prst="ellipse"><a:avLst/></a:prstGeom><a:noFill/><a:ln w="6350"><a:solidFill><a:srgbClr val="FFFFFF"><a:alpha val="100000"/></a:srgbClr></a:solidFill></a:ln></p:sp><p:sp><p:nvSpPr><p:cNvPr id="5" name="Shape"/><p:cNvSpPr/><p:nvPr/></p:nvSpPr><p:spPr><a:xfrm><a:off x="5143500" y="1905000"/><a:ext cx="1905000" cy="38100"/></a:xfrm><a:prstGeom prst="roundRect"><a:avLst><a:gd name="adj" fmla="val 1000"/></a:avLst></a:prstGeom><a:solidFill><a:srgbClr val="00D2FF"><a:alpha val="100000"/></a:srgbClr></a:solidFill><a:ln><a:noFill/></a:ln></p:sp><p:sp><p:nvSpPr><p:cNvPr id="6" name="TextBox"/><p:cNvSpPr/><p:nvPr/></p:nvSpPr><p:spPr><a:xfrm><a:off x="0" y="2857500"/><a:ext cx="12192000" cy="853440"/></a:xfrm><p:txBody><a:bodyPr wrap="square" rtlCol="0" anchor="t"/><a:lstStyle/><a:p><a:pPr algn="ctr"/><a:r><a:rPr lang="en-US" sz="48" b="0" i="0" u="none"><a:solidFill><a:srgbClr val="FFFFFF"/></a:solidFill></a:rPr><a:t>InkUO</a:t></a:r></a:p></p:txBody></p:sp><p:sp><p:nvSpPr><p:cNvPr id="7" name="TextBox"/><p:cNvSpPr/><p:nvPr/></p:nvSpPr><p:spPr><a:xfrm><a:off x="0" y="3429000"/><a:ext cx="12192000" cy="391160"/></a:xfrm><p:txBody><a:bodyPr wrap="square" rtlCol="0" anchor="t"/><a:lstStyle/><a:p><a:pPr algn="ctr"/><a:r><a:rPr lang="en-US" sz="22" b="0" i="0" u="none"><a:solidFill><a:srgbClr val="A0B4D8"/></a:solidFill></a:rPr><a:t>AI 文档编辑中枢</a:t></a:r></a:p></p:txBody></p:sp><p:sp><p:nvSpPr><p:cNvPr id="8" name="TextBox"/><p:cNvSpPr/><p:nvPr/></p:nvSpPr><p:spPr><a:xfrm><a:off x="0" y="4000500"/><a:ext cx="12192000" cy="284480"/></a:xfrm><p:txBody><a:bodyPr wrap="square" rtlCol="0" anchor="t"/><a:lstStyle/><a:p><a:pPr algn="ctr"/><a:r><a:rPr lang="en-US" sz="16" b="0" i="0" u="none"><a:solidFill><a:srgbClr val="6C8EB0"/></a:solidFill></a:rPr><a:t>融合 AI 智能与多格式编辑能力 · 让文档创作更高效、更智能</a:t></a:r></a:p></p:txBody></p:sp><p:sp><p:nvSpPr><p:cNvPr id="9" name="TextBox"/><p:cNvSpPr/><p:nvPr/></p:nvSpPr><p:spPr><a:xfrm><a:off x="0" y="4476750"/><a:ext cx="12192000" cy="248920"/></a:xfrm><p:txBody><a:bodyPr wrap="square" rtlCol="0" anchor="t"/><a:lstStyle/><a:p><a:pPr algn="ctr"/><a:r><a:rPr lang="en-US" sz="14" b="0" i="0" u="none"><a:solidFill><a:srgbClr val="4A6A8A"/></a:solidFill></a:rPr><a:t>开源 · 跨平台 · 可扩展</a:t></a:r></a:p></p:txBody></p:sp><p:sp><p:nvSpPr><p:cNvPr id="10" name="Shape"/><p:cNvSpPr/><p:nvPr/></p:nvSpPr><p:spPr><a:xfrm><a:off x="4667250" y="4953000"/><a:ext cx="2857500" cy="419100"/></a:xfrm><a:prstGeom prst="roundRect"><a:avLst><a:gd name="adj" fmla="val 7333"/></a:avLst></a:prstGeom><a:solidFill><a:srgbClr val="00D2FF"><a:alpha val="100000"/></a:srgbClr></a:solidFill><a:ln w="12700"><a:solidFill><a:srgbClr val="00D2FF"><a:alpha val="100000"/></a:srgbClr></a:solidFill></a:ln></p:sp><p:sp><p:nvSpPr><p:cNvPr id="11" name="TextBox"/><p:cNvSpPr/><p:nvPr/></p:nvSpPr><p:spPr><a:xfrm><a:off x="0" y="5219700"/><a:ext cx="12192000" cy="266700"/></a:xfrm><p:txBody><a:bodyPr wrap="square" rtlCol="0" anchor="t"/><a:lstStyle/><a:p><a:pPr algn="ctr"/><a:r><a:rPr lang="en-US" sz="15" b="0" i="0" u="none"><a:solidFill><a:srgbClr val="00D2FF"/></a:solidFill></a:rPr><a:t>github.com/inkuo/inkuo</a:t></a:r></a:p></p:txBody></p:sp></p:spTree></p:cSld></p:sld>
 </file>
 
 <file path=ppt/theme/theme1.xml><?xml version="1.0" encoding="utf-8"?>

--- a/test/InkUO-产品介绍.pptx
+++ b/test/InkUO-产品介绍.pptx
@@ -94,7 +94,7 @@
           <a:ln w="25400">
             <a:solidFill>
               <a:srgbClr val="FFFFFF">
-                <a:alpha val="100000"/>
+                <a:alpha val="3000"/>
               </a:srgbClr>
             </a:solidFill>
           </a:ln>
@@ -118,7 +118,7 @@
           <a:ln w="25400">
             <a:solidFill>
               <a:srgbClr val="FFFFFF">
-                <a:alpha val="100000"/>
+                <a:alpha val="3000"/>
               </a:srgbClr>
             </a:solidFill>
           </a:ln>
@@ -142,7 +142,7 @@
           <a:ln w="12700">
             <a:solidFill>
               <a:srgbClr val="FFFFFF">
-                <a:alpha val="100000"/>
+                <a:alpha val="2000"/>
               </a:srgbClr>
             </a:solidFill>
           </a:ln>
@@ -192,7 +192,7 @@
           <a:p>
             <a:pPr algn="ctr"/>
             <a:r>
-              <a:rPr lang="en-US" sz="64" b="0" i="0" u="none">
+              <a:rPr lang="en-US" sz="6400" b="0" i="0" u="none">
                 <a:solidFill>
                   <a:srgbClr val="FFFFFF"/>
                 </a:solidFill>
@@ -220,7 +220,7 @@
           <a:p>
             <a:pPr algn="ctr"/>
             <a:r>
-              <a:rPr lang="en-US" sz="28" b="0" i="0" u="none">
+              <a:rPr lang="en-US" sz="2800" b="0" i="0" u="none">
                 <a:solidFill>
                   <a:srgbClr val="A0B4D8"/>
                 </a:solidFill>
@@ -248,7 +248,7 @@
           <a:p>
             <a:pPr algn="ctr"/>
             <a:r>
-              <a:rPr lang="en-US" sz="18" b="0" i="0" u="none">
+              <a:rPr lang="en-US" sz="1800" b="0" i="0" u="none">
                 <a:solidFill>
                   <a:srgbClr val="6C8EB0"/>
                 </a:solidFill>
@@ -276,7 +276,7 @@
           <a:p>
             <a:pPr algn="ctr"/>
             <a:r>
-              <a:rPr lang="en-US" sz="14" b="0" i="0" u="none">
+              <a:rPr lang="en-US" sz="1400" b="0" i="0" u="none">
                 <a:solidFill>
                   <a:srgbClr val="4A6A8A"/>
                 </a:solidFill>
@@ -376,7 +376,7 @@
           <a:p>
             <a:pPr algn="l"/>
             <a:r>
-              <a:rPr lang="en-US" sz="36" b="0" i="0" u="none">
+              <a:rPr lang="en-US" sz="3600" b="0" i="0" u="none">
                 <a:solidFill>
                   <a:srgbClr val="FFFFFF"/>
                 </a:solidFill>
@@ -425,7 +425,7 @@
           <a:p>
             <a:pPr algn="l"/>
             <a:r>
-              <a:rPr lang="en-US" sz="18" b="0" i="0" u="none">
+              <a:rPr lang="en-US" sz="1800" b="0" i="0" u="none">
                 <a:solidFill>
                   <a:srgbClr val="C0D0E8"/>
                 </a:solidFill>
@@ -433,7 +433,7 @@
               <a:t>InkUO 是一款面向知识工作者、开发者和创意团队的</a:t>
             </a:r>
             <a:r>
-              <a:rPr lang="en-US" sz="18" b="0" i="0" u="none">
+              <a:rPr lang="en-US" sz="1800" b="0" i="0" u="none">
                 <a:solidFill>
                   <a:srgbClr val="C0D0E8"/>
                 </a:solidFill>
@@ -461,13 +461,13 @@
           </a:prstGeom>
           <a:solidFill>
             <a:srgbClr val="00D2FF">
-              <a:alpha val="100000"/>
+              <a:alpha val="8000"/>
             </a:srgbClr>
           </a:solidFill>
           <a:ln w="12700">
             <a:solidFill>
               <a:srgbClr val="00D2FF">
-                <a:alpha val="100000"/>
+                <a:alpha val="20000"/>
               </a:srgbClr>
             </a:solidFill>
           </a:ln>
@@ -491,7 +491,7 @@
           <a:p>
             <a:pPr algn="l"/>
             <a:r>
-              <a:rPr lang="en-US" sz="18" b="0" i="0" u="none">
+              <a:rPr lang="en-US" sz="1800" b="0" i="0" u="none">
                 <a:solidFill>
                   <a:srgbClr val="00D2FF"/>
                 </a:solidFill>
@@ -519,7 +519,7 @@
           <a:p>
             <a:pPr algn="l"/>
             <a:r>
-              <a:rPr lang="en-US" sz="14" b="0" i="0" u="none">
+              <a:rPr lang="en-US" sz="1400" b="0" i="0" u="none">
                 <a:solidFill>
                   <a:srgbClr val="8AA8C8"/>
                 </a:solidFill>
@@ -547,13 +547,13 @@
           </a:prstGeom>
           <a:solidFill>
             <a:srgbClr val="3A7BD5">
-              <a:alpha val="100000"/>
+              <a:alpha val="8000"/>
             </a:srgbClr>
           </a:solidFill>
           <a:ln w="12700">
             <a:solidFill>
               <a:srgbClr val="3A7BD5">
-                <a:alpha val="100000"/>
+                <a:alpha val="20000"/>
               </a:srgbClr>
             </a:solidFill>
           </a:ln>
@@ -577,7 +577,7 @@
           <a:p>
             <a:pPr algn="l"/>
             <a:r>
-              <a:rPr lang="en-US" sz="18" b="0" i="0" u="none">
+              <a:rPr lang="en-US" sz="1800" b="0" i="0" u="none">
                 <a:solidFill>
                   <a:srgbClr val="5A9BE5"/>
                 </a:solidFill>
@@ -605,7 +605,7 @@
           <a:p>
             <a:pPr algn="l"/>
             <a:r>
-              <a:rPr lang="en-US" sz="14" b="0" i="0" u="none">
+              <a:rPr lang="en-US" sz="1400" b="0" i="0" u="none">
                 <a:solidFill>
                   <a:srgbClr val="8AA8C8"/>
                 </a:solidFill>
@@ -633,13 +633,13 @@
           </a:prstGeom>
           <a:solidFill>
             <a:srgbClr val="64C896">
-              <a:alpha val="100000"/>
+              <a:alpha val="8000"/>
             </a:srgbClr>
           </a:solidFill>
           <a:ln w="12700">
             <a:solidFill>
               <a:srgbClr val="64C896">
-                <a:alpha val="100000"/>
+                <a:alpha val="20000"/>
               </a:srgbClr>
             </a:solidFill>
           </a:ln>
@@ -663,7 +663,7 @@
           <a:p>
             <a:pPr algn="l"/>
             <a:r>
-              <a:rPr lang="en-US" sz="18" b="0" i="0" u="none">
+              <a:rPr lang="en-US" sz="1800" b="0" i="0" u="none">
                 <a:solidFill>
                   <a:srgbClr val="6CC8A0"/>
                 </a:solidFill>
@@ -691,7 +691,7 @@
           <a:p>
             <a:pPr algn="l"/>
             <a:r>
-              <a:rPr lang="en-US" sz="14" b="0" i="0" u="none">
+              <a:rPr lang="en-US" sz="1400" b="0" i="0" u="none">
                 <a:solidFill>
                   <a:srgbClr val="8AA8C8"/>
                 </a:solidFill>
@@ -719,7 +719,7 @@
           <a:p>
             <a:pPr algn="l"/>
             <a:r>
-              <a:rPr lang="en-US" sz="16" b="0" i="0" u="none">
+              <a:rPr lang="en-US" sz="1600" b="0" i="0" u="none">
                 <a:solidFill>
                   <a:srgbClr val="7090B0"/>
                 </a:solidFill>
@@ -727,7 +727,7 @@
               <a:t>无论你是撰写技术文档、编辑报告、处理数据表格，</a:t>
             </a:r>
             <a:r>
-              <a:rPr lang="en-US" sz="16" b="0" i="0" u="none">
+              <a:rPr lang="en-US" sz="1600" b="0" i="0" u="none">
                 <a:solidFill>
                   <a:srgbClr val="7090B0"/>
                 </a:solidFill>
@@ -801,7 +801,7 @@
           <a:p>
             <a:pPr algn="l"/>
             <a:r>
-              <a:rPr lang="en-US" sz="36" b="0" i="0" u="none">
+              <a:rPr lang="en-US" sz="3600" b="0" i="0" u="none">
                 <a:solidFill>
                   <a:srgbClr val="FFFFFF"/>
                 </a:solidFill>
@@ -850,13 +850,13 @@
           </a:prstGeom>
           <a:solidFill>
             <a:srgbClr val="00D2FF">
-              <a:alpha val="100000"/>
+              <a:alpha val="6000"/>
             </a:srgbClr>
           </a:solidFill>
           <a:ln w="19050">
             <a:solidFill>
               <a:srgbClr val="00D2FF">
-                <a:alpha val="100000"/>
+                <a:alpha val="25000"/>
               </a:srgbClr>
             </a:solidFill>
           </a:ln>
@@ -880,7 +880,7 @@
           </a:prstGeom>
           <a:solidFill>
             <a:srgbClr val="00D2FF">
-              <a:alpha val="100000"/>
+              <a:alpha val="12000"/>
             </a:srgbClr>
           </a:solidFill>
           <a:ln>
@@ -906,7 +906,7 @@
           <a:p>
             <a:pPr algn="ctr"/>
             <a:r>
-              <a:rPr lang="en-US" sz="20" b="0" i="0" u="none">
+              <a:rPr lang="en-US" sz="2000" b="0" i="0" u="none">
                 <a:solidFill>
                   <a:srgbClr val="00D2FF"/>
                 </a:solidFill>
@@ -934,7 +934,7 @@
           <a:p>
             <a:pPr algn="l"/>
             <a:r>
-              <a:rPr lang="en-US" sz="15" b="0" i="0" u="none">
+              <a:rPr lang="en-US" sz="1500" b="0" i="0" u="none">
                 <a:solidFill>
                   <a:srgbClr val="B0C4D8"/>
                 </a:solidFill>
@@ -962,7 +962,7 @@
           <a:p>
             <a:pPr algn="l"/>
             <a:r>
-              <a:rPr lang="en-US" sz="15" b="0" i="0" u="none">
+              <a:rPr lang="en-US" sz="1500" b="0" i="0" u="none">
                 <a:solidFill>
                   <a:srgbClr val="B0C4D8"/>
                 </a:solidFill>
@@ -990,7 +990,7 @@
           <a:p>
             <a:pPr algn="l"/>
             <a:r>
-              <a:rPr lang="en-US" sz="15" b="0" i="0" u="none">
+              <a:rPr lang="en-US" sz="1500" b="0" i="0" u="none">
                 <a:solidFill>
                   <a:srgbClr val="B0C4D8"/>
                 </a:solidFill>
@@ -1018,7 +1018,7 @@
           <a:p>
             <a:pPr algn="l"/>
             <a:r>
-              <a:rPr lang="en-US" sz="15" b="0" i="0" u="none">
+              <a:rPr lang="en-US" sz="1500" b="0" i="0" u="none">
                 <a:solidFill>
                   <a:srgbClr val="B0C4D8"/>
                 </a:solidFill>
@@ -1046,13 +1046,13 @@
           </a:prstGeom>
           <a:solidFill>
             <a:srgbClr val="3A7BD5">
-              <a:alpha val="100000"/>
+              <a:alpha val="6000"/>
             </a:srgbClr>
           </a:solidFill>
           <a:ln w="19050">
             <a:solidFill>
               <a:srgbClr val="3A7BD5">
-                <a:alpha val="100000"/>
+                <a:alpha val="25000"/>
               </a:srgbClr>
             </a:solidFill>
           </a:ln>
@@ -1076,7 +1076,7 @@
           </a:prstGeom>
           <a:solidFill>
             <a:srgbClr val="3A7BD5">
-              <a:alpha val="100000"/>
+              <a:alpha val="12000"/>
             </a:srgbClr>
           </a:solidFill>
           <a:ln>
@@ -1102,7 +1102,7 @@
           <a:p>
             <a:pPr algn="ctr"/>
             <a:r>
-              <a:rPr lang="en-US" sz="20" b="0" i="0" u="none">
+              <a:rPr lang="en-US" sz="2000" b="0" i="0" u="none">
                 <a:solidFill>
                   <a:srgbClr val="5A9BE5"/>
                 </a:solidFill>
@@ -1130,7 +1130,7 @@
           <a:p>
             <a:pPr algn="l"/>
             <a:r>
-              <a:rPr lang="en-US" sz="15" b="0" i="0" u="none">
+              <a:rPr lang="en-US" sz="1500" b="0" i="0" u="none">
                 <a:solidFill>
                   <a:srgbClr val="B0C4D8"/>
                 </a:solidFill>
@@ -1158,7 +1158,7 @@
           <a:p>
             <a:pPr algn="l"/>
             <a:r>
-              <a:rPr lang="en-US" sz="15" b="0" i="0" u="none">
+              <a:rPr lang="en-US" sz="1500" b="0" i="0" u="none">
                 <a:solidFill>
                   <a:srgbClr val="B0C4D8"/>
                 </a:solidFill>
@@ -1186,7 +1186,7 @@
           <a:p>
             <a:pPr algn="l"/>
             <a:r>
-              <a:rPr lang="en-US" sz="15" b="0" i="0" u="none">
+              <a:rPr lang="en-US" sz="1500" b="0" i="0" u="none">
                 <a:solidFill>
                   <a:srgbClr val="B0C4D8"/>
                 </a:solidFill>
@@ -1214,7 +1214,7 @@
           <a:p>
             <a:pPr algn="l"/>
             <a:r>
-              <a:rPr lang="en-US" sz="15" b="0" i="0" u="none">
+              <a:rPr lang="en-US" sz="1500" b="0" i="0" u="none">
                 <a:solidFill>
                   <a:srgbClr val="B0C4D8"/>
                 </a:solidFill>
@@ -1242,13 +1242,13 @@
           </a:prstGeom>
           <a:solidFill>
             <a:srgbClr val="64C896">
-              <a:alpha val="100000"/>
+              <a:alpha val="6000"/>
             </a:srgbClr>
           </a:solidFill>
           <a:ln w="19050">
             <a:solidFill>
               <a:srgbClr val="64C896">
-                <a:alpha val="100000"/>
+                <a:alpha val="25000"/>
               </a:srgbClr>
             </a:solidFill>
           </a:ln>
@@ -1272,7 +1272,7 @@
           </a:prstGeom>
           <a:solidFill>
             <a:srgbClr val="64C896">
-              <a:alpha val="100000"/>
+              <a:alpha val="12000"/>
             </a:srgbClr>
           </a:solidFill>
           <a:ln>
@@ -1298,7 +1298,7 @@
           <a:p>
             <a:pPr algn="ctr"/>
             <a:r>
-              <a:rPr lang="en-US" sz="20" b="0" i="0" u="none">
+              <a:rPr lang="en-US" sz="2000" b="0" i="0" u="none">
                 <a:solidFill>
                   <a:srgbClr val="6CC8A0"/>
                 </a:solidFill>
@@ -1326,7 +1326,7 @@
           <a:p>
             <a:pPr algn="l"/>
             <a:r>
-              <a:rPr lang="en-US" sz="15" b="0" i="0" u="none">
+              <a:rPr lang="en-US" sz="1500" b="0" i="0" u="none">
                 <a:solidFill>
                   <a:srgbClr val="B0C4D8"/>
                 </a:solidFill>
@@ -1354,7 +1354,7 @@
           <a:p>
             <a:pPr algn="l"/>
             <a:r>
-              <a:rPr lang="en-US" sz="15" b="0" i="0" u="none">
+              <a:rPr lang="en-US" sz="1500" b="0" i="0" u="none">
                 <a:solidFill>
                   <a:srgbClr val="B0C4D8"/>
                 </a:solidFill>
@@ -1382,7 +1382,7 @@
           <a:p>
             <a:pPr algn="l"/>
             <a:r>
-              <a:rPr lang="en-US" sz="15" b="0" i="0" u="none">
+              <a:rPr lang="en-US" sz="1500" b="0" i="0" u="none">
                 <a:solidFill>
                   <a:srgbClr val="B0C4D8"/>
                 </a:solidFill>
@@ -1410,7 +1410,7 @@
           <a:p>
             <a:pPr algn="l"/>
             <a:r>
-              <a:rPr lang="en-US" sz="15" b="0" i="0" u="none">
+              <a:rPr lang="en-US" sz="1500" b="0" i="0" u="none">
                 <a:solidFill>
                   <a:srgbClr val="B0C4D8"/>
                 </a:solidFill>
@@ -1438,7 +1438,7 @@
           <a:p>
             <a:pPr algn="l"/>
             <a:r>
-              <a:rPr lang="en-US" sz="22" b="0" i="0" u="none">
+              <a:rPr lang="en-US" sz="2200" b="0" i="0" u="none">
                 <a:solidFill>
                   <a:srgbClr val="FFFFFF"/>
                 </a:solidFill>
@@ -1466,13 +1466,13 @@
           </a:prstGeom>
           <a:solidFill>
             <a:srgbClr val="00D2FF">
-              <a:alpha val="100000"/>
+              <a:alpha val="8000"/>
             </a:srgbClr>
           </a:solidFill>
           <a:ln w="12700">
             <a:solidFill>
               <a:srgbClr val="00D2FF">
-                <a:alpha val="100000"/>
+                <a:alpha val="15000"/>
               </a:srgbClr>
             </a:solidFill>
           </a:ln>
@@ -1496,7 +1496,7 @@
           <a:p>
             <a:pPr algn="ctr"/>
             <a:r>
-              <a:rPr lang="en-US" sz="14" b="0" i="0" u="none">
+              <a:rPr lang="en-US" sz="1400" b="0" i="0" u="none">
                 <a:solidFill>
                   <a:srgbClr val="00D2FF"/>
                 </a:solidFill>
@@ -1524,7 +1524,7 @@
           <a:p>
             <a:pPr algn="ctr"/>
             <a:r>
-              <a:rPr lang="en-US" sz="11" b="0" i="0" u="none">
+              <a:rPr lang="en-US" sz="1100" b="0" i="0" u="none">
                 <a:solidFill>
                   <a:srgbClr val="7090B0"/>
                 </a:solidFill>
@@ -1552,13 +1552,13 @@
           </a:prstGeom>
           <a:solidFill>
             <a:srgbClr val="3A7BD5">
-              <a:alpha val="100000"/>
+              <a:alpha val="8000"/>
             </a:srgbClr>
           </a:solidFill>
           <a:ln w="12700">
             <a:solidFill>
               <a:srgbClr val="3A7BD5">
-                <a:alpha val="100000"/>
+                <a:alpha val="15000"/>
               </a:srgbClr>
             </a:solidFill>
           </a:ln>
@@ -1582,7 +1582,7 @@
           <a:p>
             <a:pPr algn="ctr"/>
             <a:r>
-              <a:rPr lang="en-US" sz="14" b="0" i="0" u="none">
+              <a:rPr lang="en-US" sz="1400" b="0" i="0" u="none">
                 <a:solidFill>
                   <a:srgbClr val="5A9BE5"/>
                 </a:solidFill>
@@ -1610,7 +1610,7 @@
           <a:p>
             <a:pPr algn="ctr"/>
             <a:r>
-              <a:rPr lang="en-US" sz="11" b="0" i="0" u="none">
+              <a:rPr lang="en-US" sz="1100" b="0" i="0" u="none">
                 <a:solidFill>
                   <a:srgbClr val="7090B0"/>
                 </a:solidFill>
@@ -1638,13 +1638,13 @@
           </a:prstGeom>
           <a:solidFill>
             <a:srgbClr val="64C896">
-              <a:alpha val="100000"/>
+              <a:alpha val="8000"/>
             </a:srgbClr>
           </a:solidFill>
           <a:ln w="12700">
             <a:solidFill>
               <a:srgbClr val="64C896">
-                <a:alpha val="100000"/>
+                <a:alpha val="15000"/>
               </a:srgbClr>
             </a:solidFill>
           </a:ln>
@@ -1668,7 +1668,7 @@
           <a:p>
             <a:pPr algn="ctr"/>
             <a:r>
-              <a:rPr lang="en-US" sz="14" b="0" i="0" u="none">
+              <a:rPr lang="en-US" sz="1400" b="0" i="0" u="none">
                 <a:solidFill>
                   <a:srgbClr val="6CC8A0"/>
                 </a:solidFill>
@@ -1696,7 +1696,7 @@
           <a:p>
             <a:pPr algn="ctr"/>
             <a:r>
-              <a:rPr lang="en-US" sz="11" b="0" i="0" u="none">
+              <a:rPr lang="en-US" sz="1100" b="0" i="0" u="none">
                 <a:solidFill>
                   <a:srgbClr val="7090B0"/>
                 </a:solidFill>
@@ -1724,13 +1724,13 @@
           </a:prstGeom>
           <a:solidFill>
             <a:srgbClr val="C89650">
-              <a:alpha val="100000"/>
+              <a:alpha val="8000"/>
             </a:srgbClr>
           </a:solidFill>
           <a:ln w="12700">
             <a:solidFill>
               <a:srgbClr val="C89650">
-                <a:alpha val="100000"/>
+                <a:alpha val="15000"/>
               </a:srgbClr>
             </a:solidFill>
           </a:ln>
@@ -1754,7 +1754,7 @@
           <a:p>
             <a:pPr algn="ctr"/>
             <a:r>
-              <a:rPr lang="en-US" sz="14" b="0" i="0" u="none">
+              <a:rPr lang="en-US" sz="1400" b="0" i="0" u="none">
                 <a:solidFill>
                   <a:srgbClr val="C8A050"/>
                 </a:solidFill>
@@ -1782,7 +1782,7 @@
           <a:p>
             <a:pPr algn="ctr"/>
             <a:r>
-              <a:rPr lang="en-US" sz="11" b="0" i="0" u="none">
+              <a:rPr lang="en-US" sz="1100" b="0" i="0" u="none">
                 <a:solidFill>
                   <a:srgbClr val="7090B0"/>
                 </a:solidFill>
@@ -1810,13 +1810,13 @@
           </a:prstGeom>
           <a:solidFill>
             <a:srgbClr val="C86478">
-              <a:alpha val="100000"/>
+              <a:alpha val="8000"/>
             </a:srgbClr>
           </a:solidFill>
           <a:ln w="12700">
             <a:solidFill>
               <a:srgbClr val="C86478">
-                <a:alpha val="100000"/>
+                <a:alpha val="15000"/>
               </a:srgbClr>
             </a:solidFill>
           </a:ln>
@@ -1840,7 +1840,7 @@
           <a:p>
             <a:pPr algn="ctr"/>
             <a:r>
-              <a:rPr lang="en-US" sz="14" b="0" i="0" u="none">
+              <a:rPr lang="en-US" sz="1400" b="0" i="0" u="none">
                 <a:solidFill>
                   <a:srgbClr val="C86478"/>
                 </a:solidFill>
@@ -1868,7 +1868,7 @@
           <a:p>
             <a:pPr algn="ctr"/>
             <a:r>
-              <a:rPr lang="en-US" sz="11" b="0" i="0" u="none">
+              <a:rPr lang="en-US" sz="1100" b="0" i="0" u="none">
                 <a:solidFill>
                   <a:srgbClr val="7090B0"/>
                 </a:solidFill>
@@ -1896,13 +1896,13 @@
           </a:prstGeom>
           <a:solidFill>
             <a:srgbClr val="9664C8">
-              <a:alpha val="100000"/>
+              <a:alpha val="8000"/>
             </a:srgbClr>
           </a:solidFill>
           <a:ln w="12700">
             <a:solidFill>
               <a:srgbClr val="9664C8">
-                <a:alpha val="100000"/>
+                <a:alpha val="15000"/>
               </a:srgbClr>
             </a:solidFill>
           </a:ln>
@@ -1926,7 +1926,7 @@
           <a:p>
             <a:pPr algn="ctr"/>
             <a:r>
-              <a:rPr lang="en-US" sz="14" b="0" i="0" u="none">
+              <a:rPr lang="en-US" sz="1400" b="0" i="0" u="none">
                 <a:solidFill>
                   <a:srgbClr val="9664C8"/>
                 </a:solidFill>
@@ -1954,7 +1954,7 @@
           <a:p>
             <a:pPr algn="ctr"/>
             <a:r>
-              <a:rPr lang="en-US" sz="11" b="0" i="0" u="none">
+              <a:rPr lang="en-US" sz="1100" b="0" i="0" u="none">
                 <a:solidFill>
                   <a:srgbClr val="7090B0"/>
                 </a:solidFill>
@@ -1982,13 +1982,13 @@
           </a:prstGeom>
           <a:solidFill>
             <a:srgbClr val="B48250">
-              <a:alpha val="100000"/>
+              <a:alpha val="8000"/>
             </a:srgbClr>
           </a:solidFill>
           <a:ln w="12700">
             <a:solidFill>
               <a:srgbClr val="B48250">
-                <a:alpha val="100000"/>
+                <a:alpha val="15000"/>
               </a:srgbClr>
             </a:solidFill>
           </a:ln>
@@ -2012,7 +2012,7 @@
           <a:p>
             <a:pPr algn="ctr"/>
             <a:r>
-              <a:rPr lang="en-US" sz="14" b="0" i="0" u="none">
+              <a:rPr lang="en-US" sz="1400" b="0" i="0" u="none">
                 <a:solidFill>
                   <a:srgbClr val="B48250"/>
                 </a:solidFill>
@@ -2040,7 +2040,7 @@
           <a:p>
             <a:pPr algn="ctr"/>
             <a:r>
-              <a:rPr lang="en-US" sz="11" b="0" i="0" u="none">
+              <a:rPr lang="en-US" sz="1100" b="0" i="0" u="none">
                 <a:solidFill>
                   <a:srgbClr val="7090B0"/>
                 </a:solidFill>
@@ -2114,7 +2114,7 @@
           <a:p>
             <a:pPr algn="l"/>
             <a:r>
-              <a:rPr lang="en-US" sz="36" b="0" i="0" u="none">
+              <a:rPr lang="en-US" sz="3600" b="0" i="0" u="none">
                 <a:solidFill>
                   <a:srgbClr val="FFFFFF"/>
                 </a:solidFill>
@@ -2163,13 +2163,13 @@
           </a:prstGeom>
           <a:solidFill>
             <a:srgbClr val="00D2FF">
-              <a:alpha val="100000"/>
+              <a:alpha val="6000"/>
             </a:srgbClr>
           </a:solidFill>
           <a:ln w="12700">
             <a:solidFill>
               <a:srgbClr val="00D2FF">
-                <a:alpha val="100000"/>
+                <a:alpha val="20000"/>
               </a:srgbClr>
             </a:solidFill>
           </a:ln>
@@ -2193,7 +2193,7 @@
           <a:p>
             <a:pPr algn="l"/>
             <a:r>
-              <a:rPr lang="en-US" sz="18" b="0" i="0" u="none">
+              <a:rPr lang="en-US" sz="1800" b="0" i="0" u="none">
                 <a:solidFill>
                   <a:srgbClr val="00D2FF"/>
                 </a:solidFill>
@@ -2221,7 +2221,7 @@
           <a:p>
             <a:pPr algn="l"/>
             <a:r>
-              <a:rPr lang="en-US" sz="14" b="0" i="0" u="none">
+              <a:rPr lang="en-US" sz="1400" b="0" i="0" u="none">
                 <a:solidFill>
                   <a:srgbClr val="B0C4D8"/>
                 </a:solidFill>
@@ -2249,7 +2249,7 @@
           <a:p>
             <a:pPr algn="l"/>
             <a:r>
-              <a:rPr lang="en-US" sz="14" b="0" i="0" u="none">
+              <a:rPr lang="en-US" sz="1400" b="0" i="0" u="none">
                 <a:solidFill>
                   <a:srgbClr val="B0C4D8"/>
                 </a:solidFill>
@@ -2277,7 +2277,7 @@
           <a:p>
             <a:pPr algn="l"/>
             <a:r>
-              <a:rPr lang="en-US" sz="14" b="0" i="0" u="none">
+              <a:rPr lang="en-US" sz="1400" b="0" i="0" u="none">
                 <a:solidFill>
                   <a:srgbClr val="B0C4D8"/>
                 </a:solidFill>
@@ -2305,13 +2305,13 @@
           </a:prstGeom>
           <a:solidFill>
             <a:srgbClr val="3A7BD5">
-              <a:alpha val="100000"/>
+              <a:alpha val="6000"/>
             </a:srgbClr>
           </a:solidFill>
           <a:ln w="12700">
             <a:solidFill>
               <a:srgbClr val="3A7BD5">
-                <a:alpha val="100000"/>
+                <a:alpha val="20000"/>
               </a:srgbClr>
             </a:solidFill>
           </a:ln>
@@ -2335,7 +2335,7 @@
           <a:p>
             <a:pPr algn="l"/>
             <a:r>
-              <a:rPr lang="en-US" sz="18" b="0" i="0" u="none">
+              <a:rPr lang="en-US" sz="1800" b="0" i="0" u="none">
                 <a:solidFill>
                   <a:srgbClr val="5A9BE5"/>
                 </a:solidFill>
@@ -2363,7 +2363,7 @@
           <a:p>
             <a:pPr algn="l"/>
             <a:r>
-              <a:rPr lang="en-US" sz="14" b="0" i="0" u="none">
+              <a:rPr lang="en-US" sz="1400" b="0" i="0" u="none">
                 <a:solidFill>
                   <a:srgbClr val="B0C4D8"/>
                 </a:solidFill>
@@ -2391,7 +2391,7 @@
           <a:p>
             <a:pPr algn="l"/>
             <a:r>
-              <a:rPr lang="en-US" sz="14" b="0" i="0" u="none">
+              <a:rPr lang="en-US" sz="1400" b="0" i="0" u="none">
                 <a:solidFill>
                   <a:srgbClr val="B0C4D8"/>
                 </a:solidFill>
@@ -2419,7 +2419,7 @@
           <a:p>
             <a:pPr algn="l"/>
             <a:r>
-              <a:rPr lang="en-US" sz="14" b="0" i="0" u="none">
+              <a:rPr lang="en-US" sz="1400" b="0" i="0" u="none">
                 <a:solidFill>
                   <a:srgbClr val="B0C4D8"/>
                 </a:solidFill>
@@ -2447,13 +2447,13 @@
           </a:prstGeom>
           <a:solidFill>
             <a:srgbClr val="64C896">
-              <a:alpha val="100000"/>
+              <a:alpha val="6000"/>
             </a:srgbClr>
           </a:solidFill>
           <a:ln w="12700">
             <a:solidFill>
               <a:srgbClr val="64C896">
-                <a:alpha val="100000"/>
+                <a:alpha val="20000"/>
               </a:srgbClr>
             </a:solidFill>
           </a:ln>
@@ -2477,7 +2477,7 @@
           <a:p>
             <a:pPr algn="l"/>
             <a:r>
-              <a:rPr lang="en-US" sz="18" b="0" i="0" u="none">
+              <a:rPr lang="en-US" sz="1800" b="0" i="0" u="none">
                 <a:solidFill>
                   <a:srgbClr val="6CC8A0"/>
                 </a:solidFill>
@@ -2505,7 +2505,7 @@
           <a:p>
             <a:pPr algn="l"/>
             <a:r>
-              <a:rPr lang="en-US" sz="14" b="0" i="0" u="none">
+              <a:rPr lang="en-US" sz="1400" b="0" i="0" u="none">
                 <a:solidFill>
                   <a:srgbClr val="B0C4D8"/>
                 </a:solidFill>
@@ -2533,7 +2533,7 @@
           <a:p>
             <a:pPr algn="l"/>
             <a:r>
-              <a:rPr lang="en-US" sz="14" b="0" i="0" u="none">
+              <a:rPr lang="en-US" sz="1400" b="0" i="0" u="none">
                 <a:solidFill>
                   <a:srgbClr val="B0C4D8"/>
                 </a:solidFill>
@@ -2561,7 +2561,7 @@
           <a:p>
             <a:pPr algn="l"/>
             <a:r>
-              <a:rPr lang="en-US" sz="14" b="0" i="0" u="none">
+              <a:rPr lang="en-US" sz="1400" b="0" i="0" u="none">
                 <a:solidFill>
                   <a:srgbClr val="B0C4D8"/>
                 </a:solidFill>
@@ -2589,13 +2589,13 @@
           </a:prstGeom>
           <a:solidFill>
             <a:srgbClr val="C89650">
-              <a:alpha val="100000"/>
+              <a:alpha val="6000"/>
             </a:srgbClr>
           </a:solidFill>
           <a:ln w="12700">
             <a:solidFill>
               <a:srgbClr val="C89650">
-                <a:alpha val="100000"/>
+                <a:alpha val="20000"/>
               </a:srgbClr>
             </a:solidFill>
           </a:ln>
@@ -2619,7 +2619,7 @@
           <a:p>
             <a:pPr algn="l"/>
             <a:r>
-              <a:rPr lang="en-US" sz="18" b="0" i="0" u="none">
+              <a:rPr lang="en-US" sz="1800" b="0" i="0" u="none">
                 <a:solidFill>
                   <a:srgbClr val="C8A050"/>
                 </a:solidFill>
@@ -2647,7 +2647,7 @@
           <a:p>
             <a:pPr algn="l"/>
             <a:r>
-              <a:rPr lang="en-US" sz="14" b="0" i="0" u="none">
+              <a:rPr lang="en-US" sz="1400" b="0" i="0" u="none">
                 <a:solidFill>
                   <a:srgbClr val="B0C4D8"/>
                 </a:solidFill>
@@ -2675,7 +2675,7 @@
           <a:p>
             <a:pPr algn="l"/>
             <a:r>
-              <a:rPr lang="en-US" sz="14" b="0" i="0" u="none">
+              <a:rPr lang="en-US" sz="1400" b="0" i="0" u="none">
                 <a:solidFill>
                   <a:srgbClr val="B0C4D8"/>
                 </a:solidFill>
@@ -2703,7 +2703,7 @@
           <a:p>
             <a:pPr algn="l"/>
             <a:r>
-              <a:rPr lang="en-US" sz="14" b="0" i="0" u="none">
+              <a:rPr lang="en-US" sz="1400" b="0" i="0" u="none">
                 <a:solidFill>
                   <a:srgbClr val="B0C4D8"/>
                 </a:solidFill>
@@ -2731,13 +2731,13 @@
           </a:prstGeom>
           <a:solidFill>
             <a:srgbClr val="9664C8">
-              <a:alpha val="100000"/>
+              <a:alpha val="6000"/>
             </a:srgbClr>
           </a:solidFill>
           <a:ln w="12700">
             <a:solidFill>
               <a:srgbClr val="9664C8">
-                <a:alpha val="100000"/>
+                <a:alpha val="20000"/>
               </a:srgbClr>
             </a:solidFill>
           </a:ln>
@@ -2761,7 +2761,7 @@
           <a:p>
             <a:pPr algn="l"/>
             <a:r>
-              <a:rPr lang="en-US" sz="18" b="0" i="0" u="none">
+              <a:rPr lang="en-US" sz="1800" b="0" i="0" u="none">
                 <a:solidFill>
                   <a:srgbClr val="9664C8"/>
                 </a:solidFill>
@@ -2789,7 +2789,7 @@
           <a:p>
             <a:pPr algn="l"/>
             <a:r>
-              <a:rPr lang="en-US" sz="14" b="0" i="0" u="none">
+              <a:rPr lang="en-US" sz="1400" b="0" i="0" u="none">
                 <a:solidFill>
                   <a:srgbClr val="B0C4D8"/>
                 </a:solidFill>
@@ -2817,7 +2817,7 @@
           <a:p>
             <a:pPr algn="l"/>
             <a:r>
-              <a:rPr lang="en-US" sz="14" b="0" i="0" u="none">
+              <a:rPr lang="en-US" sz="1400" b="0" i="0" u="none">
                 <a:solidFill>
                   <a:srgbClr val="B0C4D8"/>
                 </a:solidFill>
@@ -2845,7 +2845,7 @@
           <a:p>
             <a:pPr algn="l"/>
             <a:r>
-              <a:rPr lang="en-US" sz="14" b="0" i="0" u="none">
+              <a:rPr lang="en-US" sz="1400" b="0" i="0" u="none">
                 <a:solidFill>
                   <a:srgbClr val="B0C4D8"/>
                 </a:solidFill>
@@ -2873,13 +2873,13 @@
           </a:prstGeom>
           <a:solidFill>
             <a:srgbClr val="C85078">
-              <a:alpha val="100000"/>
+              <a:alpha val="6000"/>
             </a:srgbClr>
           </a:solidFill>
           <a:ln w="12700">
             <a:solidFill>
               <a:srgbClr val="C85078">
-                <a:alpha val="100000"/>
+                <a:alpha val="20000"/>
               </a:srgbClr>
             </a:solidFill>
           </a:ln>
@@ -2903,7 +2903,7 @@
           <a:p>
             <a:pPr algn="l"/>
             <a:r>
-              <a:rPr lang="en-US" sz="18" b="0" i="0" u="none">
+              <a:rPr lang="en-US" sz="1800" b="0" i="0" u="none">
                 <a:solidFill>
                   <a:srgbClr val="C85078"/>
                 </a:solidFill>
@@ -2931,7 +2931,7 @@
           <a:p>
             <a:pPr algn="l"/>
             <a:r>
-              <a:rPr lang="en-US" sz="14" b="0" i="0" u="none">
+              <a:rPr lang="en-US" sz="1400" b="0" i="0" u="none">
                 <a:solidFill>
                   <a:srgbClr val="B0C4D8"/>
                 </a:solidFill>
@@ -2959,7 +2959,7 @@
           <a:p>
             <a:pPr algn="l"/>
             <a:r>
-              <a:rPr lang="en-US" sz="14" b="0" i="0" u="none">
+              <a:rPr lang="en-US" sz="1400" b="0" i="0" u="none">
                 <a:solidFill>
                   <a:srgbClr val="B0C4D8"/>
                 </a:solidFill>
@@ -2987,7 +2987,7 @@
           <a:p>
             <a:pPr algn="l"/>
             <a:r>
-              <a:rPr lang="en-US" sz="14" b="0" i="0" u="none">
+              <a:rPr lang="en-US" sz="1400" b="0" i="0" u="none">
                 <a:solidFill>
                   <a:srgbClr val="B0C4D8"/>
                 </a:solidFill>
@@ -3015,13 +3015,13 @@
           </a:prstGeom>
           <a:solidFill>
             <a:srgbClr val="FFFFFF">
-              <a:alpha val="100000"/>
+              <a:alpha val="4000"/>
             </a:srgbClr>
           </a:solidFill>
           <a:ln w="12700">
             <a:solidFill>
               <a:srgbClr val="FFFFFF">
-                <a:alpha val="100000"/>
+                <a:alpha val="8000"/>
               </a:srgbClr>
             </a:solidFill>
           </a:ln>
@@ -3045,7 +3045,7 @@
           <a:p>
             <a:pPr algn="ctr"/>
             <a:r>
-              <a:rPr lang="en-US" sz="15" b="0" i="0" u="none">
+              <a:rPr lang="en-US" sz="1500" b="0" i="0" u="none">
                 <a:solidFill>
                   <a:srgbClr val="7090B0"/>
                 </a:solidFill>
@@ -3119,7 +3119,7 @@
           <a:p>
             <a:pPr algn="l"/>
             <a:r>
-              <a:rPr lang="en-US" sz="36" b="0" i="0" u="none">
+              <a:rPr lang="en-US" sz="3600" b="0" i="0" u="none">
                 <a:solidFill>
                   <a:srgbClr val="FFFFFF"/>
                 </a:solidFill>
@@ -3168,13 +3168,13 @@
           </a:prstGeom>
           <a:solidFill>
             <a:srgbClr val="00D2FF">
-              <a:alpha val="100000"/>
+              <a:alpha val="4000"/>
             </a:srgbClr>
           </a:solidFill>
           <a:ln w="19050">
             <a:solidFill>
               <a:srgbClr val="00D2FF">
-                <a:alpha val="100000"/>
+                <a:alpha val="20000"/>
               </a:srgbClr>
             </a:solidFill>
           </a:ln>
@@ -3198,7 +3198,7 @@
           </a:prstGeom>
           <a:solidFill>
             <a:srgbClr val="00D2FF">
-              <a:alpha val="100000"/>
+              <a:alpha val="8000"/>
             </a:srgbClr>
           </a:solidFill>
           <a:ln>
@@ -3224,7 +3224,7 @@
           <a:p>
             <a:pPr algn="l"/>
             <a:r>
-              <a:rPr lang="en-US" sz="20" b="0" i="0" u="none">
+              <a:rPr lang="en-US" sz="2000" b="0" i="0" u="none">
                 <a:solidFill>
                   <a:srgbClr val="00D2FF"/>
                 </a:solidFill>
@@ -3252,7 +3252,7 @@
           <a:p>
             <a:pPr algn="l"/>
             <a:r>
-              <a:rPr lang="en-US" sz="15" b="0" i="0" u="none">
+              <a:rPr lang="en-US" sz="1500" b="0" i="0" u="none">
                 <a:solidFill>
                   <a:srgbClr val="C0D0E8"/>
                 </a:solidFill>
@@ -3280,7 +3280,7 @@
           <a:p>
             <a:pPr algn="l"/>
             <a:r>
-              <a:rPr lang="en-US" sz="15" b="0" i="0" u="none">
+              <a:rPr lang="en-US" sz="1500" b="0" i="0" u="none">
                 <a:solidFill>
                   <a:srgbClr val="C0D0E8"/>
                 </a:solidFill>
@@ -3308,7 +3308,7 @@
           <a:p>
             <a:pPr algn="l"/>
             <a:r>
-              <a:rPr lang="en-US" sz="15" b="0" i="0" u="none">
+              <a:rPr lang="en-US" sz="1500" b="0" i="0" u="none">
                 <a:solidFill>
                   <a:srgbClr val="C0D0E8"/>
                 </a:solidFill>
@@ -3336,7 +3336,7 @@
           <a:p>
             <a:pPr algn="l"/>
             <a:r>
-              <a:rPr lang="en-US" sz="15" b="0" i="0" u="none">
+              <a:rPr lang="en-US" sz="1500" b="0" i="0" u="none">
                 <a:solidFill>
                   <a:srgbClr val="C0D0E8"/>
                 </a:solidFill>
@@ -3364,7 +3364,7 @@
           <a:p>
             <a:pPr algn="l"/>
             <a:r>
-              <a:rPr lang="en-US" sz="13" b="0" i="0" u="none">
+              <a:rPr lang="en-US" sz="1300" b="0" i="0" u="none">
                 <a:solidFill>
                   <a:srgbClr val="6090B0"/>
                 </a:solidFill>
@@ -3392,13 +3392,13 @@
           </a:prstGeom>
           <a:solidFill>
             <a:srgbClr val="64C896">
-              <a:alpha val="100000"/>
+              <a:alpha val="4000"/>
             </a:srgbClr>
           </a:solidFill>
           <a:ln w="19050">
             <a:solidFill>
               <a:srgbClr val="64C896">
-                <a:alpha val="100000"/>
+                <a:alpha val="20000"/>
               </a:srgbClr>
             </a:solidFill>
           </a:ln>
@@ -3422,7 +3422,7 @@
           </a:prstGeom>
           <a:solidFill>
             <a:srgbClr val="64C896">
-              <a:alpha val="100000"/>
+              <a:alpha val="8000"/>
             </a:srgbClr>
           </a:solidFill>
           <a:ln>
@@ -3448,7 +3448,7 @@
           <a:p>
             <a:pPr algn="l"/>
             <a:r>
-              <a:rPr lang="en-US" sz="20" b="0" i="0" u="none">
+              <a:rPr lang="en-US" sz="2000" b="0" i="0" u="none">
                 <a:solidFill>
                   <a:srgbClr val="6CC8A0"/>
                 </a:solidFill>
@@ -3476,7 +3476,7 @@
           <a:p>
             <a:pPr algn="l"/>
             <a:r>
-              <a:rPr lang="en-US" sz="15" b="0" i="0" u="none">
+              <a:rPr lang="en-US" sz="1500" b="0" i="0" u="none">
                 <a:solidFill>
                   <a:srgbClr val="C0D0E8"/>
                 </a:solidFill>
@@ -3504,7 +3504,7 @@
           <a:p>
             <a:pPr algn="l"/>
             <a:r>
-              <a:rPr lang="en-US" sz="15" b="0" i="0" u="none">
+              <a:rPr lang="en-US" sz="1500" b="0" i="0" u="none">
                 <a:solidFill>
                   <a:srgbClr val="C0D0E8"/>
                 </a:solidFill>
@@ -3532,7 +3532,7 @@
           <a:p>
             <a:pPr algn="l"/>
             <a:r>
-              <a:rPr lang="en-US" sz="15" b="0" i="0" u="none">
+              <a:rPr lang="en-US" sz="1500" b="0" i="0" u="none">
                 <a:solidFill>
                   <a:srgbClr val="C0D0E8"/>
                 </a:solidFill>
@@ -3560,7 +3560,7 @@
           <a:p>
             <a:pPr algn="l"/>
             <a:r>
-              <a:rPr lang="en-US" sz="15" b="0" i="0" u="none">
+              <a:rPr lang="en-US" sz="1500" b="0" i="0" u="none">
                 <a:solidFill>
                   <a:srgbClr val="C0D0E8"/>
                 </a:solidFill>
@@ -3588,7 +3588,7 @@
           <a:p>
             <a:pPr algn="l"/>
             <a:r>
-              <a:rPr lang="en-US" sz="13" b="0" i="0" u="none">
+              <a:rPr lang="en-US" sz="1300" b="0" i="0" u="none">
                 <a:solidFill>
                   <a:srgbClr val="6090B0"/>
                 </a:solidFill>
@@ -3616,13 +3616,13 @@
           </a:prstGeom>
           <a:solidFill>
             <a:srgbClr val="3A7BD5">
-              <a:alpha val="100000"/>
+              <a:alpha val="4000"/>
             </a:srgbClr>
           </a:solidFill>
           <a:ln w="19050">
             <a:solidFill>
               <a:srgbClr val="3A7BD5">
-                <a:alpha val="100000"/>
+                <a:alpha val="20000"/>
               </a:srgbClr>
             </a:solidFill>
           </a:ln>
@@ -3646,7 +3646,7 @@
           </a:prstGeom>
           <a:solidFill>
             <a:srgbClr val="3A7BD5">
-              <a:alpha val="100000"/>
+              <a:alpha val="8000"/>
             </a:srgbClr>
           </a:solidFill>
           <a:ln>
@@ -3672,7 +3672,7 @@
           <a:p>
             <a:pPr algn="l"/>
             <a:r>
-              <a:rPr lang="en-US" sz="20" b="0" i="0" u="none">
+              <a:rPr lang="en-US" sz="2000" b="0" i="0" u="none">
                 <a:solidFill>
                   <a:srgbClr val="5A9BE5"/>
                 </a:solidFill>
@@ -3700,7 +3700,7 @@
           <a:p>
             <a:pPr algn="l"/>
             <a:r>
-              <a:rPr lang="en-US" sz="15" b="0" i="0" u="none">
+              <a:rPr lang="en-US" sz="1500" b="0" i="0" u="none">
                 <a:solidFill>
                   <a:srgbClr val="C0D0E8"/>
                 </a:solidFill>
@@ -3728,7 +3728,7 @@
           <a:p>
             <a:pPr algn="l"/>
             <a:r>
-              <a:rPr lang="en-US" sz="15" b="0" i="0" u="none">
+              <a:rPr lang="en-US" sz="1500" b="0" i="0" u="none">
                 <a:solidFill>
                   <a:srgbClr val="C0D0E8"/>
                 </a:solidFill>
@@ -3802,7 +3802,7 @@
           <a:p>
             <a:pPr algn="l"/>
             <a:r>
-              <a:rPr lang="en-US" sz="36" b="0" i="0" u="none">
+              <a:rPr lang="en-US" sz="3600" b="0" i="0" u="none">
                 <a:solidFill>
                   <a:srgbClr val="FFFFFF"/>
                 </a:solidFill>
@@ -3851,13 +3851,13 @@
           </a:prstGeom>
           <a:solidFill>
             <a:srgbClr val="00D2FF">
-              <a:alpha val="100000"/>
+              <a:alpha val="8000"/>
             </a:srgbClr>
           </a:solidFill>
           <a:ln w="19050">
             <a:solidFill>
               <a:srgbClr val="00D2FF">
-                <a:alpha val="100000"/>
+                <a:alpha val="25000"/>
               </a:srgbClr>
             </a:solidFill>
           </a:ln>
@@ -3881,7 +3881,7 @@
           <a:p>
             <a:pPr algn="l"/>
             <a:r>
-              <a:rPr lang="en-US" sz="16" b="0" i="0" u="none">
+              <a:rPr lang="en-US" sz="1600" b="0" i="0" u="none">
                 <a:solidFill>
                   <a:srgbClr val="00D2FF"/>
                 </a:solidFill>
@@ -3909,7 +3909,7 @@
           <a:p>
             <a:pPr algn="l"/>
             <a:r>
-              <a:rPr lang="en-US" sz="14" b="0" i="0" u="none">
+              <a:rPr lang="en-US" sz="1400" b="0" i="0" u="none">
                 <a:solidFill>
                   <a:srgbClr val="B0C4D8"/>
                 </a:solidFill>
@@ -3937,7 +3937,7 @@
           <a:p>
             <a:pPr algn="l"/>
             <a:r>
-              <a:rPr lang="en-US" sz="14" b="0" i="0" u="none">
+              <a:rPr lang="en-US" sz="1400" b="0" i="0" u="none">
                 <a:solidFill>
                   <a:srgbClr val="B0C4D8"/>
                 </a:solidFill>
@@ -3965,7 +3965,7 @@
           <a:p>
             <a:pPr algn="l"/>
             <a:r>
-              <a:rPr lang="en-US" sz="14" b="0" i="0" u="none">
+              <a:rPr lang="en-US" sz="1400" b="0" i="0" u="none">
                 <a:solidFill>
                   <a:srgbClr val="B0C4D8"/>
                 </a:solidFill>
@@ -3993,7 +3993,7 @@
           <a:p>
             <a:pPr algn="ctr"/>
             <a:r>
-              <a:rPr lang="en-US" sz="20" b="0" i="0" u="none">
+              <a:rPr lang="en-US" sz="2000" b="0" i="0" u="none">
                 <a:solidFill>
                   <a:srgbClr val="404060"/>
                 </a:solidFill>
@@ -4021,13 +4021,13 @@
           </a:prstGeom>
           <a:solidFill>
             <a:srgbClr val="3A7BD5">
-              <a:alpha val="100000"/>
+              <a:alpha val="8000"/>
             </a:srgbClr>
           </a:solidFill>
           <a:ln w="19050">
             <a:solidFill>
               <a:srgbClr val="3A7BD5">
-                <a:alpha val="100000"/>
+                <a:alpha val="25000"/>
               </a:srgbClr>
             </a:solidFill>
           </a:ln>
@@ -4051,7 +4051,7 @@
           <a:p>
             <a:pPr algn="l"/>
             <a:r>
-              <a:rPr lang="en-US" sz="16" b="0" i="0" u="none">
+              <a:rPr lang="en-US" sz="1600" b="0" i="0" u="none">
                 <a:solidFill>
                   <a:srgbClr val="5A9BE5"/>
                 </a:solidFill>
@@ -4079,7 +4079,7 @@
           <a:p>
             <a:pPr algn="l"/>
             <a:r>
-              <a:rPr lang="en-US" sz="14" b="0" i="0" u="none">
+              <a:rPr lang="en-US" sz="1400" b="0" i="0" u="none">
                 <a:solidFill>
                   <a:srgbClr val="B0C4D8"/>
                 </a:solidFill>
@@ -4107,7 +4107,7 @@
           <a:p>
             <a:pPr algn="l"/>
             <a:r>
-              <a:rPr lang="en-US" sz="14" b="0" i="0" u="none">
+              <a:rPr lang="en-US" sz="1400" b="0" i="0" u="none">
                 <a:solidFill>
                   <a:srgbClr val="B0C4D8"/>
                 </a:solidFill>
@@ -4135,7 +4135,7 @@
           <a:p>
             <a:pPr algn="l"/>
             <a:r>
-              <a:rPr lang="en-US" sz="14" b="0" i="0" u="none">
+              <a:rPr lang="en-US" sz="1400" b="0" i="0" u="none">
                 <a:solidFill>
                   <a:srgbClr val="B0C4D8"/>
                 </a:solidFill>
@@ -4163,7 +4163,7 @@
           <a:p>
             <a:pPr algn="ctr"/>
             <a:r>
-              <a:rPr lang="en-US" sz="20" b="0" i="0" u="none">
+              <a:rPr lang="en-US" sz="2000" b="0" i="0" u="none">
                 <a:solidFill>
                   <a:srgbClr val="404060"/>
                 </a:solidFill>
@@ -4191,13 +4191,13 @@
           </a:prstGeom>
           <a:solidFill>
             <a:srgbClr val="64C896">
-              <a:alpha val="100000"/>
+              <a:alpha val="8000"/>
             </a:srgbClr>
           </a:solidFill>
           <a:ln w="19050">
             <a:solidFill>
               <a:srgbClr val="64C896">
-                <a:alpha val="100000"/>
+                <a:alpha val="25000"/>
               </a:srgbClr>
             </a:solidFill>
           </a:ln>
@@ -4221,7 +4221,7 @@
           <a:p>
             <a:pPr algn="l"/>
             <a:r>
-              <a:rPr lang="en-US" sz="16" b="0" i="0" u="none">
+              <a:rPr lang="en-US" sz="1600" b="0" i="0" u="none">
                 <a:solidFill>
                   <a:srgbClr val="6CC8A0"/>
                 </a:solidFill>
@@ -4249,7 +4249,7 @@
           <a:p>
             <a:pPr algn="l"/>
             <a:r>
-              <a:rPr lang="en-US" sz="14" b="0" i="0" u="none">
+              <a:rPr lang="en-US" sz="1400" b="0" i="0" u="none">
                 <a:solidFill>
                   <a:srgbClr val="B0C4D8"/>
                 </a:solidFill>
@@ -4277,7 +4277,7 @@
           <a:p>
             <a:pPr algn="l"/>
             <a:r>
-              <a:rPr lang="en-US" sz="14" b="0" i="0" u="none">
+              <a:rPr lang="en-US" sz="1400" b="0" i="0" u="none">
                 <a:solidFill>
                   <a:srgbClr val="B0C4D8"/>
                 </a:solidFill>
@@ -4305,7 +4305,7 @@
           <a:p>
             <a:pPr algn="l"/>
             <a:r>
-              <a:rPr lang="en-US" sz="14" b="0" i="0" u="none">
+              <a:rPr lang="en-US" sz="1400" b="0" i="0" u="none">
                 <a:solidFill>
                   <a:srgbClr val="B0C4D8"/>
                 </a:solidFill>
@@ -4333,7 +4333,7 @@
           <a:p>
             <a:pPr algn="ctr"/>
             <a:r>
-              <a:rPr lang="en-US" sz="20" b="0" i="0" u="none">
+              <a:rPr lang="en-US" sz="2000" b="0" i="0" u="none">
                 <a:solidFill>
                   <a:srgbClr val="404060"/>
                 </a:solidFill>
@@ -4361,13 +4361,13 @@
           </a:prstGeom>
           <a:solidFill>
             <a:srgbClr val="C89650">
-              <a:alpha val="100000"/>
+              <a:alpha val="8000"/>
             </a:srgbClr>
           </a:solidFill>
           <a:ln w="19050">
             <a:solidFill>
               <a:srgbClr val="C89650">
-                <a:alpha val="100000"/>
+                <a:alpha val="25000"/>
               </a:srgbClr>
             </a:solidFill>
           </a:ln>
@@ -4391,7 +4391,7 @@
           <a:p>
             <a:pPr algn="l"/>
             <a:r>
-              <a:rPr lang="en-US" sz="16" b="0" i="0" u="none">
+              <a:rPr lang="en-US" sz="1600" b="0" i="0" u="none">
                 <a:solidFill>
                   <a:srgbClr val="C8A050"/>
                 </a:solidFill>
@@ -4419,7 +4419,7 @@
           <a:p>
             <a:pPr algn="l"/>
             <a:r>
-              <a:rPr lang="en-US" sz="14" b="0" i="0" u="none">
+              <a:rPr lang="en-US" sz="1400" b="0" i="0" u="none">
                 <a:solidFill>
                   <a:srgbClr val="B0C4D8"/>
                 </a:solidFill>
@@ -4447,7 +4447,7 @@
           <a:p>
             <a:pPr algn="l"/>
             <a:r>
-              <a:rPr lang="en-US" sz="14" b="0" i="0" u="none">
+              <a:rPr lang="en-US" sz="1400" b="0" i="0" u="none">
                 <a:solidFill>
                   <a:srgbClr val="B0C4D8"/>
                 </a:solidFill>
@@ -4475,7 +4475,7 @@
           <a:p>
             <a:pPr algn="l"/>
             <a:r>
-              <a:rPr lang="en-US" sz="14" b="0" i="0" u="none">
+              <a:rPr lang="en-US" sz="1400" b="0" i="0" u="none">
                 <a:solidFill>
                   <a:srgbClr val="B0C4D8"/>
                 </a:solidFill>
@@ -4503,7 +4503,7 @@
           <a:p>
             <a:pPr algn="ctr"/>
             <a:r>
-              <a:rPr lang="en-US" sz="20" b="0" i="0" u="none">
+              <a:rPr lang="en-US" sz="2000" b="0" i="0" u="none">
                 <a:solidFill>
                   <a:srgbClr val="404060"/>
                 </a:solidFill>
@@ -4531,13 +4531,13 @@
           </a:prstGeom>
           <a:solidFill>
             <a:srgbClr val="C85078">
-              <a:alpha val="100000"/>
+              <a:alpha val="8000"/>
             </a:srgbClr>
           </a:solidFill>
           <a:ln w="19050">
             <a:solidFill>
               <a:srgbClr val="C85078">
-                <a:alpha val="100000"/>
+                <a:alpha val="25000"/>
               </a:srgbClr>
             </a:solidFill>
           </a:ln>
@@ -4561,7 +4561,7 @@
           <a:p>
             <a:pPr algn="l"/>
             <a:r>
-              <a:rPr lang="en-US" sz="16" b="0" i="0" u="none">
+              <a:rPr lang="en-US" sz="1600" b="0" i="0" u="none">
                 <a:solidFill>
                   <a:srgbClr val="C85078"/>
                 </a:solidFill>
@@ -4589,7 +4589,7 @@
           <a:p>
             <a:pPr algn="l"/>
             <a:r>
-              <a:rPr lang="en-US" sz="14" b="0" i="0" u="none">
+              <a:rPr lang="en-US" sz="1400" b="0" i="0" u="none">
                 <a:solidFill>
                   <a:srgbClr val="B0C4D8"/>
                 </a:solidFill>
@@ -4617,7 +4617,7 @@
           <a:p>
             <a:pPr algn="l"/>
             <a:r>
-              <a:rPr lang="en-US" sz="14" b="0" i="0" u="none">
+              <a:rPr lang="en-US" sz="1400" b="0" i="0" u="none">
                 <a:solidFill>
                   <a:srgbClr val="B0C4D8"/>
                 </a:solidFill>
@@ -4645,7 +4645,7 @@
           <a:p>
             <a:pPr algn="l"/>
             <a:r>
-              <a:rPr lang="en-US" sz="14" b="0" i="0" u="none">
+              <a:rPr lang="en-US" sz="1400" b="0" i="0" u="none">
                 <a:solidFill>
                   <a:srgbClr val="B0C4D8"/>
                 </a:solidFill>
@@ -4719,7 +4719,7 @@
           <a:p>
             <a:pPr algn="l"/>
             <a:r>
-              <a:rPr lang="en-US" sz="36" b="0" i="0" u="none">
+              <a:rPr lang="en-US" sz="3600" b="0" i="0" u="none">
                 <a:solidFill>
                   <a:srgbClr val="FFFFFF"/>
                 </a:solidFill>
@@ -4768,7 +4768,7 @@
           <a:p>
             <a:pPr algn="l"/>
             <a:r>
-              <a:rPr lang="en-US" sz="22" b="0" i="0" u="none">
+              <a:rPr lang="en-US" sz="2200" b="0" i="0" u="none">
                 <a:solidFill>
                   <a:srgbClr val="00D2FF"/>
                 </a:solidFill>
@@ -4796,13 +4796,13 @@
           </a:prstGeom>
           <a:solidFill>
             <a:srgbClr val="00D2FF">
-              <a:alpha val="100000"/>
+              <a:alpha val="6000"/>
             </a:srgbClr>
           </a:solidFill>
           <a:ln w="12700">
             <a:solidFill>
               <a:srgbClr val="00D2FF">
-                <a:alpha val="100000"/>
+                <a:alpha val="15000"/>
               </a:srgbClr>
             </a:solidFill>
           </a:ln>
@@ -4826,7 +4826,7 @@
           <a:p>
             <a:pPr algn="ctr"/>
             <a:r>
-              <a:rPr lang="en-US" sz="18" b="0" i="0" u="none">
+              <a:rPr lang="en-US" sz="1800" b="0" i="0" u="none">
                 <a:solidFill>
                   <a:srgbClr val="FFFFFF"/>
                 </a:solidFill>
@@ -4854,7 +4854,7 @@
           <a:p>
             <a:pPr algn="ctr"/>
             <a:r>
-              <a:rPr lang="en-US" sz="13" b="0" i="0" u="none">
+              <a:rPr lang="en-US" sz="1300" b="0" i="0" u="none">
                 <a:solidFill>
                   <a:srgbClr val="7090B0"/>
                 </a:solidFill>
@@ -4882,13 +4882,13 @@
           </a:prstGeom>
           <a:solidFill>
             <a:srgbClr val="3A7BD5">
-              <a:alpha val="100000"/>
+              <a:alpha val="6000"/>
             </a:srgbClr>
           </a:solidFill>
           <a:ln w="12700">
             <a:solidFill>
               <a:srgbClr val="3A7BD5">
-                <a:alpha val="100000"/>
+                <a:alpha val="15000"/>
               </a:srgbClr>
             </a:solidFill>
           </a:ln>
@@ -4912,7 +4912,7 @@
           <a:p>
             <a:pPr algn="ctr"/>
             <a:r>
-              <a:rPr lang="en-US" sz="18" b="0" i="0" u="none">
+              <a:rPr lang="en-US" sz="1800" b="0" i="0" u="none">
                 <a:solidFill>
                   <a:srgbClr val="FFFFFF"/>
                 </a:solidFill>
@@ -4940,7 +4940,7 @@
           <a:p>
             <a:pPr algn="ctr"/>
             <a:r>
-              <a:rPr lang="en-US" sz="13" b="0" i="0" u="none">
+              <a:rPr lang="en-US" sz="1300" b="0" i="0" u="none">
                 <a:solidFill>
                   <a:srgbClr val="7090B0"/>
                 </a:solidFill>
@@ -4968,13 +4968,13 @@
           </a:prstGeom>
           <a:solidFill>
             <a:srgbClr val="64C896">
-              <a:alpha val="100000"/>
+              <a:alpha val="6000"/>
             </a:srgbClr>
           </a:solidFill>
           <a:ln w="12700">
             <a:solidFill>
               <a:srgbClr val="64C896">
-                <a:alpha val="100000"/>
+                <a:alpha val="15000"/>
               </a:srgbClr>
             </a:solidFill>
           </a:ln>
@@ -4998,7 +4998,7 @@
           <a:p>
             <a:pPr algn="ctr"/>
             <a:r>
-              <a:rPr lang="en-US" sz="18" b="0" i="0" u="none">
+              <a:rPr lang="en-US" sz="1800" b="0" i="0" u="none">
                 <a:solidFill>
                   <a:srgbClr val="FFFFFF"/>
                 </a:solidFill>
@@ -5026,7 +5026,7 @@
           <a:p>
             <a:pPr algn="ctr"/>
             <a:r>
-              <a:rPr lang="en-US" sz="13" b="0" i="0" u="none">
+              <a:rPr lang="en-US" sz="1300" b="0" i="0" u="none">
                 <a:solidFill>
                   <a:srgbClr val="7090B0"/>
                 </a:solidFill>
@@ -5054,7 +5054,7 @@
           <a:p>
             <a:pPr algn="l"/>
             <a:r>
-              <a:rPr lang="en-US" sz="22" b="0" i="0" u="none">
+              <a:rPr lang="en-US" sz="2200" b="0" i="0" u="none">
                 <a:solidFill>
                   <a:srgbClr val="5A9BE5"/>
                 </a:solidFill>
@@ -5082,13 +5082,13 @@
           </a:prstGeom>
           <a:solidFill>
             <a:srgbClr val="00D2FF">
-              <a:alpha val="100000"/>
+              <a:alpha val="4000"/>
             </a:srgbClr>
           </a:solidFill>
           <a:ln w="12700">
             <a:solidFill>
               <a:srgbClr val="00D2FF">
-                <a:alpha val="100000"/>
+                <a:alpha val="12000"/>
               </a:srgbClr>
             </a:solidFill>
           </a:ln>
@@ -5112,7 +5112,7 @@
           <a:p>
             <a:pPr algn="ctr"/>
             <a:r>
-              <a:rPr lang="en-US" sz="16" b="0" i="0" u="none">
+              <a:rPr lang="en-US" sz="1600" b="0" i="0" u="none">
                 <a:solidFill>
                   <a:srgbClr val="00D2FF"/>
                 </a:solidFill>
@@ -5140,7 +5140,7 @@
           <a:p>
             <a:pPr algn="l"/>
             <a:r>
-              <a:rPr lang="en-US" sz="13" b="0" i="0" u="none">
+              <a:rPr lang="en-US" sz="1300" b="0" i="0" u="none">
                 <a:solidFill>
                   <a:srgbClr val="A0B4C8"/>
                 </a:solidFill>
@@ -5168,7 +5168,7 @@
           <a:p>
             <a:pPr algn="l"/>
             <a:r>
-              <a:rPr lang="en-US" sz="13" b="0" i="0" u="none">
+              <a:rPr lang="en-US" sz="1300" b="0" i="0" u="none">
                 <a:solidFill>
                   <a:srgbClr val="A0B4C8"/>
                 </a:solidFill>
@@ -5196,7 +5196,7 @@
           <a:p>
             <a:pPr algn="l"/>
             <a:r>
-              <a:rPr lang="en-US" sz="13" b="0" i="0" u="none">
+              <a:rPr lang="en-US" sz="1300" b="0" i="0" u="none">
                 <a:solidFill>
                   <a:srgbClr val="A0B4C8"/>
                 </a:solidFill>
@@ -5224,13 +5224,13 @@
           </a:prstGeom>
           <a:solidFill>
             <a:srgbClr val="3A7BD5">
-              <a:alpha val="100000"/>
+              <a:alpha val="4000"/>
             </a:srgbClr>
           </a:solidFill>
           <a:ln w="12700">
             <a:solidFill>
               <a:srgbClr val="3A7BD5">
-                <a:alpha val="100000"/>
+                <a:alpha val="12000"/>
               </a:srgbClr>
             </a:solidFill>
           </a:ln>
@@ -5254,7 +5254,7 @@
           <a:p>
             <a:pPr algn="ctr"/>
             <a:r>
-              <a:rPr lang="en-US" sz="16" b="0" i="0" u="none">
+              <a:rPr lang="en-US" sz="1600" b="0" i="0" u="none">
                 <a:solidFill>
                   <a:srgbClr val="5A9BE5"/>
                 </a:solidFill>
@@ -5282,7 +5282,7 @@
           <a:p>
             <a:pPr algn="l"/>
             <a:r>
-              <a:rPr lang="en-US" sz="13" b="0" i="0" u="none">
+              <a:rPr lang="en-US" sz="1300" b="0" i="0" u="none">
                 <a:solidFill>
                   <a:srgbClr val="A0B4C8"/>
                 </a:solidFill>
@@ -5310,7 +5310,7 @@
           <a:p>
             <a:pPr algn="l"/>
             <a:r>
-              <a:rPr lang="en-US" sz="13" b="0" i="0" u="none">
+              <a:rPr lang="en-US" sz="1300" b="0" i="0" u="none">
                 <a:solidFill>
                   <a:srgbClr val="A0B4C8"/>
                 </a:solidFill>
@@ -5338,7 +5338,7 @@
           <a:p>
             <a:pPr algn="l"/>
             <a:r>
-              <a:rPr lang="en-US" sz="13" b="0" i="0" u="none">
+              <a:rPr lang="en-US" sz="1300" b="0" i="0" u="none">
                 <a:solidFill>
                   <a:srgbClr val="A0B4C8"/>
                 </a:solidFill>
@@ -5366,13 +5366,13 @@
           </a:prstGeom>
           <a:solidFill>
             <a:srgbClr val="64C896">
-              <a:alpha val="100000"/>
+              <a:alpha val="4000"/>
             </a:srgbClr>
           </a:solidFill>
           <a:ln w="12700">
             <a:solidFill>
               <a:srgbClr val="64C896">
-                <a:alpha val="100000"/>
+                <a:alpha val="12000"/>
               </a:srgbClr>
             </a:solidFill>
           </a:ln>
@@ -5396,7 +5396,7 @@
           <a:p>
             <a:pPr algn="ctr"/>
             <a:r>
-              <a:rPr lang="en-US" sz="16" b="0" i="0" u="none">
+              <a:rPr lang="en-US" sz="1600" b="0" i="0" u="none">
                 <a:solidFill>
                   <a:srgbClr val="6CC8A0"/>
                 </a:solidFill>
@@ -5424,7 +5424,7 @@
           <a:p>
             <a:pPr algn="l"/>
             <a:r>
-              <a:rPr lang="en-US" sz="13" b="0" i="0" u="none">
+              <a:rPr lang="en-US" sz="1300" b="0" i="0" u="none">
                 <a:solidFill>
                   <a:srgbClr val="A0B4C8"/>
                 </a:solidFill>
@@ -5452,7 +5452,7 @@
           <a:p>
             <a:pPr algn="l"/>
             <a:r>
-              <a:rPr lang="en-US" sz="13" b="0" i="0" u="none">
+              <a:rPr lang="en-US" sz="1300" b="0" i="0" u="none">
                 <a:solidFill>
                   <a:srgbClr val="A0B4C8"/>
                 </a:solidFill>
@@ -5480,7 +5480,7 @@
           <a:p>
             <a:pPr algn="l"/>
             <a:r>
-              <a:rPr lang="en-US" sz="13" b="0" i="0" u="none">
+              <a:rPr lang="en-US" sz="1300" b="0" i="0" u="none">
                 <a:solidFill>
                   <a:srgbClr val="A0B4C8"/>
                 </a:solidFill>
@@ -5508,13 +5508,13 @@
           </a:prstGeom>
           <a:solidFill>
             <a:srgbClr val="C89650">
-              <a:alpha val="100000"/>
+              <a:alpha val="4000"/>
             </a:srgbClr>
           </a:solidFill>
           <a:ln w="12700">
             <a:solidFill>
               <a:srgbClr val="C89650">
-                <a:alpha val="100000"/>
+                <a:alpha val="12000"/>
               </a:srgbClr>
             </a:solidFill>
           </a:ln>
@@ -5538,7 +5538,7 @@
           <a:p>
             <a:pPr algn="ctr"/>
             <a:r>
-              <a:rPr lang="en-US" sz="16" b="0" i="0" u="none">
+              <a:rPr lang="en-US" sz="1600" b="0" i="0" u="none">
                 <a:solidFill>
                   <a:srgbClr val="C8A050"/>
                 </a:solidFill>
@@ -5566,7 +5566,7 @@
           <a:p>
             <a:pPr algn="l"/>
             <a:r>
-              <a:rPr lang="en-US" sz="13" b="0" i="0" u="none">
+              <a:rPr lang="en-US" sz="1300" b="0" i="0" u="none">
                 <a:solidFill>
                   <a:srgbClr val="A0B4C8"/>
                 </a:solidFill>
@@ -5594,7 +5594,7 @@
           <a:p>
             <a:pPr algn="l"/>
             <a:r>
-              <a:rPr lang="en-US" sz="13" b="0" i="0" u="none">
+              <a:rPr lang="en-US" sz="1300" b="0" i="0" u="none">
                 <a:solidFill>
                   <a:srgbClr val="A0B4C8"/>
                 </a:solidFill>
@@ -5622,7 +5622,7 @@
           <a:p>
             <a:pPr algn="l"/>
             <a:r>
-              <a:rPr lang="en-US" sz="13" b="0" i="0" u="none">
+              <a:rPr lang="en-US" sz="1300" b="0" i="0" u="none">
                 <a:solidFill>
                   <a:srgbClr val="A0B4C8"/>
                 </a:solidFill>
@@ -5650,7 +5650,7 @@
           <a:p>
             <a:pPr algn="l"/>
             <a:r>
-              <a:rPr lang="en-US" sz="14" b="0" i="0" u="none">
+              <a:rPr lang="en-US" sz="1400" b="0" i="0" u="none">
                 <a:solidFill>
                   <a:srgbClr val="6080A0"/>
                 </a:solidFill>
@@ -5724,7 +5724,7 @@
           <a:ln w="12700">
             <a:solidFill>
               <a:srgbClr val="FFFFFF">
-                <a:alpha val="100000"/>
+                <a:alpha val="2000"/>
               </a:srgbClr>
             </a:solidFill>
           </a:ln>
@@ -5748,7 +5748,7 @@
           <a:ln w="6350">
             <a:solidFill>
               <a:srgbClr val="FFFFFF">
-                <a:alpha val="100000"/>
+                <a:alpha val="2000"/>
               </a:srgbClr>
             </a:solidFill>
           </a:ln>
@@ -5798,7 +5798,7 @@
           <a:p>
             <a:pPr algn="ctr"/>
             <a:r>
-              <a:rPr lang="en-US" sz="48" b="0" i="0" u="none">
+              <a:rPr lang="en-US" sz="4800" b="0" i="0" u="none">
                 <a:solidFill>
                   <a:srgbClr val="FFFFFF"/>
                 </a:solidFill>
@@ -5826,7 +5826,7 @@
           <a:p>
             <a:pPr algn="ctr"/>
             <a:r>
-              <a:rPr lang="en-US" sz="22" b="0" i="0" u="none">
+              <a:rPr lang="en-US" sz="2200" b="0" i="0" u="none">
                 <a:solidFill>
                   <a:srgbClr val="A0B4D8"/>
                 </a:solidFill>
@@ -5854,7 +5854,7 @@
           <a:p>
             <a:pPr algn="ctr"/>
             <a:r>
-              <a:rPr lang="en-US" sz="16" b="0" i="0" u="none">
+              <a:rPr lang="en-US" sz="1600" b="0" i="0" u="none">
                 <a:solidFill>
                   <a:srgbClr val="6C8EB0"/>
                 </a:solidFill>
@@ -5882,7 +5882,7 @@
           <a:p>
             <a:pPr algn="ctr"/>
             <a:r>
-              <a:rPr lang="en-US" sz="14" b="0" i="0" u="none">
+              <a:rPr lang="en-US" sz="1400" b="0" i="0" u="none">
                 <a:solidFill>
                   <a:srgbClr val="4A6A8A"/>
                 </a:solidFill>
@@ -5910,13 +5910,13 @@
           </a:prstGeom>
           <a:solidFill>
             <a:srgbClr val="00D2FF">
-              <a:alpha val="100000"/>
+              <a:alpha val="10000"/>
             </a:srgbClr>
           </a:solidFill>
           <a:ln w="12700">
             <a:solidFill>
               <a:srgbClr val="00D2FF">
-                <a:alpha val="100000"/>
+                <a:alpha val="30000"/>
               </a:srgbClr>
             </a:solidFill>
           </a:ln>
@@ -5940,7 +5940,7 @@
           <a:p>
             <a:pPr algn="ctr"/>
             <a:r>
-              <a:rPr lang="en-US" sz="15" b="0" i="0" u="none">
+              <a:rPr lang="en-US" sz="1500" b="0" i="0" u="none">
                 <a:solidFill>
                   <a:srgbClr val="00D2FF"/>
                 </a:solidFill>

--- a/test/InkUO-产品介绍.pptx
+++ b/test/InkUO-产品介绍.pptx
@@ -182,7 +182,7 @@
         </p:nvSpPr>
         <p:spPr>
           <a:xfrm>
-            <a:off x="0" y="3333750"/>
+            <a:off x="0" y="2561590"/>
             <a:ext cx="12192000" cy="1137920"/>
           </a:xfrm>
         </p:spPr>
@@ -210,7 +210,7 @@
         </p:nvSpPr>
         <p:spPr>
           <a:xfrm>
-            <a:off x="0" y="3905250"/>
+            <a:off x="0" y="3567430"/>
             <a:ext cx="12192000" cy="497840"/>
           </a:xfrm>
         </p:spPr>
@@ -238,7 +238,7 @@
         </p:nvSpPr>
         <p:spPr>
           <a:xfrm>
-            <a:off x="0" y="4381500"/>
+            <a:off x="0" y="4164330"/>
             <a:ext cx="12192000" cy="320040"/>
           </a:xfrm>
         </p:spPr>
@@ -266,7 +266,7 @@
         </p:nvSpPr>
         <p:spPr>
           <a:xfrm>
-            <a:off x="0" y="5715000"/>
+            <a:off x="0" y="5546090"/>
             <a:ext cx="12192000" cy="248920"/>
           </a:xfrm>
         </p:spPr>
@@ -366,7 +366,7 @@
         </p:nvSpPr>
         <p:spPr>
           <a:xfrm>
-            <a:off x="762000" y="1047750"/>
+            <a:off x="762000" y="613410"/>
             <a:ext cx="12192000" cy="640080"/>
           </a:xfrm>
         </p:spPr>
@@ -415,7 +415,7 @@
         </p:nvSpPr>
         <p:spPr>
           <a:xfrm>
-            <a:off x="762000" y="2000250"/>
+            <a:off x="762000" y="1783080"/>
             <a:ext cx="12192000" cy="320040"/>
           </a:xfrm>
         </p:spPr>
@@ -481,7 +481,7 @@
         </p:nvSpPr>
         <p:spPr>
           <a:xfrm>
-            <a:off x="1047750" y="3238500"/>
+            <a:off x="1047750" y="3021330"/>
             <a:ext cx="12192000" cy="320040"/>
           </a:xfrm>
         </p:spPr>
@@ -509,7 +509,7 @@
         </p:nvSpPr>
         <p:spPr>
           <a:xfrm>
-            <a:off x="1047750" y="3476625"/>
+            <a:off x="1047750" y="3307715"/>
             <a:ext cx="12192000" cy="248920"/>
           </a:xfrm>
         </p:spPr>
@@ -567,7 +567,7 @@
         </p:nvSpPr>
         <p:spPr>
           <a:xfrm>
-            <a:off x="4714875" y="3238500"/>
+            <a:off x="4714875" y="3021330"/>
             <a:ext cx="12192000" cy="320040"/>
           </a:xfrm>
         </p:spPr>
@@ -595,7 +595,7 @@
         </p:nvSpPr>
         <p:spPr>
           <a:xfrm>
-            <a:off x="4714875" y="3476625"/>
+            <a:off x="4714875" y="3307715"/>
             <a:ext cx="12192000" cy="248920"/>
           </a:xfrm>
         </p:spPr>
@@ -653,7 +653,7 @@
         </p:nvSpPr>
         <p:spPr>
           <a:xfrm>
-            <a:off x="8382000" y="3238500"/>
+            <a:off x="8382000" y="3021330"/>
             <a:ext cx="12192000" cy="320040"/>
           </a:xfrm>
         </p:spPr>
@@ -681,7 +681,7 @@
         </p:nvSpPr>
         <p:spPr>
           <a:xfrm>
-            <a:off x="8382000" y="3476625"/>
+            <a:off x="8382000" y="3307715"/>
             <a:ext cx="12192000" cy="248920"/>
           </a:xfrm>
         </p:spPr>
@@ -709,7 +709,7 @@
         </p:nvSpPr>
         <p:spPr>
           <a:xfrm>
-            <a:off x="762000" y="4476750"/>
+            <a:off x="762000" y="4283710"/>
             <a:ext cx="12192000" cy="284480"/>
           </a:xfrm>
         </p:spPr>
@@ -791,7 +791,7 @@
         </p:nvSpPr>
         <p:spPr>
           <a:xfrm>
-            <a:off x="762000" y="1047750"/>
+            <a:off x="762000" y="613410"/>
             <a:ext cx="12192000" cy="640080"/>
           </a:xfrm>
         </p:spPr>
@@ -896,7 +896,7 @@
         </p:nvSpPr>
         <p:spPr>
           <a:xfrm>
-            <a:off x="-3714750" y="1981200"/>
+            <a:off x="-3714750" y="1739900"/>
             <a:ext cx="12192000" cy="355600"/>
           </a:xfrm>
         </p:spPr>
@@ -924,7 +924,7 @@
         </p:nvSpPr>
         <p:spPr>
           <a:xfrm>
-            <a:off x="1047750" y="2476500"/>
+            <a:off x="1047750" y="2295525"/>
             <a:ext cx="12192000" cy="266700"/>
           </a:xfrm>
         </p:spPr>
@@ -952,7 +952,7 @@
         </p:nvSpPr>
         <p:spPr>
           <a:xfrm>
-            <a:off x="1047750" y="2762250"/>
+            <a:off x="1047750" y="2581275"/>
             <a:ext cx="12192000" cy="266700"/>
           </a:xfrm>
         </p:spPr>
@@ -980,7 +980,7 @@
         </p:nvSpPr>
         <p:spPr>
           <a:xfrm>
-            <a:off x="1047750" y="3048000"/>
+            <a:off x="1047750" y="2867025"/>
             <a:ext cx="12192000" cy="266700"/>
           </a:xfrm>
         </p:spPr>
@@ -1008,7 +1008,7 @@
         </p:nvSpPr>
         <p:spPr>
           <a:xfrm>
-            <a:off x="1047750" y="3333750"/>
+            <a:off x="1047750" y="3152775"/>
             <a:ext cx="12192000" cy="266700"/>
           </a:xfrm>
         </p:spPr>
@@ -1092,7 +1092,7 @@
         </p:nvSpPr>
         <p:spPr>
           <a:xfrm>
-            <a:off x="0" y="1981200"/>
+            <a:off x="0" y="1739900"/>
             <a:ext cx="12192000" cy="355600"/>
           </a:xfrm>
         </p:spPr>
@@ -1120,7 +1120,7 @@
         </p:nvSpPr>
         <p:spPr>
           <a:xfrm>
-            <a:off x="4762500" y="2476500"/>
+            <a:off x="4762500" y="2295525"/>
             <a:ext cx="12192000" cy="266700"/>
           </a:xfrm>
         </p:spPr>
@@ -1148,7 +1148,7 @@
         </p:nvSpPr>
         <p:spPr>
           <a:xfrm>
-            <a:off x="4762500" y="2762250"/>
+            <a:off x="4762500" y="2581275"/>
             <a:ext cx="12192000" cy="266700"/>
           </a:xfrm>
         </p:spPr>
@@ -1176,7 +1176,7 @@
         </p:nvSpPr>
         <p:spPr>
           <a:xfrm>
-            <a:off x="4762500" y="3048000"/>
+            <a:off x="4762500" y="2867025"/>
             <a:ext cx="12192000" cy="266700"/>
           </a:xfrm>
         </p:spPr>
@@ -1204,7 +1204,7 @@
         </p:nvSpPr>
         <p:spPr>
           <a:xfrm>
-            <a:off x="4762500" y="3333750"/>
+            <a:off x="4762500" y="3152775"/>
             <a:ext cx="12192000" cy="266700"/>
           </a:xfrm>
         </p:spPr>
@@ -1288,7 +1288,7 @@
         </p:nvSpPr>
         <p:spPr>
           <a:xfrm>
-            <a:off x="3714750" y="1981200"/>
+            <a:off x="3714750" y="1739900"/>
             <a:ext cx="12192000" cy="355600"/>
           </a:xfrm>
         </p:spPr>
@@ -1316,7 +1316,7 @@
         </p:nvSpPr>
         <p:spPr>
           <a:xfrm>
-            <a:off x="8477250" y="2476500"/>
+            <a:off x="8477250" y="2295525"/>
             <a:ext cx="12192000" cy="266700"/>
           </a:xfrm>
         </p:spPr>
@@ -1344,7 +1344,7 @@
         </p:nvSpPr>
         <p:spPr>
           <a:xfrm>
-            <a:off x="8477250" y="2762250"/>
+            <a:off x="8477250" y="2581275"/>
             <a:ext cx="12192000" cy="266700"/>
           </a:xfrm>
         </p:spPr>
@@ -1372,7 +1372,7 @@
         </p:nvSpPr>
         <p:spPr>
           <a:xfrm>
-            <a:off x="8477250" y="3048000"/>
+            <a:off x="8477250" y="2867025"/>
             <a:ext cx="12192000" cy="266700"/>
           </a:xfrm>
         </p:spPr>
@@ -1400,7 +1400,7 @@
         </p:nvSpPr>
         <p:spPr>
           <a:xfrm>
-            <a:off x="8477250" y="3333750"/>
+            <a:off x="8477250" y="3152775"/>
             <a:ext cx="12192000" cy="266700"/>
           </a:xfrm>
         </p:spPr>
@@ -1428,7 +1428,7 @@
         </p:nvSpPr>
         <p:spPr>
           <a:xfrm>
-            <a:off x="762000" y="4286250"/>
+            <a:off x="762000" y="4020820"/>
             <a:ext cx="12192000" cy="391160"/>
           </a:xfrm>
         </p:spPr>
@@ -1486,7 +1486,7 @@
         </p:nvSpPr>
         <p:spPr>
           <a:xfrm>
-            <a:off x="-4476750" y="4857750"/>
+            <a:off x="-4476750" y="4688840"/>
             <a:ext cx="12192000" cy="248920"/>
           </a:xfrm>
         </p:spPr>
@@ -1514,7 +1514,7 @@
         </p:nvSpPr>
         <p:spPr>
           <a:xfrm>
-            <a:off x="-4476750" y="5019675"/>
+            <a:off x="-4476750" y="4886960"/>
             <a:ext cx="12192000" cy="195580"/>
           </a:xfrm>
         </p:spPr>
@@ -1572,7 +1572,7 @@
         </p:nvSpPr>
         <p:spPr>
           <a:xfrm>
-            <a:off x="-2571750" y="4857750"/>
+            <a:off x="-2571750" y="4688840"/>
             <a:ext cx="12192000" cy="248920"/>
           </a:xfrm>
         </p:spPr>
@@ -1600,7 +1600,7 @@
         </p:nvSpPr>
         <p:spPr>
           <a:xfrm>
-            <a:off x="-2571750" y="5019675"/>
+            <a:off x="-2571750" y="4886960"/>
             <a:ext cx="12192000" cy="195580"/>
           </a:xfrm>
         </p:spPr>
@@ -1658,7 +1658,7 @@
         </p:nvSpPr>
         <p:spPr>
           <a:xfrm>
-            <a:off x="-666750" y="4857750"/>
+            <a:off x="-666750" y="4688840"/>
             <a:ext cx="12192000" cy="248920"/>
           </a:xfrm>
         </p:spPr>
@@ -1686,7 +1686,7 @@
         </p:nvSpPr>
         <p:spPr>
           <a:xfrm>
-            <a:off x="-666750" y="5019675"/>
+            <a:off x="-666750" y="4886960"/>
             <a:ext cx="12192000" cy="195580"/>
           </a:xfrm>
         </p:spPr>
@@ -1744,7 +1744,7 @@
         </p:nvSpPr>
         <p:spPr>
           <a:xfrm>
-            <a:off x="1238250" y="4857750"/>
+            <a:off x="1238250" y="4688840"/>
             <a:ext cx="12192000" cy="248920"/>
           </a:xfrm>
         </p:spPr>
@@ -1772,7 +1772,7 @@
         </p:nvSpPr>
         <p:spPr>
           <a:xfrm>
-            <a:off x="1238250" y="5019675"/>
+            <a:off x="1238250" y="4886960"/>
             <a:ext cx="12192000" cy="195580"/>
           </a:xfrm>
         </p:spPr>
@@ -1830,7 +1830,7 @@
         </p:nvSpPr>
         <p:spPr>
           <a:xfrm>
-            <a:off x="3143250" y="4857750"/>
+            <a:off x="3143250" y="4688840"/>
             <a:ext cx="12192000" cy="248920"/>
           </a:xfrm>
         </p:spPr>
@@ -1858,7 +1858,7 @@
         </p:nvSpPr>
         <p:spPr>
           <a:xfrm>
-            <a:off x="3143250" y="5019675"/>
+            <a:off x="3143250" y="4886960"/>
             <a:ext cx="12192000" cy="195580"/>
           </a:xfrm>
         </p:spPr>
@@ -1916,7 +1916,7 @@
         </p:nvSpPr>
         <p:spPr>
           <a:xfrm>
-            <a:off x="-4476750" y="5619750"/>
+            <a:off x="-4476750" y="5450840"/>
             <a:ext cx="12192000" cy="248920"/>
           </a:xfrm>
         </p:spPr>
@@ -1944,7 +1944,7 @@
         </p:nvSpPr>
         <p:spPr>
           <a:xfrm>
-            <a:off x="-4476750" y="5781675"/>
+            <a:off x="-4476750" y="5648960"/>
             <a:ext cx="12192000" cy="195580"/>
           </a:xfrm>
         </p:spPr>
@@ -2002,7 +2002,7 @@
         </p:nvSpPr>
         <p:spPr>
           <a:xfrm>
-            <a:off x="-2571750" y="5619750"/>
+            <a:off x="-2571750" y="5450840"/>
             <a:ext cx="12192000" cy="248920"/>
           </a:xfrm>
         </p:spPr>
@@ -2030,7 +2030,7 @@
         </p:nvSpPr>
         <p:spPr>
           <a:xfrm>
-            <a:off x="-2571750" y="5781675"/>
+            <a:off x="-2571750" y="5648960"/>
             <a:ext cx="12192000" cy="195580"/>
           </a:xfrm>
         </p:spPr>
@@ -2104,7 +2104,7 @@
         </p:nvSpPr>
         <p:spPr>
           <a:xfrm>
-            <a:off x="762000" y="1047750"/>
+            <a:off x="762000" y="613410"/>
             <a:ext cx="12192000" cy="640080"/>
           </a:xfrm>
         </p:spPr>
@@ -2183,7 +2183,7 @@
         </p:nvSpPr>
         <p:spPr>
           <a:xfrm>
-            <a:off x="1047750" y="2000250"/>
+            <a:off x="1047750" y="1783080"/>
             <a:ext cx="12192000" cy="320040"/>
           </a:xfrm>
         </p:spPr>
@@ -2211,7 +2211,7 @@
         </p:nvSpPr>
         <p:spPr>
           <a:xfrm>
-            <a:off x="1047750" y="2238375"/>
+            <a:off x="1047750" y="2069465"/>
             <a:ext cx="12192000" cy="248920"/>
           </a:xfrm>
         </p:spPr>
@@ -2239,7 +2239,7 @@
         </p:nvSpPr>
         <p:spPr>
           <a:xfrm>
-            <a:off x="1047750" y="2457450"/>
+            <a:off x="1047750" y="2288540"/>
             <a:ext cx="12192000" cy="248920"/>
           </a:xfrm>
         </p:spPr>
@@ -2267,7 +2267,7 @@
         </p:nvSpPr>
         <p:spPr>
           <a:xfrm>
-            <a:off x="1047750" y="2676525"/>
+            <a:off x="1047750" y="2507615"/>
             <a:ext cx="12192000" cy="248920"/>
           </a:xfrm>
         </p:spPr>
@@ -2325,7 +2325,7 @@
         </p:nvSpPr>
         <p:spPr>
           <a:xfrm>
-            <a:off x="4714875" y="2000250"/>
+            <a:off x="4714875" y="1783080"/>
             <a:ext cx="12192000" cy="320040"/>
           </a:xfrm>
         </p:spPr>
@@ -2353,7 +2353,7 @@
         </p:nvSpPr>
         <p:spPr>
           <a:xfrm>
-            <a:off x="4714875" y="2238375"/>
+            <a:off x="4714875" y="2069465"/>
             <a:ext cx="12192000" cy="248920"/>
           </a:xfrm>
         </p:spPr>
@@ -2381,7 +2381,7 @@
         </p:nvSpPr>
         <p:spPr>
           <a:xfrm>
-            <a:off x="4714875" y="2457450"/>
+            <a:off x="4714875" y="2288540"/>
             <a:ext cx="12192000" cy="248920"/>
           </a:xfrm>
         </p:spPr>
@@ -2409,7 +2409,7 @@
         </p:nvSpPr>
         <p:spPr>
           <a:xfrm>
-            <a:off x="4714875" y="2676525"/>
+            <a:off x="4714875" y="2507615"/>
             <a:ext cx="12192000" cy="248920"/>
           </a:xfrm>
         </p:spPr>
@@ -2467,7 +2467,7 @@
         </p:nvSpPr>
         <p:spPr>
           <a:xfrm>
-            <a:off x="8382000" y="2000250"/>
+            <a:off x="8382000" y="1783080"/>
             <a:ext cx="12192000" cy="320040"/>
           </a:xfrm>
         </p:spPr>
@@ -2495,7 +2495,7 @@
         </p:nvSpPr>
         <p:spPr>
           <a:xfrm>
-            <a:off x="8382000" y="2238375"/>
+            <a:off x="8382000" y="2069465"/>
             <a:ext cx="12192000" cy="248920"/>
           </a:xfrm>
         </p:spPr>
@@ -2523,7 +2523,7 @@
         </p:nvSpPr>
         <p:spPr>
           <a:xfrm>
-            <a:off x="8382000" y="2457450"/>
+            <a:off x="8382000" y="2288540"/>
             <a:ext cx="12192000" cy="248920"/>
           </a:xfrm>
         </p:spPr>
@@ -2551,7 +2551,7 @@
         </p:nvSpPr>
         <p:spPr>
           <a:xfrm>
-            <a:off x="8382000" y="2676525"/>
+            <a:off x="8382000" y="2507615"/>
             <a:ext cx="12192000" cy="248920"/>
           </a:xfrm>
         </p:spPr>
@@ -2609,7 +2609,7 @@
         </p:nvSpPr>
         <p:spPr>
           <a:xfrm>
-            <a:off x="1047750" y="3619500"/>
+            <a:off x="1047750" y="3402330"/>
             <a:ext cx="12192000" cy="320040"/>
           </a:xfrm>
         </p:spPr>
@@ -2637,7 +2637,7 @@
         </p:nvSpPr>
         <p:spPr>
           <a:xfrm>
-            <a:off x="1047750" y="3857625"/>
+            <a:off x="1047750" y="3688715"/>
             <a:ext cx="12192000" cy="248920"/>
           </a:xfrm>
         </p:spPr>
@@ -2665,7 +2665,7 @@
         </p:nvSpPr>
         <p:spPr>
           <a:xfrm>
-            <a:off x="1047750" y="4076700"/>
+            <a:off x="1047750" y="3907790"/>
             <a:ext cx="12192000" cy="248920"/>
           </a:xfrm>
         </p:spPr>
@@ -2693,7 +2693,7 @@
         </p:nvSpPr>
         <p:spPr>
           <a:xfrm>
-            <a:off x="1047750" y="4295775"/>
+            <a:off x="1047750" y="4126865"/>
             <a:ext cx="12192000" cy="248920"/>
           </a:xfrm>
         </p:spPr>
@@ -2751,7 +2751,7 @@
         </p:nvSpPr>
         <p:spPr>
           <a:xfrm>
-            <a:off x="4714875" y="3619500"/>
+            <a:off x="4714875" y="3402330"/>
             <a:ext cx="12192000" cy="320040"/>
           </a:xfrm>
         </p:spPr>
@@ -2779,7 +2779,7 @@
         </p:nvSpPr>
         <p:spPr>
           <a:xfrm>
-            <a:off x="4714875" y="3857625"/>
+            <a:off x="4714875" y="3688715"/>
             <a:ext cx="12192000" cy="248920"/>
           </a:xfrm>
         </p:spPr>
@@ -2807,7 +2807,7 @@
         </p:nvSpPr>
         <p:spPr>
           <a:xfrm>
-            <a:off x="4714875" y="4076700"/>
+            <a:off x="4714875" y="3907790"/>
             <a:ext cx="12192000" cy="248920"/>
           </a:xfrm>
         </p:spPr>
@@ -2835,7 +2835,7 @@
         </p:nvSpPr>
         <p:spPr>
           <a:xfrm>
-            <a:off x="4714875" y="4295775"/>
+            <a:off x="4714875" y="4126865"/>
             <a:ext cx="12192000" cy="248920"/>
           </a:xfrm>
         </p:spPr>
@@ -2893,7 +2893,7 @@
         </p:nvSpPr>
         <p:spPr>
           <a:xfrm>
-            <a:off x="8382000" y="3619500"/>
+            <a:off x="8382000" y="3402330"/>
             <a:ext cx="12192000" cy="320040"/>
           </a:xfrm>
         </p:spPr>
@@ -2921,7 +2921,7 @@
         </p:nvSpPr>
         <p:spPr>
           <a:xfrm>
-            <a:off x="8382000" y="3857625"/>
+            <a:off x="8382000" y="3688715"/>
             <a:ext cx="12192000" cy="248920"/>
           </a:xfrm>
         </p:spPr>
@@ -2949,7 +2949,7 @@
         </p:nvSpPr>
         <p:spPr>
           <a:xfrm>
-            <a:off x="8382000" y="4076700"/>
+            <a:off x="8382000" y="3907790"/>
             <a:ext cx="12192000" cy="248920"/>
           </a:xfrm>
         </p:spPr>
@@ -2977,7 +2977,7 @@
         </p:nvSpPr>
         <p:spPr>
           <a:xfrm>
-            <a:off x="8382000" y="4295775"/>
+            <a:off x="8382000" y="4126865"/>
             <a:ext cx="12192000" cy="248920"/>
           </a:xfrm>
         </p:spPr>
@@ -3035,7 +3035,7 @@
         </p:nvSpPr>
         <p:spPr>
           <a:xfrm>
-            <a:off x="0" y="5334000"/>
+            <a:off x="0" y="5153025"/>
             <a:ext cx="12192000" cy="266700"/>
           </a:xfrm>
         </p:spPr>
@@ -3109,7 +3109,7 @@
         </p:nvSpPr>
         <p:spPr>
           <a:xfrm>
-            <a:off x="762000" y="1047750"/>
+            <a:off x="762000" y="613410"/>
             <a:ext cx="12192000" cy="640080"/>
           </a:xfrm>
         </p:spPr>
@@ -3214,7 +3214,7 @@
         </p:nvSpPr>
         <p:spPr>
           <a:xfrm>
-            <a:off x="1047750" y="1885950"/>
+            <a:off x="1047750" y="1644650"/>
             <a:ext cx="12192000" cy="355600"/>
           </a:xfrm>
         </p:spPr>
@@ -3242,7 +3242,7 @@
         </p:nvSpPr>
         <p:spPr>
           <a:xfrm>
-            <a:off x="1047750" y="2381250"/>
+            <a:off x="1047750" y="2200275"/>
             <a:ext cx="12192000" cy="266700"/>
           </a:xfrm>
         </p:spPr>
@@ -3270,7 +3270,7 @@
         </p:nvSpPr>
         <p:spPr>
           <a:xfrm>
-            <a:off x="1047750" y="2667000"/>
+            <a:off x="1047750" y="2486025"/>
             <a:ext cx="12192000" cy="266700"/>
           </a:xfrm>
         </p:spPr>
@@ -3298,7 +3298,7 @@
         </p:nvSpPr>
         <p:spPr>
           <a:xfrm>
-            <a:off x="1047750" y="2952750"/>
+            <a:off x="1047750" y="2771775"/>
             <a:ext cx="12192000" cy="266700"/>
           </a:xfrm>
         </p:spPr>
@@ -3326,7 +3326,7 @@
         </p:nvSpPr>
         <p:spPr>
           <a:xfrm>
-            <a:off x="1047750" y="3238500"/>
+            <a:off x="1047750" y="3057525"/>
             <a:ext cx="12192000" cy="266700"/>
           </a:xfrm>
         </p:spPr>
@@ -3354,7 +3354,7 @@
         </p:nvSpPr>
         <p:spPr>
           <a:xfrm>
-            <a:off x="1047750" y="3571875"/>
+            <a:off x="1047750" y="3415030"/>
             <a:ext cx="12192000" cy="231140"/>
           </a:xfrm>
         </p:spPr>
@@ -3438,7 +3438,7 @@
         </p:nvSpPr>
         <p:spPr>
           <a:xfrm>
-            <a:off x="6572250" y="1885950"/>
+            <a:off x="6572250" y="1644650"/>
             <a:ext cx="12192000" cy="355600"/>
           </a:xfrm>
         </p:spPr>
@@ -3466,7 +3466,7 @@
         </p:nvSpPr>
         <p:spPr>
           <a:xfrm>
-            <a:off x="6572250" y="2381250"/>
+            <a:off x="6572250" y="2200275"/>
             <a:ext cx="12192000" cy="266700"/>
           </a:xfrm>
         </p:spPr>
@@ -3494,7 +3494,7 @@
         </p:nvSpPr>
         <p:spPr>
           <a:xfrm>
-            <a:off x="6572250" y="2667000"/>
+            <a:off x="6572250" y="2486025"/>
             <a:ext cx="12192000" cy="266700"/>
           </a:xfrm>
         </p:spPr>
@@ -3522,7 +3522,7 @@
         </p:nvSpPr>
         <p:spPr>
           <a:xfrm>
-            <a:off x="6572250" y="2952750"/>
+            <a:off x="6572250" y="2771775"/>
             <a:ext cx="12192000" cy="266700"/>
           </a:xfrm>
         </p:spPr>
@@ -3550,7 +3550,7 @@
         </p:nvSpPr>
         <p:spPr>
           <a:xfrm>
-            <a:off x="6572250" y="3238500"/>
+            <a:off x="6572250" y="3057525"/>
             <a:ext cx="12192000" cy="266700"/>
           </a:xfrm>
         </p:spPr>
@@ -3578,7 +3578,7 @@
         </p:nvSpPr>
         <p:spPr>
           <a:xfrm>
-            <a:off x="6572250" y="3571875"/>
+            <a:off x="6572250" y="3415030"/>
             <a:ext cx="12192000" cy="231140"/>
           </a:xfrm>
         </p:spPr>
@@ -3662,7 +3662,7 @@
         </p:nvSpPr>
         <p:spPr>
           <a:xfrm>
-            <a:off x="1047750" y="4552950"/>
+            <a:off x="1047750" y="4311650"/>
             <a:ext cx="12192000" cy="355600"/>
           </a:xfrm>
         </p:spPr>
@@ -3690,7 +3690,7 @@
         </p:nvSpPr>
         <p:spPr>
           <a:xfrm>
-            <a:off x="1047750" y="4953000"/>
+            <a:off x="1047750" y="4772025"/>
             <a:ext cx="12192000" cy="266700"/>
           </a:xfrm>
         </p:spPr>
@@ -3718,7 +3718,7 @@
         </p:nvSpPr>
         <p:spPr>
           <a:xfrm>
-            <a:off x="1047750" y="5238750"/>
+            <a:off x="1047750" y="5057775"/>
             <a:ext cx="12192000" cy="266700"/>
           </a:xfrm>
         </p:spPr>
@@ -3792,7 +3792,7 @@
         </p:nvSpPr>
         <p:spPr>
           <a:xfrm>
-            <a:off x="762000" y="1047750"/>
+            <a:off x="762000" y="613410"/>
             <a:ext cx="12192000" cy="640080"/>
           </a:xfrm>
         </p:spPr>
@@ -3871,7 +3871,7 @@
         </p:nvSpPr>
         <p:spPr>
           <a:xfrm>
-            <a:off x="1047750" y="2000250"/>
+            <a:off x="1047750" y="1807210"/>
             <a:ext cx="12192000" cy="284480"/>
           </a:xfrm>
         </p:spPr>
@@ -3899,7 +3899,7 @@
         </p:nvSpPr>
         <p:spPr>
           <a:xfrm>
-            <a:off x="3048000" y="2000250"/>
+            <a:off x="3048000" y="1831340"/>
             <a:ext cx="12192000" cy="248920"/>
           </a:xfrm>
         </p:spPr>
@@ -3927,7 +3927,7 @@
         </p:nvSpPr>
         <p:spPr>
           <a:xfrm>
-            <a:off x="5524500" y="2000250"/>
+            <a:off x="5524500" y="1831340"/>
             <a:ext cx="12192000" cy="248920"/>
           </a:xfrm>
         </p:spPr>
@@ -3955,7 +3955,7 @@
         </p:nvSpPr>
         <p:spPr>
           <a:xfrm>
-            <a:off x="8001000" y="2000250"/>
+            <a:off x="8001000" y="1831340"/>
             <a:ext cx="12192000" cy="248920"/>
           </a:xfrm>
         </p:spPr>
@@ -3983,7 +3983,7 @@
         </p:nvSpPr>
         <p:spPr>
           <a:xfrm>
-            <a:off x="0" y="2495550"/>
+            <a:off x="0" y="2254250"/>
             <a:ext cx="12192000" cy="355600"/>
           </a:xfrm>
         </p:spPr>
@@ -4041,7 +4041,7 @@
         </p:nvSpPr>
         <p:spPr>
           <a:xfrm>
-            <a:off x="1047750" y="3000375"/>
+            <a:off x="1047750" y="2807335"/>
             <a:ext cx="12192000" cy="284480"/>
           </a:xfrm>
         </p:spPr>
@@ -4069,7 +4069,7 @@
         </p:nvSpPr>
         <p:spPr>
           <a:xfrm>
-            <a:off x="3048000" y="3000375"/>
+            <a:off x="3048000" y="2831465"/>
             <a:ext cx="12192000" cy="248920"/>
           </a:xfrm>
         </p:spPr>
@@ -4097,7 +4097,7 @@
         </p:nvSpPr>
         <p:spPr>
           <a:xfrm>
-            <a:off x="5524500" y="3000375"/>
+            <a:off x="5524500" y="2831465"/>
             <a:ext cx="12192000" cy="248920"/>
           </a:xfrm>
         </p:spPr>
@@ -4125,7 +4125,7 @@
         </p:nvSpPr>
         <p:spPr>
           <a:xfrm>
-            <a:off x="8001000" y="3000375"/>
+            <a:off x="8001000" y="2831465"/>
             <a:ext cx="12192000" cy="248920"/>
           </a:xfrm>
         </p:spPr>
@@ -4153,7 +4153,7 @@
         </p:nvSpPr>
         <p:spPr>
           <a:xfrm>
-            <a:off x="0" y="3495675"/>
+            <a:off x="0" y="3254375"/>
             <a:ext cx="12192000" cy="355600"/>
           </a:xfrm>
         </p:spPr>
@@ -4211,7 +4211,7 @@
         </p:nvSpPr>
         <p:spPr>
           <a:xfrm>
-            <a:off x="1047750" y="4000500"/>
+            <a:off x="1047750" y="3807460"/>
             <a:ext cx="12192000" cy="284480"/>
           </a:xfrm>
         </p:spPr>
@@ -4239,7 +4239,7 @@
         </p:nvSpPr>
         <p:spPr>
           <a:xfrm>
-            <a:off x="3048000" y="4000500"/>
+            <a:off x="3048000" y="3831590"/>
             <a:ext cx="12192000" cy="248920"/>
           </a:xfrm>
         </p:spPr>
@@ -4267,7 +4267,7 @@
         </p:nvSpPr>
         <p:spPr>
           <a:xfrm>
-            <a:off x="5524500" y="4000500"/>
+            <a:off x="5524500" y="3831590"/>
             <a:ext cx="12192000" cy="248920"/>
           </a:xfrm>
         </p:spPr>
@@ -4295,7 +4295,7 @@
         </p:nvSpPr>
         <p:spPr>
           <a:xfrm>
-            <a:off x="8001000" y="4000500"/>
+            <a:off x="8001000" y="3831590"/>
             <a:ext cx="12192000" cy="248920"/>
           </a:xfrm>
         </p:spPr>
@@ -4323,7 +4323,7 @@
         </p:nvSpPr>
         <p:spPr>
           <a:xfrm>
-            <a:off x="0" y="4495800"/>
+            <a:off x="0" y="4254500"/>
             <a:ext cx="12192000" cy="355600"/>
           </a:xfrm>
         </p:spPr>
@@ -4381,7 +4381,7 @@
         </p:nvSpPr>
         <p:spPr>
           <a:xfrm>
-            <a:off x="1047750" y="5000625"/>
+            <a:off x="1047750" y="4807585"/>
             <a:ext cx="12192000" cy="284480"/>
           </a:xfrm>
         </p:spPr>
@@ -4409,7 +4409,7 @@
         </p:nvSpPr>
         <p:spPr>
           <a:xfrm>
-            <a:off x="3048000" y="5000625"/>
+            <a:off x="3048000" y="4831715"/>
             <a:ext cx="12192000" cy="248920"/>
           </a:xfrm>
         </p:spPr>
@@ -4437,7 +4437,7 @@
         </p:nvSpPr>
         <p:spPr>
           <a:xfrm>
-            <a:off x="5524500" y="5000625"/>
+            <a:off x="5524500" y="4831715"/>
             <a:ext cx="12192000" cy="248920"/>
           </a:xfrm>
         </p:spPr>
@@ -4465,7 +4465,7 @@
         </p:nvSpPr>
         <p:spPr>
           <a:xfrm>
-            <a:off x="8001000" y="5000625"/>
+            <a:off x="8001000" y="4831715"/>
             <a:ext cx="12192000" cy="248920"/>
           </a:xfrm>
         </p:spPr>
@@ -4493,7 +4493,7 @@
         </p:nvSpPr>
         <p:spPr>
           <a:xfrm>
-            <a:off x="0" y="5495925"/>
+            <a:off x="0" y="5254625"/>
             <a:ext cx="12192000" cy="355600"/>
           </a:xfrm>
         </p:spPr>
@@ -4551,7 +4551,7 @@
         </p:nvSpPr>
         <p:spPr>
           <a:xfrm>
-            <a:off x="1047750" y="6000750"/>
+            <a:off x="1047750" y="5807710"/>
             <a:ext cx="12192000" cy="284480"/>
           </a:xfrm>
         </p:spPr>
@@ -4579,7 +4579,7 @@
         </p:nvSpPr>
         <p:spPr>
           <a:xfrm>
-            <a:off x="3048000" y="6000750"/>
+            <a:off x="3048000" y="5831840"/>
             <a:ext cx="12192000" cy="248920"/>
           </a:xfrm>
         </p:spPr>
@@ -4607,7 +4607,7 @@
         </p:nvSpPr>
         <p:spPr>
           <a:xfrm>
-            <a:off x="5524500" y="6000750"/>
+            <a:off x="5524500" y="5831840"/>
             <a:ext cx="12192000" cy="248920"/>
           </a:xfrm>
         </p:spPr>
@@ -4635,7 +4635,7 @@
         </p:nvSpPr>
         <p:spPr>
           <a:xfrm>
-            <a:off x="8001000" y="6000750"/>
+            <a:off x="8001000" y="5831840"/>
             <a:ext cx="12192000" cy="248920"/>
           </a:xfrm>
         </p:spPr>
@@ -4709,7 +4709,7 @@
         </p:nvSpPr>
         <p:spPr>
           <a:xfrm>
-            <a:off x="762000" y="1047750"/>
+            <a:off x="762000" y="613410"/>
             <a:ext cx="12192000" cy="640080"/>
           </a:xfrm>
         </p:spPr>
@@ -4758,7 +4758,7 @@
         </p:nvSpPr>
         <p:spPr>
           <a:xfrm>
-            <a:off x="762000" y="1714500"/>
+            <a:off x="762000" y="1449070"/>
             <a:ext cx="12192000" cy="391160"/>
           </a:xfrm>
         </p:spPr>
@@ -4816,7 +4816,7 @@
         </p:nvSpPr>
         <p:spPr>
           <a:xfrm>
-            <a:off x="-3714750" y="2238375"/>
+            <a:off x="-3714750" y="2021205"/>
             <a:ext cx="12192000" cy="320040"/>
           </a:xfrm>
         </p:spPr>
@@ -4844,7 +4844,7 @@
         </p:nvSpPr>
         <p:spPr>
           <a:xfrm>
-            <a:off x="-3714750" y="2457450"/>
+            <a:off x="-3714750" y="2300605"/>
             <a:ext cx="12192000" cy="231140"/>
           </a:xfrm>
         </p:spPr>
@@ -4902,7 +4902,7 @@
         </p:nvSpPr>
         <p:spPr>
           <a:xfrm>
-            <a:off x="0" y="2238375"/>
+            <a:off x="0" y="2021205"/>
             <a:ext cx="12192000" cy="320040"/>
           </a:xfrm>
         </p:spPr>
@@ -4930,7 +4930,7 @@
         </p:nvSpPr>
         <p:spPr>
           <a:xfrm>
-            <a:off x="0" y="2457450"/>
+            <a:off x="0" y="2300605"/>
             <a:ext cx="12192000" cy="231140"/>
           </a:xfrm>
         </p:spPr>
@@ -4988,7 +4988,7 @@
         </p:nvSpPr>
         <p:spPr>
           <a:xfrm>
-            <a:off x="3714750" y="2238375"/>
+            <a:off x="3714750" y="2021205"/>
             <a:ext cx="12192000" cy="320040"/>
           </a:xfrm>
         </p:spPr>
@@ -5016,7 +5016,7 @@
         </p:nvSpPr>
         <p:spPr>
           <a:xfrm>
-            <a:off x="3714750" y="2457450"/>
+            <a:off x="3714750" y="2300605"/>
             <a:ext cx="12192000" cy="231140"/>
           </a:xfrm>
         </p:spPr>
@@ -5044,7 +5044,7 @@
         </p:nvSpPr>
         <p:spPr>
           <a:xfrm>
-            <a:off x="762000" y="3333750"/>
+            <a:off x="762000" y="3068320"/>
             <a:ext cx="12192000" cy="391160"/>
           </a:xfrm>
         </p:spPr>
@@ -5102,7 +5102,7 @@
         </p:nvSpPr>
         <p:spPr>
           <a:xfrm>
-            <a:off x="-4124325" y="3810000"/>
+            <a:off x="-4124325" y="3616960"/>
             <a:ext cx="12192000" cy="284480"/>
           </a:xfrm>
         </p:spPr>
@@ -5130,7 +5130,7 @@
         </p:nvSpPr>
         <p:spPr>
           <a:xfrm>
-            <a:off x="952500" y="4076700"/>
+            <a:off x="952500" y="3919855"/>
             <a:ext cx="12192000" cy="231140"/>
           </a:xfrm>
         </p:spPr>
@@ -5158,7 +5158,7 @@
         </p:nvSpPr>
         <p:spPr>
           <a:xfrm>
-            <a:off x="952500" y="4286250"/>
+            <a:off x="952500" y="4129405"/>
             <a:ext cx="12192000" cy="231140"/>
           </a:xfrm>
         </p:spPr>
@@ -5186,7 +5186,7 @@
         </p:nvSpPr>
         <p:spPr>
           <a:xfrm>
-            <a:off x="952500" y="4495800"/>
+            <a:off x="952500" y="4338955"/>
             <a:ext cx="12192000" cy="231140"/>
           </a:xfrm>
         </p:spPr>
@@ -5244,7 +5244,7 @@
         </p:nvSpPr>
         <p:spPr>
           <a:xfrm>
-            <a:off x="-1504950" y="3810000"/>
+            <a:off x="-1504950" y="3616960"/>
             <a:ext cx="12192000" cy="284480"/>
           </a:xfrm>
         </p:spPr>
@@ -5272,7 +5272,7 @@
         </p:nvSpPr>
         <p:spPr>
           <a:xfrm>
-            <a:off x="3571875" y="4076700"/>
+            <a:off x="3571875" y="3919855"/>
             <a:ext cx="12192000" cy="231140"/>
           </a:xfrm>
         </p:spPr>
@@ -5300,7 +5300,7 @@
         </p:nvSpPr>
         <p:spPr>
           <a:xfrm>
-            <a:off x="3571875" y="4286250"/>
+            <a:off x="3571875" y="4129405"/>
             <a:ext cx="12192000" cy="231140"/>
           </a:xfrm>
         </p:spPr>
@@ -5328,7 +5328,7 @@
         </p:nvSpPr>
         <p:spPr>
           <a:xfrm>
-            <a:off x="3571875" y="4495800"/>
+            <a:off x="3571875" y="4338955"/>
             <a:ext cx="12192000" cy="231140"/>
           </a:xfrm>
         </p:spPr>
@@ -5386,7 +5386,7 @@
         </p:nvSpPr>
         <p:spPr>
           <a:xfrm>
-            <a:off x="1114425" y="3810000"/>
+            <a:off x="1114425" y="3616960"/>
             <a:ext cx="12192000" cy="284480"/>
           </a:xfrm>
         </p:spPr>
@@ -5414,7 +5414,7 @@
         </p:nvSpPr>
         <p:spPr>
           <a:xfrm>
-            <a:off x="6191250" y="4076700"/>
+            <a:off x="6191250" y="3919855"/>
             <a:ext cx="12192000" cy="231140"/>
           </a:xfrm>
         </p:spPr>
@@ -5442,7 +5442,7 @@
         </p:nvSpPr>
         <p:spPr>
           <a:xfrm>
-            <a:off x="6191250" y="4286250"/>
+            <a:off x="6191250" y="4129405"/>
             <a:ext cx="12192000" cy="231140"/>
           </a:xfrm>
         </p:spPr>
@@ -5470,7 +5470,7 @@
         </p:nvSpPr>
         <p:spPr>
           <a:xfrm>
-            <a:off x="6191250" y="4495800"/>
+            <a:off x="6191250" y="4338955"/>
             <a:ext cx="12192000" cy="231140"/>
           </a:xfrm>
         </p:spPr>
@@ -5528,7 +5528,7 @@
         </p:nvSpPr>
         <p:spPr>
           <a:xfrm>
-            <a:off x="3733800" y="3810000"/>
+            <a:off x="3733800" y="3616960"/>
             <a:ext cx="12192000" cy="284480"/>
           </a:xfrm>
         </p:spPr>
@@ -5556,7 +5556,7 @@
         </p:nvSpPr>
         <p:spPr>
           <a:xfrm>
-            <a:off x="8810625" y="4076700"/>
+            <a:off x="8810625" y="3919855"/>
             <a:ext cx="12192000" cy="231140"/>
           </a:xfrm>
         </p:spPr>
@@ -5584,7 +5584,7 @@
         </p:nvSpPr>
         <p:spPr>
           <a:xfrm>
-            <a:off x="8810625" y="4286250"/>
+            <a:off x="8810625" y="4129405"/>
             <a:ext cx="12192000" cy="231140"/>
           </a:xfrm>
         </p:spPr>
@@ -5612,7 +5612,7 @@
         </p:nvSpPr>
         <p:spPr>
           <a:xfrm>
-            <a:off x="8810625" y="4495800"/>
+            <a:off x="8810625" y="4338955"/>
             <a:ext cx="12192000" cy="231140"/>
           </a:xfrm>
         </p:spPr>
@@ -5640,7 +5640,7 @@
         </p:nvSpPr>
         <p:spPr>
           <a:xfrm>
-            <a:off x="762000" y="5143500"/>
+            <a:off x="762000" y="4974590"/>
             <a:ext cx="12192000" cy="248920"/>
           </a:xfrm>
         </p:spPr>
@@ -5788,7 +5788,7 @@
         </p:nvSpPr>
         <p:spPr>
           <a:xfrm>
-            <a:off x="0" y="2857500"/>
+            <a:off x="0" y="2278380"/>
             <a:ext cx="12192000" cy="853440"/>
           </a:xfrm>
         </p:spPr>
@@ -5816,7 +5816,7 @@
         </p:nvSpPr>
         <p:spPr>
           <a:xfrm>
-            <a:off x="0" y="3429000"/>
+            <a:off x="0" y="3163570"/>
             <a:ext cx="12192000" cy="391160"/>
           </a:xfrm>
         </p:spPr>
@@ -5844,7 +5844,7 @@
         </p:nvSpPr>
         <p:spPr>
           <a:xfrm>
-            <a:off x="0" y="4000500"/>
+            <a:off x="0" y="3807460"/>
             <a:ext cx="12192000" cy="284480"/>
           </a:xfrm>
         </p:spPr>
@@ -5872,7 +5872,7 @@
         </p:nvSpPr>
         <p:spPr>
           <a:xfrm>
-            <a:off x="0" y="4476750"/>
+            <a:off x="0" y="4307840"/>
             <a:ext cx="12192000" cy="248920"/>
           </a:xfrm>
         </p:spPr>
@@ -5930,7 +5930,7 @@
         </p:nvSpPr>
         <p:spPr>
           <a:xfrm>
-            <a:off x="0" y="5219700"/>
+            <a:off x="0" y="5038725"/>
             <a:ext cx="12192000" cy="266700"/>
           </a:xfrm>
         </p:spPr>

--- a/test/InkUO-产品介绍.pptx
+++ b/test/InkUO-产品介绍.pptx
@@ -182,7 +182,7 @@
         </p:nvSpPr>
         <p:spPr>
           <a:xfrm>
-            <a:off x="0" y="2561590"/>
+            <a:off x="0" y="2754630"/>
             <a:ext cx="12192000" cy="1137920"/>
           </a:xfrm>
         </p:spPr>
@@ -192,7 +192,7 @@
           <a:p>
             <a:pPr algn="ctr"/>
             <a:r>
-              <a:rPr lang="en-US" sz="6400" b="0" i="0" u="none">
+              <a:rPr lang="en-US" sz="4800" b="0" i="0" u="none">
                 <a:solidFill>
                   <a:srgbClr val="FFFFFF"/>
                 </a:solidFill>
@@ -210,7 +210,7 @@
         </p:nvSpPr>
         <p:spPr>
           <a:xfrm>
-            <a:off x="0" y="3567430"/>
+            <a:off x="0" y="3651885"/>
             <a:ext cx="12192000" cy="497840"/>
           </a:xfrm>
         </p:spPr>
@@ -220,7 +220,7 @@
           <a:p>
             <a:pPr algn="ctr"/>
             <a:r>
-              <a:rPr lang="en-US" sz="2800" b="0" i="0" u="none">
+              <a:rPr lang="en-US" sz="2100" b="0" i="0" u="none">
                 <a:solidFill>
                   <a:srgbClr val="A0B4D8"/>
                 </a:solidFill>
@@ -238,7 +238,7 @@
         </p:nvSpPr>
         <p:spPr>
           <a:xfrm>
-            <a:off x="0" y="4164330"/>
+            <a:off x="0" y="4218622"/>
             <a:ext cx="12192000" cy="320040"/>
           </a:xfrm>
         </p:spPr>
@@ -248,7 +248,7 @@
           <a:p>
             <a:pPr algn="ctr"/>
             <a:r>
-              <a:rPr lang="en-US" sz="1800" b="0" i="0" u="none">
+              <a:rPr lang="en-US" sz="1350" b="0" i="0" u="none">
                 <a:solidFill>
                   <a:srgbClr val="6C8EB0"/>
                 </a:solidFill>
@@ -266,7 +266,7 @@
         </p:nvSpPr>
         <p:spPr>
           <a:xfrm>
-            <a:off x="0" y="5546090"/>
+            <a:off x="0" y="5588317"/>
             <a:ext cx="12192000" cy="248920"/>
           </a:xfrm>
         </p:spPr>
@@ -276,7 +276,7 @@
           <a:p>
             <a:pPr algn="ctr"/>
             <a:r>
-              <a:rPr lang="en-US" sz="1400" b="0" i="0" u="none">
+              <a:rPr lang="en-US" sz="1050" b="0" i="0" u="none">
                 <a:solidFill>
                   <a:srgbClr val="4A6A8A"/>
                 </a:solidFill>
@@ -366,7 +366,7 @@
         </p:nvSpPr>
         <p:spPr>
           <a:xfrm>
-            <a:off x="762000" y="613410"/>
+            <a:off x="762000" y="721995"/>
             <a:ext cx="12192000" cy="640080"/>
           </a:xfrm>
         </p:spPr>
@@ -376,7 +376,7 @@
           <a:p>
             <a:pPr algn="l"/>
             <a:r>
-              <a:rPr lang="en-US" sz="3600" b="0" i="0" u="none">
+              <a:rPr lang="en-US" sz="2700" b="0" i="0" u="none">
                 <a:solidFill>
                   <a:srgbClr val="FFFFFF"/>
                 </a:solidFill>
@@ -415,7 +415,7 @@
         </p:nvSpPr>
         <p:spPr>
           <a:xfrm>
-            <a:off x="762000" y="1783080"/>
+            <a:off x="762000" y="1837372"/>
             <a:ext cx="12192000" cy="320040"/>
           </a:xfrm>
         </p:spPr>
@@ -425,7 +425,7 @@
           <a:p>
             <a:pPr algn="l"/>
             <a:r>
-              <a:rPr lang="en-US" sz="1800" b="0" i="0" u="none">
+              <a:rPr lang="en-US" sz="1350" b="0" i="0" u="none">
                 <a:solidFill>
                   <a:srgbClr val="C0D0E8"/>
                 </a:solidFill>
@@ -433,7 +433,7 @@
               <a:t>InkUO 是一款面向知识工作者、开发者和创意团队的</a:t>
             </a:r>
             <a:r>
-              <a:rPr lang="en-US" sz="1800" b="0" i="0" u="none">
+              <a:rPr lang="en-US" sz="1350" b="0" i="0" u="none">
                 <a:solidFill>
                   <a:srgbClr val="C0D0E8"/>
                 </a:solidFill>
@@ -481,7 +481,7 @@
         </p:nvSpPr>
         <p:spPr>
           <a:xfrm>
-            <a:off x="1047750" y="3021330"/>
+            <a:off x="1047750" y="3075622"/>
             <a:ext cx="12192000" cy="320040"/>
           </a:xfrm>
         </p:spPr>
@@ -491,7 +491,7 @@
           <a:p>
             <a:pPr algn="l"/>
             <a:r>
-              <a:rPr lang="en-US" sz="1800" b="0" i="0" u="none">
+              <a:rPr lang="en-US" sz="1350" b="0" i="0" u="none">
                 <a:solidFill>
                   <a:srgbClr val="00D2FF"/>
                 </a:solidFill>
@@ -509,7 +509,7 @@
         </p:nvSpPr>
         <p:spPr>
           <a:xfrm>
-            <a:off x="1047750" y="3307715"/>
+            <a:off x="1047750" y="3349942"/>
             <a:ext cx="12192000" cy="248920"/>
           </a:xfrm>
         </p:spPr>
@@ -519,7 +519,7 @@
           <a:p>
             <a:pPr algn="l"/>
             <a:r>
-              <a:rPr lang="en-US" sz="1400" b="0" i="0" u="none">
+              <a:rPr lang="en-US" sz="1050" b="0" i="0" u="none">
                 <a:solidFill>
                   <a:srgbClr val="8AA8C8"/>
                 </a:solidFill>
@@ -567,7 +567,7 @@
         </p:nvSpPr>
         <p:spPr>
           <a:xfrm>
-            <a:off x="4714875" y="3021330"/>
+            <a:off x="4714875" y="3075622"/>
             <a:ext cx="12192000" cy="320040"/>
           </a:xfrm>
         </p:spPr>
@@ -577,7 +577,7 @@
           <a:p>
             <a:pPr algn="l"/>
             <a:r>
-              <a:rPr lang="en-US" sz="1800" b="0" i="0" u="none">
+              <a:rPr lang="en-US" sz="1350" b="0" i="0" u="none">
                 <a:solidFill>
                   <a:srgbClr val="5A9BE5"/>
                 </a:solidFill>
@@ -595,7 +595,7 @@
         </p:nvSpPr>
         <p:spPr>
           <a:xfrm>
-            <a:off x="4714875" y="3307715"/>
+            <a:off x="4714875" y="3349942"/>
             <a:ext cx="12192000" cy="248920"/>
           </a:xfrm>
         </p:spPr>
@@ -605,7 +605,7 @@
           <a:p>
             <a:pPr algn="l"/>
             <a:r>
-              <a:rPr lang="en-US" sz="1400" b="0" i="0" u="none">
+              <a:rPr lang="en-US" sz="1050" b="0" i="0" u="none">
                 <a:solidFill>
                   <a:srgbClr val="8AA8C8"/>
                 </a:solidFill>
@@ -653,7 +653,7 @@
         </p:nvSpPr>
         <p:spPr>
           <a:xfrm>
-            <a:off x="8382000" y="3021330"/>
+            <a:off x="8382000" y="3075622"/>
             <a:ext cx="12192000" cy="320040"/>
           </a:xfrm>
         </p:spPr>
@@ -663,7 +663,7 @@
           <a:p>
             <a:pPr algn="l"/>
             <a:r>
-              <a:rPr lang="en-US" sz="1800" b="0" i="0" u="none">
+              <a:rPr lang="en-US" sz="1350" b="0" i="0" u="none">
                 <a:solidFill>
                   <a:srgbClr val="6CC8A0"/>
                 </a:solidFill>
@@ -681,7 +681,7 @@
         </p:nvSpPr>
         <p:spPr>
           <a:xfrm>
-            <a:off x="8382000" y="3307715"/>
+            <a:off x="8382000" y="3349942"/>
             <a:ext cx="12192000" cy="248920"/>
           </a:xfrm>
         </p:spPr>
@@ -691,7 +691,7 @@
           <a:p>
             <a:pPr algn="l"/>
             <a:r>
-              <a:rPr lang="en-US" sz="1400" b="0" i="0" u="none">
+              <a:rPr lang="en-US" sz="1050" b="0" i="0" u="none">
                 <a:solidFill>
                   <a:srgbClr val="8AA8C8"/>
                 </a:solidFill>
@@ -709,7 +709,7 @@
         </p:nvSpPr>
         <p:spPr>
           <a:xfrm>
-            <a:off x="762000" y="4283710"/>
+            <a:off x="762000" y="4331970"/>
             <a:ext cx="12192000" cy="284480"/>
           </a:xfrm>
         </p:spPr>
@@ -719,7 +719,7 @@
           <a:p>
             <a:pPr algn="l"/>
             <a:r>
-              <a:rPr lang="en-US" sz="1600" b="0" i="0" u="none">
+              <a:rPr lang="en-US" sz="1200" b="0" i="0" u="none">
                 <a:solidFill>
                   <a:srgbClr val="7090B0"/>
                 </a:solidFill>
@@ -727,7 +727,7 @@
               <a:t>无论你是撰写技术文档、编辑报告、处理数据表格，</a:t>
             </a:r>
             <a:r>
-              <a:rPr lang="en-US" sz="1600" b="0" i="0" u="none">
+              <a:rPr lang="en-US" sz="1200" b="0" i="0" u="none">
                 <a:solidFill>
                   <a:srgbClr val="7090B0"/>
                 </a:solidFill>
@@ -791,7 +791,7 @@
         </p:nvSpPr>
         <p:spPr>
           <a:xfrm>
-            <a:off x="762000" y="613410"/>
+            <a:off x="762000" y="721995"/>
             <a:ext cx="12192000" cy="640080"/>
           </a:xfrm>
         </p:spPr>
@@ -801,7 +801,7 @@
           <a:p>
             <a:pPr algn="l"/>
             <a:r>
-              <a:rPr lang="en-US" sz="3600" b="0" i="0" u="none">
+              <a:rPr lang="en-US" sz="2700" b="0" i="0" u="none">
                 <a:solidFill>
                   <a:srgbClr val="FFFFFF"/>
                 </a:solidFill>
@@ -896,7 +896,7 @@
         </p:nvSpPr>
         <p:spPr>
           <a:xfrm>
-            <a:off x="-3714750" y="1739900"/>
+            <a:off x="-3714750" y="1800225"/>
             <a:ext cx="12192000" cy="355600"/>
           </a:xfrm>
         </p:spPr>
@@ -906,7 +906,7 @@
           <a:p>
             <a:pPr algn="ctr"/>
             <a:r>
-              <a:rPr lang="en-US" sz="2000" b="0" i="0" u="none">
+              <a:rPr lang="en-US" sz="1500" b="0" i="0" u="none">
                 <a:solidFill>
                   <a:srgbClr val="00D2FF"/>
                 </a:solidFill>
@@ -924,7 +924,7 @@
         </p:nvSpPr>
         <p:spPr>
           <a:xfrm>
-            <a:off x="1047750" y="2295525"/>
+            <a:off x="1047750" y="2340769"/>
             <a:ext cx="12192000" cy="266700"/>
           </a:xfrm>
         </p:spPr>
@@ -934,7 +934,7 @@
           <a:p>
             <a:pPr algn="l"/>
             <a:r>
-              <a:rPr lang="en-US" sz="1500" b="0" i="0" u="none">
+              <a:rPr lang="en-US" sz="1125" b="0" i="0" u="none">
                 <a:solidFill>
                   <a:srgbClr val="B0C4D8"/>
                 </a:solidFill>
@@ -952,7 +952,7 @@
         </p:nvSpPr>
         <p:spPr>
           <a:xfrm>
-            <a:off x="1047750" y="2581275"/>
+            <a:off x="1047750" y="2626519"/>
             <a:ext cx="12192000" cy="266700"/>
           </a:xfrm>
         </p:spPr>
@@ -962,7 +962,7 @@
           <a:p>
             <a:pPr algn="l"/>
             <a:r>
-              <a:rPr lang="en-US" sz="1500" b="0" i="0" u="none">
+              <a:rPr lang="en-US" sz="1125" b="0" i="0" u="none">
                 <a:solidFill>
                   <a:srgbClr val="B0C4D8"/>
                 </a:solidFill>
@@ -980,7 +980,7 @@
         </p:nvSpPr>
         <p:spPr>
           <a:xfrm>
-            <a:off x="1047750" y="2867025"/>
+            <a:off x="1047750" y="2912269"/>
             <a:ext cx="12192000" cy="266700"/>
           </a:xfrm>
         </p:spPr>
@@ -990,7 +990,7 @@
           <a:p>
             <a:pPr algn="l"/>
             <a:r>
-              <a:rPr lang="en-US" sz="1500" b="0" i="0" u="none">
+              <a:rPr lang="en-US" sz="1125" b="0" i="0" u="none">
                 <a:solidFill>
                   <a:srgbClr val="B0C4D8"/>
                 </a:solidFill>
@@ -1008,7 +1008,7 @@
         </p:nvSpPr>
         <p:spPr>
           <a:xfrm>
-            <a:off x="1047750" y="3152775"/>
+            <a:off x="1047750" y="3198019"/>
             <a:ext cx="12192000" cy="266700"/>
           </a:xfrm>
         </p:spPr>
@@ -1018,7 +1018,7 @@
           <a:p>
             <a:pPr algn="l"/>
             <a:r>
-              <a:rPr lang="en-US" sz="1500" b="0" i="0" u="none">
+              <a:rPr lang="en-US" sz="1125" b="0" i="0" u="none">
                 <a:solidFill>
                   <a:srgbClr val="B0C4D8"/>
                 </a:solidFill>
@@ -1092,7 +1092,7 @@
         </p:nvSpPr>
         <p:spPr>
           <a:xfrm>
-            <a:off x="0" y="1739900"/>
+            <a:off x="0" y="1800225"/>
             <a:ext cx="12192000" cy="355600"/>
           </a:xfrm>
         </p:spPr>
@@ -1102,7 +1102,7 @@
           <a:p>
             <a:pPr algn="ctr"/>
             <a:r>
-              <a:rPr lang="en-US" sz="2000" b="0" i="0" u="none">
+              <a:rPr lang="en-US" sz="1500" b="0" i="0" u="none">
                 <a:solidFill>
                   <a:srgbClr val="5A9BE5"/>
                 </a:solidFill>
@@ -1120,7 +1120,7 @@
         </p:nvSpPr>
         <p:spPr>
           <a:xfrm>
-            <a:off x="4762500" y="2295525"/>
+            <a:off x="4762500" y="2340769"/>
             <a:ext cx="12192000" cy="266700"/>
           </a:xfrm>
         </p:spPr>
@@ -1130,7 +1130,7 @@
           <a:p>
             <a:pPr algn="l"/>
             <a:r>
-              <a:rPr lang="en-US" sz="1500" b="0" i="0" u="none">
+              <a:rPr lang="en-US" sz="1125" b="0" i="0" u="none">
                 <a:solidFill>
                   <a:srgbClr val="B0C4D8"/>
                 </a:solidFill>
@@ -1148,7 +1148,7 @@
         </p:nvSpPr>
         <p:spPr>
           <a:xfrm>
-            <a:off x="4762500" y="2581275"/>
+            <a:off x="4762500" y="2626519"/>
             <a:ext cx="12192000" cy="266700"/>
           </a:xfrm>
         </p:spPr>
@@ -1158,7 +1158,7 @@
           <a:p>
             <a:pPr algn="l"/>
             <a:r>
-              <a:rPr lang="en-US" sz="1500" b="0" i="0" u="none">
+              <a:rPr lang="en-US" sz="1125" b="0" i="0" u="none">
                 <a:solidFill>
                   <a:srgbClr val="B0C4D8"/>
                 </a:solidFill>
@@ -1176,7 +1176,7 @@
         </p:nvSpPr>
         <p:spPr>
           <a:xfrm>
-            <a:off x="4762500" y="2867025"/>
+            <a:off x="4762500" y="2912269"/>
             <a:ext cx="12192000" cy="266700"/>
           </a:xfrm>
         </p:spPr>
@@ -1186,7 +1186,7 @@
           <a:p>
             <a:pPr algn="l"/>
             <a:r>
-              <a:rPr lang="en-US" sz="1500" b="0" i="0" u="none">
+              <a:rPr lang="en-US" sz="1125" b="0" i="0" u="none">
                 <a:solidFill>
                   <a:srgbClr val="B0C4D8"/>
                 </a:solidFill>
@@ -1204,7 +1204,7 @@
         </p:nvSpPr>
         <p:spPr>
           <a:xfrm>
-            <a:off x="4762500" y="3152775"/>
+            <a:off x="4762500" y="3198019"/>
             <a:ext cx="12192000" cy="266700"/>
           </a:xfrm>
         </p:spPr>
@@ -1214,7 +1214,7 @@
           <a:p>
             <a:pPr algn="l"/>
             <a:r>
-              <a:rPr lang="en-US" sz="1500" b="0" i="0" u="none">
+              <a:rPr lang="en-US" sz="1125" b="0" i="0" u="none">
                 <a:solidFill>
                   <a:srgbClr val="B0C4D8"/>
                 </a:solidFill>
@@ -1288,7 +1288,7 @@
         </p:nvSpPr>
         <p:spPr>
           <a:xfrm>
-            <a:off x="3714750" y="1739900"/>
+            <a:off x="3714750" y="1800225"/>
             <a:ext cx="12192000" cy="355600"/>
           </a:xfrm>
         </p:spPr>
@@ -1298,7 +1298,7 @@
           <a:p>
             <a:pPr algn="ctr"/>
             <a:r>
-              <a:rPr lang="en-US" sz="2000" b="0" i="0" u="none">
+              <a:rPr lang="en-US" sz="1500" b="0" i="0" u="none">
                 <a:solidFill>
                   <a:srgbClr val="6CC8A0"/>
                 </a:solidFill>
@@ -1316,7 +1316,7 @@
         </p:nvSpPr>
         <p:spPr>
           <a:xfrm>
-            <a:off x="8477250" y="2295525"/>
+            <a:off x="8477250" y="2340769"/>
             <a:ext cx="12192000" cy="266700"/>
           </a:xfrm>
         </p:spPr>
@@ -1326,7 +1326,7 @@
           <a:p>
             <a:pPr algn="l"/>
             <a:r>
-              <a:rPr lang="en-US" sz="1500" b="0" i="0" u="none">
+              <a:rPr lang="en-US" sz="1125" b="0" i="0" u="none">
                 <a:solidFill>
                   <a:srgbClr val="B0C4D8"/>
                 </a:solidFill>
@@ -1344,7 +1344,7 @@
         </p:nvSpPr>
         <p:spPr>
           <a:xfrm>
-            <a:off x="8477250" y="2581275"/>
+            <a:off x="8477250" y="2626519"/>
             <a:ext cx="12192000" cy="266700"/>
           </a:xfrm>
         </p:spPr>
@@ -1354,7 +1354,7 @@
           <a:p>
             <a:pPr algn="l"/>
             <a:r>
-              <a:rPr lang="en-US" sz="1500" b="0" i="0" u="none">
+              <a:rPr lang="en-US" sz="1125" b="0" i="0" u="none">
                 <a:solidFill>
                   <a:srgbClr val="B0C4D8"/>
                 </a:solidFill>
@@ -1372,7 +1372,7 @@
         </p:nvSpPr>
         <p:spPr>
           <a:xfrm>
-            <a:off x="8477250" y="2867025"/>
+            <a:off x="8477250" y="2912269"/>
             <a:ext cx="12192000" cy="266700"/>
           </a:xfrm>
         </p:spPr>
@@ -1382,7 +1382,7 @@
           <a:p>
             <a:pPr algn="l"/>
             <a:r>
-              <a:rPr lang="en-US" sz="1500" b="0" i="0" u="none">
+              <a:rPr lang="en-US" sz="1125" b="0" i="0" u="none">
                 <a:solidFill>
                   <a:srgbClr val="B0C4D8"/>
                 </a:solidFill>
@@ -1400,7 +1400,7 @@
         </p:nvSpPr>
         <p:spPr>
           <a:xfrm>
-            <a:off x="8477250" y="3152775"/>
+            <a:off x="8477250" y="3198019"/>
             <a:ext cx="12192000" cy="266700"/>
           </a:xfrm>
         </p:spPr>
@@ -1410,7 +1410,7 @@
           <a:p>
             <a:pPr algn="l"/>
             <a:r>
-              <a:rPr lang="en-US" sz="1500" b="0" i="0" u="none">
+              <a:rPr lang="en-US" sz="1125" b="0" i="0" u="none">
                 <a:solidFill>
                   <a:srgbClr val="B0C4D8"/>
                 </a:solidFill>
@@ -1428,7 +1428,7 @@
         </p:nvSpPr>
         <p:spPr>
           <a:xfrm>
-            <a:off x="762000" y="4020820"/>
+            <a:off x="762000" y="4087177"/>
             <a:ext cx="12192000" cy="391160"/>
           </a:xfrm>
         </p:spPr>
@@ -1438,7 +1438,7 @@
           <a:p>
             <a:pPr algn="l"/>
             <a:r>
-              <a:rPr lang="en-US" sz="2200" b="0" i="0" u="none">
+              <a:rPr lang="en-US" sz="1650" b="0" i="0" u="none">
                 <a:solidFill>
                   <a:srgbClr val="FFFFFF"/>
                 </a:solidFill>
@@ -1486,7 +1486,7 @@
         </p:nvSpPr>
         <p:spPr>
           <a:xfrm>
-            <a:off x="-4476750" y="4688840"/>
+            <a:off x="-4476750" y="4731067"/>
             <a:ext cx="12192000" cy="248920"/>
           </a:xfrm>
         </p:spPr>
@@ -1496,7 +1496,7 @@
           <a:p>
             <a:pPr algn="ctr"/>
             <a:r>
-              <a:rPr lang="en-US" sz="1400" b="0" i="0" u="none">
+              <a:rPr lang="en-US" sz="1050" b="0" i="0" u="none">
                 <a:solidFill>
                   <a:srgbClr val="00D2FF"/>
                 </a:solidFill>
@@ -1514,7 +1514,7 @@
         </p:nvSpPr>
         <p:spPr>
           <a:xfrm>
-            <a:off x="-4476750" y="4886960"/>
+            <a:off x="-4476750" y="4920139"/>
             <a:ext cx="12192000" cy="195580"/>
           </a:xfrm>
         </p:spPr>
@@ -1524,7 +1524,7 @@
           <a:p>
             <a:pPr algn="ctr"/>
             <a:r>
-              <a:rPr lang="en-US" sz="1100" b="0" i="0" u="none">
+              <a:rPr lang="en-US" sz="825" b="0" i="0" u="none">
                 <a:solidFill>
                   <a:srgbClr val="7090B0"/>
                 </a:solidFill>
@@ -1572,7 +1572,7 @@
         </p:nvSpPr>
         <p:spPr>
           <a:xfrm>
-            <a:off x="-2571750" y="4688840"/>
+            <a:off x="-2571750" y="4731067"/>
             <a:ext cx="12192000" cy="248920"/>
           </a:xfrm>
         </p:spPr>
@@ -1582,7 +1582,7 @@
           <a:p>
             <a:pPr algn="ctr"/>
             <a:r>
-              <a:rPr lang="en-US" sz="1400" b="0" i="0" u="none">
+              <a:rPr lang="en-US" sz="1050" b="0" i="0" u="none">
                 <a:solidFill>
                   <a:srgbClr val="5A9BE5"/>
                 </a:solidFill>
@@ -1600,7 +1600,7 @@
         </p:nvSpPr>
         <p:spPr>
           <a:xfrm>
-            <a:off x="-2571750" y="4886960"/>
+            <a:off x="-2571750" y="4920139"/>
             <a:ext cx="12192000" cy="195580"/>
           </a:xfrm>
         </p:spPr>
@@ -1610,7 +1610,7 @@
           <a:p>
             <a:pPr algn="ctr"/>
             <a:r>
-              <a:rPr lang="en-US" sz="1100" b="0" i="0" u="none">
+              <a:rPr lang="en-US" sz="825" b="0" i="0" u="none">
                 <a:solidFill>
                   <a:srgbClr val="7090B0"/>
                 </a:solidFill>
@@ -1658,7 +1658,7 @@
         </p:nvSpPr>
         <p:spPr>
           <a:xfrm>
-            <a:off x="-666750" y="4688840"/>
+            <a:off x="-666750" y="4731067"/>
             <a:ext cx="12192000" cy="248920"/>
           </a:xfrm>
         </p:spPr>
@@ -1668,7 +1668,7 @@
           <a:p>
             <a:pPr algn="ctr"/>
             <a:r>
-              <a:rPr lang="en-US" sz="1400" b="0" i="0" u="none">
+              <a:rPr lang="en-US" sz="1050" b="0" i="0" u="none">
                 <a:solidFill>
                   <a:srgbClr val="6CC8A0"/>
                 </a:solidFill>
@@ -1686,7 +1686,7 @@
         </p:nvSpPr>
         <p:spPr>
           <a:xfrm>
-            <a:off x="-666750" y="4886960"/>
+            <a:off x="-666750" y="4920139"/>
             <a:ext cx="12192000" cy="195580"/>
           </a:xfrm>
         </p:spPr>
@@ -1696,7 +1696,7 @@
           <a:p>
             <a:pPr algn="ctr"/>
             <a:r>
-              <a:rPr lang="en-US" sz="1100" b="0" i="0" u="none">
+              <a:rPr lang="en-US" sz="825" b="0" i="0" u="none">
                 <a:solidFill>
                   <a:srgbClr val="7090B0"/>
                 </a:solidFill>
@@ -1744,7 +1744,7 @@
         </p:nvSpPr>
         <p:spPr>
           <a:xfrm>
-            <a:off x="1238250" y="4688840"/>
+            <a:off x="1238250" y="4731067"/>
             <a:ext cx="12192000" cy="248920"/>
           </a:xfrm>
         </p:spPr>
@@ -1754,7 +1754,7 @@
           <a:p>
             <a:pPr algn="ctr"/>
             <a:r>
-              <a:rPr lang="en-US" sz="1400" b="0" i="0" u="none">
+              <a:rPr lang="en-US" sz="1050" b="0" i="0" u="none">
                 <a:solidFill>
                   <a:srgbClr val="C8A050"/>
                 </a:solidFill>
@@ -1772,7 +1772,7 @@
         </p:nvSpPr>
         <p:spPr>
           <a:xfrm>
-            <a:off x="1238250" y="4886960"/>
+            <a:off x="1238250" y="4920139"/>
             <a:ext cx="12192000" cy="195580"/>
           </a:xfrm>
         </p:spPr>
@@ -1782,7 +1782,7 @@
           <a:p>
             <a:pPr algn="ctr"/>
             <a:r>
-              <a:rPr lang="en-US" sz="1100" b="0" i="0" u="none">
+              <a:rPr lang="en-US" sz="825" b="0" i="0" u="none">
                 <a:solidFill>
                   <a:srgbClr val="7090B0"/>
                 </a:solidFill>
@@ -1830,7 +1830,7 @@
         </p:nvSpPr>
         <p:spPr>
           <a:xfrm>
-            <a:off x="3143250" y="4688840"/>
+            <a:off x="3143250" y="4731067"/>
             <a:ext cx="12192000" cy="248920"/>
           </a:xfrm>
         </p:spPr>
@@ -1840,7 +1840,7 @@
           <a:p>
             <a:pPr algn="ctr"/>
             <a:r>
-              <a:rPr lang="en-US" sz="1400" b="0" i="0" u="none">
+              <a:rPr lang="en-US" sz="1050" b="0" i="0" u="none">
                 <a:solidFill>
                   <a:srgbClr val="C86478"/>
                 </a:solidFill>
@@ -1858,7 +1858,7 @@
         </p:nvSpPr>
         <p:spPr>
           <a:xfrm>
-            <a:off x="3143250" y="4886960"/>
+            <a:off x="3143250" y="4920139"/>
             <a:ext cx="12192000" cy="195580"/>
           </a:xfrm>
         </p:spPr>
@@ -1868,7 +1868,7 @@
           <a:p>
             <a:pPr algn="ctr"/>
             <a:r>
-              <a:rPr lang="en-US" sz="1100" b="0" i="0" u="none">
+              <a:rPr lang="en-US" sz="825" b="0" i="0" u="none">
                 <a:solidFill>
                   <a:srgbClr val="7090B0"/>
                 </a:solidFill>
@@ -1916,7 +1916,7 @@
         </p:nvSpPr>
         <p:spPr>
           <a:xfrm>
-            <a:off x="-4476750" y="5450840"/>
+            <a:off x="-4476750" y="5493067"/>
             <a:ext cx="12192000" cy="248920"/>
           </a:xfrm>
         </p:spPr>
@@ -1926,7 +1926,7 @@
           <a:p>
             <a:pPr algn="ctr"/>
             <a:r>
-              <a:rPr lang="en-US" sz="1400" b="0" i="0" u="none">
+              <a:rPr lang="en-US" sz="1050" b="0" i="0" u="none">
                 <a:solidFill>
                   <a:srgbClr val="9664C8"/>
                 </a:solidFill>
@@ -1944,7 +1944,7 @@
         </p:nvSpPr>
         <p:spPr>
           <a:xfrm>
-            <a:off x="-4476750" y="5648960"/>
+            <a:off x="-4476750" y="5682139"/>
             <a:ext cx="12192000" cy="195580"/>
           </a:xfrm>
         </p:spPr>
@@ -1954,7 +1954,7 @@
           <a:p>
             <a:pPr algn="ctr"/>
             <a:r>
-              <a:rPr lang="en-US" sz="1100" b="0" i="0" u="none">
+              <a:rPr lang="en-US" sz="825" b="0" i="0" u="none">
                 <a:solidFill>
                   <a:srgbClr val="7090B0"/>
                 </a:solidFill>
@@ -2002,7 +2002,7 @@
         </p:nvSpPr>
         <p:spPr>
           <a:xfrm>
-            <a:off x="-2571750" y="5450840"/>
+            <a:off x="-2571750" y="5493067"/>
             <a:ext cx="12192000" cy="248920"/>
           </a:xfrm>
         </p:spPr>
@@ -2012,7 +2012,7 @@
           <a:p>
             <a:pPr algn="ctr"/>
             <a:r>
-              <a:rPr lang="en-US" sz="1400" b="0" i="0" u="none">
+              <a:rPr lang="en-US" sz="1050" b="0" i="0" u="none">
                 <a:solidFill>
                   <a:srgbClr val="B48250"/>
                 </a:solidFill>
@@ -2030,7 +2030,7 @@
         </p:nvSpPr>
         <p:spPr>
           <a:xfrm>
-            <a:off x="-2571750" y="5648960"/>
+            <a:off x="-2571750" y="5682139"/>
             <a:ext cx="12192000" cy="195580"/>
           </a:xfrm>
         </p:spPr>
@@ -2040,7 +2040,7 @@
           <a:p>
             <a:pPr algn="ctr"/>
             <a:r>
-              <a:rPr lang="en-US" sz="1100" b="0" i="0" u="none">
+              <a:rPr lang="en-US" sz="825" b="0" i="0" u="none">
                 <a:solidFill>
                   <a:srgbClr val="7090B0"/>
                 </a:solidFill>
@@ -2104,7 +2104,7 @@
         </p:nvSpPr>
         <p:spPr>
           <a:xfrm>
-            <a:off x="762000" y="613410"/>
+            <a:off x="762000" y="721995"/>
             <a:ext cx="12192000" cy="640080"/>
           </a:xfrm>
         </p:spPr>
@@ -2114,7 +2114,7 @@
           <a:p>
             <a:pPr algn="l"/>
             <a:r>
-              <a:rPr lang="en-US" sz="3600" b="0" i="0" u="none">
+              <a:rPr lang="en-US" sz="2700" b="0" i="0" u="none">
                 <a:solidFill>
                   <a:srgbClr val="FFFFFF"/>
                 </a:solidFill>
@@ -2183,7 +2183,7 @@
         </p:nvSpPr>
         <p:spPr>
           <a:xfrm>
-            <a:off x="1047750" y="1783080"/>
+            <a:off x="1047750" y="1837372"/>
             <a:ext cx="12192000" cy="320040"/>
           </a:xfrm>
         </p:spPr>
@@ -2193,7 +2193,7 @@
           <a:p>
             <a:pPr algn="l"/>
             <a:r>
-              <a:rPr lang="en-US" sz="1800" b="0" i="0" u="none">
+              <a:rPr lang="en-US" sz="1350" b="0" i="0" u="none">
                 <a:solidFill>
                   <a:srgbClr val="00D2FF"/>
                 </a:solidFill>
@@ -2211,7 +2211,7 @@
         </p:nvSpPr>
         <p:spPr>
           <a:xfrm>
-            <a:off x="1047750" y="2069465"/>
+            <a:off x="1047750" y="2111692"/>
             <a:ext cx="12192000" cy="248920"/>
           </a:xfrm>
         </p:spPr>
@@ -2221,7 +2221,7 @@
           <a:p>
             <a:pPr algn="l"/>
             <a:r>
-              <a:rPr lang="en-US" sz="1400" b="0" i="0" u="none">
+              <a:rPr lang="en-US" sz="1050" b="0" i="0" u="none">
                 <a:solidFill>
                   <a:srgbClr val="B0C4D8"/>
                 </a:solidFill>
@@ -2239,7 +2239,7 @@
         </p:nvSpPr>
         <p:spPr>
           <a:xfrm>
-            <a:off x="1047750" y="2288540"/>
+            <a:off x="1047750" y="2330767"/>
             <a:ext cx="12192000" cy="248920"/>
           </a:xfrm>
         </p:spPr>
@@ -2249,7 +2249,7 @@
           <a:p>
             <a:pPr algn="l"/>
             <a:r>
-              <a:rPr lang="en-US" sz="1400" b="0" i="0" u="none">
+              <a:rPr lang="en-US" sz="1050" b="0" i="0" u="none">
                 <a:solidFill>
                   <a:srgbClr val="B0C4D8"/>
                 </a:solidFill>
@@ -2267,7 +2267,7 @@
         </p:nvSpPr>
         <p:spPr>
           <a:xfrm>
-            <a:off x="1047750" y="2507615"/>
+            <a:off x="1047750" y="2549842"/>
             <a:ext cx="12192000" cy="248920"/>
           </a:xfrm>
         </p:spPr>
@@ -2277,7 +2277,7 @@
           <a:p>
             <a:pPr algn="l"/>
             <a:r>
-              <a:rPr lang="en-US" sz="1400" b="0" i="0" u="none">
+              <a:rPr lang="en-US" sz="1050" b="0" i="0" u="none">
                 <a:solidFill>
                   <a:srgbClr val="B0C4D8"/>
                 </a:solidFill>
@@ -2325,7 +2325,7 @@
         </p:nvSpPr>
         <p:spPr>
           <a:xfrm>
-            <a:off x="4714875" y="1783080"/>
+            <a:off x="4714875" y="1837372"/>
             <a:ext cx="12192000" cy="320040"/>
           </a:xfrm>
         </p:spPr>
@@ -2335,7 +2335,7 @@
           <a:p>
             <a:pPr algn="l"/>
             <a:r>
-              <a:rPr lang="en-US" sz="1800" b="0" i="0" u="none">
+              <a:rPr lang="en-US" sz="1350" b="0" i="0" u="none">
                 <a:solidFill>
                   <a:srgbClr val="5A9BE5"/>
                 </a:solidFill>
@@ -2353,7 +2353,7 @@
         </p:nvSpPr>
         <p:spPr>
           <a:xfrm>
-            <a:off x="4714875" y="2069465"/>
+            <a:off x="4714875" y="2111692"/>
             <a:ext cx="12192000" cy="248920"/>
           </a:xfrm>
         </p:spPr>
@@ -2363,7 +2363,7 @@
           <a:p>
             <a:pPr algn="l"/>
             <a:r>
-              <a:rPr lang="en-US" sz="1400" b="0" i="0" u="none">
+              <a:rPr lang="en-US" sz="1050" b="0" i="0" u="none">
                 <a:solidFill>
                   <a:srgbClr val="B0C4D8"/>
                 </a:solidFill>
@@ -2381,7 +2381,7 @@
         </p:nvSpPr>
         <p:spPr>
           <a:xfrm>
-            <a:off x="4714875" y="2288540"/>
+            <a:off x="4714875" y="2330767"/>
             <a:ext cx="12192000" cy="248920"/>
           </a:xfrm>
         </p:spPr>
@@ -2391,7 +2391,7 @@
           <a:p>
             <a:pPr algn="l"/>
             <a:r>
-              <a:rPr lang="en-US" sz="1400" b="0" i="0" u="none">
+              <a:rPr lang="en-US" sz="1050" b="0" i="0" u="none">
                 <a:solidFill>
                   <a:srgbClr val="B0C4D8"/>
                 </a:solidFill>
@@ -2409,7 +2409,7 @@
         </p:nvSpPr>
         <p:spPr>
           <a:xfrm>
-            <a:off x="4714875" y="2507615"/>
+            <a:off x="4714875" y="2549842"/>
             <a:ext cx="12192000" cy="248920"/>
           </a:xfrm>
         </p:spPr>
@@ -2419,7 +2419,7 @@
           <a:p>
             <a:pPr algn="l"/>
             <a:r>
-              <a:rPr lang="en-US" sz="1400" b="0" i="0" u="none">
+              <a:rPr lang="en-US" sz="1050" b="0" i="0" u="none">
                 <a:solidFill>
                   <a:srgbClr val="B0C4D8"/>
                 </a:solidFill>
@@ -2467,7 +2467,7 @@
         </p:nvSpPr>
         <p:spPr>
           <a:xfrm>
-            <a:off x="8382000" y="1783080"/>
+            <a:off x="8382000" y="1837372"/>
             <a:ext cx="12192000" cy="320040"/>
           </a:xfrm>
         </p:spPr>
@@ -2477,7 +2477,7 @@
           <a:p>
             <a:pPr algn="l"/>
             <a:r>
-              <a:rPr lang="en-US" sz="1800" b="0" i="0" u="none">
+              <a:rPr lang="en-US" sz="1350" b="0" i="0" u="none">
                 <a:solidFill>
                   <a:srgbClr val="6CC8A0"/>
                 </a:solidFill>
@@ -2495,7 +2495,7 @@
         </p:nvSpPr>
         <p:spPr>
           <a:xfrm>
-            <a:off x="8382000" y="2069465"/>
+            <a:off x="8382000" y="2111692"/>
             <a:ext cx="12192000" cy="248920"/>
           </a:xfrm>
         </p:spPr>
@@ -2505,7 +2505,7 @@
           <a:p>
             <a:pPr algn="l"/>
             <a:r>
-              <a:rPr lang="en-US" sz="1400" b="0" i="0" u="none">
+              <a:rPr lang="en-US" sz="1050" b="0" i="0" u="none">
                 <a:solidFill>
                   <a:srgbClr val="B0C4D8"/>
                 </a:solidFill>
@@ -2523,7 +2523,7 @@
         </p:nvSpPr>
         <p:spPr>
           <a:xfrm>
-            <a:off x="8382000" y="2288540"/>
+            <a:off x="8382000" y="2330767"/>
             <a:ext cx="12192000" cy="248920"/>
           </a:xfrm>
         </p:spPr>
@@ -2533,7 +2533,7 @@
           <a:p>
             <a:pPr algn="l"/>
             <a:r>
-              <a:rPr lang="en-US" sz="1400" b="0" i="0" u="none">
+              <a:rPr lang="en-US" sz="1050" b="0" i="0" u="none">
                 <a:solidFill>
                   <a:srgbClr val="B0C4D8"/>
                 </a:solidFill>
@@ -2551,7 +2551,7 @@
         </p:nvSpPr>
         <p:spPr>
           <a:xfrm>
-            <a:off x="8382000" y="2507615"/>
+            <a:off x="8382000" y="2549842"/>
             <a:ext cx="12192000" cy="248920"/>
           </a:xfrm>
         </p:spPr>
@@ -2561,7 +2561,7 @@
           <a:p>
             <a:pPr algn="l"/>
             <a:r>
-              <a:rPr lang="en-US" sz="1400" b="0" i="0" u="none">
+              <a:rPr lang="en-US" sz="1050" b="0" i="0" u="none">
                 <a:solidFill>
                   <a:srgbClr val="B0C4D8"/>
                 </a:solidFill>
@@ -2609,7 +2609,7 @@
         </p:nvSpPr>
         <p:spPr>
           <a:xfrm>
-            <a:off x="1047750" y="3402330"/>
+            <a:off x="1047750" y="3456622"/>
             <a:ext cx="12192000" cy="320040"/>
           </a:xfrm>
         </p:spPr>
@@ -2619,7 +2619,7 @@
           <a:p>
             <a:pPr algn="l"/>
             <a:r>
-              <a:rPr lang="en-US" sz="1800" b="0" i="0" u="none">
+              <a:rPr lang="en-US" sz="1350" b="0" i="0" u="none">
                 <a:solidFill>
                   <a:srgbClr val="C8A050"/>
                 </a:solidFill>
@@ -2637,7 +2637,7 @@
         </p:nvSpPr>
         <p:spPr>
           <a:xfrm>
-            <a:off x="1047750" y="3688715"/>
+            <a:off x="1047750" y="3730942"/>
             <a:ext cx="12192000" cy="248920"/>
           </a:xfrm>
         </p:spPr>
@@ -2647,7 +2647,7 @@
           <a:p>
             <a:pPr algn="l"/>
             <a:r>
-              <a:rPr lang="en-US" sz="1400" b="0" i="0" u="none">
+              <a:rPr lang="en-US" sz="1050" b="0" i="0" u="none">
                 <a:solidFill>
                   <a:srgbClr val="B0C4D8"/>
                 </a:solidFill>
@@ -2665,7 +2665,7 @@
         </p:nvSpPr>
         <p:spPr>
           <a:xfrm>
-            <a:off x="1047750" y="3907790"/>
+            <a:off x="1047750" y="3950017"/>
             <a:ext cx="12192000" cy="248920"/>
           </a:xfrm>
         </p:spPr>
@@ -2675,7 +2675,7 @@
           <a:p>
             <a:pPr algn="l"/>
             <a:r>
-              <a:rPr lang="en-US" sz="1400" b="0" i="0" u="none">
+              <a:rPr lang="en-US" sz="1050" b="0" i="0" u="none">
                 <a:solidFill>
                   <a:srgbClr val="B0C4D8"/>
                 </a:solidFill>
@@ -2693,7 +2693,7 @@
         </p:nvSpPr>
         <p:spPr>
           <a:xfrm>
-            <a:off x="1047750" y="4126865"/>
+            <a:off x="1047750" y="4169092"/>
             <a:ext cx="12192000" cy="248920"/>
           </a:xfrm>
         </p:spPr>
@@ -2703,7 +2703,7 @@
           <a:p>
             <a:pPr algn="l"/>
             <a:r>
-              <a:rPr lang="en-US" sz="1400" b="0" i="0" u="none">
+              <a:rPr lang="en-US" sz="1050" b="0" i="0" u="none">
                 <a:solidFill>
                   <a:srgbClr val="B0C4D8"/>
                 </a:solidFill>
@@ -2751,7 +2751,7 @@
         </p:nvSpPr>
         <p:spPr>
           <a:xfrm>
-            <a:off x="4714875" y="3402330"/>
+            <a:off x="4714875" y="3456622"/>
             <a:ext cx="12192000" cy="320040"/>
           </a:xfrm>
         </p:spPr>
@@ -2761,7 +2761,7 @@
           <a:p>
             <a:pPr algn="l"/>
             <a:r>
-              <a:rPr lang="en-US" sz="1800" b="0" i="0" u="none">
+              <a:rPr lang="en-US" sz="1350" b="0" i="0" u="none">
                 <a:solidFill>
                   <a:srgbClr val="9664C8"/>
                 </a:solidFill>
@@ -2779,7 +2779,7 @@
         </p:nvSpPr>
         <p:spPr>
           <a:xfrm>
-            <a:off x="4714875" y="3688715"/>
+            <a:off x="4714875" y="3730942"/>
             <a:ext cx="12192000" cy="248920"/>
           </a:xfrm>
         </p:spPr>
@@ -2789,7 +2789,7 @@
           <a:p>
             <a:pPr algn="l"/>
             <a:r>
-              <a:rPr lang="en-US" sz="1400" b="0" i="0" u="none">
+              <a:rPr lang="en-US" sz="1050" b="0" i="0" u="none">
                 <a:solidFill>
                   <a:srgbClr val="B0C4D8"/>
                 </a:solidFill>
@@ -2807,7 +2807,7 @@
         </p:nvSpPr>
         <p:spPr>
           <a:xfrm>
-            <a:off x="4714875" y="3907790"/>
+            <a:off x="4714875" y="3950017"/>
             <a:ext cx="12192000" cy="248920"/>
           </a:xfrm>
         </p:spPr>
@@ -2817,7 +2817,7 @@
           <a:p>
             <a:pPr algn="l"/>
             <a:r>
-              <a:rPr lang="en-US" sz="1400" b="0" i="0" u="none">
+              <a:rPr lang="en-US" sz="1050" b="0" i="0" u="none">
                 <a:solidFill>
                   <a:srgbClr val="B0C4D8"/>
                 </a:solidFill>
@@ -2835,7 +2835,7 @@
         </p:nvSpPr>
         <p:spPr>
           <a:xfrm>
-            <a:off x="4714875" y="4126865"/>
+            <a:off x="4714875" y="4169092"/>
             <a:ext cx="12192000" cy="248920"/>
           </a:xfrm>
         </p:spPr>
@@ -2845,7 +2845,7 @@
           <a:p>
             <a:pPr algn="l"/>
             <a:r>
-              <a:rPr lang="en-US" sz="1400" b="0" i="0" u="none">
+              <a:rPr lang="en-US" sz="1050" b="0" i="0" u="none">
                 <a:solidFill>
                   <a:srgbClr val="B0C4D8"/>
                 </a:solidFill>
@@ -2893,7 +2893,7 @@
         </p:nvSpPr>
         <p:spPr>
           <a:xfrm>
-            <a:off x="8382000" y="3402330"/>
+            <a:off x="8382000" y="3456622"/>
             <a:ext cx="12192000" cy="320040"/>
           </a:xfrm>
         </p:spPr>
@@ -2903,7 +2903,7 @@
           <a:p>
             <a:pPr algn="l"/>
             <a:r>
-              <a:rPr lang="en-US" sz="1800" b="0" i="0" u="none">
+              <a:rPr lang="en-US" sz="1350" b="0" i="0" u="none">
                 <a:solidFill>
                   <a:srgbClr val="C85078"/>
                 </a:solidFill>
@@ -2921,7 +2921,7 @@
         </p:nvSpPr>
         <p:spPr>
           <a:xfrm>
-            <a:off x="8382000" y="3688715"/>
+            <a:off x="8382000" y="3730942"/>
             <a:ext cx="12192000" cy="248920"/>
           </a:xfrm>
         </p:spPr>
@@ -2931,7 +2931,7 @@
           <a:p>
             <a:pPr algn="l"/>
             <a:r>
-              <a:rPr lang="en-US" sz="1400" b="0" i="0" u="none">
+              <a:rPr lang="en-US" sz="1050" b="0" i="0" u="none">
                 <a:solidFill>
                   <a:srgbClr val="B0C4D8"/>
                 </a:solidFill>
@@ -2949,7 +2949,7 @@
         </p:nvSpPr>
         <p:spPr>
           <a:xfrm>
-            <a:off x="8382000" y="3907790"/>
+            <a:off x="8382000" y="3950017"/>
             <a:ext cx="12192000" cy="248920"/>
           </a:xfrm>
         </p:spPr>
@@ -2959,7 +2959,7 @@
           <a:p>
             <a:pPr algn="l"/>
             <a:r>
-              <a:rPr lang="en-US" sz="1400" b="0" i="0" u="none">
+              <a:rPr lang="en-US" sz="1050" b="0" i="0" u="none">
                 <a:solidFill>
                   <a:srgbClr val="B0C4D8"/>
                 </a:solidFill>
@@ -2977,7 +2977,7 @@
         </p:nvSpPr>
         <p:spPr>
           <a:xfrm>
-            <a:off x="8382000" y="4126865"/>
+            <a:off x="8382000" y="4169092"/>
             <a:ext cx="12192000" cy="248920"/>
           </a:xfrm>
         </p:spPr>
@@ -2987,7 +2987,7 @@
           <a:p>
             <a:pPr algn="l"/>
             <a:r>
-              <a:rPr lang="en-US" sz="1400" b="0" i="0" u="none">
+              <a:rPr lang="en-US" sz="1050" b="0" i="0" u="none">
                 <a:solidFill>
                   <a:srgbClr val="B0C4D8"/>
                 </a:solidFill>
@@ -3035,7 +3035,7 @@
         </p:nvSpPr>
         <p:spPr>
           <a:xfrm>
-            <a:off x="0" y="5153025"/>
+            <a:off x="0" y="5198269"/>
             <a:ext cx="12192000" cy="266700"/>
           </a:xfrm>
         </p:spPr>
@@ -3045,7 +3045,7 @@
           <a:p>
             <a:pPr algn="ctr"/>
             <a:r>
-              <a:rPr lang="en-US" sz="1500" b="0" i="0" u="none">
+              <a:rPr lang="en-US" sz="1125" b="0" i="0" u="none">
                 <a:solidFill>
                   <a:srgbClr val="7090B0"/>
                 </a:solidFill>
@@ -3109,7 +3109,7 @@
         </p:nvSpPr>
         <p:spPr>
           <a:xfrm>
-            <a:off x="762000" y="613410"/>
+            <a:off x="762000" y="721995"/>
             <a:ext cx="12192000" cy="640080"/>
           </a:xfrm>
         </p:spPr>
@@ -3119,7 +3119,7 @@
           <a:p>
             <a:pPr algn="l"/>
             <a:r>
-              <a:rPr lang="en-US" sz="3600" b="0" i="0" u="none">
+              <a:rPr lang="en-US" sz="2700" b="0" i="0" u="none">
                 <a:solidFill>
                   <a:srgbClr val="FFFFFF"/>
                 </a:solidFill>
@@ -3214,7 +3214,7 @@
         </p:nvSpPr>
         <p:spPr>
           <a:xfrm>
-            <a:off x="1047750" y="1644650"/>
+            <a:off x="1047750" y="1704975"/>
             <a:ext cx="12192000" cy="355600"/>
           </a:xfrm>
         </p:spPr>
@@ -3224,7 +3224,7 @@
           <a:p>
             <a:pPr algn="l"/>
             <a:r>
-              <a:rPr lang="en-US" sz="2000" b="0" i="0" u="none">
+              <a:rPr lang="en-US" sz="1500" b="0" i="0" u="none">
                 <a:solidFill>
                   <a:srgbClr val="00D2FF"/>
                 </a:solidFill>
@@ -3242,7 +3242,7 @@
         </p:nvSpPr>
         <p:spPr>
           <a:xfrm>
-            <a:off x="1047750" y="2200275"/>
+            <a:off x="1047750" y="2245519"/>
             <a:ext cx="12192000" cy="266700"/>
           </a:xfrm>
         </p:spPr>
@@ -3252,7 +3252,7 @@
           <a:p>
             <a:pPr algn="l"/>
             <a:r>
-              <a:rPr lang="en-US" sz="1500" b="0" i="0" u="none">
+              <a:rPr lang="en-US" sz="1125" b="0" i="0" u="none">
                 <a:solidFill>
                   <a:srgbClr val="C0D0E8"/>
                 </a:solidFill>
@@ -3270,7 +3270,7 @@
         </p:nvSpPr>
         <p:spPr>
           <a:xfrm>
-            <a:off x="1047750" y="2486025"/>
+            <a:off x="1047750" y="2531269"/>
             <a:ext cx="12192000" cy="266700"/>
           </a:xfrm>
         </p:spPr>
@@ -3280,7 +3280,7 @@
           <a:p>
             <a:pPr algn="l"/>
             <a:r>
-              <a:rPr lang="en-US" sz="1500" b="0" i="0" u="none">
+              <a:rPr lang="en-US" sz="1125" b="0" i="0" u="none">
                 <a:solidFill>
                   <a:srgbClr val="C0D0E8"/>
                 </a:solidFill>
@@ -3298,7 +3298,7 @@
         </p:nvSpPr>
         <p:spPr>
           <a:xfrm>
-            <a:off x="1047750" y="2771775"/>
+            <a:off x="1047750" y="2817019"/>
             <a:ext cx="12192000" cy="266700"/>
           </a:xfrm>
         </p:spPr>
@@ -3308,7 +3308,7 @@
           <a:p>
             <a:pPr algn="l"/>
             <a:r>
-              <a:rPr lang="en-US" sz="1500" b="0" i="0" u="none">
+              <a:rPr lang="en-US" sz="1125" b="0" i="0" u="none">
                 <a:solidFill>
                   <a:srgbClr val="C0D0E8"/>
                 </a:solidFill>
@@ -3326,7 +3326,7 @@
         </p:nvSpPr>
         <p:spPr>
           <a:xfrm>
-            <a:off x="1047750" y="3057525"/>
+            <a:off x="1047750" y="3102769"/>
             <a:ext cx="12192000" cy="266700"/>
           </a:xfrm>
         </p:spPr>
@@ -3336,7 +3336,7 @@
           <a:p>
             <a:pPr algn="l"/>
             <a:r>
-              <a:rPr lang="en-US" sz="1500" b="0" i="0" u="none">
+              <a:rPr lang="en-US" sz="1125" b="0" i="0" u="none">
                 <a:solidFill>
                   <a:srgbClr val="C0D0E8"/>
                 </a:solidFill>
@@ -3354,7 +3354,7 @@
         </p:nvSpPr>
         <p:spPr>
           <a:xfrm>
-            <a:off x="1047750" y="3415030"/>
+            <a:off x="1047750" y="3454241"/>
             <a:ext cx="12192000" cy="231140"/>
           </a:xfrm>
         </p:spPr>
@@ -3364,7 +3364,7 @@
           <a:p>
             <a:pPr algn="l"/>
             <a:r>
-              <a:rPr lang="en-US" sz="1300" b="0" i="0" u="none">
+              <a:rPr lang="en-US" sz="975" b="0" i="0" u="none">
                 <a:solidFill>
                   <a:srgbClr val="6090B0"/>
                 </a:solidFill>
@@ -3438,7 +3438,7 @@
         </p:nvSpPr>
         <p:spPr>
           <a:xfrm>
-            <a:off x="6572250" y="1644650"/>
+            <a:off x="6572250" y="1704975"/>
             <a:ext cx="12192000" cy="355600"/>
           </a:xfrm>
         </p:spPr>
@@ -3448,7 +3448,7 @@
           <a:p>
             <a:pPr algn="l"/>
             <a:r>
-              <a:rPr lang="en-US" sz="2000" b="0" i="0" u="none">
+              <a:rPr lang="en-US" sz="1500" b="0" i="0" u="none">
                 <a:solidFill>
                   <a:srgbClr val="6CC8A0"/>
                 </a:solidFill>
@@ -3466,7 +3466,7 @@
         </p:nvSpPr>
         <p:spPr>
           <a:xfrm>
-            <a:off x="6572250" y="2200275"/>
+            <a:off x="6572250" y="2245519"/>
             <a:ext cx="12192000" cy="266700"/>
           </a:xfrm>
         </p:spPr>
@@ -3476,7 +3476,7 @@
           <a:p>
             <a:pPr algn="l"/>
             <a:r>
-              <a:rPr lang="en-US" sz="1500" b="0" i="0" u="none">
+              <a:rPr lang="en-US" sz="1125" b="0" i="0" u="none">
                 <a:solidFill>
                   <a:srgbClr val="C0D0E8"/>
                 </a:solidFill>
@@ -3494,7 +3494,7 @@
         </p:nvSpPr>
         <p:spPr>
           <a:xfrm>
-            <a:off x="6572250" y="2486025"/>
+            <a:off x="6572250" y="2531269"/>
             <a:ext cx="12192000" cy="266700"/>
           </a:xfrm>
         </p:spPr>
@@ -3504,7 +3504,7 @@
           <a:p>
             <a:pPr algn="l"/>
             <a:r>
-              <a:rPr lang="en-US" sz="1500" b="0" i="0" u="none">
+              <a:rPr lang="en-US" sz="1125" b="0" i="0" u="none">
                 <a:solidFill>
                   <a:srgbClr val="C0D0E8"/>
                 </a:solidFill>
@@ -3522,7 +3522,7 @@
         </p:nvSpPr>
         <p:spPr>
           <a:xfrm>
-            <a:off x="6572250" y="2771775"/>
+            <a:off x="6572250" y="2817019"/>
             <a:ext cx="12192000" cy="266700"/>
           </a:xfrm>
         </p:spPr>
@@ -3532,7 +3532,7 @@
           <a:p>
             <a:pPr algn="l"/>
             <a:r>
-              <a:rPr lang="en-US" sz="1500" b="0" i="0" u="none">
+              <a:rPr lang="en-US" sz="1125" b="0" i="0" u="none">
                 <a:solidFill>
                   <a:srgbClr val="C0D0E8"/>
                 </a:solidFill>
@@ -3550,7 +3550,7 @@
         </p:nvSpPr>
         <p:spPr>
           <a:xfrm>
-            <a:off x="6572250" y="3057525"/>
+            <a:off x="6572250" y="3102769"/>
             <a:ext cx="12192000" cy="266700"/>
           </a:xfrm>
         </p:spPr>
@@ -3560,7 +3560,7 @@
           <a:p>
             <a:pPr algn="l"/>
             <a:r>
-              <a:rPr lang="en-US" sz="1500" b="0" i="0" u="none">
+              <a:rPr lang="en-US" sz="1125" b="0" i="0" u="none">
                 <a:solidFill>
                   <a:srgbClr val="C0D0E8"/>
                 </a:solidFill>
@@ -3578,7 +3578,7 @@
         </p:nvSpPr>
         <p:spPr>
           <a:xfrm>
-            <a:off x="6572250" y="3415030"/>
+            <a:off x="6572250" y="3454241"/>
             <a:ext cx="12192000" cy="231140"/>
           </a:xfrm>
         </p:spPr>
@@ -3588,7 +3588,7 @@
           <a:p>
             <a:pPr algn="l"/>
             <a:r>
-              <a:rPr lang="en-US" sz="1300" b="0" i="0" u="none">
+              <a:rPr lang="en-US" sz="975" b="0" i="0" u="none">
                 <a:solidFill>
                   <a:srgbClr val="6090B0"/>
                 </a:solidFill>
@@ -3662,7 +3662,7 @@
         </p:nvSpPr>
         <p:spPr>
           <a:xfrm>
-            <a:off x="1047750" y="4311650"/>
+            <a:off x="1047750" y="4371975"/>
             <a:ext cx="12192000" cy="355600"/>
           </a:xfrm>
         </p:spPr>
@@ -3672,7 +3672,7 @@
           <a:p>
             <a:pPr algn="l"/>
             <a:r>
-              <a:rPr lang="en-US" sz="2000" b="0" i="0" u="none">
+              <a:rPr lang="en-US" sz="1500" b="0" i="0" u="none">
                 <a:solidFill>
                   <a:srgbClr val="5A9BE5"/>
                 </a:solidFill>
@@ -3690,7 +3690,7 @@
         </p:nvSpPr>
         <p:spPr>
           <a:xfrm>
-            <a:off x="1047750" y="4772025"/>
+            <a:off x="1047750" y="4817269"/>
             <a:ext cx="12192000" cy="266700"/>
           </a:xfrm>
         </p:spPr>
@@ -3700,7 +3700,7 @@
           <a:p>
             <a:pPr algn="l"/>
             <a:r>
-              <a:rPr lang="en-US" sz="1500" b="0" i="0" u="none">
+              <a:rPr lang="en-US" sz="1125" b="0" i="0" u="none">
                 <a:solidFill>
                   <a:srgbClr val="C0D0E8"/>
                 </a:solidFill>
@@ -3718,7 +3718,7 @@
         </p:nvSpPr>
         <p:spPr>
           <a:xfrm>
-            <a:off x="1047750" y="5057775"/>
+            <a:off x="1047750" y="5103019"/>
             <a:ext cx="12192000" cy="266700"/>
           </a:xfrm>
         </p:spPr>
@@ -3728,7 +3728,7 @@
           <a:p>
             <a:pPr algn="l"/>
             <a:r>
-              <a:rPr lang="en-US" sz="1500" b="0" i="0" u="none">
+              <a:rPr lang="en-US" sz="1125" b="0" i="0" u="none">
                 <a:solidFill>
                   <a:srgbClr val="C0D0E8"/>
                 </a:solidFill>
@@ -3792,7 +3792,7 @@
         </p:nvSpPr>
         <p:spPr>
           <a:xfrm>
-            <a:off x="762000" y="613410"/>
+            <a:off x="762000" y="721995"/>
             <a:ext cx="12192000" cy="640080"/>
           </a:xfrm>
         </p:spPr>
@@ -3802,7 +3802,7 @@
           <a:p>
             <a:pPr algn="l"/>
             <a:r>
-              <a:rPr lang="en-US" sz="3600" b="0" i="0" u="none">
+              <a:rPr lang="en-US" sz="2700" b="0" i="0" u="none">
                 <a:solidFill>
                   <a:srgbClr val="FFFFFF"/>
                 </a:solidFill>
@@ -3871,7 +3871,7 @@
         </p:nvSpPr>
         <p:spPr>
           <a:xfrm>
-            <a:off x="1047750" y="1807210"/>
+            <a:off x="1047750" y="1855470"/>
             <a:ext cx="12192000" cy="284480"/>
           </a:xfrm>
         </p:spPr>
@@ -3881,7 +3881,7 @@
           <a:p>
             <a:pPr algn="l"/>
             <a:r>
-              <a:rPr lang="en-US" sz="1600" b="0" i="0" u="none">
+              <a:rPr lang="en-US" sz="1200" b="0" i="0" u="none">
                 <a:solidFill>
                   <a:srgbClr val="00D2FF"/>
                 </a:solidFill>
@@ -3899,7 +3899,7 @@
         </p:nvSpPr>
         <p:spPr>
           <a:xfrm>
-            <a:off x="3048000" y="1831340"/>
+            <a:off x="3048000" y="1873567"/>
             <a:ext cx="12192000" cy="248920"/>
           </a:xfrm>
         </p:spPr>
@@ -3909,7 +3909,7 @@
           <a:p>
             <a:pPr algn="l"/>
             <a:r>
-              <a:rPr lang="en-US" sz="1400" b="0" i="0" u="none">
+              <a:rPr lang="en-US" sz="1050" b="0" i="0" u="none">
                 <a:solidFill>
                   <a:srgbClr val="B0C4D8"/>
                 </a:solidFill>
@@ -3927,7 +3927,7 @@
         </p:nvSpPr>
         <p:spPr>
           <a:xfrm>
-            <a:off x="5524500" y="1831340"/>
+            <a:off x="5524500" y="1873567"/>
             <a:ext cx="12192000" cy="248920"/>
           </a:xfrm>
         </p:spPr>
@@ -3937,7 +3937,7 @@
           <a:p>
             <a:pPr algn="l"/>
             <a:r>
-              <a:rPr lang="en-US" sz="1400" b="0" i="0" u="none">
+              <a:rPr lang="en-US" sz="1050" b="0" i="0" u="none">
                 <a:solidFill>
                   <a:srgbClr val="B0C4D8"/>
                 </a:solidFill>
@@ -3955,7 +3955,7 @@
         </p:nvSpPr>
         <p:spPr>
           <a:xfrm>
-            <a:off x="8001000" y="1831340"/>
+            <a:off x="8001000" y="1873567"/>
             <a:ext cx="12192000" cy="248920"/>
           </a:xfrm>
         </p:spPr>
@@ -3965,7 +3965,7 @@
           <a:p>
             <a:pPr algn="l"/>
             <a:r>
-              <a:rPr lang="en-US" sz="1400" b="0" i="0" u="none">
+              <a:rPr lang="en-US" sz="1050" b="0" i="0" u="none">
                 <a:solidFill>
                   <a:srgbClr val="B0C4D8"/>
                 </a:solidFill>
@@ -3983,7 +3983,7 @@
         </p:nvSpPr>
         <p:spPr>
           <a:xfrm>
-            <a:off x="0" y="2254250"/>
+            <a:off x="0" y="2314575"/>
             <a:ext cx="12192000" cy="355600"/>
           </a:xfrm>
         </p:spPr>
@@ -3993,7 +3993,7 @@
           <a:p>
             <a:pPr algn="ctr"/>
             <a:r>
-              <a:rPr lang="en-US" sz="2000" b="0" i="0" u="none">
+              <a:rPr lang="en-US" sz="1500" b="0" i="0" u="none">
                 <a:solidFill>
                   <a:srgbClr val="404060"/>
                 </a:solidFill>
@@ -4041,7 +4041,7 @@
         </p:nvSpPr>
         <p:spPr>
           <a:xfrm>
-            <a:off x="1047750" y="2807335"/>
+            <a:off x="1047750" y="2855595"/>
             <a:ext cx="12192000" cy="284480"/>
           </a:xfrm>
         </p:spPr>
@@ -4051,7 +4051,7 @@
           <a:p>
             <a:pPr algn="l"/>
             <a:r>
-              <a:rPr lang="en-US" sz="1600" b="0" i="0" u="none">
+              <a:rPr lang="en-US" sz="1200" b="0" i="0" u="none">
                 <a:solidFill>
                   <a:srgbClr val="5A9BE5"/>
                 </a:solidFill>
@@ -4069,7 +4069,7 @@
         </p:nvSpPr>
         <p:spPr>
           <a:xfrm>
-            <a:off x="3048000" y="2831465"/>
+            <a:off x="3048000" y="2873692"/>
             <a:ext cx="12192000" cy="248920"/>
           </a:xfrm>
         </p:spPr>
@@ -4079,7 +4079,7 @@
           <a:p>
             <a:pPr algn="l"/>
             <a:r>
-              <a:rPr lang="en-US" sz="1400" b="0" i="0" u="none">
+              <a:rPr lang="en-US" sz="1050" b="0" i="0" u="none">
                 <a:solidFill>
                   <a:srgbClr val="B0C4D8"/>
                 </a:solidFill>
@@ -4097,7 +4097,7 @@
         </p:nvSpPr>
         <p:spPr>
           <a:xfrm>
-            <a:off x="5524500" y="2831465"/>
+            <a:off x="5524500" y="2873692"/>
             <a:ext cx="12192000" cy="248920"/>
           </a:xfrm>
         </p:spPr>
@@ -4107,7 +4107,7 @@
           <a:p>
             <a:pPr algn="l"/>
             <a:r>
-              <a:rPr lang="en-US" sz="1400" b="0" i="0" u="none">
+              <a:rPr lang="en-US" sz="1050" b="0" i="0" u="none">
                 <a:solidFill>
                   <a:srgbClr val="B0C4D8"/>
                 </a:solidFill>
@@ -4125,7 +4125,7 @@
         </p:nvSpPr>
         <p:spPr>
           <a:xfrm>
-            <a:off x="8001000" y="2831465"/>
+            <a:off x="8001000" y="2873692"/>
             <a:ext cx="12192000" cy="248920"/>
           </a:xfrm>
         </p:spPr>
@@ -4135,7 +4135,7 @@
           <a:p>
             <a:pPr algn="l"/>
             <a:r>
-              <a:rPr lang="en-US" sz="1400" b="0" i="0" u="none">
+              <a:rPr lang="en-US" sz="1050" b="0" i="0" u="none">
                 <a:solidFill>
                   <a:srgbClr val="B0C4D8"/>
                 </a:solidFill>
@@ -4153,7 +4153,7 @@
         </p:nvSpPr>
         <p:spPr>
           <a:xfrm>
-            <a:off x="0" y="3254375"/>
+            <a:off x="0" y="3314700"/>
             <a:ext cx="12192000" cy="355600"/>
           </a:xfrm>
         </p:spPr>
@@ -4163,7 +4163,7 @@
           <a:p>
             <a:pPr algn="ctr"/>
             <a:r>
-              <a:rPr lang="en-US" sz="2000" b="0" i="0" u="none">
+              <a:rPr lang="en-US" sz="1500" b="0" i="0" u="none">
                 <a:solidFill>
                   <a:srgbClr val="404060"/>
                 </a:solidFill>
@@ -4211,7 +4211,7 @@
         </p:nvSpPr>
         <p:spPr>
           <a:xfrm>
-            <a:off x="1047750" y="3807460"/>
+            <a:off x="1047750" y="3855720"/>
             <a:ext cx="12192000" cy="284480"/>
           </a:xfrm>
         </p:spPr>
@@ -4221,7 +4221,7 @@
           <a:p>
             <a:pPr algn="l"/>
             <a:r>
-              <a:rPr lang="en-US" sz="1600" b="0" i="0" u="none">
+              <a:rPr lang="en-US" sz="1200" b="0" i="0" u="none">
                 <a:solidFill>
                   <a:srgbClr val="6CC8A0"/>
                 </a:solidFill>
@@ -4239,7 +4239,7 @@
         </p:nvSpPr>
         <p:spPr>
           <a:xfrm>
-            <a:off x="3048000" y="3831590"/>
+            <a:off x="3048000" y="3873817"/>
             <a:ext cx="12192000" cy="248920"/>
           </a:xfrm>
         </p:spPr>
@@ -4249,7 +4249,7 @@
           <a:p>
             <a:pPr algn="l"/>
             <a:r>
-              <a:rPr lang="en-US" sz="1400" b="0" i="0" u="none">
+              <a:rPr lang="en-US" sz="1050" b="0" i="0" u="none">
                 <a:solidFill>
                   <a:srgbClr val="B0C4D8"/>
                 </a:solidFill>
@@ -4267,7 +4267,7 @@
         </p:nvSpPr>
         <p:spPr>
           <a:xfrm>
-            <a:off x="5524500" y="3831590"/>
+            <a:off x="5524500" y="3873817"/>
             <a:ext cx="12192000" cy="248920"/>
           </a:xfrm>
         </p:spPr>
@@ -4277,7 +4277,7 @@
           <a:p>
             <a:pPr algn="l"/>
             <a:r>
-              <a:rPr lang="en-US" sz="1400" b="0" i="0" u="none">
+              <a:rPr lang="en-US" sz="1050" b="0" i="0" u="none">
                 <a:solidFill>
                   <a:srgbClr val="B0C4D8"/>
                 </a:solidFill>
@@ -4295,7 +4295,7 @@
         </p:nvSpPr>
         <p:spPr>
           <a:xfrm>
-            <a:off x="8001000" y="3831590"/>
+            <a:off x="8001000" y="3873817"/>
             <a:ext cx="12192000" cy="248920"/>
           </a:xfrm>
         </p:spPr>
@@ -4305,7 +4305,7 @@
           <a:p>
             <a:pPr algn="l"/>
             <a:r>
-              <a:rPr lang="en-US" sz="1400" b="0" i="0" u="none">
+              <a:rPr lang="en-US" sz="1050" b="0" i="0" u="none">
                 <a:solidFill>
                   <a:srgbClr val="B0C4D8"/>
                 </a:solidFill>
@@ -4323,7 +4323,7 @@
         </p:nvSpPr>
         <p:spPr>
           <a:xfrm>
-            <a:off x="0" y="4254500"/>
+            <a:off x="0" y="4314825"/>
             <a:ext cx="12192000" cy="355600"/>
           </a:xfrm>
         </p:spPr>
@@ -4333,7 +4333,7 @@
           <a:p>
             <a:pPr algn="ctr"/>
             <a:r>
-              <a:rPr lang="en-US" sz="2000" b="0" i="0" u="none">
+              <a:rPr lang="en-US" sz="1500" b="0" i="0" u="none">
                 <a:solidFill>
                   <a:srgbClr val="404060"/>
                 </a:solidFill>
@@ -4381,7 +4381,7 @@
         </p:nvSpPr>
         <p:spPr>
           <a:xfrm>
-            <a:off x="1047750" y="4807585"/>
+            <a:off x="1047750" y="4855845"/>
             <a:ext cx="12192000" cy="284480"/>
           </a:xfrm>
         </p:spPr>
@@ -4391,7 +4391,7 @@
           <a:p>
             <a:pPr algn="l"/>
             <a:r>
-              <a:rPr lang="en-US" sz="1600" b="0" i="0" u="none">
+              <a:rPr lang="en-US" sz="1200" b="0" i="0" u="none">
                 <a:solidFill>
                   <a:srgbClr val="C8A050"/>
                 </a:solidFill>
@@ -4409,7 +4409,7 @@
         </p:nvSpPr>
         <p:spPr>
           <a:xfrm>
-            <a:off x="3048000" y="4831715"/>
+            <a:off x="3048000" y="4873942"/>
             <a:ext cx="12192000" cy="248920"/>
           </a:xfrm>
         </p:spPr>
@@ -4419,7 +4419,7 @@
           <a:p>
             <a:pPr algn="l"/>
             <a:r>
-              <a:rPr lang="en-US" sz="1400" b="0" i="0" u="none">
+              <a:rPr lang="en-US" sz="1050" b="0" i="0" u="none">
                 <a:solidFill>
                   <a:srgbClr val="B0C4D8"/>
                 </a:solidFill>
@@ -4437,7 +4437,7 @@
         </p:nvSpPr>
         <p:spPr>
           <a:xfrm>
-            <a:off x="5524500" y="4831715"/>
+            <a:off x="5524500" y="4873942"/>
             <a:ext cx="12192000" cy="248920"/>
           </a:xfrm>
         </p:spPr>
@@ -4447,7 +4447,7 @@
           <a:p>
             <a:pPr algn="l"/>
             <a:r>
-              <a:rPr lang="en-US" sz="1400" b="0" i="0" u="none">
+              <a:rPr lang="en-US" sz="1050" b="0" i="0" u="none">
                 <a:solidFill>
                   <a:srgbClr val="B0C4D8"/>
                 </a:solidFill>
@@ -4465,7 +4465,7 @@
         </p:nvSpPr>
         <p:spPr>
           <a:xfrm>
-            <a:off x="8001000" y="4831715"/>
+            <a:off x="8001000" y="4873942"/>
             <a:ext cx="12192000" cy="248920"/>
           </a:xfrm>
         </p:spPr>
@@ -4475,7 +4475,7 @@
           <a:p>
             <a:pPr algn="l"/>
             <a:r>
-              <a:rPr lang="en-US" sz="1400" b="0" i="0" u="none">
+              <a:rPr lang="en-US" sz="1050" b="0" i="0" u="none">
                 <a:solidFill>
                   <a:srgbClr val="B0C4D8"/>
                 </a:solidFill>
@@ -4493,7 +4493,7 @@
         </p:nvSpPr>
         <p:spPr>
           <a:xfrm>
-            <a:off x="0" y="5254625"/>
+            <a:off x="0" y="5314950"/>
             <a:ext cx="12192000" cy="355600"/>
           </a:xfrm>
         </p:spPr>
@@ -4503,7 +4503,7 @@
           <a:p>
             <a:pPr algn="ctr"/>
             <a:r>
-              <a:rPr lang="en-US" sz="2000" b="0" i="0" u="none">
+              <a:rPr lang="en-US" sz="1500" b="0" i="0" u="none">
                 <a:solidFill>
                   <a:srgbClr val="404060"/>
                 </a:solidFill>
@@ -4551,7 +4551,7 @@
         </p:nvSpPr>
         <p:spPr>
           <a:xfrm>
-            <a:off x="1047750" y="5807710"/>
+            <a:off x="1047750" y="5855970"/>
             <a:ext cx="12192000" cy="284480"/>
           </a:xfrm>
         </p:spPr>
@@ -4561,7 +4561,7 @@
           <a:p>
             <a:pPr algn="l"/>
             <a:r>
-              <a:rPr lang="en-US" sz="1600" b="0" i="0" u="none">
+              <a:rPr lang="en-US" sz="1200" b="0" i="0" u="none">
                 <a:solidFill>
                   <a:srgbClr val="C85078"/>
                 </a:solidFill>
@@ -4579,7 +4579,7 @@
         </p:nvSpPr>
         <p:spPr>
           <a:xfrm>
-            <a:off x="3048000" y="5831840"/>
+            <a:off x="3048000" y="5874067"/>
             <a:ext cx="12192000" cy="248920"/>
           </a:xfrm>
         </p:spPr>
@@ -4589,7 +4589,7 @@
           <a:p>
             <a:pPr algn="l"/>
             <a:r>
-              <a:rPr lang="en-US" sz="1400" b="0" i="0" u="none">
+              <a:rPr lang="en-US" sz="1050" b="0" i="0" u="none">
                 <a:solidFill>
                   <a:srgbClr val="B0C4D8"/>
                 </a:solidFill>
@@ -4607,7 +4607,7 @@
         </p:nvSpPr>
         <p:spPr>
           <a:xfrm>
-            <a:off x="5524500" y="5831840"/>
+            <a:off x="5524500" y="5874067"/>
             <a:ext cx="12192000" cy="248920"/>
           </a:xfrm>
         </p:spPr>
@@ -4617,7 +4617,7 @@
           <a:p>
             <a:pPr algn="l"/>
             <a:r>
-              <a:rPr lang="en-US" sz="1400" b="0" i="0" u="none">
+              <a:rPr lang="en-US" sz="1050" b="0" i="0" u="none">
                 <a:solidFill>
                   <a:srgbClr val="B0C4D8"/>
                 </a:solidFill>
@@ -4635,7 +4635,7 @@
         </p:nvSpPr>
         <p:spPr>
           <a:xfrm>
-            <a:off x="8001000" y="5831840"/>
+            <a:off x="8001000" y="5874067"/>
             <a:ext cx="12192000" cy="248920"/>
           </a:xfrm>
         </p:spPr>
@@ -4645,7 +4645,7 @@
           <a:p>
             <a:pPr algn="l"/>
             <a:r>
-              <a:rPr lang="en-US" sz="1400" b="0" i="0" u="none">
+              <a:rPr lang="en-US" sz="1050" b="0" i="0" u="none">
                 <a:solidFill>
                   <a:srgbClr val="B0C4D8"/>
                 </a:solidFill>
@@ -4709,7 +4709,7 @@
         </p:nvSpPr>
         <p:spPr>
           <a:xfrm>
-            <a:off x="762000" y="613410"/>
+            <a:off x="762000" y="721995"/>
             <a:ext cx="12192000" cy="640080"/>
           </a:xfrm>
         </p:spPr>
@@ -4719,7 +4719,7 @@
           <a:p>
             <a:pPr algn="l"/>
             <a:r>
-              <a:rPr lang="en-US" sz="3600" b="0" i="0" u="none">
+              <a:rPr lang="en-US" sz="2700" b="0" i="0" u="none">
                 <a:solidFill>
                   <a:srgbClr val="FFFFFF"/>
                 </a:solidFill>
@@ -4758,7 +4758,7 @@
         </p:nvSpPr>
         <p:spPr>
           <a:xfrm>
-            <a:off x="762000" y="1449070"/>
+            <a:off x="762000" y="1515427"/>
             <a:ext cx="12192000" cy="391160"/>
           </a:xfrm>
         </p:spPr>
@@ -4768,7 +4768,7 @@
           <a:p>
             <a:pPr algn="l"/>
             <a:r>
-              <a:rPr lang="en-US" sz="2200" b="0" i="0" u="none">
+              <a:rPr lang="en-US" sz="1650" b="0" i="0" u="none">
                 <a:solidFill>
                   <a:srgbClr val="00D2FF"/>
                 </a:solidFill>
@@ -4816,7 +4816,7 @@
         </p:nvSpPr>
         <p:spPr>
           <a:xfrm>
-            <a:off x="-3714750" y="2021205"/>
+            <a:off x="-3714750" y="2075497"/>
             <a:ext cx="12192000" cy="320040"/>
           </a:xfrm>
         </p:spPr>
@@ -4826,7 +4826,7 @@
           <a:p>
             <a:pPr algn="ctr"/>
             <a:r>
-              <a:rPr lang="en-US" sz="1800" b="0" i="0" u="none">
+              <a:rPr lang="en-US" sz="1350" b="0" i="0" u="none">
                 <a:solidFill>
                   <a:srgbClr val="FFFFFF"/>
                 </a:solidFill>
@@ -4844,7 +4844,7 @@
         </p:nvSpPr>
         <p:spPr>
           <a:xfrm>
-            <a:off x="-3714750" y="2300605"/>
+            <a:off x="-3714750" y="2339816"/>
             <a:ext cx="12192000" cy="231140"/>
           </a:xfrm>
         </p:spPr>
@@ -4854,7 +4854,7 @@
           <a:p>
             <a:pPr algn="ctr"/>
             <a:r>
-              <a:rPr lang="en-US" sz="1300" b="0" i="0" u="none">
+              <a:rPr lang="en-US" sz="975" b="0" i="0" u="none">
                 <a:solidFill>
                   <a:srgbClr val="7090B0"/>
                 </a:solidFill>
@@ -4902,7 +4902,7 @@
         </p:nvSpPr>
         <p:spPr>
           <a:xfrm>
-            <a:off x="0" y="2021205"/>
+            <a:off x="0" y="2075497"/>
             <a:ext cx="12192000" cy="320040"/>
           </a:xfrm>
         </p:spPr>
@@ -4912,7 +4912,7 @@
           <a:p>
             <a:pPr algn="ctr"/>
             <a:r>
-              <a:rPr lang="en-US" sz="1800" b="0" i="0" u="none">
+              <a:rPr lang="en-US" sz="1350" b="0" i="0" u="none">
                 <a:solidFill>
                   <a:srgbClr val="FFFFFF"/>
                 </a:solidFill>
@@ -4930,7 +4930,7 @@
         </p:nvSpPr>
         <p:spPr>
           <a:xfrm>
-            <a:off x="0" y="2300605"/>
+            <a:off x="0" y="2339816"/>
             <a:ext cx="12192000" cy="231140"/>
           </a:xfrm>
         </p:spPr>
@@ -4940,7 +4940,7 @@
           <a:p>
             <a:pPr algn="ctr"/>
             <a:r>
-              <a:rPr lang="en-US" sz="1300" b="0" i="0" u="none">
+              <a:rPr lang="en-US" sz="975" b="0" i="0" u="none">
                 <a:solidFill>
                   <a:srgbClr val="7090B0"/>
                 </a:solidFill>
@@ -4988,7 +4988,7 @@
         </p:nvSpPr>
         <p:spPr>
           <a:xfrm>
-            <a:off x="3714750" y="2021205"/>
+            <a:off x="3714750" y="2075497"/>
             <a:ext cx="12192000" cy="320040"/>
           </a:xfrm>
         </p:spPr>
@@ -4998,7 +4998,7 @@
           <a:p>
             <a:pPr algn="ctr"/>
             <a:r>
-              <a:rPr lang="en-US" sz="1800" b="0" i="0" u="none">
+              <a:rPr lang="en-US" sz="1350" b="0" i="0" u="none">
                 <a:solidFill>
                   <a:srgbClr val="FFFFFF"/>
                 </a:solidFill>
@@ -5016,7 +5016,7 @@
         </p:nvSpPr>
         <p:spPr>
           <a:xfrm>
-            <a:off x="3714750" y="2300605"/>
+            <a:off x="3714750" y="2339816"/>
             <a:ext cx="12192000" cy="231140"/>
           </a:xfrm>
         </p:spPr>
@@ -5026,7 +5026,7 @@
           <a:p>
             <a:pPr algn="ctr"/>
             <a:r>
-              <a:rPr lang="en-US" sz="1300" b="0" i="0" u="none">
+              <a:rPr lang="en-US" sz="975" b="0" i="0" u="none">
                 <a:solidFill>
                   <a:srgbClr val="7090B0"/>
                 </a:solidFill>
@@ -5044,7 +5044,7 @@
         </p:nvSpPr>
         <p:spPr>
           <a:xfrm>
-            <a:off x="762000" y="3068320"/>
+            <a:off x="762000" y="3134677"/>
             <a:ext cx="12192000" cy="391160"/>
           </a:xfrm>
         </p:spPr>
@@ -5054,7 +5054,7 @@
           <a:p>
             <a:pPr algn="l"/>
             <a:r>
-              <a:rPr lang="en-US" sz="2200" b="0" i="0" u="none">
+              <a:rPr lang="en-US" sz="1650" b="0" i="0" u="none">
                 <a:solidFill>
                   <a:srgbClr val="5A9BE5"/>
                 </a:solidFill>
@@ -5102,7 +5102,7 @@
         </p:nvSpPr>
         <p:spPr>
           <a:xfrm>
-            <a:off x="-4124325" y="3616960"/>
+            <a:off x="-4124325" y="3665220"/>
             <a:ext cx="12192000" cy="284480"/>
           </a:xfrm>
         </p:spPr>
@@ -5112,7 +5112,7 @@
           <a:p>
             <a:pPr algn="ctr"/>
             <a:r>
-              <a:rPr lang="en-US" sz="1600" b="0" i="0" u="none">
+              <a:rPr lang="en-US" sz="1200" b="0" i="0" u="none">
                 <a:solidFill>
                   <a:srgbClr val="00D2FF"/>
                 </a:solidFill>
@@ -5130,7 +5130,7 @@
         </p:nvSpPr>
         <p:spPr>
           <a:xfrm>
-            <a:off x="952500" y="3919855"/>
+            <a:off x="952500" y="3959066"/>
             <a:ext cx="12192000" cy="231140"/>
           </a:xfrm>
         </p:spPr>
@@ -5140,7 +5140,7 @@
           <a:p>
             <a:pPr algn="l"/>
             <a:r>
-              <a:rPr lang="en-US" sz="1300" b="0" i="0" u="none">
+              <a:rPr lang="en-US" sz="975" b="0" i="0" u="none">
                 <a:solidFill>
                   <a:srgbClr val="A0B4C8"/>
                 </a:solidFill>
@@ -5158,7 +5158,7 @@
         </p:nvSpPr>
         <p:spPr>
           <a:xfrm>
-            <a:off x="952500" y="4129405"/>
+            <a:off x="952500" y="4168616"/>
             <a:ext cx="12192000" cy="231140"/>
           </a:xfrm>
         </p:spPr>
@@ -5168,7 +5168,7 @@
           <a:p>
             <a:pPr algn="l"/>
             <a:r>
-              <a:rPr lang="en-US" sz="1300" b="0" i="0" u="none">
+              <a:rPr lang="en-US" sz="975" b="0" i="0" u="none">
                 <a:solidFill>
                   <a:srgbClr val="A0B4C8"/>
                 </a:solidFill>
@@ -5186,7 +5186,7 @@
         </p:nvSpPr>
         <p:spPr>
           <a:xfrm>
-            <a:off x="952500" y="4338955"/>
+            <a:off x="952500" y="4378166"/>
             <a:ext cx="12192000" cy="231140"/>
           </a:xfrm>
         </p:spPr>
@@ -5196,7 +5196,7 @@
           <a:p>
             <a:pPr algn="l"/>
             <a:r>
-              <a:rPr lang="en-US" sz="1300" b="0" i="0" u="none">
+              <a:rPr lang="en-US" sz="975" b="0" i="0" u="none">
                 <a:solidFill>
                   <a:srgbClr val="A0B4C8"/>
                 </a:solidFill>
@@ -5244,7 +5244,7 @@
         </p:nvSpPr>
         <p:spPr>
           <a:xfrm>
-            <a:off x="-1504950" y="3616960"/>
+            <a:off x="-1504950" y="3665220"/>
             <a:ext cx="12192000" cy="284480"/>
           </a:xfrm>
         </p:spPr>
@@ -5254,7 +5254,7 @@
           <a:p>
             <a:pPr algn="ctr"/>
             <a:r>
-              <a:rPr lang="en-US" sz="1600" b="0" i="0" u="none">
+              <a:rPr lang="en-US" sz="1200" b="0" i="0" u="none">
                 <a:solidFill>
                   <a:srgbClr val="5A9BE5"/>
                 </a:solidFill>
@@ -5272,7 +5272,7 @@
         </p:nvSpPr>
         <p:spPr>
           <a:xfrm>
-            <a:off x="3571875" y="3919855"/>
+            <a:off x="3571875" y="3959066"/>
             <a:ext cx="12192000" cy="231140"/>
           </a:xfrm>
         </p:spPr>
@@ -5282,7 +5282,7 @@
           <a:p>
             <a:pPr algn="l"/>
             <a:r>
-              <a:rPr lang="en-US" sz="1300" b="0" i="0" u="none">
+              <a:rPr lang="en-US" sz="975" b="0" i="0" u="none">
                 <a:solidFill>
                   <a:srgbClr val="A0B4C8"/>
                 </a:solidFill>
@@ -5300,7 +5300,7 @@
         </p:nvSpPr>
         <p:spPr>
           <a:xfrm>
-            <a:off x="3571875" y="4129405"/>
+            <a:off x="3571875" y="4168616"/>
             <a:ext cx="12192000" cy="231140"/>
           </a:xfrm>
         </p:spPr>
@@ -5310,7 +5310,7 @@
           <a:p>
             <a:pPr algn="l"/>
             <a:r>
-              <a:rPr lang="en-US" sz="1300" b="0" i="0" u="none">
+              <a:rPr lang="en-US" sz="975" b="0" i="0" u="none">
                 <a:solidFill>
                   <a:srgbClr val="A0B4C8"/>
                 </a:solidFill>
@@ -5328,7 +5328,7 @@
         </p:nvSpPr>
         <p:spPr>
           <a:xfrm>
-            <a:off x="3571875" y="4338955"/>
+            <a:off x="3571875" y="4378166"/>
             <a:ext cx="12192000" cy="231140"/>
           </a:xfrm>
         </p:spPr>
@@ -5338,7 +5338,7 @@
           <a:p>
             <a:pPr algn="l"/>
             <a:r>
-              <a:rPr lang="en-US" sz="1300" b="0" i="0" u="none">
+              <a:rPr lang="en-US" sz="975" b="0" i="0" u="none">
                 <a:solidFill>
                   <a:srgbClr val="A0B4C8"/>
                 </a:solidFill>
@@ -5386,7 +5386,7 @@
         </p:nvSpPr>
         <p:spPr>
           <a:xfrm>
-            <a:off x="1114425" y="3616960"/>
+            <a:off x="1114425" y="3665220"/>
             <a:ext cx="12192000" cy="284480"/>
           </a:xfrm>
         </p:spPr>
@@ -5396,7 +5396,7 @@
           <a:p>
             <a:pPr algn="ctr"/>
             <a:r>
-              <a:rPr lang="en-US" sz="1600" b="0" i="0" u="none">
+              <a:rPr lang="en-US" sz="1200" b="0" i="0" u="none">
                 <a:solidFill>
                   <a:srgbClr val="6CC8A0"/>
                 </a:solidFill>
@@ -5414,7 +5414,7 @@
         </p:nvSpPr>
         <p:spPr>
           <a:xfrm>
-            <a:off x="6191250" y="3919855"/>
+            <a:off x="6191250" y="3959066"/>
             <a:ext cx="12192000" cy="231140"/>
           </a:xfrm>
         </p:spPr>
@@ -5424,7 +5424,7 @@
           <a:p>
             <a:pPr algn="l"/>
             <a:r>
-              <a:rPr lang="en-US" sz="1300" b="0" i="0" u="none">
+              <a:rPr lang="en-US" sz="975" b="0" i="0" u="none">
                 <a:solidFill>
                   <a:srgbClr val="A0B4C8"/>
                 </a:solidFill>
@@ -5442,7 +5442,7 @@
         </p:nvSpPr>
         <p:spPr>
           <a:xfrm>
-            <a:off x="6191250" y="4129405"/>
+            <a:off x="6191250" y="4168616"/>
             <a:ext cx="12192000" cy="231140"/>
           </a:xfrm>
         </p:spPr>
@@ -5452,7 +5452,7 @@
           <a:p>
             <a:pPr algn="l"/>
             <a:r>
-              <a:rPr lang="en-US" sz="1300" b="0" i="0" u="none">
+              <a:rPr lang="en-US" sz="975" b="0" i="0" u="none">
                 <a:solidFill>
                   <a:srgbClr val="A0B4C8"/>
                 </a:solidFill>
@@ -5470,7 +5470,7 @@
         </p:nvSpPr>
         <p:spPr>
           <a:xfrm>
-            <a:off x="6191250" y="4338955"/>
+            <a:off x="6191250" y="4378166"/>
             <a:ext cx="12192000" cy="231140"/>
           </a:xfrm>
         </p:spPr>
@@ -5480,7 +5480,7 @@
           <a:p>
             <a:pPr algn="l"/>
             <a:r>
-              <a:rPr lang="en-US" sz="1300" b="0" i="0" u="none">
+              <a:rPr lang="en-US" sz="975" b="0" i="0" u="none">
                 <a:solidFill>
                   <a:srgbClr val="A0B4C8"/>
                 </a:solidFill>
@@ -5528,7 +5528,7 @@
         </p:nvSpPr>
         <p:spPr>
           <a:xfrm>
-            <a:off x="3733800" y="3616960"/>
+            <a:off x="3733800" y="3665220"/>
             <a:ext cx="12192000" cy="284480"/>
           </a:xfrm>
         </p:spPr>
@@ -5538,7 +5538,7 @@
           <a:p>
             <a:pPr algn="ctr"/>
             <a:r>
-              <a:rPr lang="en-US" sz="1600" b="0" i="0" u="none">
+              <a:rPr lang="en-US" sz="1200" b="0" i="0" u="none">
                 <a:solidFill>
                   <a:srgbClr val="C8A050"/>
                 </a:solidFill>
@@ -5556,7 +5556,7 @@
         </p:nvSpPr>
         <p:spPr>
           <a:xfrm>
-            <a:off x="8810625" y="3919855"/>
+            <a:off x="8810625" y="3959066"/>
             <a:ext cx="12192000" cy="231140"/>
           </a:xfrm>
         </p:spPr>
@@ -5566,7 +5566,7 @@
           <a:p>
             <a:pPr algn="l"/>
             <a:r>
-              <a:rPr lang="en-US" sz="1300" b="0" i="0" u="none">
+              <a:rPr lang="en-US" sz="975" b="0" i="0" u="none">
                 <a:solidFill>
                   <a:srgbClr val="A0B4C8"/>
                 </a:solidFill>
@@ -5584,7 +5584,7 @@
         </p:nvSpPr>
         <p:spPr>
           <a:xfrm>
-            <a:off x="8810625" y="4129405"/>
+            <a:off x="8810625" y="4168616"/>
             <a:ext cx="12192000" cy="231140"/>
           </a:xfrm>
         </p:spPr>
@@ -5594,7 +5594,7 @@
           <a:p>
             <a:pPr algn="l"/>
             <a:r>
-              <a:rPr lang="en-US" sz="1300" b="0" i="0" u="none">
+              <a:rPr lang="en-US" sz="975" b="0" i="0" u="none">
                 <a:solidFill>
                   <a:srgbClr val="A0B4C8"/>
                 </a:solidFill>
@@ -5612,7 +5612,7 @@
         </p:nvSpPr>
         <p:spPr>
           <a:xfrm>
-            <a:off x="8810625" y="4338955"/>
+            <a:off x="8810625" y="4378166"/>
             <a:ext cx="12192000" cy="231140"/>
           </a:xfrm>
         </p:spPr>
@@ -5622,7 +5622,7 @@
           <a:p>
             <a:pPr algn="l"/>
             <a:r>
-              <a:rPr lang="en-US" sz="1300" b="0" i="0" u="none">
+              <a:rPr lang="en-US" sz="975" b="0" i="0" u="none">
                 <a:solidFill>
                   <a:srgbClr val="A0B4C8"/>
                 </a:solidFill>
@@ -5640,7 +5640,7 @@
         </p:nvSpPr>
         <p:spPr>
           <a:xfrm>
-            <a:off x="762000" y="4974590"/>
+            <a:off x="762000" y="5016817"/>
             <a:ext cx="12192000" cy="248920"/>
           </a:xfrm>
         </p:spPr>
@@ -5650,7 +5650,7 @@
           <a:p>
             <a:pPr algn="l"/>
             <a:r>
-              <a:rPr lang="en-US" sz="1400" b="0" i="0" u="none">
+              <a:rPr lang="en-US" sz="1050" b="0" i="0" u="none">
                 <a:solidFill>
                   <a:srgbClr val="6080A0"/>
                 </a:solidFill>
@@ -5788,7 +5788,7 @@
         </p:nvSpPr>
         <p:spPr>
           <a:xfrm>
-            <a:off x="0" y="2278380"/>
+            <a:off x="0" y="2423160"/>
             <a:ext cx="12192000" cy="853440"/>
           </a:xfrm>
         </p:spPr>
@@ -5798,7 +5798,7 @@
           <a:p>
             <a:pPr algn="ctr"/>
             <a:r>
-              <a:rPr lang="en-US" sz="4800" b="0" i="0" u="none">
+              <a:rPr lang="en-US" sz="3600" b="0" i="0" u="none">
                 <a:solidFill>
                   <a:srgbClr val="FFFFFF"/>
                 </a:solidFill>
@@ -5816,7 +5816,7 @@
         </p:nvSpPr>
         <p:spPr>
           <a:xfrm>
-            <a:off x="0" y="3163570"/>
+            <a:off x="0" y="3229927"/>
             <a:ext cx="12192000" cy="391160"/>
           </a:xfrm>
         </p:spPr>
@@ -5826,7 +5826,7 @@
           <a:p>
             <a:pPr algn="ctr"/>
             <a:r>
-              <a:rPr lang="en-US" sz="2200" b="0" i="0" u="none">
+              <a:rPr lang="en-US" sz="1650" b="0" i="0" u="none">
                 <a:solidFill>
                   <a:srgbClr val="A0B4D8"/>
                 </a:solidFill>
@@ -5844,7 +5844,7 @@
         </p:nvSpPr>
         <p:spPr>
           <a:xfrm>
-            <a:off x="0" y="3807460"/>
+            <a:off x="0" y="3855720"/>
             <a:ext cx="12192000" cy="284480"/>
           </a:xfrm>
         </p:spPr>
@@ -5854,7 +5854,7 @@
           <a:p>
             <a:pPr algn="ctr"/>
             <a:r>
-              <a:rPr lang="en-US" sz="1600" b="0" i="0" u="none">
+              <a:rPr lang="en-US" sz="1200" b="0" i="0" u="none">
                 <a:solidFill>
                   <a:srgbClr val="6C8EB0"/>
                 </a:solidFill>
@@ -5872,7 +5872,7 @@
         </p:nvSpPr>
         <p:spPr>
           <a:xfrm>
-            <a:off x="0" y="4307840"/>
+            <a:off x="0" y="4350067"/>
             <a:ext cx="12192000" cy="248920"/>
           </a:xfrm>
         </p:spPr>
@@ -5882,7 +5882,7 @@
           <a:p>
             <a:pPr algn="ctr"/>
             <a:r>
-              <a:rPr lang="en-US" sz="1400" b="0" i="0" u="none">
+              <a:rPr lang="en-US" sz="1050" b="0" i="0" u="none">
                 <a:solidFill>
                   <a:srgbClr val="4A6A8A"/>
                 </a:solidFill>
@@ -5930,7 +5930,7 @@
         </p:nvSpPr>
         <p:spPr>
           <a:xfrm>
-            <a:off x="0" y="5038725"/>
+            <a:off x="0" y="5083969"/>
             <a:ext cx="12192000" cy="266700"/>
           </a:xfrm>
         </p:spPr>
@@ -5940,7 +5940,7 @@
           <a:p>
             <a:pPr algn="ctr"/>
             <a:r>
-              <a:rPr lang="en-US" sz="1500" b="0" i="0" u="none">
+              <a:rPr lang="en-US" sz="1125" b="0" i="0" u="none">
                 <a:solidFill>
                   <a:srgbClr val="00D2FF"/>
                 </a:solidFill>
